--- a/Family_Intervention_EE_Schizophrenia_JournalClub.pptx
+++ b/Family_Intervention_EE_Schizophrenia_JournalClub.pptx
@@ -120,8 +120,8 @@
         </p:nvSpPr>
         <p:spPr>
           <a:xfrm>
-            <a:off x="914400" y="1600200"/>
-            <a:ext cx="10363200" cy="2600000"/>
+            <a:off x="914400" y="1400200"/>
+            <a:ext cx="10363200" cy="2800000"/>
           </a:xfrm>
           <a:prstGeom prst="rect">
             <a:avLst/>
@@ -140,7 +140,7 @@
               <a:buNone/>
             </a:pPr>
             <a:r>
-              <a:rPr lang="en-US" sz="3200" b="1" dirty="0">
+              <a:rPr lang="en-US" sz="4000" b="1" dirty="0">
                 <a:solidFill>
                   <a:srgbClr val="1F3864"/>
                 </a:solidFill>
@@ -160,7 +160,7 @@
         </p:nvSpPr>
         <p:spPr>
           <a:xfrm>
-            <a:off x="914400" y="4300000"/>
+            <a:off x="914400" y="4400000"/>
             <a:ext cx="10363200" cy="2000000"/>
           </a:xfrm>
           <a:prstGeom prst="rect">
@@ -180,7 +180,7 @@
               <a:buNone/>
             </a:pPr>
             <a:r>
-              <a:rPr lang="en-US" sz="1400" dirty="0">
+              <a:rPr lang="en-US" sz="2000" dirty="0">
                 <a:solidFill>
                   <a:srgbClr val="404040"/>
                 </a:solidFill>
@@ -198,7 +198,7 @@
               <a:buNone/>
             </a:pPr>
             <a:r>
-              <a:rPr lang="en-US" sz="1400" dirty="0">
+              <a:rPr lang="en-US" sz="2000" dirty="0">
                 <a:solidFill>
                   <a:srgbClr val="404040"/>
                 </a:solidFill>
@@ -216,7 +216,7 @@
               <a:buNone/>
             </a:pPr>
             <a:r>
-              <a:rPr lang="en-US" sz="1400" dirty="0">
+              <a:rPr lang="en-US" sz="2000" dirty="0">
                 <a:solidFill>
                   <a:srgbClr val="404040"/>
                 </a:solidFill>
@@ -242,7 +242,7 @@
               <a:buNone/>
             </a:pPr>
             <a:r>
-              <a:rPr lang="en-US" sz="1400" dirty="0">
+              <a:rPr lang="en-US" sz="2000" dirty="0">
                 <a:solidFill>
                   <a:srgbClr val="404040"/>
                 </a:solidFill>
@@ -285,7 +285,7 @@
         <p:spPr>
           <a:xfrm>
             <a:off x="0" y="0"/>
-            <a:ext cx="12192000" cy="900000"/>
+            <a:ext cx="12192000" cy="1000000"/>
           </a:xfrm>
           <a:prstGeom prst="rect">
             <a:avLst/>
@@ -307,7 +307,7 @@
               <a:buNone/>
             </a:pPr>
             <a:r>
-              <a:rPr lang="en-US" sz="1400" b="1" dirty="0">
+              <a:rPr lang="en-US" sz="3000" b="1" dirty="0">
                 <a:solidFill>
                   <a:srgbClr val="FFFFFF"/>
                 </a:solidFill>
@@ -327,8 +327,8 @@
         </p:nvSpPr>
         <p:spPr>
           <a:xfrm>
-            <a:off x="685800" y="1050000"/>
-            <a:ext cx="10820400" cy="5600000"/>
+            <a:off x="685800" y="1150000"/>
+            <a:ext cx="10820400" cy="5500000"/>
           </a:xfrm>
           <a:prstGeom prst="rect">
             <a:avLst/>
@@ -350,7 +350,7 @@
               <a:buNone/>
             </a:pPr>
             <a:r>
-              <a:rPr lang="en-US" sz="1200" b="1" dirty="0">
+              <a:rPr lang="en-US" sz="2000" b="1" dirty="0">
                 <a:solidFill>
                   <a:srgbClr val="1F3864"/>
                 </a:solidFill>
@@ -372,7 +372,7 @@
               <a:buChar char="•"/>
             </a:pPr>
             <a:r>
-              <a:rPr lang="en-US" sz="1200" dirty="0">
+              <a:rPr lang="en-US" sz="1800" dirty="0">
                 <a:solidFill>
                   <a:srgbClr val="000000"/>
                 </a:solidFill>
@@ -393,7 +393,7 @@
               <a:buNone/>
             </a:pPr>
             <a:r>
-              <a:rPr lang="en-US" sz="1200" b="1" dirty="0">
+              <a:rPr lang="en-US" sz="2000" b="1" dirty="0">
                 <a:solidFill>
                   <a:srgbClr val="1F3864"/>
                 </a:solidFill>
@@ -415,73 +415,73 @@
               <a:buChar char="•"/>
             </a:pPr>
             <a:r>
-              <a:rPr lang="en-US" sz="1200" dirty="0">
-                <a:solidFill>
-                  <a:srgbClr val="000000"/>
-                </a:solidFill>
-                <a:latin typeface="Times New Roman"/>
-                <a:cs typeface="Times New Roman"/>
-              </a:rPr>
-              <a:t>1. To assess the level of Expressed Emotion (criticality and emotional over-involvement) among caregivers of persons with schizophrenia.</a:t>
-            </a:r>
-          </a:p>
-          <a:p>
-            <a:pPr marL="285750" indent="-285750">
-              <a:spcBef>
-                <a:spcPts val="0"/>
-              </a:spcBef>
-              <a:spcAft>
-                <a:spcPts val="300"/>
-              </a:spcAft>
-              <a:buFont typeface="Arial"/>
-              <a:buChar char="•"/>
-            </a:pPr>
-            <a:r>
-              <a:rPr lang="en-US" sz="1200" dirty="0">
-                <a:solidFill>
-                  <a:srgbClr val="000000"/>
-                </a:solidFill>
-                <a:latin typeface="Times New Roman"/>
-                <a:cs typeface="Times New Roman"/>
-              </a:rPr>
-              <a:t>2. To deliver a standardized 10-session family intervention programme to the caregivers in the intervention group.</a:t>
-            </a:r>
-          </a:p>
-          <a:p>
-            <a:pPr marL="285750" indent="-285750">
-              <a:spcBef>
-                <a:spcPts val="0"/>
-              </a:spcBef>
-              <a:spcAft>
-                <a:spcPts val="300"/>
-              </a:spcAft>
-              <a:buFont typeface="Arial"/>
-              <a:buChar char="•"/>
-            </a:pPr>
-            <a:r>
-              <a:rPr lang="en-US" sz="1200" dirty="0">
-                <a:solidFill>
-                  <a:srgbClr val="000000"/>
-                </a:solidFill>
-                <a:latin typeface="Times New Roman"/>
-                <a:cs typeface="Times New Roman"/>
-              </a:rPr>
-              <a:t>3. To compare pre-test and post-test EE scores within and between the intervention and control (treatment-as-usual) groups.</a:t>
-            </a:r>
-          </a:p>
-          <a:p>
-            <a:pPr marL="285750" indent="-285750">
-              <a:spcBef>
-                <a:spcPts val="0"/>
-              </a:spcBef>
-              <a:spcAft>
-                <a:spcPts val="300"/>
-              </a:spcAft>
-              <a:buFont typeface="Arial"/>
-              <a:buChar char="•"/>
-            </a:pPr>
-            <a:r>
-              <a:rPr lang="en-US" sz="1200" dirty="0">
+              <a:rPr lang="en-US" sz="1800" dirty="0">
+                <a:solidFill>
+                  <a:srgbClr val="000000"/>
+                </a:solidFill>
+                <a:latin typeface="Times New Roman"/>
+                <a:cs typeface="Times New Roman"/>
+              </a:rPr>
+              <a:t>1. To assess the level of EE (criticality &amp; emotional over-involvement) among caregivers.</a:t>
+            </a:r>
+          </a:p>
+          <a:p>
+            <a:pPr marL="285750" indent="-285750">
+              <a:spcBef>
+                <a:spcPts val="0"/>
+              </a:spcBef>
+              <a:spcAft>
+                <a:spcPts val="300"/>
+              </a:spcAft>
+              <a:buFont typeface="Arial"/>
+              <a:buChar char="•"/>
+            </a:pPr>
+            <a:r>
+              <a:rPr lang="en-US" sz="1800" dirty="0">
+                <a:solidFill>
+                  <a:srgbClr val="000000"/>
+                </a:solidFill>
+                <a:latin typeface="Times New Roman"/>
+                <a:cs typeface="Times New Roman"/>
+              </a:rPr>
+              <a:t>2. To deliver a standardized 10-session family intervention to the experimental group.</a:t>
+            </a:r>
+          </a:p>
+          <a:p>
+            <a:pPr marL="285750" indent="-285750">
+              <a:spcBef>
+                <a:spcPts val="0"/>
+              </a:spcBef>
+              <a:spcAft>
+                <a:spcPts val="300"/>
+              </a:spcAft>
+              <a:buFont typeface="Arial"/>
+              <a:buChar char="•"/>
+            </a:pPr>
+            <a:r>
+              <a:rPr lang="en-US" sz="1800" dirty="0">
+                <a:solidFill>
+                  <a:srgbClr val="000000"/>
+                </a:solidFill>
+                <a:latin typeface="Times New Roman"/>
+                <a:cs typeface="Times New Roman"/>
+              </a:rPr>
+              <a:t>3. To compare pre-test &amp; post-test EE scores within and between the experimental and control (TAU) groups.</a:t>
+            </a:r>
+          </a:p>
+          <a:p>
+            <a:pPr marL="285750" indent="-285750">
+              <a:spcBef>
+                <a:spcPts val="0"/>
+              </a:spcBef>
+              <a:spcAft>
+                <a:spcPts val="300"/>
+              </a:spcAft>
+              <a:buFont typeface="Arial"/>
+              <a:buChar char="•"/>
+            </a:pPr>
+            <a:r>
+              <a:rPr lang="en-US" sz="1800" dirty="0">
                 <a:solidFill>
                   <a:srgbClr val="000000"/>
                 </a:solidFill>
@@ -524,7 +524,7 @@
         <p:spPr>
           <a:xfrm>
             <a:off x="0" y="0"/>
-            <a:ext cx="12192000" cy="900000"/>
+            <a:ext cx="12192000" cy="1000000"/>
           </a:xfrm>
           <a:prstGeom prst="rect">
             <a:avLst/>
@@ -546,7 +546,7 @@
               <a:buNone/>
             </a:pPr>
             <a:r>
-              <a:rPr lang="en-US" sz="1400" b="1" dirty="0">
+              <a:rPr lang="en-US" sz="3000" b="1" dirty="0">
                 <a:solidFill>
                   <a:srgbClr val="FFFFFF"/>
                 </a:solidFill>
@@ -566,8 +566,8 @@
         </p:nvSpPr>
         <p:spPr>
           <a:xfrm>
-            <a:off x="685800" y="1050000"/>
-            <a:ext cx="10820400" cy="5600000"/>
+            <a:off x="685800" y="1150000"/>
+            <a:ext cx="10820400" cy="5500000"/>
           </a:xfrm>
           <a:prstGeom prst="rect">
             <a:avLst/>
@@ -589,7 +589,7 @@
               <a:buNone/>
             </a:pPr>
             <a:r>
-              <a:rPr lang="en-US" sz="1200" b="1" dirty="0">
+              <a:rPr lang="en-US" sz="2000" b="1" dirty="0">
                 <a:solidFill>
                   <a:srgbClr val="1F3864"/>
                 </a:solidFill>
@@ -611,14 +611,14 @@
               <a:buChar char="•"/>
             </a:pPr>
             <a:r>
-              <a:rPr lang="en-US" sz="1200" dirty="0">
-                <a:solidFill>
-                  <a:srgbClr val="000000"/>
-                </a:solidFill>
-                <a:latin typeface="Times New Roman"/>
-                <a:cs typeface="Times New Roman"/>
-              </a:rPr>
-              <a:t>There is a significant difference in EE scores between the intervention and control groups after the family intervention.</a:t>
+              <a:rPr lang="en-US" sz="1800" dirty="0">
+                <a:solidFill>
+                  <a:srgbClr val="000000"/>
+                </a:solidFill>
+                <a:latin typeface="Times New Roman"/>
+                <a:cs typeface="Times New Roman"/>
+              </a:rPr>
+              <a:t>There is a significant difference in EE scores between the experimental and control groups after the family intervention.</a:t>
             </a:r>
           </a:p>
           <a:p>
@@ -632,7 +632,7 @@
               <a:buNone/>
             </a:pPr>
             <a:r>
-              <a:rPr lang="en-US" sz="1200" b="1" dirty="0">
+              <a:rPr lang="en-US" sz="2000" b="1" dirty="0">
                 <a:solidFill>
                   <a:srgbClr val="1F3864"/>
                 </a:solidFill>
@@ -654,14 +654,14 @@
               <a:buChar char="•"/>
             </a:pPr>
             <a:r>
-              <a:rPr lang="en-US" sz="1200" dirty="0">
-                <a:solidFill>
-                  <a:srgbClr val="000000"/>
-                </a:solidFill>
-                <a:latin typeface="Times New Roman"/>
-                <a:cs typeface="Times New Roman"/>
-              </a:rPr>
-              <a:t>Caregivers who receive the family intervention will show a significantly greater reduction in EE (criticality and emotional over-involvement) than caregivers receiving treatment as usual.</a:t>
+              <a:rPr lang="en-US" sz="1800" dirty="0">
+                <a:solidFill>
+                  <a:srgbClr val="000000"/>
+                </a:solidFill>
+                <a:latin typeface="Times New Roman"/>
+                <a:cs typeface="Times New Roman"/>
+              </a:rPr>
+              <a:t>Caregivers who receive the family intervention will show a significantly greater reduction in EE (criticality &amp; emotional over-involvement) than caregivers receiving treatment as usual.</a:t>
             </a:r>
           </a:p>
           <a:p>
@@ -675,7 +675,7 @@
               <a:buNone/>
             </a:pPr>
             <a:r>
-              <a:rPr lang="en-US" sz="1200" b="1" dirty="0">
+              <a:rPr lang="en-US" sz="2000" b="1" dirty="0">
                 <a:solidFill>
                   <a:srgbClr val="1F3864"/>
                 </a:solidFill>
@@ -697,14 +697,14 @@
               <a:buChar char="•"/>
             </a:pPr>
             <a:r>
-              <a:rPr lang="en-US" sz="1200" dirty="0">
-                <a:solidFill>
-                  <a:srgbClr val="000000"/>
-                </a:solidFill>
-                <a:latin typeface="Times New Roman"/>
-                <a:cs typeface="Times New Roman"/>
-              </a:rPr>
-              <a:t>There is no significant difference in the EE scores of caregivers in the intervention group compared with the control group; the family intervention has no effect on EE.</a:t>
+              <a:rPr lang="en-US" sz="1800" dirty="0">
+                <a:solidFill>
+                  <a:srgbClr val="000000"/>
+                </a:solidFill>
+                <a:latin typeface="Times New Roman"/>
+                <a:cs typeface="Times New Roman"/>
+              </a:rPr>
+              <a:t>There is no significant difference in EE scores between the experimental and control groups; the family intervention has no effect on EE.</a:t>
             </a:r>
           </a:p>
           <a:p>
@@ -719,7 +719,7 @@
               <a:buChar char="–"/>
             </a:pPr>
             <a:r>
-              <a:rPr lang="en-US" sz="1200" i="1" dirty="0">
+              <a:rPr lang="en-US" sz="1800" i="1" dirty="0">
                 <a:solidFill>
                   <a:srgbClr val="333333"/>
                 </a:solidFill>
@@ -762,7 +762,7 @@
         <p:spPr>
           <a:xfrm>
             <a:off x="0" y="0"/>
-            <a:ext cx="12192000" cy="900000"/>
+            <a:ext cx="12192000" cy="1000000"/>
           </a:xfrm>
           <a:prstGeom prst="rect">
             <a:avLst/>
@@ -784,7 +784,7 @@
               <a:buNone/>
             </a:pPr>
             <a:r>
-              <a:rPr lang="en-US" sz="1400" b="1" dirty="0">
+              <a:rPr lang="en-US" sz="3000" b="1" dirty="0">
                 <a:solidFill>
                   <a:srgbClr val="FFFFFF"/>
                 </a:solidFill>
@@ -804,8 +804,8 @@
         </p:nvSpPr>
         <p:spPr>
           <a:xfrm>
-            <a:off x="685800" y="1050000"/>
-            <a:ext cx="10820400" cy="5600000"/>
+            <a:off x="685800" y="1150000"/>
+            <a:ext cx="10820400" cy="5500000"/>
           </a:xfrm>
           <a:prstGeom prst="rect">
             <a:avLst/>
@@ -827,7 +827,7 @@
               <a:buNone/>
             </a:pPr>
             <a:r>
-              <a:rPr lang="en-US" sz="1200" b="1" dirty="0">
+              <a:rPr lang="en-US" sz="2000" b="1" dirty="0">
                 <a:solidFill>
                   <a:srgbClr val="1F3864"/>
                 </a:solidFill>
@@ -849,14 +849,14 @@
               <a:buChar char="•"/>
             </a:pPr>
             <a:r>
-              <a:rPr lang="en-US" sz="1200" dirty="0">
-                <a:solidFill>
-                  <a:srgbClr val="000000"/>
-                </a:solidFill>
-                <a:latin typeface="Times New Roman"/>
-                <a:cs typeface="Times New Roman"/>
-              </a:rPr>
-              <a:t>Experimental research design – a randomized, two-arm (parallel-group) controlled trial with pre-test / post-test assessment.</a:t>
+              <a:rPr lang="en-US" sz="1800" dirty="0">
+                <a:solidFill>
+                  <a:srgbClr val="000000"/>
+                </a:solidFill>
+                <a:latin typeface="Times New Roman"/>
+                <a:cs typeface="Times New Roman"/>
+              </a:rPr>
+              <a:t>Experimental research design – a randomized, two-arm (parallel-group) controlled trial with pre-test / post-test assessment of both groups.</a:t>
             </a:r>
           </a:p>
           <a:p>
@@ -870,36 +870,36 @@
               <a:buNone/>
             </a:pPr>
             <a:r>
-              <a:rPr lang="en-US" sz="1200" b="1" dirty="0">
+              <a:rPr lang="en-US" sz="2000" b="1" dirty="0">
                 <a:solidFill>
                   <a:srgbClr val="1F3864"/>
                 </a:solidFill>
                 <a:latin typeface="Times New Roman"/>
                 <a:cs typeface="Times New Roman"/>
               </a:rPr>
-              <a:t>Setting</a:t>
-            </a:r>
-          </a:p>
-          <a:p>
-            <a:pPr marL="285750" indent="-285750">
-              <a:spcBef>
-                <a:spcPts val="0"/>
-              </a:spcBef>
-              <a:spcAft>
-                <a:spcPts val="300"/>
-              </a:spcAft>
-              <a:buFont typeface="Arial"/>
-              <a:buChar char="•"/>
-            </a:pPr>
-            <a:r>
-              <a:rPr lang="en-US" sz="1200" dirty="0">
-                <a:solidFill>
-                  <a:srgbClr val="000000"/>
-                </a:solidFill>
-                <a:latin typeface="Times New Roman"/>
-                <a:cs typeface="Times New Roman"/>
-              </a:rPr>
-              <a:t>In-patient wards, NIMHANS, Bengaluru, India (September 2014 – November 2014).</a:t>
+              <a:t>Setting &amp; duration</a:t>
+            </a:r>
+          </a:p>
+          <a:p>
+            <a:pPr marL="285750" indent="-285750">
+              <a:spcBef>
+                <a:spcPts val="0"/>
+              </a:spcBef>
+              <a:spcAft>
+                <a:spcPts val="300"/>
+              </a:spcAft>
+              <a:buFont typeface="Arial"/>
+              <a:buChar char="•"/>
+            </a:pPr>
+            <a:r>
+              <a:rPr lang="en-US" sz="1800" dirty="0">
+                <a:solidFill>
+                  <a:srgbClr val="000000"/>
+                </a:solidFill>
+                <a:latin typeface="Times New Roman"/>
+                <a:cs typeface="Times New Roman"/>
+              </a:rPr>
+              <a:t>In-patient wards, NIMHANS, Bengaluru, India; September 2014 – November 2014.</a:t>
             </a:r>
           </a:p>
           <a:p>
@@ -913,36 +913,58 @@
               <a:buNone/>
             </a:pPr>
             <a:r>
-              <a:rPr lang="en-US" sz="1200" b="1" dirty="0">
+              <a:rPr lang="en-US" sz="2000" b="1" dirty="0">
                 <a:solidFill>
                   <a:srgbClr val="1F3864"/>
                 </a:solidFill>
                 <a:latin typeface="Times New Roman"/>
                 <a:cs typeface="Times New Roman"/>
               </a:rPr>
-              <a:t>Randomization</a:t>
-            </a:r>
-          </a:p>
-          <a:p>
-            <a:pPr marL="285750" indent="-285750">
-              <a:spcBef>
-                <a:spcPts val="0"/>
-              </a:spcBef>
-              <a:spcAft>
-                <a:spcPts val="300"/>
-              </a:spcAft>
-              <a:buFont typeface="Arial"/>
-              <a:buChar char="•"/>
-            </a:pPr>
-            <a:r>
-              <a:rPr lang="en-US" sz="1200" dirty="0">
-                <a:solidFill>
-                  <a:srgbClr val="000000"/>
-                </a:solidFill>
-                <a:latin typeface="Times New Roman"/>
-                <a:cs typeface="Times New Roman"/>
-              </a:rPr>
-              <a:t>Caregivers were randomly allocated to the intervention group or the treatment-as-usual (TAU / control) group using a random list generated by randomization software; the allocation sequence was concealed until interventions were assigned.</a:t>
+              <a:t>Randomization &amp; blinding</a:t>
+            </a:r>
+          </a:p>
+          <a:p>
+            <a:pPr marL="285750" indent="-285750">
+              <a:spcBef>
+                <a:spcPts val="0"/>
+              </a:spcBef>
+              <a:spcAft>
+                <a:spcPts val="300"/>
+              </a:spcAft>
+              <a:buFont typeface="Arial"/>
+              <a:buChar char="•"/>
+            </a:pPr>
+            <a:r>
+              <a:rPr lang="en-US" sz="1800" dirty="0">
+                <a:solidFill>
+                  <a:srgbClr val="000000"/>
+                </a:solidFill>
+                <a:latin typeface="Times New Roman"/>
+                <a:cs typeface="Times New Roman"/>
+              </a:rPr>
+              <a:t>Caregivers randomly allocated to experimental or control (TAU) group using a computer-generated random list; allocation concealed until assignment.</a:t>
+            </a:r>
+          </a:p>
+          <a:p>
+            <a:pPr marL="285750" indent="-285750">
+              <a:spcBef>
+                <a:spcPts val="0"/>
+              </a:spcBef>
+              <a:spcAft>
+                <a:spcPts val="300"/>
+              </a:spcAft>
+              <a:buFont typeface="Arial"/>
+              <a:buChar char="•"/>
+            </a:pPr>
+            <a:r>
+              <a:rPr lang="en-US" sz="1800" dirty="0">
+                <a:solidFill>
+                  <a:srgbClr val="000000"/>
+                </a:solidFill>
+                <a:latin typeface="Times New Roman"/>
+                <a:cs typeface="Times New Roman"/>
+              </a:rPr>
+              <a:t>Two blind raters (postgraduates in Social Work &amp; Psychology, &gt;5 years’ experience) trained for 2 days assessed outcomes.</a:t>
             </a:r>
           </a:p>
         </p:txBody>
@@ -978,7 +1000,7 @@
         <p:spPr>
           <a:xfrm>
             <a:off x="0" y="0"/>
-            <a:ext cx="12192000" cy="900000"/>
+            <a:ext cx="12192000" cy="1000000"/>
           </a:xfrm>
           <a:prstGeom prst="rect">
             <a:avLst/>
@@ -1000,7 +1022,7 @@
               <a:buNone/>
             </a:pPr>
             <a:r>
-              <a:rPr lang="en-US" sz="1400" b="1" dirty="0">
+              <a:rPr lang="en-US" sz="3000" b="1" dirty="0">
                 <a:solidFill>
                   <a:srgbClr val="FFFFFF"/>
                 </a:solidFill>
@@ -1020,8 +1042,8 @@
         </p:nvSpPr>
         <p:spPr>
           <a:xfrm>
-            <a:off x="685800" y="1050000"/>
-            <a:ext cx="10820400" cy="5600000"/>
+            <a:off x="685800" y="1150000"/>
+            <a:ext cx="10820400" cy="5500000"/>
           </a:xfrm>
           <a:prstGeom prst="rect">
             <a:avLst/>
@@ -1044,7 +1066,7 @@
               <a:buChar char="•"/>
             </a:pPr>
             <a:r>
-              <a:rPr lang="en-US" sz="1200" dirty="0">
+              <a:rPr lang="en-US" sz="1800" dirty="0">
                 <a:solidFill>
                   <a:srgbClr val="000000"/>
                 </a:solidFill>
@@ -1066,58 +1088,58 @@
               <a:buChar char="•"/>
             </a:pPr>
             <a:r>
-              <a:rPr lang="en-US" sz="1200" dirty="0">
-                <a:solidFill>
-                  <a:srgbClr val="000000"/>
-                </a:solidFill>
-                <a:latin typeface="Times New Roman"/>
-                <a:cs typeface="Times New Roman"/>
-              </a:rPr>
-              <a:t>Intervention group: 40 caregivers.</a:t>
-            </a:r>
-          </a:p>
-          <a:p>
-            <a:pPr marL="285750" indent="-285750">
-              <a:spcBef>
-                <a:spcPts val="0"/>
-              </a:spcBef>
-              <a:spcAft>
-                <a:spcPts val="300"/>
-              </a:spcAft>
-              <a:buFont typeface="Arial"/>
-              <a:buChar char="•"/>
-            </a:pPr>
-            <a:r>
-              <a:rPr lang="en-US" sz="1200" dirty="0">
-                <a:solidFill>
-                  <a:srgbClr val="000000"/>
-                </a:solidFill>
-                <a:latin typeface="Times New Roman"/>
-                <a:cs typeface="Times New Roman"/>
-              </a:rPr>
-              <a:t>Control (TAU) group: 40 caregivers.</a:t>
-            </a:r>
-          </a:p>
-          <a:p>
-            <a:pPr marL="285750" indent="-285750">
-              <a:spcBef>
-                <a:spcPts val="0"/>
-              </a:spcBef>
-              <a:spcAft>
-                <a:spcPts val="300"/>
-              </a:spcAft>
-              <a:buFont typeface="Arial"/>
-              <a:buChar char="•"/>
-            </a:pPr>
-            <a:r>
-              <a:rPr lang="en-US" sz="1200" dirty="0">
-                <a:solidFill>
-                  <a:srgbClr val="000000"/>
-                </a:solidFill>
-                <a:latin typeface="Times New Roman"/>
-                <a:cs typeface="Times New Roman"/>
-              </a:rPr>
-              <a:t>Assessments were done by two blind raters – postgraduates in Social Work and Psychology, each with &gt;5 years of experience working with psychiatry patients, trained over two days on the study and administration of the tools.</a:t>
+              <a:rPr lang="en-US" sz="1800" dirty="0">
+                <a:solidFill>
+                  <a:srgbClr val="000000"/>
+                </a:solidFill>
+                <a:latin typeface="Times New Roman"/>
+                <a:cs typeface="Times New Roman"/>
+              </a:rPr>
+              <a:t>Experimental (intervention) group: 40 caregivers.</a:t>
+            </a:r>
+          </a:p>
+          <a:p>
+            <a:pPr marL="285750" indent="-285750">
+              <a:spcBef>
+                <a:spcPts val="0"/>
+              </a:spcBef>
+              <a:spcAft>
+                <a:spcPts val="300"/>
+              </a:spcAft>
+              <a:buFont typeface="Arial"/>
+              <a:buChar char="•"/>
+            </a:pPr>
+            <a:r>
+              <a:rPr lang="en-US" sz="1800" dirty="0">
+                <a:solidFill>
+                  <a:srgbClr val="000000"/>
+                </a:solidFill>
+                <a:latin typeface="Times New Roman"/>
+                <a:cs typeface="Times New Roman"/>
+              </a:rPr>
+              <a:t>Control (treatment-as-usual, TAU) group: 40 caregivers.</a:t>
+            </a:r>
+          </a:p>
+          <a:p>
+            <a:pPr marL="285750" indent="-285750">
+              <a:spcBef>
+                <a:spcPts val="0"/>
+              </a:spcBef>
+              <a:spcAft>
+                <a:spcPts val="300"/>
+              </a:spcAft>
+              <a:buFont typeface="Arial"/>
+              <a:buChar char="•"/>
+            </a:pPr>
+            <a:r>
+              <a:rPr lang="en-US" sz="1800" dirty="0">
+                <a:solidFill>
+                  <a:srgbClr val="000000"/>
+                </a:solidFill>
+                <a:latin typeface="Times New Roman"/>
+                <a:cs typeface="Times New Roman"/>
+              </a:rPr>
+              <a:t>Recruitment: case files screened by ICD-10 diagnosis → diagnosis &amp; in-patient stay confirmed with the treating psychiatrist → patient screened with MINI to exclude comorbidity → informed consent obtained.</a:t>
             </a:r>
           </a:p>
           <a:p>
@@ -1132,14 +1154,14 @@
               <a:buChar char="–"/>
             </a:pPr>
             <a:r>
-              <a:rPr lang="en-US" sz="1200" i="1" dirty="0">
+              <a:rPr lang="en-US" sz="1800" i="1" dirty="0">
                 <a:solidFill>
                   <a:srgbClr val="333333"/>
                 </a:solidFill>
                 <a:latin typeface="Times New Roman"/>
                 <a:cs typeface="Times New Roman"/>
               </a:rPr>
-              <a:t>Note: some post-test analyses report n = 32 (control) and n = 33 (intervention), indicating attrition from the original 40 + 40.</a:t>
+              <a:t>Note: some post-test analyses report n = 32 (control) and n = 33 (experimental), indicating attrition from the original 40 + 40.</a:t>
             </a:r>
           </a:p>
         </p:txBody>
@@ -1175,7 +1197,7 @@
         <p:spPr>
           <a:xfrm>
             <a:off x="0" y="0"/>
-            <a:ext cx="12192000" cy="900000"/>
+            <a:ext cx="12192000" cy="1000000"/>
           </a:xfrm>
           <a:prstGeom prst="rect">
             <a:avLst/>
@@ -1197,14 +1219,14 @@
               <a:buNone/>
             </a:pPr>
             <a:r>
-              <a:rPr lang="en-US" sz="1400" b="1" dirty="0">
+              <a:rPr lang="en-US" sz="3000" b="1" dirty="0">
                 <a:solidFill>
                   <a:srgbClr val="FFFFFF"/>
                 </a:solidFill>
                 <a:latin typeface="Times New Roman"/>
                 <a:cs typeface="Times New Roman"/>
               </a:rPr>
-              <a:t>Eligibility: Inclusion Criteria</a:t>
+              <a:t>Control Group vs Experimental Group (1)</a:t>
             </a:r>
           </a:p>
         </p:txBody>
@@ -1217,8 +1239,8 @@
         </p:nvSpPr>
         <p:spPr>
           <a:xfrm>
-            <a:off x="685800" y="1050000"/>
-            <a:ext cx="10820400" cy="5600000"/>
+            <a:off x="685800" y="1150000"/>
+            <a:ext cx="10820400" cy="5500000"/>
           </a:xfrm>
           <a:prstGeom prst="rect">
             <a:avLst/>
@@ -1230,135 +1252,155 @@
           </a:bodyPr>
           <a:lstStyle/>
           <a:p>
-            <a:pPr marL="285750" indent="-285750">
-              <a:spcBef>
-                <a:spcPts val="0"/>
-              </a:spcBef>
-              <a:spcAft>
-                <a:spcPts val="300"/>
-              </a:spcAft>
-              <a:buFont typeface="Arial"/>
-              <a:buChar char="•"/>
-            </a:pPr>
-            <a:r>
-              <a:rPr lang="en-US" sz="1200" dirty="0">
-                <a:solidFill>
-                  <a:srgbClr val="000000"/>
-                </a:solidFill>
-                <a:latin typeface="Times New Roman"/>
-                <a:cs typeface="Times New Roman"/>
-              </a:rPr>
-              <a:t>Caregiver living with the patient and actively providing care.</a:t>
-            </a:r>
-          </a:p>
-          <a:p>
-            <a:pPr marL="285750" indent="-285750">
-              <a:spcBef>
-                <a:spcPts val="0"/>
-              </a:spcBef>
-              <a:spcAft>
-                <a:spcPts val="300"/>
-              </a:spcAft>
-              <a:buFont typeface="Arial"/>
-              <a:buChar char="•"/>
-            </a:pPr>
-            <a:r>
-              <a:rPr lang="en-US" sz="1200" dirty="0">
-                <a:solidFill>
-                  <a:srgbClr val="000000"/>
-                </a:solidFill>
-                <a:latin typeface="Times New Roman"/>
-                <a:cs typeface="Times New Roman"/>
-              </a:rPr>
-              <a:t>Aged 18 years or more.</a:t>
-            </a:r>
-          </a:p>
-          <a:p>
-            <a:pPr marL="285750" indent="-285750">
-              <a:spcBef>
-                <a:spcPts val="0"/>
-              </a:spcBef>
-              <a:spcAft>
-                <a:spcPts val="300"/>
-              </a:spcAft>
-              <a:buFont typeface="Arial"/>
-              <a:buChar char="•"/>
-            </a:pPr>
-            <a:r>
-              <a:rPr lang="en-US" sz="1200" dirty="0">
-                <a:solidFill>
-                  <a:srgbClr val="000000"/>
-                </a:solidFill>
-                <a:latin typeface="Times New Roman"/>
-                <a:cs typeface="Times New Roman"/>
-              </a:rPr>
-              <a:t>Duration of the patient’s illness between 1 and 5 years.</a:t>
-            </a:r>
-          </a:p>
-          <a:p>
-            <a:pPr marL="285750" indent="-285750">
-              <a:spcBef>
-                <a:spcPts val="0"/>
-              </a:spcBef>
-              <a:spcAft>
-                <a:spcPts val="300"/>
-              </a:spcAft>
-              <a:buFont typeface="Arial"/>
-              <a:buChar char="•"/>
-            </a:pPr>
-            <a:r>
-              <a:rPr lang="en-US" sz="1200" dirty="0">
-                <a:solidFill>
-                  <a:srgbClr val="000000"/>
-                </a:solidFill>
-                <a:latin typeface="Times New Roman"/>
-                <a:cs typeface="Times New Roman"/>
-              </a:rPr>
-              <a:t>Caregiver fluent in Kannada, Telugu, or English.</a:t>
-            </a:r>
-          </a:p>
-          <a:p>
-            <a:pPr marL="285750" indent="-285750">
-              <a:spcBef>
-                <a:spcPts val="0"/>
-              </a:spcBef>
-              <a:spcAft>
-                <a:spcPts val="300"/>
-              </a:spcAft>
-              <a:buFont typeface="Arial"/>
-              <a:buChar char="•"/>
-            </a:pPr>
-            <a:r>
-              <a:rPr lang="en-US" sz="1200" dirty="0">
-                <a:solidFill>
-                  <a:srgbClr val="000000"/>
-                </a:solidFill>
-                <a:latin typeface="Times New Roman"/>
-                <a:cs typeface="Times New Roman"/>
-              </a:rPr>
-              <a:t>Patient’s diagnosis of schizophrenia confirmed using ICD-10 criteria.</a:t>
-            </a:r>
-          </a:p>
-          <a:p>
-            <a:pPr marL="285750" indent="-285750">
-              <a:spcBef>
-                <a:spcPts val="0"/>
-              </a:spcBef>
-              <a:spcAft>
-                <a:spcPts val="300"/>
-              </a:spcAft>
-              <a:buFont typeface="Arial"/>
-              <a:buChar char="•"/>
-            </a:pPr>
-            <a:r>
-              <a:rPr lang="en-US" sz="1200" dirty="0">
-                <a:solidFill>
-                  <a:srgbClr val="000000"/>
-                </a:solidFill>
-                <a:latin typeface="Times New Roman"/>
-                <a:cs typeface="Times New Roman"/>
-              </a:rPr>
-              <a:t>Caregiver available for at least 10 days to undergo the intervention programme.</a:t>
+            <a:pPr marL="0" indent="0">
+              <a:spcBef>
+                <a:spcPts val="300"/>
+              </a:spcBef>
+              <a:spcAft>
+                <a:spcPts val="150"/>
+              </a:spcAft>
+              <a:buNone/>
+            </a:pPr>
+            <a:r>
+              <a:rPr lang="en-US" sz="2000" b="1" dirty="0">
+                <a:solidFill>
+                  <a:srgbClr val="1F3864"/>
+                </a:solidFill>
+                <a:latin typeface="Times New Roman"/>
+                <a:cs typeface="Times New Roman"/>
+              </a:rPr>
+              <a:t>Experimental (Intervention) Group – n = 40</a:t>
+            </a:r>
+          </a:p>
+          <a:p>
+            <a:pPr marL="285750" indent="-285750">
+              <a:spcBef>
+                <a:spcPts val="0"/>
+              </a:spcBef>
+              <a:spcAft>
+                <a:spcPts val="300"/>
+              </a:spcAft>
+              <a:buFont typeface="Arial"/>
+              <a:buChar char="•"/>
+            </a:pPr>
+            <a:r>
+              <a:rPr lang="en-US" sz="1800" dirty="0">
+                <a:solidFill>
+                  <a:srgbClr val="000000"/>
+                </a:solidFill>
+                <a:latin typeface="Times New Roman"/>
+                <a:cs typeface="Times New Roman"/>
+              </a:rPr>
+              <a:t>Received treatment as usual PLUS a standardized 10-session family intervention delivered by a trained Psychiatric Social Worker over 2–3 months.</a:t>
+            </a:r>
+          </a:p>
+          <a:p>
+            <a:pPr marL="285750" indent="-285750">
+              <a:spcBef>
+                <a:spcPts val="0"/>
+              </a:spcBef>
+              <a:spcAft>
+                <a:spcPts val="300"/>
+              </a:spcAft>
+              <a:buFont typeface="Arial"/>
+              <a:buChar char="•"/>
+            </a:pPr>
+            <a:r>
+              <a:rPr lang="en-US" sz="1800" dirty="0">
+                <a:solidFill>
+                  <a:srgbClr val="000000"/>
+                </a:solidFill>
+                <a:latin typeface="Times New Roman"/>
+                <a:cs typeface="Times New Roman"/>
+              </a:rPr>
+              <a:t>Package: 6 psychoeducation + 2 communication-training + 1 stress-management + 1 recap/referral sessions.</a:t>
+            </a:r>
+          </a:p>
+          <a:p>
+            <a:pPr marL="285750" indent="-285750">
+              <a:spcBef>
+                <a:spcPts val="0"/>
+              </a:spcBef>
+              <a:spcAft>
+                <a:spcPts val="300"/>
+              </a:spcAft>
+              <a:buFont typeface="Arial"/>
+              <a:buChar char="•"/>
+            </a:pPr>
+            <a:r>
+              <a:rPr lang="en-US" sz="1800" dirty="0">
+                <a:solidFill>
+                  <a:srgbClr val="000000"/>
+                </a:solidFill>
+                <a:latin typeface="Times New Roman"/>
+                <a:cs typeface="Times New Roman"/>
+              </a:rPr>
+              <a:t>Methods: social case-work &amp; group-work, role plays, video clippings, case vignettes, brainstorming, and a vernacular take-home handout.</a:t>
+            </a:r>
+          </a:p>
+          <a:p>
+            <a:pPr marL="0" indent="0">
+              <a:spcBef>
+                <a:spcPts val="300"/>
+              </a:spcBef>
+              <a:spcAft>
+                <a:spcPts val="150"/>
+              </a:spcAft>
+              <a:buNone/>
+            </a:pPr>
+            <a:r>
+              <a:rPr lang="en-US" sz="2000" b="1" dirty="0">
+                <a:solidFill>
+                  <a:srgbClr val="1F3864"/>
+                </a:solidFill>
+                <a:latin typeface="Times New Roman"/>
+                <a:cs typeface="Times New Roman"/>
+              </a:rPr>
+              <a:t>Control Group – Treatment As Usual (TAU) – n = 40</a:t>
+            </a:r>
+          </a:p>
+          <a:p>
+            <a:pPr marL="285750" indent="-285750">
+              <a:spcBef>
+                <a:spcPts val="0"/>
+              </a:spcBef>
+              <a:spcAft>
+                <a:spcPts val="300"/>
+              </a:spcAft>
+              <a:buFont typeface="Arial"/>
+              <a:buChar char="•"/>
+            </a:pPr>
+            <a:r>
+              <a:rPr lang="en-US" sz="1800" dirty="0">
+                <a:solidFill>
+                  <a:srgbClr val="000000"/>
+                </a:solidFill>
+                <a:latin typeface="Times New Roman"/>
+                <a:cs typeface="Times New Roman"/>
+              </a:rPr>
+              <a:t>Continued only with the routine hospital care provided by their respective units – no structured family intervention.</a:t>
+            </a:r>
+          </a:p>
+          <a:p>
+            <a:pPr marL="285750" indent="-285750">
+              <a:spcBef>
+                <a:spcPts val="0"/>
+              </a:spcBef>
+              <a:spcAft>
+                <a:spcPts val="300"/>
+              </a:spcAft>
+              <a:buFont typeface="Arial"/>
+              <a:buChar char="•"/>
+            </a:pPr>
+            <a:r>
+              <a:rPr lang="en-US" sz="1800" dirty="0">
+                <a:solidFill>
+                  <a:srgbClr val="000000"/>
+                </a:solidFill>
+                <a:latin typeface="Times New Roman"/>
+                <a:cs typeface="Times New Roman"/>
+              </a:rPr>
+              <a:t>For ethical reasons, the control group was offered the intervention AFTER the post-assessment.</a:t>
             </a:r>
           </a:p>
         </p:txBody>
@@ -1394,7 +1436,7 @@
         <p:spPr>
           <a:xfrm>
             <a:off x="0" y="0"/>
-            <a:ext cx="12192000" cy="900000"/>
+            <a:ext cx="12192000" cy="1000000"/>
           </a:xfrm>
           <a:prstGeom prst="rect">
             <a:avLst/>
@@ -1416,14 +1458,14 @@
               <a:buNone/>
             </a:pPr>
             <a:r>
-              <a:rPr lang="en-US" sz="1400" b="1" dirty="0">
+              <a:rPr lang="en-US" sz="3000" b="1" dirty="0">
                 <a:solidFill>
                   <a:srgbClr val="FFFFFF"/>
                 </a:solidFill>
                 <a:latin typeface="Times New Roman"/>
                 <a:cs typeface="Times New Roman"/>
               </a:rPr>
-              <a:t>Eligibility: Exclusion Criteria</a:t>
+              <a:t>Control Group vs Experimental Group (2)</a:t>
             </a:r>
           </a:p>
         </p:txBody>
@@ -1436,8 +1478,8 @@
         </p:nvSpPr>
         <p:spPr>
           <a:xfrm>
-            <a:off x="685800" y="1050000"/>
-            <a:ext cx="10820400" cy="5600000"/>
+            <a:off x="685800" y="1150000"/>
+            <a:ext cx="10820400" cy="5500000"/>
           </a:xfrm>
           <a:prstGeom prst="rect">
             <a:avLst/>
@@ -1449,69 +1491,154 @@
           </a:bodyPr>
           <a:lstStyle/>
           <a:p>
-            <a:pPr marL="285750" indent="-285750">
-              <a:spcBef>
-                <a:spcPts val="0"/>
-              </a:spcBef>
-              <a:spcAft>
-                <a:spcPts val="300"/>
-              </a:spcAft>
-              <a:buFont typeface="Arial"/>
-              <a:buChar char="•"/>
-            </a:pPr>
-            <a:r>
-              <a:rPr lang="en-US" sz="1200" dirty="0">
-                <a:solidFill>
-                  <a:srgbClr val="000000"/>
-                </a:solidFill>
-                <a:latin typeface="Times New Roman"/>
-                <a:cs typeface="Times New Roman"/>
-              </a:rPr>
-              <a:t>Caregivers with a history of psychiatric illness and treatment were excluded.</a:t>
-            </a:r>
-          </a:p>
-          <a:p>
-            <a:pPr marL="285750" indent="-285750">
-              <a:spcBef>
-                <a:spcPts val="0"/>
-              </a:spcBef>
-              <a:spcAft>
-                <a:spcPts val="300"/>
-              </a:spcAft>
-              <a:buFont typeface="Arial"/>
-              <a:buChar char="•"/>
-            </a:pPr>
-            <a:r>
-              <a:rPr lang="en-US" sz="1200" dirty="0">
-                <a:solidFill>
-                  <a:srgbClr val="000000"/>
-                </a:solidFill>
-                <a:latin typeface="Times New Roman"/>
-                <a:cs typeface="Times New Roman"/>
-              </a:rPr>
-              <a:t>Persons with schizophrenia found to have a comorbid psychiatric illness (screened with MINI) were excluded, along with their caregivers.</a:t>
-            </a:r>
-          </a:p>
-          <a:p>
-            <a:pPr marL="571500" indent="-228600">
-              <a:spcBef>
-                <a:spcPts val="0"/>
-              </a:spcBef>
-              <a:spcAft>
-                <a:spcPts val="300"/>
-              </a:spcAft>
-              <a:buFont typeface="Arial"/>
-              <a:buChar char="–"/>
-            </a:pPr>
-            <a:r>
-              <a:rPr lang="en-US" sz="1200" i="1" dirty="0">
-                <a:solidFill>
-                  <a:srgbClr val="333333"/>
-                </a:solidFill>
-                <a:latin typeface="Times New Roman"/>
-                <a:cs typeface="Times New Roman"/>
-              </a:rPr>
-              <a:t>Screening used the Mini International Neuropsychiatric Interview (MINI 6.0) to rule out comorbidity.</a:t>
+            <a:pPr marL="0" indent="0">
+              <a:spcBef>
+                <a:spcPts val="300"/>
+              </a:spcBef>
+              <a:spcAft>
+                <a:spcPts val="150"/>
+              </a:spcAft>
+              <a:buNone/>
+            </a:pPr>
+            <a:r>
+              <a:rPr lang="en-US" sz="2000" b="1" dirty="0">
+                <a:solidFill>
+                  <a:srgbClr val="1F3864"/>
+                </a:solidFill>
+                <a:latin typeface="Times New Roman"/>
+                <a:cs typeface="Times New Roman"/>
+              </a:rPr>
+              <a:t>Baseline comparability</a:t>
+            </a:r>
+          </a:p>
+          <a:p>
+            <a:pPr marL="285750" indent="-285750">
+              <a:spcBef>
+                <a:spcPts val="0"/>
+              </a:spcBef>
+              <a:spcAft>
+                <a:spcPts val="300"/>
+              </a:spcAft>
+              <a:buFont typeface="Arial"/>
+              <a:buChar char="•"/>
+            </a:pPr>
+            <a:r>
+              <a:rPr lang="en-US" sz="1800" dirty="0">
+                <a:solidFill>
+                  <a:srgbClr val="000000"/>
+                </a:solidFill>
+                <a:latin typeface="Times New Roman"/>
+                <a:cs typeface="Times New Roman"/>
+              </a:rPr>
+              <a:t>Groups were comparable at baseline on most sociodemographic variables (age, marital status, education, occupation, primary caregiver, contact frequency) – no significant differences (P &gt; 0.05).</a:t>
+            </a:r>
+          </a:p>
+          <a:p>
+            <a:pPr marL="285750" indent="-285750">
+              <a:spcBef>
+                <a:spcPts val="0"/>
+              </a:spcBef>
+              <a:spcAft>
+                <a:spcPts val="300"/>
+              </a:spcAft>
+              <a:buFont typeface="Arial"/>
+              <a:buChar char="•"/>
+            </a:pPr>
+            <a:r>
+              <a:rPr lang="en-US" sz="1800" dirty="0">
+                <a:solidFill>
+                  <a:srgbClr val="000000"/>
+                </a:solidFill>
+                <a:latin typeface="Times New Roman"/>
+                <a:cs typeface="Times New Roman"/>
+              </a:rPr>
+              <a:t>Only caregiver gender differed significantly (more females in the experimental group; P = 0.039).</a:t>
+            </a:r>
+          </a:p>
+          <a:p>
+            <a:pPr marL="0" indent="0">
+              <a:spcBef>
+                <a:spcPts val="300"/>
+              </a:spcBef>
+              <a:spcAft>
+                <a:spcPts val="150"/>
+              </a:spcAft>
+              <a:buNone/>
+            </a:pPr>
+            <a:r>
+              <a:rPr lang="en-US" sz="2000" b="1" dirty="0">
+                <a:solidFill>
+                  <a:srgbClr val="1F3864"/>
+                </a:solidFill>
+                <a:latin typeface="Times New Roman"/>
+                <a:cs typeface="Times New Roman"/>
+              </a:rPr>
+              <a:t>What differed between the groups</a:t>
+            </a:r>
+          </a:p>
+          <a:p>
+            <a:pPr marL="285750" indent="-285750">
+              <a:spcBef>
+                <a:spcPts val="0"/>
+              </a:spcBef>
+              <a:spcAft>
+                <a:spcPts val="300"/>
+              </a:spcAft>
+              <a:buFont typeface="Arial"/>
+              <a:buChar char="•"/>
+            </a:pPr>
+            <a:r>
+              <a:rPr lang="en-US" sz="1800" dirty="0">
+                <a:solidFill>
+                  <a:srgbClr val="000000"/>
+                </a:solidFill>
+                <a:latin typeface="Times New Roman"/>
+                <a:cs typeface="Times New Roman"/>
+              </a:rPr>
+              <a:t>The ONLY planned difference was the family-intervention package – allowing its effect on EE to be isolated.</a:t>
+            </a:r>
+          </a:p>
+          <a:p>
+            <a:pPr marL="0" indent="0">
+              <a:spcBef>
+                <a:spcPts val="300"/>
+              </a:spcBef>
+              <a:spcAft>
+                <a:spcPts val="150"/>
+              </a:spcAft>
+              <a:buNone/>
+            </a:pPr>
+            <a:r>
+              <a:rPr lang="en-US" sz="2000" b="1" dirty="0">
+                <a:solidFill>
+                  <a:srgbClr val="1F3864"/>
+                </a:solidFill>
+                <a:latin typeface="Times New Roman"/>
+                <a:cs typeface="Times New Roman"/>
+              </a:rPr>
+              <a:t>Direction of change</a:t>
+            </a:r>
+          </a:p>
+          <a:p>
+            <a:pPr marL="285750" indent="-285750">
+              <a:spcBef>
+                <a:spcPts val="0"/>
+              </a:spcBef>
+              <a:spcAft>
+                <a:spcPts val="300"/>
+              </a:spcAft>
+              <a:buFont typeface="Arial"/>
+              <a:buChar char="•"/>
+            </a:pPr>
+            <a:r>
+              <a:rPr lang="en-US" sz="1800" dirty="0">
+                <a:solidFill>
+                  <a:srgbClr val="000000"/>
+                </a:solidFill>
+                <a:latin typeface="Times New Roman"/>
+                <a:cs typeface="Times New Roman"/>
+              </a:rPr>
+              <a:t>Experimental group: EE DECREASED after intervention. Control (TAU) group: EE INCREASED over the same period – highlighting the value of the intervention.</a:t>
             </a:r>
           </a:p>
         </p:txBody>
@@ -1547,7 +1674,7 @@
         <p:spPr>
           <a:xfrm>
             <a:off x="0" y="0"/>
-            <a:ext cx="12192000" cy="900000"/>
+            <a:ext cx="12192000" cy="1000000"/>
           </a:xfrm>
           <a:prstGeom prst="rect">
             <a:avLst/>
@@ -1569,14 +1696,14 @@
               <a:buNone/>
             </a:pPr>
             <a:r>
-              <a:rPr lang="en-US" sz="1400" b="1" dirty="0">
+              <a:rPr lang="en-US" sz="3000" b="1" dirty="0">
                 <a:solidFill>
                   <a:srgbClr val="FFFFFF"/>
                 </a:solidFill>
                 <a:latin typeface="Times New Roman"/>
                 <a:cs typeface="Times New Roman"/>
               </a:rPr>
-              <a:t>The Intervention Received (Overview)</a:t>
+              <a:t>Family Intervention – Sessions 1–6 (Psychoeducation)</a:t>
             </a:r>
           </a:p>
         </p:txBody>
@@ -1589,8 +1716,8 @@
         </p:nvSpPr>
         <p:spPr>
           <a:xfrm>
-            <a:off x="685800" y="1050000"/>
-            <a:ext cx="10820400" cy="5600000"/>
+            <a:off x="685800" y="1150000"/>
+            <a:ext cx="10820400" cy="5500000"/>
           </a:xfrm>
           <a:prstGeom prst="rect">
             <a:avLst/>
@@ -1602,50 +1729,6 @@
           </a:bodyPr>
           <a:lstStyle/>
           <a:p>
-            <a:pPr marL="285750" indent="-285750">
-              <a:spcBef>
-                <a:spcPts val="0"/>
-              </a:spcBef>
-              <a:spcAft>
-                <a:spcPts val="300"/>
-              </a:spcAft>
-              <a:buFont typeface="Arial"/>
-              <a:buChar char="•"/>
-            </a:pPr>
-            <a:r>
-              <a:rPr lang="en-US" sz="1200" dirty="0">
-                <a:solidFill>
-                  <a:srgbClr val="000000"/>
-                </a:solidFill>
-                <a:latin typeface="Times New Roman"/>
-                <a:cs typeface="Times New Roman"/>
-              </a:rPr>
-              <a:t>Intervention group: a standardized 10-session family intervention programme, delivered by the researcher (a trained Psychiatric Social Worker), over a period of 2–3 months.</a:t>
-            </a:r>
-          </a:p>
-          <a:p>
-            <a:pPr marL="285750" indent="-285750">
-              <a:spcBef>
-                <a:spcPts val="0"/>
-              </a:spcBef>
-              <a:spcAft>
-                <a:spcPts val="300"/>
-              </a:spcAft>
-              <a:buFont typeface="Arial"/>
-              <a:buChar char="•"/>
-            </a:pPr>
-            <a:r>
-              <a:rPr lang="en-US" sz="1200" dirty="0">
-                <a:solidFill>
-                  <a:srgbClr val="000000"/>
-                </a:solidFill>
-                <a:latin typeface="Times New Roman"/>
-                <a:cs typeface="Times New Roman"/>
-              </a:rPr>
-              <a:t>Control group: continued with treatment as usual (routine care provided by their respective hospital units).</a:t>
-            </a:r>
-          </a:p>
-          <a:p>
             <a:pPr marL="0" indent="0">
               <a:spcBef>
                 <a:spcPts val="300"/>
@@ -1656,79 +1739,124 @@
               <a:buNone/>
             </a:pPr>
             <a:r>
-              <a:rPr lang="en-US" sz="1200" b="1" dirty="0">
+              <a:rPr lang="en-US" sz="2000" b="1" dirty="0">
                 <a:solidFill>
                   <a:srgbClr val="1F3864"/>
                 </a:solidFill>
                 <a:latin typeface="Times New Roman"/>
                 <a:cs typeface="Times New Roman"/>
               </a:rPr>
-              <a:t>Package structure (10 sessions)</a:t>
-            </a:r>
-          </a:p>
-          <a:p>
-            <a:pPr marL="285750" indent="-285750">
-              <a:spcBef>
-                <a:spcPts val="0"/>
-              </a:spcBef>
-              <a:spcAft>
-                <a:spcPts val="300"/>
-              </a:spcAft>
-              <a:buFont typeface="Arial"/>
-              <a:buChar char="•"/>
-            </a:pPr>
-            <a:r>
-              <a:rPr lang="en-US" sz="1200" dirty="0">
-                <a:solidFill>
-                  <a:srgbClr val="000000"/>
-                </a:solidFill>
-                <a:latin typeface="Times New Roman"/>
-                <a:cs typeface="Times New Roman"/>
-              </a:rPr>
-              <a:t>6 sessions of family psychoeducation + 2 sessions of communication training + 1 session of stress management + 1 session of recap &amp; referral services.</a:t>
-            </a:r>
-          </a:p>
-          <a:p>
-            <a:pPr marL="0" indent="0">
-              <a:spcBef>
-                <a:spcPts val="300"/>
-              </a:spcBef>
-              <a:spcAft>
-                <a:spcPts val="150"/>
-              </a:spcAft>
-              <a:buNone/>
-            </a:pPr>
-            <a:r>
-              <a:rPr lang="en-US" sz="1200" b="1" dirty="0">
-                <a:solidFill>
-                  <a:srgbClr val="1F3864"/>
-                </a:solidFill>
-                <a:latin typeface="Times New Roman"/>
-                <a:cs typeface="Times New Roman"/>
-              </a:rPr>
-              <a:t>Methods used</a:t>
-            </a:r>
-          </a:p>
-          <a:p>
-            <a:pPr marL="285750" indent="-285750">
-              <a:spcBef>
-                <a:spcPts val="0"/>
-              </a:spcBef>
-              <a:spcAft>
-                <a:spcPts val="300"/>
-              </a:spcAft>
-              <a:buFont typeface="Arial"/>
-              <a:buChar char="•"/>
-            </a:pPr>
-            <a:r>
-              <a:rPr lang="en-US" sz="1200" dirty="0">
-                <a:solidFill>
-                  <a:srgbClr val="000000"/>
-                </a:solidFill>
-                <a:latin typeface="Times New Roman"/>
-                <a:cs typeface="Times New Roman"/>
-              </a:rPr>
-              <a:t>Social case-work and group-work methods, social-work principles and therapeutic activities – brainstorming, case vignettes, role plays, video clippings, and a brief take-home handout in the vernacular language.</a:t>
+              <a:t>Family Psychoeducation (6 sessions)</a:t>
+            </a:r>
+          </a:p>
+          <a:p>
+            <a:pPr marL="285750" indent="-285750">
+              <a:spcBef>
+                <a:spcPts val="0"/>
+              </a:spcBef>
+              <a:spcAft>
+                <a:spcPts val="300"/>
+              </a:spcAft>
+              <a:buFont typeface="Arial"/>
+              <a:buChar char="•"/>
+            </a:pPr>
+            <a:r>
+              <a:rPr lang="en-US" sz="1800" dirty="0">
+                <a:solidFill>
+                  <a:srgbClr val="000000"/>
+                </a:solidFill>
+                <a:latin typeface="Times New Roman"/>
+                <a:cs typeface="Times New Roman"/>
+              </a:rPr>
+              <a:t>Information about schizophrenia – symptoms, signs, course, and outcomes of the illness.</a:t>
+            </a:r>
+          </a:p>
+          <a:p>
+            <a:pPr marL="285750" indent="-285750">
+              <a:spcBef>
+                <a:spcPts val="0"/>
+              </a:spcBef>
+              <a:spcAft>
+                <a:spcPts val="300"/>
+              </a:spcAft>
+              <a:buFont typeface="Arial"/>
+              <a:buChar char="•"/>
+            </a:pPr>
+            <a:r>
+              <a:rPr lang="en-US" sz="1800" dirty="0">
+                <a:solidFill>
+                  <a:srgbClr val="000000"/>
+                </a:solidFill>
+                <a:latin typeface="Times New Roman"/>
+                <a:cs typeface="Times New Roman"/>
+              </a:rPr>
+              <a:t>Understanding high EE – what criticality and emotional over-involvement are, and how they affect relapse.</a:t>
+            </a:r>
+          </a:p>
+          <a:p>
+            <a:pPr marL="285750" indent="-285750">
+              <a:spcBef>
+                <a:spcPts val="0"/>
+              </a:spcBef>
+              <a:spcAft>
+                <a:spcPts val="300"/>
+              </a:spcAft>
+              <a:buFont typeface="Arial"/>
+              <a:buChar char="•"/>
+            </a:pPr>
+            <a:r>
+              <a:rPr lang="en-US" sz="1800" dirty="0">
+                <a:solidFill>
+                  <a:srgbClr val="000000"/>
+                </a:solidFill>
+                <a:latin typeface="Times New Roman"/>
+                <a:cs typeface="Times New Roman"/>
+              </a:rPr>
+              <a:t>Role of medication, adherence, and meeting the patient’s basic needs.</a:t>
+            </a:r>
+          </a:p>
+          <a:p>
+            <a:pPr marL="285750" indent="-285750">
+              <a:spcBef>
+                <a:spcPts val="0"/>
+              </a:spcBef>
+              <a:spcAft>
+                <a:spcPts val="300"/>
+              </a:spcAft>
+              <a:buFont typeface="Arial"/>
+              <a:buChar char="•"/>
+            </a:pPr>
+            <a:r>
+              <a:rPr lang="en-US" sz="1800" dirty="0">
+                <a:solidFill>
+                  <a:srgbClr val="000000"/>
+                </a:solidFill>
+                <a:latin typeface="Times New Roman"/>
+                <a:cs typeface="Times New Roman"/>
+              </a:rPr>
+              <a:t>Reducing excessive face-to-face contact by engaging the patient in productive activity – household work, day-care / vocational training, suitable jobs, family business, agriculture, dairy, or cattle-rearing.</a:t>
+            </a:r>
+          </a:p>
+          <a:p>
+            <a:pPr marL="285750" indent="-285750">
+              <a:spcBef>
+                <a:spcPts val="0"/>
+              </a:spcBef>
+              <a:spcAft>
+                <a:spcPts val="300"/>
+              </a:spcAft>
+              <a:buFont typeface="Arial"/>
+              <a:buChar char="•"/>
+            </a:pPr>
+            <a:r>
+              <a:rPr lang="en-US" sz="1800" dirty="0">
+                <a:solidFill>
+                  <a:srgbClr val="000000"/>
+                </a:solidFill>
+                <a:latin typeface="Times New Roman"/>
+                <a:cs typeface="Times New Roman"/>
+              </a:rPr>
+              <a:t>Helping the patient gradually regain independence in self-care (eating, bathing, watching TV) during the caregiver’s brief absences.</a:t>
             </a:r>
           </a:p>
         </p:txBody>
@@ -1764,7 +1892,7 @@
         <p:spPr>
           <a:xfrm>
             <a:off x="0" y="0"/>
-            <a:ext cx="12192000" cy="900000"/>
+            <a:ext cx="12192000" cy="1000000"/>
           </a:xfrm>
           <a:prstGeom prst="rect">
             <a:avLst/>
@@ -1786,14 +1914,14 @@
               <a:buNone/>
             </a:pPr>
             <a:r>
-              <a:rPr lang="en-US" sz="1400" b="1" dirty="0">
+              <a:rPr lang="en-US" sz="3000" b="1" dirty="0">
                 <a:solidFill>
                   <a:srgbClr val="FFFFFF"/>
                 </a:solidFill>
                 <a:latin typeface="Times New Roman"/>
                 <a:cs typeface="Times New Roman"/>
               </a:rPr>
-              <a:t>Family Intervention – Session by Session</a:t>
+              <a:t>Family Intervention – Sessions 7–10</a:t>
             </a:r>
           </a:p>
         </p:txBody>
@@ -1806,8 +1934,8 @@
         </p:nvSpPr>
         <p:spPr>
           <a:xfrm>
-            <a:off x="685800" y="1050000"/>
-            <a:ext cx="10820400" cy="5600000"/>
+            <a:off x="685800" y="1150000"/>
+            <a:ext cx="10820400" cy="5500000"/>
           </a:xfrm>
           <a:prstGeom prst="rect">
             <a:avLst/>
@@ -1829,36 +1957,80 @@
               <a:buNone/>
             </a:pPr>
             <a:r>
-              <a:rPr lang="en-US" sz="1200" b="1" dirty="0">
+              <a:rPr lang="en-US" sz="2000" b="1" dirty="0">
                 <a:solidFill>
                   <a:srgbClr val="1F3864"/>
                 </a:solidFill>
                 <a:latin typeface="Times New Roman"/>
                 <a:cs typeface="Times New Roman"/>
               </a:rPr>
-              <a:t>Sessions 1–6: Family Psychoeducation</a:t>
-            </a:r>
-          </a:p>
-          <a:p>
-            <a:pPr marL="285750" indent="-285750">
-              <a:spcBef>
-                <a:spcPts val="0"/>
-              </a:spcBef>
-              <a:spcAft>
-                <a:spcPts val="300"/>
-              </a:spcAft>
-              <a:buFont typeface="Arial"/>
-              <a:buChar char="•"/>
-            </a:pPr>
-            <a:r>
-              <a:rPr lang="en-US" sz="1200" dirty="0">
-                <a:solidFill>
-                  <a:srgbClr val="000000"/>
-                </a:solidFill>
-                <a:latin typeface="Times New Roman"/>
-                <a:cs typeface="Times New Roman"/>
-              </a:rPr>
-              <a:t>Information on schizophrenia – symptoms, signs, course, and outcomes; nature of high EE (criticality &amp; over-involvement); the role of medication and basic needs; reducing excessive face-to-face contact by engaging the patient in productive activities (household work, day-care/vocational training, jobs, agriculture, dairy, etc.).</a:t>
+              <a:t>Sessions 7–8: Communication Training</a:t>
+            </a:r>
+          </a:p>
+          <a:p>
+            <a:pPr marL="285750" indent="-285750">
+              <a:spcBef>
+                <a:spcPts val="0"/>
+              </a:spcBef>
+              <a:spcAft>
+                <a:spcPts val="300"/>
+              </a:spcAft>
+              <a:buFont typeface="Arial"/>
+              <a:buChar char="•"/>
+            </a:pPr>
+            <a:r>
+              <a:rPr lang="en-US" sz="1800" dirty="0">
+                <a:solidFill>
+                  <a:srgbClr val="000000"/>
+                </a:solidFill>
+                <a:latin typeface="Times New Roman"/>
+                <a:cs typeface="Times New Roman"/>
+              </a:rPr>
+              <a:t>Role plays and video clippings to improve day-to-day communication with the patient.</a:t>
+            </a:r>
+          </a:p>
+          <a:p>
+            <a:pPr marL="285750" indent="-285750">
+              <a:spcBef>
+                <a:spcPts val="0"/>
+              </a:spcBef>
+              <a:spcAft>
+                <a:spcPts val="300"/>
+              </a:spcAft>
+              <a:buFont typeface="Arial"/>
+              <a:buChar char="•"/>
+            </a:pPr>
+            <a:r>
+              <a:rPr lang="en-US" sz="1800" dirty="0">
+                <a:solidFill>
+                  <a:srgbClr val="000000"/>
+                </a:solidFill>
+                <a:latin typeface="Times New Roman"/>
+                <a:cs typeface="Times New Roman"/>
+              </a:rPr>
+              <a:t>Modifying negative emotions (criticality, hostility) toward positive, supportive interactions.</a:t>
+            </a:r>
+          </a:p>
+          <a:p>
+            <a:pPr marL="285750" indent="-285750">
+              <a:spcBef>
+                <a:spcPts val="0"/>
+              </a:spcBef>
+              <a:spcAft>
+                <a:spcPts val="300"/>
+              </a:spcAft>
+              <a:buFont typeface="Arial"/>
+              <a:buChar char="•"/>
+            </a:pPr>
+            <a:r>
+              <a:rPr lang="en-US" sz="1800" dirty="0">
+                <a:solidFill>
+                  <a:srgbClr val="000000"/>
+                </a:solidFill>
+                <a:latin typeface="Times New Roman"/>
+                <a:cs typeface="Times New Roman"/>
+              </a:rPr>
+              <a:t>Vernacular-language handouts to reinforce communication skills.</a:t>
             </a:r>
           </a:p>
           <a:p>
@@ -1872,36 +2044,36 @@
               <a:buNone/>
             </a:pPr>
             <a:r>
-              <a:rPr lang="en-US" sz="1200" b="1" dirty="0">
+              <a:rPr lang="en-US" sz="2000" b="1" dirty="0">
                 <a:solidFill>
                   <a:srgbClr val="1F3864"/>
                 </a:solidFill>
                 <a:latin typeface="Times New Roman"/>
                 <a:cs typeface="Times New Roman"/>
               </a:rPr>
-              <a:t>Sessions 7–8: Communication Training</a:t>
-            </a:r>
-          </a:p>
-          <a:p>
-            <a:pPr marL="285750" indent="-285750">
-              <a:spcBef>
-                <a:spcPts val="0"/>
-              </a:spcBef>
-              <a:spcAft>
-                <a:spcPts val="300"/>
-              </a:spcAft>
-              <a:buFont typeface="Arial"/>
-              <a:buChar char="•"/>
-            </a:pPr>
-            <a:r>
-              <a:rPr lang="en-US" sz="1200" dirty="0">
-                <a:solidFill>
-                  <a:srgbClr val="000000"/>
-                </a:solidFill>
-                <a:latin typeface="Times New Roman"/>
-                <a:cs typeface="Times New Roman"/>
-              </a:rPr>
-              <a:t>Role plays and video clippings to improve day-to-day communication; modifying negative emotions (criticality, hostility) toward positive interactions.</a:t>
+              <a:t>Session 9: Stress Management</a:t>
+            </a:r>
+          </a:p>
+          <a:p>
+            <a:pPr marL="285750" indent="-285750">
+              <a:spcBef>
+                <a:spcPts val="0"/>
+              </a:spcBef>
+              <a:spcAft>
+                <a:spcPts val="300"/>
+              </a:spcAft>
+              <a:buFont typeface="Arial"/>
+              <a:buChar char="•"/>
+            </a:pPr>
+            <a:r>
+              <a:rPr lang="en-US" sz="1800" dirty="0">
+                <a:solidFill>
+                  <a:srgbClr val="000000"/>
+                </a:solidFill>
+                <a:latin typeface="Times New Roman"/>
+                <a:cs typeface="Times New Roman"/>
+              </a:rPr>
+              <a:t>Identifying caregiver stressors; balanced lifestyle; sharing roles &amp; responsibilities; enhancing social support; crisis management; ‘caring for the carers’ (enjoyable activities, brief trial separations); addressing guilt.</a:t>
             </a:r>
           </a:p>
           <a:p>
@@ -1915,56 +2087,13 @@
               <a:buNone/>
             </a:pPr>
             <a:r>
-              <a:rPr lang="en-US" sz="1200" b="1" dirty="0">
+              <a:rPr lang="en-US" sz="2000" b="1" dirty="0">
                 <a:solidFill>
                   <a:srgbClr val="1F3864"/>
                 </a:solidFill>
                 <a:latin typeface="Times New Roman"/>
                 <a:cs typeface="Times New Roman"/>
               </a:rPr>
-              <a:t>Session 9: Stress Management</a:t>
-            </a:r>
-          </a:p>
-          <a:p>
-            <a:pPr marL="285750" indent="-285750">
-              <a:spcBef>
-                <a:spcPts val="0"/>
-              </a:spcBef>
-              <a:spcAft>
-                <a:spcPts val="300"/>
-              </a:spcAft>
-              <a:buFont typeface="Arial"/>
-              <a:buChar char="•"/>
-            </a:pPr>
-            <a:r>
-              <a:rPr lang="en-US" sz="1200" dirty="0">
-                <a:solidFill>
-                  <a:srgbClr val="000000"/>
-                </a:solidFill>
-                <a:latin typeface="Times New Roman"/>
-                <a:cs typeface="Times New Roman"/>
-              </a:rPr>
-              <a:t>Identifying caregiver stressors; balanced lifestyle; sharing roles &amp; responsibilities; enhancing social support; crisis management; ‘caring for the carers’ (enjoyable activities, brief trial separations); addressing guilt.</a:t>
-            </a:r>
-          </a:p>
-          <a:p>
-            <a:pPr marL="0" indent="0">
-              <a:spcBef>
-                <a:spcPts val="300"/>
-              </a:spcBef>
-              <a:spcAft>
-                <a:spcPts val="150"/>
-              </a:spcAft>
-              <a:buNone/>
-            </a:pPr>
-            <a:r>
-              <a:rPr lang="en-US" sz="1200" b="1" dirty="0">
-                <a:solidFill>
-                  <a:srgbClr val="1F3864"/>
-                </a:solidFill>
-                <a:latin typeface="Times New Roman"/>
-                <a:cs typeface="Times New Roman"/>
-              </a:rPr>
               <a:t>Session 10: Recap &amp; Referral</a:t>
             </a:r>
           </a:p>
@@ -1980,14 +2109,14 @@
               <a:buChar char="•"/>
             </a:pPr>
             <a:r>
-              <a:rPr lang="en-US" sz="1200" dirty="0">
-                <a:solidFill>
-                  <a:srgbClr val="000000"/>
-                </a:solidFill>
-                <a:latin typeface="Times New Roman"/>
-                <a:cs typeface="Times New Roman"/>
-              </a:rPr>
-              <a:t>Consolidation of learning, take-home handout, and referral services.</a:t>
+              <a:rPr lang="en-US" sz="1800" dirty="0">
+                <a:solidFill>
+                  <a:srgbClr val="000000"/>
+                </a:solidFill>
+                <a:latin typeface="Times New Roman"/>
+                <a:cs typeface="Times New Roman"/>
+              </a:rPr>
+              <a:t>Consolidation of learning, take-home handout, and referral to appropriate services.</a:t>
             </a:r>
           </a:p>
         </p:txBody>
@@ -2023,7 +2152,7 @@
         <p:spPr>
           <a:xfrm>
             <a:off x="0" y="0"/>
-            <a:ext cx="12192000" cy="900000"/>
+            <a:ext cx="12192000" cy="1000000"/>
           </a:xfrm>
           <a:prstGeom prst="rect">
             <a:avLst/>
@@ -2045,7 +2174,7 @@
               <a:buNone/>
             </a:pPr>
             <a:r>
-              <a:rPr lang="en-US" sz="1400" b="1" dirty="0">
+              <a:rPr lang="en-US" sz="3000" b="1" dirty="0">
                 <a:solidFill>
                   <a:srgbClr val="FFFFFF"/>
                 </a:solidFill>
@@ -2065,8 +2194,8 @@
         </p:nvSpPr>
         <p:spPr>
           <a:xfrm>
-            <a:off x="685800" y="1050000"/>
-            <a:ext cx="10820400" cy="5600000"/>
+            <a:off x="685800" y="1150000"/>
+            <a:ext cx="10820400" cy="5500000"/>
           </a:xfrm>
           <a:prstGeom prst="rect">
             <a:avLst/>
@@ -2088,7 +2217,7 @@
               <a:buNone/>
             </a:pPr>
             <a:r>
-              <a:rPr lang="en-US" sz="1200" b="1" dirty="0">
+              <a:rPr lang="en-US" sz="2000" b="1" dirty="0">
                 <a:solidFill>
                   <a:srgbClr val="1F3864"/>
                 </a:solidFill>
@@ -2110,7 +2239,7 @@
               <a:buChar char="•"/>
             </a:pPr>
             <a:r>
-              <a:rPr lang="en-US" sz="1200" dirty="0">
+              <a:rPr lang="en-US" sz="1800" dirty="0">
                 <a:solidFill>
                   <a:srgbClr val="000000"/>
                 </a:solidFill>
@@ -2131,7 +2260,7 @@
               <a:buNone/>
             </a:pPr>
             <a:r>
-              <a:rPr lang="en-US" sz="1200" b="1" dirty="0">
+              <a:rPr lang="en-US" sz="2000" b="1" dirty="0">
                 <a:solidFill>
                   <a:srgbClr val="1F3864"/>
                 </a:solidFill>
@@ -2153,14 +2282,14 @@
               <a:buChar char="•"/>
             </a:pPr>
             <a:r>
-              <a:rPr lang="en-US" sz="1200" dirty="0">
-                <a:solidFill>
-                  <a:srgbClr val="000000"/>
-                </a:solidFill>
-                <a:latin typeface="Times New Roman"/>
-                <a:cs typeface="Times New Roman"/>
-              </a:rPr>
-              <a:t>Semi-structured schedule (by the researcher) – personal, family, marital, occupational, income, caregiving, and illness details of caregivers and patients.</a:t>
+              <a:rPr lang="en-US" sz="1800" dirty="0">
+                <a:solidFill>
+                  <a:srgbClr val="000000"/>
+                </a:solidFill>
+                <a:latin typeface="Times New Roman"/>
+                <a:cs typeface="Times New Roman"/>
+              </a:rPr>
+              <a:t>Semi-structured schedule (by the researcher) – personal, family, marital, occupational, income, caregiving, and illness details.</a:t>
             </a:r>
           </a:p>
           <a:p>
@@ -2174,7 +2303,7 @@
               <a:buNone/>
             </a:pPr>
             <a:r>
-              <a:rPr lang="en-US" sz="1200" b="1" dirty="0">
+              <a:rPr lang="en-US" sz="2000" b="1" dirty="0">
                 <a:solidFill>
                   <a:srgbClr val="1F3864"/>
                 </a:solidFill>
@@ -2196,14 +2325,14 @@
               <a:buChar char="•"/>
             </a:pPr>
             <a:r>
-              <a:rPr lang="en-US" sz="1200" dirty="0">
-                <a:solidFill>
-                  <a:srgbClr val="000000"/>
-                </a:solidFill>
-                <a:latin typeface="Times New Roman"/>
-                <a:cs typeface="Times New Roman"/>
-              </a:rPr>
-              <a:t>14-item self-report scale; two dimensions – perceived criticism (even items) and emotional over-involvement (odd items); 5-point Likert (almost never → almost always); higher scores = greater EE.</a:t>
+              <a:rPr lang="en-US" sz="1800" dirty="0">
+                <a:solidFill>
+                  <a:srgbClr val="000000"/>
+                </a:solidFill>
+                <a:latin typeface="Times New Roman"/>
+                <a:cs typeface="Times New Roman"/>
+              </a:rPr>
+              <a:t>14-item self-report; two dimensions – perceived criticism (even items) &amp; emotional over-involvement (odd items); 5-point Likert (almost never → almost always); higher = greater EE.</a:t>
             </a:r>
           </a:p>
           <a:p>
@@ -2217,7 +2346,7 @@
               <a:buNone/>
             </a:pPr>
             <a:r>
-              <a:rPr lang="en-US" sz="1200" b="1" dirty="0">
+              <a:rPr lang="en-US" sz="2000" b="1" dirty="0">
                 <a:solidFill>
                   <a:srgbClr val="1F3864"/>
                 </a:solidFill>
@@ -2239,14 +2368,14 @@
               <a:buChar char="•"/>
             </a:pPr>
             <a:r>
-              <a:rPr lang="en-US" sz="1200" dirty="0">
-                <a:solidFill>
-                  <a:srgbClr val="000000"/>
-                </a:solidFill>
-                <a:latin typeface="Times New Roman"/>
-                <a:cs typeface="Times New Roman"/>
-              </a:rPr>
-              <a:t>Brief structured interview for major Axis-I disorders (DSM-IV / ICD-10); used to screen for comorbidity.</a:t>
+              <a:rPr lang="en-US" sz="1800" dirty="0">
+                <a:solidFill>
+                  <a:srgbClr val="000000"/>
+                </a:solidFill>
+                <a:latin typeface="Times New Roman"/>
+                <a:cs typeface="Times New Roman"/>
+              </a:rPr>
+              <a:t>Brief structured interview for major Axis-I disorders (DSM-IV / ICD-10); used to screen out comorbidity.</a:t>
             </a:r>
           </a:p>
         </p:txBody>
@@ -2282,7 +2411,7 @@
         <p:spPr>
           <a:xfrm>
             <a:off x="0" y="0"/>
-            <a:ext cx="12192000" cy="900000"/>
+            <a:ext cx="12192000" cy="1000000"/>
           </a:xfrm>
           <a:prstGeom prst="rect">
             <a:avLst/>
@@ -2304,7 +2433,7 @@
               <a:buNone/>
             </a:pPr>
             <a:r>
-              <a:rPr lang="en-US" sz="1400" b="1" dirty="0">
+              <a:rPr lang="en-US" sz="3000" b="1" dirty="0">
                 <a:solidFill>
                   <a:srgbClr val="FFFFFF"/>
                 </a:solidFill>
@@ -2324,8 +2453,8 @@
         </p:nvSpPr>
         <p:spPr>
           <a:xfrm>
-            <a:off x="685800" y="1050000"/>
-            <a:ext cx="10820400" cy="5600000"/>
+            <a:off x="685800" y="1150000"/>
+            <a:ext cx="10820400" cy="5500000"/>
           </a:xfrm>
           <a:prstGeom prst="rect">
             <a:avLst/>
@@ -2348,7 +2477,7 @@
               <a:buChar char="•"/>
             </a:pPr>
             <a:r>
-              <a:rPr lang="en-US" sz="1200" dirty="0">
+              <a:rPr lang="en-US" sz="1800" dirty="0">
                 <a:solidFill>
                   <a:srgbClr val="000000"/>
                 </a:solidFill>
@@ -2370,58 +2499,58 @@
               <a:buChar char="•"/>
             </a:pPr>
             <a:r>
-              <a:rPr lang="en-US" sz="1200" dirty="0">
-                <a:solidFill>
-                  <a:srgbClr val="000000"/>
-                </a:solidFill>
-                <a:latin typeface="Times New Roman"/>
-                <a:cs typeface="Times New Roman"/>
-              </a:rPr>
-              <a:t>Repeated Measures Analysis of Variance (RMANOVA) – to compare pre-test and post-test scores while simultaneously analysing the intervention and control groups.</a:t>
-            </a:r>
-          </a:p>
-          <a:p>
-            <a:pPr marL="285750" indent="-285750">
-              <a:spcBef>
-                <a:spcPts val="0"/>
-              </a:spcBef>
-              <a:spcAft>
-                <a:spcPts val="300"/>
-              </a:spcAft>
-              <a:buFont typeface="Arial"/>
-              <a:buChar char="•"/>
-            </a:pPr>
-            <a:r>
-              <a:rPr lang="en-US" sz="1200" dirty="0">
-                <a:solidFill>
-                  <a:srgbClr val="000000"/>
-                </a:solidFill>
-                <a:latin typeface="Times New Roman"/>
-                <a:cs typeface="Times New Roman"/>
-              </a:rPr>
-              <a:t>Paired t-test – to compare pre-intervention vs post-intervention scores within each group.</a:t>
-            </a:r>
-          </a:p>
-          <a:p>
-            <a:pPr marL="285750" indent="-285750">
-              <a:spcBef>
-                <a:spcPts val="0"/>
-              </a:spcBef>
-              <a:spcAft>
-                <a:spcPts val="300"/>
-              </a:spcAft>
-              <a:buFont typeface="Arial"/>
-              <a:buChar char="•"/>
-            </a:pPr>
-            <a:r>
-              <a:rPr lang="en-US" sz="1200" dirty="0">
-                <a:solidFill>
-                  <a:srgbClr val="000000"/>
-                </a:solidFill>
-                <a:latin typeface="Times New Roman"/>
-                <a:cs typeface="Times New Roman"/>
-              </a:rPr>
-              <a:t>Chi-square / t-tests – for comparing sociodemographic variables across groups.</a:t>
+              <a:rPr lang="en-US" sz="1800" dirty="0">
+                <a:solidFill>
+                  <a:srgbClr val="000000"/>
+                </a:solidFill>
+                <a:latin typeface="Times New Roman"/>
+                <a:cs typeface="Times New Roman"/>
+              </a:rPr>
+              <a:t>Repeated Measures ANOVA (RMANOVA) – compares pre-test &amp; post-test scores while simultaneously analysing the experimental and control groups (between-within design).</a:t>
+            </a:r>
+          </a:p>
+          <a:p>
+            <a:pPr marL="285750" indent="-285750">
+              <a:spcBef>
+                <a:spcPts val="0"/>
+              </a:spcBef>
+              <a:spcAft>
+                <a:spcPts val="300"/>
+              </a:spcAft>
+              <a:buFont typeface="Arial"/>
+              <a:buChar char="•"/>
+            </a:pPr>
+            <a:r>
+              <a:rPr lang="en-US" sz="1800" dirty="0">
+                <a:solidFill>
+                  <a:srgbClr val="000000"/>
+                </a:solidFill>
+                <a:latin typeface="Times New Roman"/>
+                <a:cs typeface="Times New Roman"/>
+              </a:rPr>
+              <a:t>Paired t-test – compares pre- vs post-intervention scores within each group.</a:t>
+            </a:r>
+          </a:p>
+          <a:p>
+            <a:pPr marL="285750" indent="-285750">
+              <a:spcBef>
+                <a:spcPts val="0"/>
+              </a:spcBef>
+              <a:spcAft>
+                <a:spcPts val="300"/>
+              </a:spcAft>
+              <a:buFont typeface="Arial"/>
+              <a:buChar char="•"/>
+            </a:pPr>
+            <a:r>
+              <a:rPr lang="en-US" sz="1800" dirty="0">
+                <a:solidFill>
+                  <a:srgbClr val="000000"/>
+                </a:solidFill>
+                <a:latin typeface="Times New Roman"/>
+                <a:cs typeface="Times New Roman"/>
+              </a:rPr>
+              <a:t>Chi-square / independent t-tests – compare sociodemographic variables across groups at baseline.</a:t>
             </a:r>
           </a:p>
           <a:p>
@@ -2435,7 +2564,7 @@
               <a:buNone/>
             </a:pPr>
             <a:r>
-              <a:rPr lang="en-US" sz="1200" b="1" dirty="0">
+              <a:rPr lang="en-US" sz="2000" b="1" dirty="0">
                 <a:solidFill>
                   <a:srgbClr val="1F3864"/>
                 </a:solidFill>
@@ -2457,7 +2586,7 @@
               <a:buChar char="•"/>
             </a:pPr>
             <a:r>
-              <a:rPr lang="en-US" sz="1200" dirty="0">
+              <a:rPr lang="en-US" sz="1800" dirty="0">
                 <a:solidFill>
                   <a:srgbClr val="000000"/>
                 </a:solidFill>
@@ -2500,7 +2629,7 @@
         <p:spPr>
           <a:xfrm>
             <a:off x="0" y="0"/>
-            <a:ext cx="12192000" cy="900000"/>
+            <a:ext cx="12192000" cy="1000000"/>
           </a:xfrm>
           <a:prstGeom prst="rect">
             <a:avLst/>
@@ -2522,7 +2651,7 @@
               <a:buNone/>
             </a:pPr>
             <a:r>
-              <a:rPr lang="en-US" sz="1400" b="1" dirty="0">
+              <a:rPr lang="en-US" sz="3000" b="1" dirty="0">
                 <a:solidFill>
                   <a:srgbClr val="FFFFFF"/>
                 </a:solidFill>
@@ -2542,8 +2671,8 @@
         </p:nvSpPr>
         <p:spPr>
           <a:xfrm>
-            <a:off x="685800" y="1050000"/>
-            <a:ext cx="10820400" cy="5600000"/>
+            <a:off x="685800" y="1150000"/>
+            <a:ext cx="10820400" cy="5500000"/>
           </a:xfrm>
           <a:prstGeom prst="rect">
             <a:avLst/>
@@ -2566,139 +2695,95 @@
               <a:buChar char="•"/>
             </a:pPr>
             <a:r>
-              <a:rPr lang="en-US" sz="1200" dirty="0">
-                <a:solidFill>
-                  <a:srgbClr val="000000"/>
-                </a:solidFill>
-                <a:latin typeface="Times New Roman"/>
-                <a:cs typeface="Times New Roman"/>
-              </a:rPr>
-              <a:t>Introduction &amp; background of the study</a:t>
-            </a:r>
-          </a:p>
-          <a:p>
-            <a:pPr marL="285750" indent="-285750">
-              <a:spcBef>
-                <a:spcPts val="0"/>
-              </a:spcBef>
-              <a:spcAft>
-                <a:spcPts val="300"/>
-              </a:spcAft>
-              <a:buFont typeface="Arial"/>
-              <a:buChar char="•"/>
-            </a:pPr>
-            <a:r>
-              <a:rPr lang="en-US" sz="1200" dirty="0">
-                <a:solidFill>
-                  <a:srgbClr val="000000"/>
-                </a:solidFill>
-                <a:latin typeface="Times New Roman"/>
-                <a:cs typeface="Times New Roman"/>
-              </a:rPr>
-              <a:t>Operational definitions of all study variables</a:t>
-            </a:r>
-          </a:p>
-          <a:p>
-            <a:pPr marL="285750" indent="-285750">
-              <a:spcBef>
-                <a:spcPts val="0"/>
-              </a:spcBef>
-              <a:spcAft>
-                <a:spcPts val="300"/>
-              </a:spcAft>
-              <a:buFont typeface="Arial"/>
-              <a:buChar char="•"/>
-            </a:pPr>
-            <a:r>
-              <a:rPr lang="en-US" sz="1200" dirty="0">
-                <a:solidFill>
-                  <a:srgbClr val="000000"/>
-                </a:solidFill>
-                <a:latin typeface="Times New Roman"/>
-                <a:cs typeface="Times New Roman"/>
-              </a:rPr>
-              <a:t>Clinical / research gap</a:t>
-            </a:r>
-          </a:p>
-          <a:p>
-            <a:pPr marL="285750" indent="-285750">
-              <a:spcBef>
-                <a:spcPts val="0"/>
-              </a:spcBef>
-              <a:spcAft>
-                <a:spcPts val="300"/>
-              </a:spcAft>
-              <a:buFont typeface="Arial"/>
-              <a:buChar char="•"/>
-            </a:pPr>
-            <a:r>
-              <a:rPr lang="en-US" sz="1200" dirty="0">
-                <a:solidFill>
-                  <a:srgbClr val="000000"/>
-                </a:solidFill>
-                <a:latin typeface="Times New Roman"/>
-                <a:cs typeface="Times New Roman"/>
-              </a:rPr>
-              <a:t>Rationale of the study</a:t>
-            </a:r>
-          </a:p>
-          <a:p>
-            <a:pPr marL="285750" indent="-285750">
-              <a:spcBef>
-                <a:spcPts val="0"/>
-              </a:spcBef>
-              <a:spcAft>
-                <a:spcPts val="300"/>
-              </a:spcAft>
-              <a:buFont typeface="Arial"/>
-              <a:buChar char="•"/>
-            </a:pPr>
-            <a:r>
-              <a:rPr lang="en-US" sz="1200" dirty="0">
-                <a:solidFill>
-                  <a:srgbClr val="000000"/>
-                </a:solidFill>
-                <a:latin typeface="Times New Roman"/>
-                <a:cs typeface="Times New Roman"/>
-              </a:rPr>
-              <a:t>Aim &amp; objectives</a:t>
-            </a:r>
-          </a:p>
-          <a:p>
-            <a:pPr marL="285750" indent="-285750">
-              <a:spcBef>
-                <a:spcPts val="0"/>
-              </a:spcBef>
-              <a:spcAft>
-                <a:spcPts val="300"/>
-              </a:spcAft>
-              <a:buFont typeface="Arial"/>
-              <a:buChar char="•"/>
-            </a:pPr>
-            <a:r>
-              <a:rPr lang="en-US" sz="1200" dirty="0">
-                <a:solidFill>
-                  <a:srgbClr val="000000"/>
-                </a:solidFill>
-                <a:latin typeface="Times New Roman"/>
-                <a:cs typeface="Times New Roman"/>
-              </a:rPr>
-              <a:t>Hypotheses (research, directional &amp; null)</a:t>
-            </a:r>
-          </a:p>
-          <a:p>
-            <a:pPr marL="285750" indent="-285750">
-              <a:spcBef>
-                <a:spcPts val="0"/>
-              </a:spcBef>
-              <a:spcAft>
-                <a:spcPts val="300"/>
-              </a:spcAft>
-              <a:buFont typeface="Arial"/>
-              <a:buChar char="•"/>
-            </a:pPr>
-            <a:r>
-              <a:rPr lang="en-US" sz="1200" dirty="0">
+              <a:rPr lang="en-US" sz="1800" dirty="0">
+                <a:solidFill>
+                  <a:srgbClr val="000000"/>
+                </a:solidFill>
+                <a:latin typeface="Times New Roman"/>
+                <a:cs typeface="Times New Roman"/>
+              </a:rPr>
+              <a:t>Introduction &amp; background</a:t>
+            </a:r>
+          </a:p>
+          <a:p>
+            <a:pPr marL="285750" indent="-285750">
+              <a:spcBef>
+                <a:spcPts val="0"/>
+              </a:spcBef>
+              <a:spcAft>
+                <a:spcPts val="300"/>
+              </a:spcAft>
+              <a:buFont typeface="Arial"/>
+              <a:buChar char="•"/>
+            </a:pPr>
+            <a:r>
+              <a:rPr lang="en-US" sz="1800" dirty="0">
+                <a:solidFill>
+                  <a:srgbClr val="000000"/>
+                </a:solidFill>
+                <a:latin typeface="Times New Roman"/>
+                <a:cs typeface="Times New Roman"/>
+              </a:rPr>
+              <a:t>Operational definitions of all variables</a:t>
+            </a:r>
+          </a:p>
+          <a:p>
+            <a:pPr marL="285750" indent="-285750">
+              <a:spcBef>
+                <a:spcPts val="0"/>
+              </a:spcBef>
+              <a:spcAft>
+                <a:spcPts val="300"/>
+              </a:spcAft>
+              <a:buFont typeface="Arial"/>
+              <a:buChar char="•"/>
+            </a:pPr>
+            <a:r>
+              <a:rPr lang="en-US" sz="1800" dirty="0">
+                <a:solidFill>
+                  <a:srgbClr val="000000"/>
+                </a:solidFill>
+                <a:latin typeface="Times New Roman"/>
+                <a:cs typeface="Times New Roman"/>
+              </a:rPr>
+              <a:t>Clinical / research gap &amp; rationale</a:t>
+            </a:r>
+          </a:p>
+          <a:p>
+            <a:pPr marL="285750" indent="-285750">
+              <a:spcBef>
+                <a:spcPts val="0"/>
+              </a:spcBef>
+              <a:spcAft>
+                <a:spcPts val="300"/>
+              </a:spcAft>
+              <a:buFont typeface="Arial"/>
+              <a:buChar char="•"/>
+            </a:pPr>
+            <a:r>
+              <a:rPr lang="en-US" sz="1800" dirty="0">
+                <a:solidFill>
+                  <a:srgbClr val="000000"/>
+                </a:solidFill>
+                <a:latin typeface="Times New Roman"/>
+                <a:cs typeface="Times New Roman"/>
+              </a:rPr>
+              <a:t>Aim, objectives &amp; hypotheses (research, directional, null)</a:t>
+            </a:r>
+          </a:p>
+          <a:p>
+            <a:pPr marL="285750" indent="-285750">
+              <a:spcBef>
+                <a:spcPts val="0"/>
+              </a:spcBef>
+              <a:spcAft>
+                <a:spcPts val="300"/>
+              </a:spcAft>
+              <a:buFont typeface="Arial"/>
+              <a:buChar char="•"/>
+            </a:pPr>
+            <a:r>
+              <a:rPr lang="en-US" sz="1800" dirty="0">
                 <a:solidFill>
                   <a:srgbClr val="000000"/>
                 </a:solidFill>
@@ -2720,7 +2805,29 @@
               <a:buChar char="•"/>
             </a:pPr>
             <a:r>
-              <a:rPr lang="en-US" sz="1200" dirty="0">
+              <a:rPr lang="en-US" sz="1800" dirty="0">
+                <a:solidFill>
+                  <a:srgbClr val="000000"/>
+                </a:solidFill>
+                <a:latin typeface="Times New Roman"/>
+                <a:cs typeface="Times New Roman"/>
+              </a:rPr>
+              <a:t>Control (TAU) group vs Experimental group</a:t>
+            </a:r>
+          </a:p>
+          <a:p>
+            <a:pPr marL="285750" indent="-285750">
+              <a:spcBef>
+                <a:spcPts val="0"/>
+              </a:spcBef>
+              <a:spcAft>
+                <a:spcPts val="300"/>
+              </a:spcAft>
+              <a:buFont typeface="Arial"/>
+              <a:buChar char="•"/>
+            </a:pPr>
+            <a:r>
+              <a:rPr lang="en-US" sz="1800" dirty="0">
                 <a:solidFill>
                   <a:srgbClr val="000000"/>
                 </a:solidFill>
@@ -2742,102 +2849,58 @@
               <a:buChar char="•"/>
             </a:pPr>
             <a:r>
-              <a:rPr lang="en-US" sz="1200" dirty="0">
-                <a:solidFill>
-                  <a:srgbClr val="000000"/>
-                </a:solidFill>
-                <a:latin typeface="Times New Roman"/>
-                <a:cs typeface="Times New Roman"/>
-              </a:rPr>
-              <a:t>Outcome measures &amp; assessment tools</a:t>
-            </a:r>
-          </a:p>
-          <a:p>
-            <a:pPr marL="285750" indent="-285750">
-              <a:spcBef>
-                <a:spcPts val="0"/>
-              </a:spcBef>
-              <a:spcAft>
-                <a:spcPts val="300"/>
-              </a:spcAft>
-              <a:buFont typeface="Arial"/>
-              <a:buChar char="•"/>
-            </a:pPr>
-            <a:r>
-              <a:rPr lang="en-US" sz="1200" dirty="0">
-                <a:solidFill>
-                  <a:srgbClr val="000000"/>
-                </a:solidFill>
-                <a:latin typeface="Times New Roman"/>
-                <a:cs typeface="Times New Roman"/>
-              </a:rPr>
-              <a:t>Analysis plan</a:t>
-            </a:r>
-          </a:p>
-          <a:p>
-            <a:pPr marL="285750" indent="-285750">
-              <a:spcBef>
-                <a:spcPts val="0"/>
-              </a:spcBef>
-              <a:spcAft>
-                <a:spcPts val="300"/>
-              </a:spcAft>
-              <a:buFont typeface="Arial"/>
-              <a:buChar char="•"/>
-            </a:pPr>
-            <a:r>
-              <a:rPr lang="en-US" sz="1200" dirty="0">
-                <a:solidFill>
-                  <a:srgbClr val="000000"/>
-                </a:solidFill>
-                <a:latin typeface="Times New Roman"/>
-                <a:cs typeface="Times New Roman"/>
-              </a:rPr>
-              <a:t>Results / findings</a:t>
-            </a:r>
-          </a:p>
-          <a:p>
-            <a:pPr marL="285750" indent="-285750">
-              <a:spcBef>
-                <a:spcPts val="0"/>
-              </a:spcBef>
-              <a:spcAft>
-                <a:spcPts val="300"/>
-              </a:spcAft>
-              <a:buFont typeface="Arial"/>
-              <a:buChar char="•"/>
-            </a:pPr>
-            <a:r>
-              <a:rPr lang="en-US" sz="1200" dirty="0">
-                <a:solidFill>
-                  <a:srgbClr val="000000"/>
-                </a:solidFill>
-                <a:latin typeface="Times New Roman"/>
-                <a:cs typeface="Times New Roman"/>
-              </a:rPr>
-              <a:t>Strengths &amp; limitations</a:t>
-            </a:r>
-          </a:p>
-          <a:p>
-            <a:pPr marL="285750" indent="-285750">
-              <a:spcBef>
-                <a:spcPts val="0"/>
-              </a:spcBef>
-              <a:spcAft>
-                <a:spcPts val="300"/>
-              </a:spcAft>
-              <a:buFont typeface="Arial"/>
-              <a:buChar char="•"/>
-            </a:pPr>
-            <a:r>
-              <a:rPr lang="en-US" sz="1200" dirty="0">
-                <a:solidFill>
-                  <a:srgbClr val="000000"/>
-                </a:solidFill>
-                <a:latin typeface="Times New Roman"/>
-                <a:cs typeface="Times New Roman"/>
-              </a:rPr>
-              <a:t>Conclusion &amp; references</a:t>
+              <a:rPr lang="en-US" sz="1800" dirty="0">
+                <a:solidFill>
+                  <a:srgbClr val="000000"/>
+                </a:solidFill>
+                <a:latin typeface="Times New Roman"/>
+                <a:cs typeface="Times New Roman"/>
+              </a:rPr>
+              <a:t>Outcome measures &amp; tools; analysis plan</a:t>
+            </a:r>
+          </a:p>
+          <a:p>
+            <a:pPr marL="285750" indent="-285750">
+              <a:spcBef>
+                <a:spcPts val="0"/>
+              </a:spcBef>
+              <a:spcAft>
+                <a:spcPts val="300"/>
+              </a:spcAft>
+              <a:buFont typeface="Arial"/>
+              <a:buChar char="•"/>
+            </a:pPr>
+            <a:r>
+              <a:rPr lang="en-US" sz="1800" dirty="0">
+                <a:solidFill>
+                  <a:srgbClr val="000000"/>
+                </a:solidFill>
+                <a:latin typeface="Times New Roman"/>
+                <a:cs typeface="Times New Roman"/>
+              </a:rPr>
+              <a:t>Results / findings &amp; interpretation</a:t>
+            </a:r>
+          </a:p>
+          <a:p>
+            <a:pPr marL="285750" indent="-285750">
+              <a:spcBef>
+                <a:spcPts val="0"/>
+              </a:spcBef>
+              <a:spcAft>
+                <a:spcPts val="300"/>
+              </a:spcAft>
+              <a:buFont typeface="Arial"/>
+              <a:buChar char="•"/>
+            </a:pPr>
+            <a:r>
+              <a:rPr lang="en-US" sz="1800" dirty="0">
+                <a:solidFill>
+                  <a:srgbClr val="000000"/>
+                </a:solidFill>
+                <a:latin typeface="Times New Roman"/>
+                <a:cs typeface="Times New Roman"/>
+              </a:rPr>
+              <a:t>Strengths, limitations, conclusion &amp; references</a:t>
             </a:r>
           </a:p>
         </p:txBody>
@@ -2873,7 +2936,7 @@
         <p:spPr>
           <a:xfrm>
             <a:off x="0" y="0"/>
-            <a:ext cx="12192000" cy="900000"/>
+            <a:ext cx="12192000" cy="1000000"/>
           </a:xfrm>
           <a:prstGeom prst="rect">
             <a:avLst/>
@@ -2895,7 +2958,7 @@
               <a:buNone/>
             </a:pPr>
             <a:r>
-              <a:rPr lang="en-US" sz="1400" b="1" dirty="0">
+              <a:rPr lang="en-US" sz="3000" b="1" dirty="0">
                 <a:solidFill>
                   <a:srgbClr val="FFFFFF"/>
                 </a:solidFill>
@@ -2915,8 +2978,8 @@
         </p:nvSpPr>
         <p:spPr>
           <a:xfrm>
-            <a:off x="685800" y="1050000"/>
-            <a:ext cx="10820400" cy="5600000"/>
+            <a:off x="685800" y="1150000"/>
+            <a:ext cx="10820400" cy="5500000"/>
           </a:xfrm>
           <a:prstGeom prst="rect">
             <a:avLst/>
@@ -2939,7 +3002,7 @@
               <a:buChar char="•"/>
             </a:pPr>
             <a:r>
-              <a:rPr lang="en-US" sz="1200" dirty="0">
+              <a:rPr lang="en-US" sz="1800" dirty="0">
                 <a:solidFill>
                   <a:srgbClr val="000000"/>
                 </a:solidFill>
@@ -2961,80 +3024,80 @@
               <a:buChar char="•"/>
             </a:pPr>
             <a:r>
-              <a:rPr lang="en-US" sz="1200" dirty="0">
-                <a:solidFill>
-                  <a:srgbClr val="000000"/>
-                </a:solidFill>
-                <a:latin typeface="Times New Roman"/>
-                <a:cs typeface="Times New Roman"/>
-              </a:rPr>
-              <a:t>More female caregivers than male in both groups (e.g., 85% female in the intervention group).</a:t>
-            </a:r>
-          </a:p>
-          <a:p>
-            <a:pPr marL="285750" indent="-285750">
-              <a:spcBef>
-                <a:spcPts val="0"/>
-              </a:spcBef>
-              <a:spcAft>
-                <a:spcPts val="300"/>
-              </a:spcAft>
-              <a:buFont typeface="Arial"/>
-              <a:buChar char="•"/>
-            </a:pPr>
-            <a:r>
-              <a:rPr lang="en-US" sz="1200" dirty="0">
-                <a:solidFill>
-                  <a:srgbClr val="000000"/>
-                </a:solidFill>
-                <a:latin typeface="Times New Roman"/>
-                <a:cs typeface="Times New Roman"/>
-              </a:rPr>
-              <a:t>Mothers were the primary caregivers in 40% (control) and 47.5% (intervention) of cases.</a:t>
-            </a:r>
-          </a:p>
-          <a:p>
-            <a:pPr marL="285750" indent="-285750">
-              <a:spcBef>
-                <a:spcPts val="0"/>
-              </a:spcBef>
-              <a:spcAft>
-                <a:spcPts val="300"/>
-              </a:spcAft>
-              <a:buFont typeface="Arial"/>
-              <a:buChar char="•"/>
-            </a:pPr>
-            <a:r>
-              <a:rPr lang="en-US" sz="1200" dirty="0">
-                <a:solidFill>
-                  <a:srgbClr val="000000"/>
-                </a:solidFill>
-                <a:latin typeface="Times New Roman"/>
-                <a:cs typeface="Times New Roman"/>
-              </a:rPr>
-              <a:t>92.5% of caregivers were in daily contact with the patient.</a:t>
-            </a:r>
-          </a:p>
-          <a:p>
-            <a:pPr marL="285750" indent="-285750">
-              <a:spcBef>
-                <a:spcPts val="0"/>
-              </a:spcBef>
-              <a:spcAft>
-                <a:spcPts val="300"/>
-              </a:spcAft>
-              <a:buFont typeface="Arial"/>
-              <a:buChar char="•"/>
-            </a:pPr>
-            <a:r>
-              <a:rPr lang="en-US" sz="1200" dirty="0">
-                <a:solidFill>
-                  <a:srgbClr val="000000"/>
-                </a:solidFill>
-                <a:latin typeface="Times New Roman"/>
-                <a:cs typeface="Times New Roman"/>
-              </a:rPr>
-              <a:t>Majority of patients were female (62.5% control; 80% intervention).</a:t>
+              <a:rPr lang="en-US" sz="1800" dirty="0">
+                <a:solidFill>
+                  <a:srgbClr val="000000"/>
+                </a:solidFill>
+                <a:latin typeface="Times New Roman"/>
+                <a:cs typeface="Times New Roman"/>
+              </a:rPr>
+              <a:t>More female caregivers than male in both groups (up to 85% female in the experimental group).</a:t>
+            </a:r>
+          </a:p>
+          <a:p>
+            <a:pPr marL="285750" indent="-285750">
+              <a:spcBef>
+                <a:spcPts val="0"/>
+              </a:spcBef>
+              <a:spcAft>
+                <a:spcPts val="300"/>
+              </a:spcAft>
+              <a:buFont typeface="Arial"/>
+              <a:buChar char="•"/>
+            </a:pPr>
+            <a:r>
+              <a:rPr lang="en-US" sz="1800" dirty="0">
+                <a:solidFill>
+                  <a:srgbClr val="000000"/>
+                </a:solidFill>
+                <a:latin typeface="Times New Roman"/>
+                <a:cs typeface="Times New Roman"/>
+              </a:rPr>
+              <a:t>Mothers were the primary caregivers in 40% (control) and 47.5% (experimental) of cases.</a:t>
+            </a:r>
+          </a:p>
+          <a:p>
+            <a:pPr marL="285750" indent="-285750">
+              <a:spcBef>
+                <a:spcPts val="0"/>
+              </a:spcBef>
+              <a:spcAft>
+                <a:spcPts val="300"/>
+              </a:spcAft>
+              <a:buFont typeface="Arial"/>
+              <a:buChar char="•"/>
+            </a:pPr>
+            <a:r>
+              <a:rPr lang="en-US" sz="1800" dirty="0">
+                <a:solidFill>
+                  <a:srgbClr val="000000"/>
+                </a:solidFill>
+                <a:latin typeface="Times New Roman"/>
+                <a:cs typeface="Times New Roman"/>
+              </a:rPr>
+              <a:t>92.5% of caregivers were in daily contact with the patient – high face-to-face contact.</a:t>
+            </a:r>
+          </a:p>
+          <a:p>
+            <a:pPr marL="285750" indent="-285750">
+              <a:spcBef>
+                <a:spcPts val="0"/>
+              </a:spcBef>
+              <a:spcAft>
+                <a:spcPts val="300"/>
+              </a:spcAft>
+              <a:buFont typeface="Arial"/>
+              <a:buChar char="•"/>
+            </a:pPr>
+            <a:r>
+              <a:rPr lang="en-US" sz="1800" dirty="0">
+                <a:solidFill>
+                  <a:srgbClr val="000000"/>
+                </a:solidFill>
+                <a:latin typeface="Times New Roman"/>
+                <a:cs typeface="Times New Roman"/>
+              </a:rPr>
+              <a:t>Majority of patients were female (62.5% control; 80% experimental); mean patient age ≈31 years.</a:t>
             </a:r>
           </a:p>
         </p:txBody>
@@ -3070,7 +3133,7 @@
         <p:spPr>
           <a:xfrm>
             <a:off x="0" y="0"/>
-            <a:ext cx="12192000" cy="900000"/>
+            <a:ext cx="12192000" cy="1000000"/>
           </a:xfrm>
           <a:prstGeom prst="rect">
             <a:avLst/>
@@ -3092,7 +3155,7 @@
               <a:buNone/>
             </a:pPr>
             <a:r>
-              <a:rPr lang="en-US" sz="1400" b="1" dirty="0">
+              <a:rPr lang="en-US" sz="3000" b="1" dirty="0">
                 <a:solidFill>
                   <a:srgbClr val="FFFFFF"/>
                 </a:solidFill>
@@ -3112,8 +3175,8 @@
         </p:nvSpPr>
         <p:spPr>
           <a:xfrm>
-            <a:off x="685800" y="1050000"/>
-            <a:ext cx="10820400" cy="5600000"/>
+            <a:off x="685800" y="1150000"/>
+            <a:ext cx="10820400" cy="5500000"/>
           </a:xfrm>
           <a:prstGeom prst="rect">
             <a:avLst/>
@@ -3136,14 +3199,14 @@
               <a:buChar char="•"/>
             </a:pPr>
             <a:r>
-              <a:rPr lang="en-US" sz="1200" dirty="0">
-                <a:solidFill>
-                  <a:srgbClr val="000000"/>
-                </a:solidFill>
-                <a:latin typeface="Times New Roman"/>
-                <a:cs typeface="Times New Roman"/>
-              </a:rPr>
-              <a:t>EE increased in the control group from pre-test to post-test:</a:t>
+              <a:rPr lang="en-US" sz="1800" dirty="0">
+                <a:solidFill>
+                  <a:srgbClr val="000000"/>
+                </a:solidFill>
+                <a:latin typeface="Times New Roman"/>
+                <a:cs typeface="Times New Roman"/>
+              </a:rPr>
+              <a:t>In the control group, EE INCREASED from pre-test to post-test (no intervention):</a:t>
             </a:r>
           </a:p>
           <a:p>
@@ -3158,14 +3221,14 @@
               <a:buChar char="–"/>
             </a:pPr>
             <a:r>
-              <a:rPr lang="en-US" sz="1200" i="1" dirty="0">
+              <a:rPr lang="en-US" sz="1800" i="1" dirty="0">
                 <a:solidFill>
                   <a:srgbClr val="333333"/>
                 </a:solidFill>
                 <a:latin typeface="Times New Roman"/>
                 <a:cs typeface="Times New Roman"/>
               </a:rPr>
-              <a:t>Total EE: pre-test Mean = 52.47 (SD 4.95) → post-test Mean = 56.72 (SD 4.52).</a:t>
+              <a:t>Total EE: pre 52.47 (SD 4.95) → post 56.72 (SD 4.52); t = −3.68; P = 0.001.</a:t>
             </a:r>
           </a:p>
           <a:p>
@@ -3180,14 +3243,14 @@
               <a:buChar char="–"/>
             </a:pPr>
             <a:r>
-              <a:rPr lang="en-US" sz="1200" i="1" dirty="0">
+              <a:rPr lang="en-US" sz="1800" i="1" dirty="0">
                 <a:solidFill>
                   <a:srgbClr val="333333"/>
                 </a:solidFill>
                 <a:latin typeface="Times New Roman"/>
                 <a:cs typeface="Times New Roman"/>
               </a:rPr>
-              <a:t>Criticality: pre 26.13 → post 28.28 (t = −3.47; P = 0.002).</a:t>
+              <a:t>Criticality: pre 26.13 → post 28.28; t = −3.47; P = 0.002.</a:t>
             </a:r>
           </a:p>
           <a:p>
@@ -3202,36 +3265,36 @@
               <a:buChar char="–"/>
             </a:pPr>
             <a:r>
-              <a:rPr lang="en-US" sz="1200" i="1" dirty="0">
+              <a:rPr lang="en-US" sz="1800" i="1" dirty="0">
                 <a:solidFill>
                   <a:srgbClr val="333333"/>
                 </a:solidFill>
                 <a:latin typeface="Times New Roman"/>
                 <a:cs typeface="Times New Roman"/>
               </a:rPr>
-              <a:t>Emotional over-involvement: pre 26.34 → post 28.44 (t = −3.25; P = 0.003).</a:t>
-            </a:r>
-          </a:p>
-          <a:p>
-            <a:pPr marL="285750" indent="-285750">
-              <a:spcBef>
-                <a:spcPts val="0"/>
-              </a:spcBef>
-              <a:spcAft>
-                <a:spcPts val="300"/>
-              </a:spcAft>
-              <a:buFont typeface="Arial"/>
-              <a:buChar char="•"/>
-            </a:pPr>
-            <a:r>
-              <a:rPr lang="en-US" sz="1200" dirty="0">
-                <a:solidFill>
-                  <a:srgbClr val="000000"/>
-                </a:solidFill>
-                <a:latin typeface="Times New Roman"/>
-                <a:cs typeface="Times New Roman"/>
-              </a:rPr>
-              <a:t>Paired t-test for total EE was significant (t = −3.68; P = 0.001) – i.e., without intervention, EE tended to rise.</a:t>
+              <a:t>Emotional over-involvement: pre 26.34 → post 28.44; t = −3.25; P = 0.003.</a:t>
+            </a:r>
+          </a:p>
+          <a:p>
+            <a:pPr marL="285750" indent="-285750">
+              <a:spcBef>
+                <a:spcPts val="0"/>
+              </a:spcBef>
+              <a:spcAft>
+                <a:spcPts val="300"/>
+              </a:spcAft>
+              <a:buFont typeface="Arial"/>
+              <a:buChar char="•"/>
+            </a:pPr>
+            <a:r>
+              <a:rPr lang="en-US" sz="1800" dirty="0">
+                <a:solidFill>
+                  <a:srgbClr val="000000"/>
+                </a:solidFill>
+                <a:latin typeface="Times New Roman"/>
+                <a:cs typeface="Times New Roman"/>
+              </a:rPr>
+              <a:t>Interpretation: without a structured intervention, caregiver EE tended to WORSEN over time.</a:t>
             </a:r>
           </a:p>
         </p:txBody>
@@ -3267,7 +3330,7 @@
         <p:spPr>
           <a:xfrm>
             <a:off x="0" y="0"/>
-            <a:ext cx="12192000" cy="900000"/>
+            <a:ext cx="12192000" cy="1000000"/>
           </a:xfrm>
           <a:prstGeom prst="rect">
             <a:avLst/>
@@ -3289,14 +3352,14 @@
               <a:buNone/>
             </a:pPr>
             <a:r>
-              <a:rPr lang="en-US" sz="1400" b="1" dirty="0">
+              <a:rPr lang="en-US" sz="3000" b="1" dirty="0">
                 <a:solidFill>
                   <a:srgbClr val="FFFFFF"/>
                 </a:solidFill>
                 <a:latin typeface="Times New Roman"/>
                 <a:cs typeface="Times New Roman"/>
               </a:rPr>
-              <a:t>Findings (3): Intervention Group</a:t>
+              <a:t>Findings (3): Experimental Group</a:t>
             </a:r>
           </a:p>
         </p:txBody>
@@ -3309,8 +3372,8 @@
         </p:nvSpPr>
         <p:spPr>
           <a:xfrm>
-            <a:off x="685800" y="1050000"/>
-            <a:ext cx="10820400" cy="5600000"/>
+            <a:off x="685800" y="1150000"/>
+            <a:ext cx="10820400" cy="5500000"/>
           </a:xfrm>
           <a:prstGeom prst="rect">
             <a:avLst/>
@@ -3333,14 +3396,14 @@
               <a:buChar char="•"/>
             </a:pPr>
             <a:r>
-              <a:rPr lang="en-US" sz="1200" dirty="0">
-                <a:solidFill>
-                  <a:srgbClr val="000000"/>
-                </a:solidFill>
-                <a:latin typeface="Times New Roman"/>
-                <a:cs typeface="Times New Roman"/>
-              </a:rPr>
-              <a:t>Significant reductions in both EE domains after the intervention:</a:t>
+              <a:rPr lang="en-US" sz="1800" dirty="0">
+                <a:solidFill>
+                  <a:srgbClr val="000000"/>
+                </a:solidFill>
+                <a:latin typeface="Times New Roman"/>
+                <a:cs typeface="Times New Roman"/>
+              </a:rPr>
+              <a:t>In the experimental group, EE DECREASED significantly after the intervention:</a:t>
             </a:r>
           </a:p>
           <a:p>
@@ -3355,7 +3418,7 @@
               <a:buChar char="–"/>
             </a:pPr>
             <a:r>
-              <a:rPr lang="en-US" sz="1200" i="1" dirty="0">
+              <a:rPr lang="en-US" sz="1800" i="1" dirty="0">
                 <a:solidFill>
                   <a:srgbClr val="333333"/>
                 </a:solidFill>
@@ -3377,7 +3440,7 @@
               <a:buChar char="–"/>
             </a:pPr>
             <a:r>
-              <a:rPr lang="en-US" sz="1200" i="1" dirty="0">
+              <a:rPr lang="en-US" sz="1800" i="1" dirty="0">
                 <a:solidFill>
                   <a:srgbClr val="333333"/>
                 </a:solidFill>
@@ -3399,7 +3462,7 @@
               <a:buChar char="–"/>
             </a:pPr>
             <a:r>
-              <a:rPr lang="en-US" sz="1200" i="1" dirty="0">
+              <a:rPr lang="en-US" sz="1800" i="1" dirty="0">
                 <a:solidFill>
                   <a:srgbClr val="333333"/>
                 </a:solidFill>
@@ -3420,36 +3483,36 @@
               <a:buNone/>
             </a:pPr>
             <a:r>
-              <a:rPr lang="en-US" sz="1200" b="1" dirty="0">
+              <a:rPr lang="en-US" sz="2000" b="1" dirty="0">
                 <a:solidFill>
                   <a:srgbClr val="1F3864"/>
                 </a:solidFill>
                 <a:latin typeface="Times New Roman"/>
                 <a:cs typeface="Times New Roman"/>
               </a:rPr>
-              <a:t>Overall result</a:t>
-            </a:r>
-          </a:p>
-          <a:p>
-            <a:pPr marL="285750" indent="-285750">
-              <a:spcBef>
-                <a:spcPts val="0"/>
-              </a:spcBef>
-              <a:spcAft>
-                <a:spcPts val="300"/>
-              </a:spcAft>
-              <a:buFont typeface="Arial"/>
-              <a:buChar char="•"/>
-            </a:pPr>
-            <a:r>
-              <a:rPr lang="en-US" sz="1200" dirty="0">
-                <a:solidFill>
-                  <a:srgbClr val="000000"/>
-                </a:solidFill>
-                <a:latin typeface="Times New Roman"/>
-                <a:cs typeface="Times New Roman"/>
-              </a:rPr>
-              <a:t>RMANOVA: F = 35.892; P = 0.001 – a significant reduction in EE for the intervention group compared with the control (TAU) group.</a:t>
+              <a:t>Overall between-group result</a:t>
+            </a:r>
+          </a:p>
+          <a:p>
+            <a:pPr marL="285750" indent="-285750">
+              <a:spcBef>
+                <a:spcPts val="0"/>
+              </a:spcBef>
+              <a:spcAft>
+                <a:spcPts val="300"/>
+              </a:spcAft>
+              <a:buFont typeface="Arial"/>
+              <a:buChar char="•"/>
+            </a:pPr>
+            <a:r>
+              <a:rPr lang="en-US" sz="1800" dirty="0">
+                <a:solidFill>
+                  <a:srgbClr val="000000"/>
+                </a:solidFill>
+                <a:latin typeface="Times New Roman"/>
+                <a:cs typeface="Times New Roman"/>
+              </a:rPr>
+              <a:t>RMANOVA: F = 35.892; P = 0.001 – a significant reduction in EE for the experimental group compared with the control (TAU) group.</a:t>
             </a:r>
           </a:p>
         </p:txBody>
@@ -3485,7 +3548,7 @@
         <p:spPr>
           <a:xfrm>
             <a:off x="0" y="0"/>
-            <a:ext cx="12192000" cy="900000"/>
+            <a:ext cx="12192000" cy="1000000"/>
           </a:xfrm>
           <a:prstGeom prst="rect">
             <a:avLst/>
@@ -3507,7 +3570,7 @@
               <a:buNone/>
             </a:pPr>
             <a:r>
-              <a:rPr lang="en-US" sz="1400" b="1" dirty="0">
+              <a:rPr lang="en-US" sz="3000" b="1" dirty="0">
                 <a:solidFill>
                   <a:srgbClr val="FFFFFF"/>
                 </a:solidFill>
@@ -3527,8 +3590,8 @@
         </p:nvSpPr>
         <p:spPr>
           <a:xfrm>
-            <a:off x="685800" y="1050000"/>
-            <a:ext cx="10820400" cy="5600000"/>
+            <a:off x="685800" y="1150000"/>
+            <a:ext cx="10820400" cy="5500000"/>
           </a:xfrm>
           <a:prstGeom prst="rect">
             <a:avLst/>
@@ -3551,80 +3614,80 @@
               <a:buChar char="•"/>
             </a:pPr>
             <a:r>
-              <a:rPr lang="en-US" sz="1200" dirty="0">
-                <a:solidFill>
-                  <a:srgbClr val="000000"/>
-                </a:solidFill>
-                <a:latin typeface="Times New Roman"/>
-                <a:cs typeface="Times New Roman"/>
-              </a:rPr>
-              <a:t>The family intervention significantly reduced negative EE (criticism and over-involvement) in caregivers.</a:t>
-            </a:r>
-          </a:p>
-          <a:p>
-            <a:pPr marL="285750" indent="-285750">
-              <a:spcBef>
-                <a:spcPts val="0"/>
-              </a:spcBef>
-              <a:spcAft>
-                <a:spcPts val="300"/>
-              </a:spcAft>
-              <a:buFont typeface="Arial"/>
-              <a:buChar char="•"/>
-            </a:pPr>
-            <a:r>
-              <a:rPr lang="en-US" sz="1200" dirty="0">
-                <a:solidFill>
-                  <a:srgbClr val="000000"/>
-                </a:solidFill>
-                <a:latin typeface="Times New Roman"/>
-                <a:cs typeface="Times New Roman"/>
-              </a:rPr>
-              <a:t>Reducing caregivers’ excessive face-to-face contact and over-involvement, and helping them overcome guilt, contributed to lower EE.</a:t>
-            </a:r>
-          </a:p>
-          <a:p>
-            <a:pPr marL="285750" indent="-285750">
-              <a:spcBef>
-                <a:spcPts val="0"/>
-              </a:spcBef>
-              <a:spcAft>
-                <a:spcPts val="300"/>
-              </a:spcAft>
-              <a:buFont typeface="Arial"/>
-              <a:buChar char="•"/>
-            </a:pPr>
-            <a:r>
-              <a:rPr lang="en-US" sz="1200" dirty="0">
-                <a:solidFill>
-                  <a:srgbClr val="000000"/>
-                </a:solidFill>
-                <a:latin typeface="Times New Roman"/>
-                <a:cs typeface="Times New Roman"/>
-              </a:rPr>
-              <a:t>Skill-development (role plays, video clippings, participatory methods, handouts) proved more effective than routine support-group / psychoeducation formats.</a:t>
-            </a:r>
-          </a:p>
-          <a:p>
-            <a:pPr marL="285750" indent="-285750">
-              <a:spcBef>
-                <a:spcPts val="0"/>
-              </a:spcBef>
-              <a:spcAft>
-                <a:spcPts val="300"/>
-              </a:spcAft>
-              <a:buFont typeface="Arial"/>
-              <a:buChar char="•"/>
-            </a:pPr>
-            <a:r>
-              <a:rPr lang="en-US" sz="1200" dirty="0">
-                <a:solidFill>
-                  <a:srgbClr val="000000"/>
-                </a:solidFill>
-                <a:latin typeface="Times New Roman"/>
-                <a:cs typeface="Times New Roman"/>
-              </a:rPr>
-              <a:t>Findings corroborate Indian (Bengaluru, Chennai) and Western studies (e.g., Linszen et al., 1997; Miklowitz &amp; Goldstein, 1984).</a:t>
+              <a:rPr lang="en-US" sz="1800" dirty="0">
+                <a:solidFill>
+                  <a:srgbClr val="000000"/>
+                </a:solidFill>
+                <a:latin typeface="Times New Roman"/>
+                <a:cs typeface="Times New Roman"/>
+              </a:rPr>
+              <a:t>The family intervention significantly reduced negative EE (criticism &amp; over-involvement) in caregivers.</a:t>
+            </a:r>
+          </a:p>
+          <a:p>
+            <a:pPr marL="285750" indent="-285750">
+              <a:spcBef>
+                <a:spcPts val="0"/>
+              </a:spcBef>
+              <a:spcAft>
+                <a:spcPts val="300"/>
+              </a:spcAft>
+              <a:buFont typeface="Arial"/>
+              <a:buChar char="•"/>
+            </a:pPr>
+            <a:r>
+              <a:rPr lang="en-US" sz="1800" dirty="0">
+                <a:solidFill>
+                  <a:srgbClr val="000000"/>
+                </a:solidFill>
+                <a:latin typeface="Times New Roman"/>
+                <a:cs typeface="Times New Roman"/>
+              </a:rPr>
+              <a:t>Reducing excessive face-to-face contact and over-involvement, and helping caregivers overcome guilt, contributed to lower EE.</a:t>
+            </a:r>
+          </a:p>
+          <a:p>
+            <a:pPr marL="285750" indent="-285750">
+              <a:spcBef>
+                <a:spcPts val="0"/>
+              </a:spcBef>
+              <a:spcAft>
+                <a:spcPts val="300"/>
+              </a:spcAft>
+              <a:buFont typeface="Arial"/>
+              <a:buChar char="•"/>
+            </a:pPr>
+            <a:r>
+              <a:rPr lang="en-US" sz="1800" dirty="0">
+                <a:solidFill>
+                  <a:srgbClr val="000000"/>
+                </a:solidFill>
+                <a:latin typeface="Times New Roman"/>
+                <a:cs typeface="Times New Roman"/>
+              </a:rPr>
+              <a:t>A skill-development approach (role plays, video clippings, participatory methods, handouts) proved more effective than routine support-group / general psychoeducation formats.</a:t>
+            </a:r>
+          </a:p>
+          <a:p>
+            <a:pPr marL="285750" indent="-285750">
+              <a:spcBef>
+                <a:spcPts val="0"/>
+              </a:spcBef>
+              <a:spcAft>
+                <a:spcPts val="300"/>
+              </a:spcAft>
+              <a:buFont typeface="Arial"/>
+              <a:buChar char="•"/>
+            </a:pPr>
+            <a:r>
+              <a:rPr lang="en-US" sz="1800" dirty="0">
+                <a:solidFill>
+                  <a:srgbClr val="000000"/>
+                </a:solidFill>
+                <a:latin typeface="Times New Roman"/>
+                <a:cs typeface="Times New Roman"/>
+              </a:rPr>
+              <a:t>Findings corroborate Indian (Bengaluru, Chennai) and Western studies (Linszen et al., 1997; Miklowitz &amp; Goldstein, 1984).</a:t>
             </a:r>
           </a:p>
           <a:p>
@@ -3639,14 +3702,14 @@
               <a:buChar char="–"/>
             </a:pPr>
             <a:r>
-              <a:rPr lang="en-US" sz="1200" i="1" dirty="0">
+              <a:rPr lang="en-US" sz="1800" i="1" dirty="0">
                 <a:solidFill>
                   <a:srgbClr val="333333"/>
                 </a:solidFill>
                 <a:latin typeface="Times New Roman"/>
                 <a:cs typeface="Times New Roman"/>
               </a:rPr>
-              <a:t>Caveat: the FEICS measures only negative EE, not positive EE such as warmth.</a:t>
+              <a:t>Caveat: FEICS measures only negative EE, not positive EE such as warmth.</a:t>
             </a:r>
           </a:p>
         </p:txBody>
@@ -3682,7 +3745,7 @@
         <p:spPr>
           <a:xfrm>
             <a:off x="0" y="0"/>
-            <a:ext cx="12192000" cy="900000"/>
+            <a:ext cx="12192000" cy="1000000"/>
           </a:xfrm>
           <a:prstGeom prst="rect">
             <a:avLst/>
@@ -3704,7 +3767,7 @@
               <a:buNone/>
             </a:pPr>
             <a:r>
-              <a:rPr lang="en-US" sz="1400" b="1" dirty="0">
+              <a:rPr lang="en-US" sz="3000" b="1" dirty="0">
                 <a:solidFill>
                   <a:srgbClr val="FFFFFF"/>
                 </a:solidFill>
@@ -3724,8 +3787,8 @@
         </p:nvSpPr>
         <p:spPr>
           <a:xfrm>
-            <a:off x="685800" y="1050000"/>
-            <a:ext cx="10820400" cy="5600000"/>
+            <a:off x="685800" y="1150000"/>
+            <a:ext cx="10820400" cy="5500000"/>
           </a:xfrm>
           <a:prstGeom prst="rect">
             <a:avLst/>
@@ -3747,7 +3810,7 @@
               <a:buNone/>
             </a:pPr>
             <a:r>
-              <a:rPr lang="en-US" sz="1200" b="1" dirty="0">
+              <a:rPr lang="en-US" sz="2000" b="1" dirty="0">
                 <a:solidFill>
                   <a:srgbClr val="1F3864"/>
                 </a:solidFill>
@@ -3769,7 +3832,7 @@
               <a:buChar char="•"/>
             </a:pPr>
             <a:r>
-              <a:rPr lang="en-US" sz="1200" dirty="0">
+              <a:rPr lang="en-US" sz="1800" dirty="0">
                 <a:solidFill>
                   <a:srgbClr val="000000"/>
                 </a:solidFill>
@@ -3791,7 +3854,7 @@
               <a:buChar char="•"/>
             </a:pPr>
             <a:r>
-              <a:rPr lang="en-US" sz="1200" dirty="0">
+              <a:rPr lang="en-US" sz="1800" dirty="0">
                 <a:solidFill>
                   <a:srgbClr val="000000"/>
                 </a:solidFill>
@@ -3813,14 +3876,14 @@
               <a:buChar char="•"/>
             </a:pPr>
             <a:r>
-              <a:rPr lang="en-US" sz="1200" dirty="0">
-                <a:solidFill>
-                  <a:srgbClr val="000000"/>
-                </a:solidFill>
-                <a:latin typeface="Times New Roman"/>
-                <a:cs typeface="Times New Roman"/>
-              </a:rPr>
-              <a:t>Statistically significant, clinically meaningful reduction in EE.</a:t>
+              <a:rPr lang="en-US" sz="1800" dirty="0">
+                <a:solidFill>
+                  <a:srgbClr val="000000"/>
+                </a:solidFill>
+                <a:latin typeface="Times New Roman"/>
+                <a:cs typeface="Times New Roman"/>
+              </a:rPr>
+              <a:t>Statistically significant and clinically meaningful reduction in EE.</a:t>
             </a:r>
           </a:p>
           <a:p>
@@ -3834,7 +3897,7 @@
               <a:buNone/>
             </a:pPr>
             <a:r>
-              <a:rPr lang="en-US" sz="1200" b="1" dirty="0">
+              <a:rPr lang="en-US" sz="2000" b="1" dirty="0">
                 <a:solidFill>
                   <a:srgbClr val="1F3864"/>
                 </a:solidFill>
@@ -3856,7 +3919,7 @@
               <a:buChar char="•"/>
             </a:pPr>
             <a:r>
-              <a:rPr lang="en-US" sz="1200" dirty="0">
+              <a:rPr lang="en-US" sz="1800" dirty="0">
                 <a:solidFill>
                   <a:srgbClr val="000000"/>
                 </a:solidFill>
@@ -3878,7 +3941,7 @@
               <a:buChar char="•"/>
             </a:pPr>
             <a:r>
-              <a:rPr lang="en-US" sz="1200" dirty="0">
+              <a:rPr lang="en-US" sz="1800" dirty="0">
                 <a:solidFill>
                   <a:srgbClr val="000000"/>
                 </a:solidFill>
@@ -3900,14 +3963,14 @@
               <a:buChar char="•"/>
             </a:pPr>
             <a:r>
-              <a:rPr lang="en-US" sz="1200" dirty="0">
-                <a:solidFill>
-                  <a:srgbClr val="000000"/>
-                </a:solidFill>
-                <a:latin typeface="Times New Roman"/>
-                <a:cs typeface="Times New Roman"/>
-              </a:rPr>
-              <a:t>Absence of a double-blind technique – which would have better controlled biases in assessment and delivery of the intervention.</a:t>
+              <a:rPr lang="en-US" sz="1800" dirty="0">
+                <a:solidFill>
+                  <a:srgbClr val="000000"/>
+                </a:solidFill>
+                <a:latin typeface="Times New Roman"/>
+                <a:cs typeface="Times New Roman"/>
+              </a:rPr>
+              <a:t>No double-blind technique – which would have better controlled assessment and delivery biases.</a:t>
             </a:r>
           </a:p>
         </p:txBody>
@@ -3943,7 +4006,7 @@
         <p:spPr>
           <a:xfrm>
             <a:off x="0" y="0"/>
-            <a:ext cx="12192000" cy="900000"/>
+            <a:ext cx="12192000" cy="1000000"/>
           </a:xfrm>
           <a:prstGeom prst="rect">
             <a:avLst/>
@@ -3965,7 +4028,7 @@
               <a:buNone/>
             </a:pPr>
             <a:r>
-              <a:rPr lang="en-US" sz="1400" b="1" dirty="0">
+              <a:rPr lang="en-US" sz="3000" b="1" dirty="0">
                 <a:solidFill>
                   <a:srgbClr val="FFFFFF"/>
                 </a:solidFill>
@@ -3985,8 +4048,8 @@
         </p:nvSpPr>
         <p:spPr>
           <a:xfrm>
-            <a:off x="685800" y="1050000"/>
-            <a:ext cx="10820400" cy="5600000"/>
+            <a:off x="685800" y="1150000"/>
+            <a:ext cx="10820400" cy="5500000"/>
           </a:xfrm>
           <a:prstGeom prst="rect">
             <a:avLst/>
@@ -4009,51 +4072,51 @@
               <a:buChar char="•"/>
             </a:pPr>
             <a:r>
-              <a:rPr lang="en-US" sz="1200" dirty="0">
-                <a:solidFill>
-                  <a:srgbClr val="000000"/>
-                </a:solidFill>
-                <a:latin typeface="Times New Roman"/>
-                <a:cs typeface="Times New Roman"/>
-              </a:rPr>
-              <a:t>A family-based intervention – comprising psychoeducation, communication training, and stress management for caregivers of persons living with schizophrenia – was effective.</a:t>
-            </a:r>
-          </a:p>
-          <a:p>
-            <a:pPr marL="285750" indent="-285750">
-              <a:spcBef>
-                <a:spcPts val="0"/>
-              </a:spcBef>
-              <a:spcAft>
-                <a:spcPts val="300"/>
-              </a:spcAft>
-              <a:buFont typeface="Arial"/>
-              <a:buChar char="•"/>
-            </a:pPr>
-            <a:r>
-              <a:rPr lang="en-US" sz="1200" dirty="0">
-                <a:solidFill>
-                  <a:srgbClr val="000000"/>
-                </a:solidFill>
-                <a:latin typeface="Times New Roman"/>
-                <a:cs typeface="Times New Roman"/>
-              </a:rPr>
-              <a:t>It produced an overall, statistically significant decrease in the level of Expressed Emotion among caregivers.</a:t>
-            </a:r>
-          </a:p>
-          <a:p>
-            <a:pPr marL="285750" indent="-285750">
-              <a:spcBef>
-                <a:spcPts val="0"/>
-              </a:spcBef>
-              <a:spcAft>
-                <a:spcPts val="300"/>
-              </a:spcAft>
-              <a:buFont typeface="Arial"/>
-              <a:buChar char="•"/>
-            </a:pPr>
-            <a:r>
-              <a:rPr lang="en-US" sz="1200" dirty="0">
+              <a:rPr lang="en-US" sz="1800" dirty="0">
+                <a:solidFill>
+                  <a:srgbClr val="000000"/>
+                </a:solidFill>
+                <a:latin typeface="Times New Roman"/>
+                <a:cs typeface="Times New Roman"/>
+              </a:rPr>
+              <a:t>A family-based intervention – psychoeducation, communication training, and stress management for caregivers of persons living with schizophrenia – was effective.</a:t>
+            </a:r>
+          </a:p>
+          <a:p>
+            <a:pPr marL="285750" indent="-285750">
+              <a:spcBef>
+                <a:spcPts val="0"/>
+              </a:spcBef>
+              <a:spcAft>
+                <a:spcPts val="300"/>
+              </a:spcAft>
+              <a:buFont typeface="Arial"/>
+              <a:buChar char="•"/>
+            </a:pPr>
+            <a:r>
+              <a:rPr lang="en-US" sz="1800" dirty="0">
+                <a:solidFill>
+                  <a:srgbClr val="000000"/>
+                </a:solidFill>
+                <a:latin typeface="Times New Roman"/>
+                <a:cs typeface="Times New Roman"/>
+              </a:rPr>
+              <a:t>It produced an overall, statistically significant decrease in Expressed Emotion among caregivers, while EE rose in the untreated control group.</a:t>
+            </a:r>
+          </a:p>
+          <a:p>
+            <a:pPr marL="285750" indent="-285750">
+              <a:spcBef>
+                <a:spcPts val="0"/>
+              </a:spcBef>
+              <a:spcAft>
+                <a:spcPts val="300"/>
+              </a:spcAft>
+              <a:buFont typeface="Arial"/>
+              <a:buChar char="•"/>
+            </a:pPr>
+            <a:r>
+              <a:rPr lang="en-US" sz="1800" dirty="0">
                 <a:solidFill>
                   <a:srgbClr val="000000"/>
                 </a:solidFill>
@@ -4096,7 +4159,7 @@
         <p:spPr>
           <a:xfrm>
             <a:off x="0" y="0"/>
-            <a:ext cx="12192000" cy="900000"/>
+            <a:ext cx="12192000" cy="1000000"/>
           </a:xfrm>
           <a:prstGeom prst="rect">
             <a:avLst/>
@@ -4118,7 +4181,7 @@
               <a:buNone/>
             </a:pPr>
             <a:r>
-              <a:rPr lang="en-US" sz="1400" b="1" dirty="0">
+              <a:rPr lang="en-US" sz="3000" b="1" dirty="0">
                 <a:solidFill>
                   <a:srgbClr val="FFFFFF"/>
                 </a:solidFill>
@@ -4138,8 +4201,8 @@
         </p:nvSpPr>
         <p:spPr>
           <a:xfrm>
-            <a:off x="685800" y="1050000"/>
-            <a:ext cx="10820400" cy="5600000"/>
+            <a:off x="685800" y="1150000"/>
+            <a:ext cx="10820400" cy="5500000"/>
           </a:xfrm>
           <a:prstGeom prst="rect">
             <a:avLst/>
@@ -4162,7 +4225,7 @@
               <a:buChar char="•"/>
             </a:pPr>
             <a:r>
-              <a:rPr lang="en-US" sz="1200" dirty="0">
+              <a:rPr lang="en-US" sz="1800" dirty="0">
                 <a:solidFill>
                   <a:srgbClr val="000000"/>
                 </a:solidFill>
@@ -4184,7 +4247,7 @@
               <a:buChar char="•"/>
             </a:pPr>
             <a:r>
-              <a:rPr lang="en-US" sz="1200" dirty="0">
+              <a:rPr lang="en-US" sz="1800" dirty="0">
                 <a:solidFill>
                   <a:srgbClr val="000000"/>
                 </a:solidFill>
@@ -4206,7 +4269,7 @@
               <a:buChar char="•"/>
             </a:pPr>
             <a:r>
-              <a:rPr lang="en-US" sz="1200" dirty="0">
+              <a:rPr lang="en-US" sz="1800" dirty="0">
                 <a:solidFill>
                   <a:srgbClr val="000000"/>
                 </a:solidFill>
@@ -4228,7 +4291,7 @@
               <a:buChar char="•"/>
             </a:pPr>
             <a:r>
-              <a:rPr lang="en-US" sz="1200" dirty="0">
+              <a:rPr lang="en-US" sz="1800" dirty="0">
                 <a:solidFill>
                   <a:srgbClr val="000000"/>
                 </a:solidFill>
@@ -4271,7 +4334,7 @@
         <p:spPr>
           <a:xfrm>
             <a:off x="0" y="0"/>
-            <a:ext cx="12192000" cy="900000"/>
+            <a:ext cx="12192000" cy="1000000"/>
           </a:xfrm>
           <a:prstGeom prst="rect">
             <a:avLst/>
@@ -4293,7 +4356,7 @@
               <a:buNone/>
             </a:pPr>
             <a:r>
-              <a:rPr lang="en-US" sz="1400" b="1" dirty="0">
+              <a:rPr lang="en-US" sz="3000" b="1" dirty="0">
                 <a:solidFill>
                   <a:srgbClr val="FFFFFF"/>
                 </a:solidFill>
@@ -4313,8 +4376,8 @@
         </p:nvSpPr>
         <p:spPr>
           <a:xfrm>
-            <a:off x="685800" y="1050000"/>
-            <a:ext cx="10820400" cy="5600000"/>
+            <a:off x="685800" y="1150000"/>
+            <a:ext cx="10820400" cy="5500000"/>
           </a:xfrm>
           <a:prstGeom prst="rect">
             <a:avLst/>
@@ -4337,7 +4400,7 @@
               <a:buChar char="•"/>
             </a:pPr>
             <a:r>
-              <a:rPr lang="en-US" sz="1200" dirty="0">
+              <a:rPr lang="en-US" sz="1800" dirty="0">
                 <a:solidFill>
                   <a:srgbClr val="000000"/>
                 </a:solidFill>
@@ -4359,7 +4422,7 @@
               <a:buChar char="•"/>
             </a:pPr>
             <a:r>
-              <a:rPr lang="en-US" sz="1200" dirty="0">
+              <a:rPr lang="en-US" sz="1800" dirty="0">
                 <a:solidFill>
                   <a:srgbClr val="000000"/>
                 </a:solidFill>
@@ -4381,7 +4444,7 @@
               <a:buChar char="•"/>
             </a:pPr>
             <a:r>
-              <a:rPr lang="en-US" sz="1200" dirty="0">
+              <a:rPr lang="en-US" sz="1800" dirty="0">
                 <a:solidFill>
                   <a:srgbClr val="000000"/>
                 </a:solidFill>
@@ -4403,29 +4466,29 @@
               <a:buChar char="•"/>
             </a:pPr>
             <a:r>
-              <a:rPr lang="en-US" sz="1200" dirty="0">
-                <a:solidFill>
-                  <a:srgbClr val="000000"/>
-                </a:solidFill>
-                <a:latin typeface="Times New Roman"/>
-                <a:cs typeface="Times New Roman"/>
-              </a:rPr>
-              <a:t>8. Shetty K. V., Janardhana N., Math S. B., Marimuthu P. (2021/2022). Development and validation / manual of the psychiatric social-work intervention package to reduce EE. [Intervention package used in this study.]</a:t>
-            </a:r>
-          </a:p>
-          <a:p>
-            <a:pPr marL="285750" indent="-285750">
-              <a:spcBef>
-                <a:spcPts val="0"/>
-              </a:spcBef>
-              <a:spcAft>
-                <a:spcPts val="300"/>
-              </a:spcAft>
-              <a:buFont typeface="Arial"/>
-              <a:buChar char="•"/>
-            </a:pPr>
-            <a:r>
-              <a:rPr lang="en-US" sz="1200" dirty="0">
+              <a:rPr lang="en-US" sz="1800" dirty="0">
+                <a:solidFill>
+                  <a:srgbClr val="000000"/>
+                </a:solidFill>
+                <a:latin typeface="Times New Roman"/>
+                <a:cs typeface="Times New Roman"/>
+              </a:rPr>
+              <a:t>8. Shetty K. V., Janardhana N., Math S. B., Marimuthu P. (2021–2022). Development/validation &amp; manual of the psychiatric social-work intervention package to reduce EE. [Intervention package used in this study.]</a:t>
+            </a:r>
+          </a:p>
+          <a:p>
+            <a:pPr marL="285750" indent="-285750">
+              <a:spcBef>
+                <a:spcPts val="0"/>
+              </a:spcBef>
+              <a:spcAft>
+                <a:spcPts val="300"/>
+              </a:spcAft>
+              <a:buFont typeface="Arial"/>
+              <a:buChar char="•"/>
+            </a:pPr>
+            <a:r>
+              <a:rPr lang="en-US" sz="1800" dirty="0">
                 <a:solidFill>
                   <a:srgbClr val="000000"/>
                 </a:solidFill>
@@ -4467,8 +4530,8 @@
         </p:nvSpPr>
         <p:spPr>
           <a:xfrm>
-            <a:off x="914400" y="1600200"/>
-            <a:ext cx="10363200" cy="2600000"/>
+            <a:off x="914400" y="1400200"/>
+            <a:ext cx="10363200" cy="2800000"/>
           </a:xfrm>
           <a:prstGeom prst="rect">
             <a:avLst/>
@@ -4487,7 +4550,7 @@
               <a:buNone/>
             </a:pPr>
             <a:r>
-              <a:rPr lang="en-US" sz="3200" b="1" dirty="0">
+              <a:rPr lang="en-US" sz="4000" b="1" dirty="0">
                 <a:solidFill>
                   <a:srgbClr val="1F3864"/>
                 </a:solidFill>
@@ -4507,7 +4570,7 @@
         </p:nvSpPr>
         <p:spPr>
           <a:xfrm>
-            <a:off x="914400" y="4300000"/>
+            <a:off x="914400" y="4400000"/>
             <a:ext cx="10363200" cy="2000000"/>
           </a:xfrm>
           <a:prstGeom prst="rect">
@@ -4527,7 +4590,7 @@
               <a:buNone/>
             </a:pPr>
             <a:r>
-              <a:rPr lang="en-US" sz="1400" dirty="0">
+              <a:rPr lang="en-US" sz="2000" dirty="0">
                 <a:solidFill>
                   <a:srgbClr val="404040"/>
                 </a:solidFill>
@@ -4570,7 +4633,7 @@
         <p:spPr>
           <a:xfrm>
             <a:off x="0" y="0"/>
-            <a:ext cx="12192000" cy="900000"/>
+            <a:ext cx="12192000" cy="1000000"/>
           </a:xfrm>
           <a:prstGeom prst="rect">
             <a:avLst/>
@@ -4592,7 +4655,7 @@
               <a:buNone/>
             </a:pPr>
             <a:r>
-              <a:rPr lang="en-US" sz="1400" b="1" dirty="0">
+              <a:rPr lang="en-US" sz="3000" b="1" dirty="0">
                 <a:solidFill>
                   <a:srgbClr val="FFFFFF"/>
                 </a:solidFill>
@@ -4612,8 +4675,8 @@
         </p:nvSpPr>
         <p:spPr>
           <a:xfrm>
-            <a:off x="685800" y="1050000"/>
-            <a:ext cx="10820400" cy="5600000"/>
+            <a:off x="685800" y="1150000"/>
+            <a:ext cx="10820400" cy="5500000"/>
           </a:xfrm>
           <a:prstGeom prst="rect">
             <a:avLst/>
@@ -4636,80 +4699,102 @@
               <a:buChar char="•"/>
             </a:pPr>
             <a:r>
-              <a:rPr lang="en-US" sz="1200" dirty="0">
-                <a:solidFill>
-                  <a:srgbClr val="000000"/>
-                </a:solidFill>
-                <a:latin typeface="Times New Roman"/>
-                <a:cs typeface="Times New Roman"/>
-              </a:rPr>
-              <a:t>Family is an important, multifunctional social entity that fulfils the emotional and socializing needs of its members; its functioning can be affected by a member’s chronic health condition.</a:t>
-            </a:r>
-          </a:p>
-          <a:p>
-            <a:pPr marL="285750" indent="-285750">
-              <a:spcBef>
-                <a:spcPts val="0"/>
-              </a:spcBef>
-              <a:spcAft>
-                <a:spcPts val="300"/>
-              </a:spcAft>
-              <a:buFont typeface="Arial"/>
-              <a:buChar char="•"/>
-            </a:pPr>
-            <a:r>
-              <a:rPr lang="en-US" sz="1200" dirty="0">
-                <a:solidFill>
-                  <a:srgbClr val="000000"/>
-                </a:solidFill>
-                <a:latin typeface="Times New Roman"/>
-                <a:cs typeface="Times New Roman"/>
-              </a:rPr>
-              <a:t>In India, most persons with schizophrenia live with and rely on their family members for emotional support, assistance, housing, safety, and advocacy – unlike in Western countries.</a:t>
-            </a:r>
-          </a:p>
-          <a:p>
-            <a:pPr marL="285750" indent="-285750">
-              <a:spcBef>
-                <a:spcPts val="0"/>
-              </a:spcBef>
-              <a:spcAft>
-                <a:spcPts val="300"/>
-              </a:spcAft>
-              <a:buFont typeface="Arial"/>
-              <a:buChar char="•"/>
-            </a:pPr>
-            <a:r>
-              <a:rPr lang="en-US" sz="1200" dirty="0">
-                <a:solidFill>
-                  <a:srgbClr val="000000"/>
-                </a:solidFill>
-                <a:latin typeface="Times New Roman"/>
-                <a:cs typeface="Times New Roman"/>
-              </a:rPr>
-              <a:t>The comparatively better prognosis of schizophrenia in Asian countries is attributed partly to this strong family support.</a:t>
-            </a:r>
-          </a:p>
-          <a:p>
-            <a:pPr marL="285750" indent="-285750">
-              <a:spcBef>
-                <a:spcPts val="0"/>
-              </a:spcBef>
-              <a:spcAft>
-                <a:spcPts val="300"/>
-              </a:spcAft>
-              <a:buFont typeface="Arial"/>
-              <a:buChar char="•"/>
-            </a:pPr>
-            <a:r>
-              <a:rPr lang="en-US" sz="1200" dirty="0">
-                <a:solidFill>
-                  <a:srgbClr val="000000"/>
-                </a:solidFill>
-                <a:latin typeface="Times New Roman"/>
-                <a:cs typeface="Times New Roman"/>
-              </a:rPr>
-              <a:t>A person with schizophrenia may develop symptoms distressing to the family, leading to crises, uncertainty, and over-burden – compounded by varying attitudes among family members.</a:t>
+              <a:rPr lang="en-US" sz="1800" dirty="0">
+                <a:solidFill>
+                  <a:srgbClr val="000000"/>
+                </a:solidFill>
+                <a:latin typeface="Times New Roman"/>
+                <a:cs typeface="Times New Roman"/>
+              </a:rPr>
+              <a:t>Schizophrenia is a chronic, disabling mental illness that disrupts thinking, perception, emotion, and social functioning, and usually follows a relapsing course.</a:t>
+            </a:r>
+          </a:p>
+          <a:p>
+            <a:pPr marL="285750" indent="-285750">
+              <a:spcBef>
+                <a:spcPts val="0"/>
+              </a:spcBef>
+              <a:spcAft>
+                <a:spcPts val="300"/>
+              </a:spcAft>
+              <a:buFont typeface="Arial"/>
+              <a:buChar char="•"/>
+            </a:pPr>
+            <a:r>
+              <a:rPr lang="en-US" sz="1800" dirty="0">
+                <a:solidFill>
+                  <a:srgbClr val="000000"/>
+                </a:solidFill>
+                <a:latin typeface="Times New Roman"/>
+                <a:cs typeface="Times New Roman"/>
+              </a:rPr>
+              <a:t>Family is an important, multifunctional social entity that meets the emotional and socializing needs of its members; a member’s chronic illness disturbs this functioning.</a:t>
+            </a:r>
+          </a:p>
+          <a:p>
+            <a:pPr marL="285750" indent="-285750">
+              <a:spcBef>
+                <a:spcPts val="0"/>
+              </a:spcBef>
+              <a:spcAft>
+                <a:spcPts val="300"/>
+              </a:spcAft>
+              <a:buFont typeface="Arial"/>
+              <a:buChar char="•"/>
+            </a:pPr>
+            <a:r>
+              <a:rPr lang="en-US" sz="1800" dirty="0">
+                <a:solidFill>
+                  <a:srgbClr val="000000"/>
+                </a:solidFill>
+                <a:latin typeface="Times New Roman"/>
+                <a:cs typeface="Times New Roman"/>
+              </a:rPr>
+              <a:t>In India, most persons with schizophrenia live with their families and depend on them for emotional support, assistance, housing, safety, and advocacy – unlike in Western countries.</a:t>
+            </a:r>
+          </a:p>
+          <a:p>
+            <a:pPr marL="285750" indent="-285750">
+              <a:spcBef>
+                <a:spcPts val="0"/>
+              </a:spcBef>
+              <a:spcAft>
+                <a:spcPts val="300"/>
+              </a:spcAft>
+              <a:buFont typeface="Arial"/>
+              <a:buChar char="•"/>
+            </a:pPr>
+            <a:r>
+              <a:rPr lang="en-US" sz="1800" dirty="0">
+                <a:solidFill>
+                  <a:srgbClr val="000000"/>
+                </a:solidFill>
+                <a:latin typeface="Times New Roman"/>
+                <a:cs typeface="Times New Roman"/>
+              </a:rPr>
+              <a:t>The comparatively better prognosis of schizophrenia in Asian countries is attributed partly to this strong family support system.</a:t>
+            </a:r>
+          </a:p>
+          <a:p>
+            <a:pPr marL="285750" indent="-285750">
+              <a:spcBef>
+                <a:spcPts val="0"/>
+              </a:spcBef>
+              <a:spcAft>
+                <a:spcPts val="300"/>
+              </a:spcAft>
+              <a:buFont typeface="Arial"/>
+              <a:buChar char="•"/>
+            </a:pPr>
+            <a:r>
+              <a:rPr lang="en-US" sz="1800" dirty="0">
+                <a:solidFill>
+                  <a:srgbClr val="000000"/>
+                </a:solidFill>
+                <a:latin typeface="Times New Roman"/>
+                <a:cs typeface="Times New Roman"/>
+              </a:rPr>
+              <a:t>However, the illness can cause distress, crises, uncertainty, and over-burden for the family, and caregivers’ attitudes toward the patient vary widely.</a:t>
             </a:r>
           </a:p>
         </p:txBody>
@@ -4745,7 +4830,7 @@
         <p:spPr>
           <a:xfrm>
             <a:off x="0" y="0"/>
-            <a:ext cx="12192000" cy="900000"/>
+            <a:ext cx="12192000" cy="1000000"/>
           </a:xfrm>
           <a:prstGeom prst="rect">
             <a:avLst/>
@@ -4767,7 +4852,7 @@
               <a:buNone/>
             </a:pPr>
             <a:r>
-              <a:rPr lang="en-US" sz="1400" b="1" dirty="0">
+              <a:rPr lang="en-US" sz="3000" b="1" dirty="0">
                 <a:solidFill>
                   <a:srgbClr val="FFFFFF"/>
                 </a:solidFill>
@@ -4787,8 +4872,8 @@
         </p:nvSpPr>
         <p:spPr>
           <a:xfrm>
-            <a:off x="685800" y="1050000"/>
-            <a:ext cx="10820400" cy="5600000"/>
+            <a:off x="685800" y="1150000"/>
+            <a:ext cx="10820400" cy="5500000"/>
           </a:xfrm>
           <a:prstGeom prst="rect">
             <a:avLst/>
@@ -4811,102 +4896,102 @@
               <a:buChar char="•"/>
             </a:pPr>
             <a:r>
-              <a:rPr lang="en-US" sz="1200" dirty="0">
-                <a:solidFill>
-                  <a:srgbClr val="000000"/>
-                </a:solidFill>
-                <a:latin typeface="Times New Roman"/>
-                <a:cs typeface="Times New Roman"/>
-              </a:rPr>
-              <a:t>Caregivers may be unsympathetic or judgmental, interpreting the patient’s bizarre behaviours as intentional → the family develops high Expressed Emotion (EE).</a:t>
-            </a:r>
-          </a:p>
-          <a:p>
-            <a:pPr marL="285750" indent="-285750">
-              <a:spcBef>
-                <a:spcPts val="0"/>
-              </a:spcBef>
-              <a:spcAft>
-                <a:spcPts val="300"/>
-              </a:spcAft>
-              <a:buFont typeface="Arial"/>
-              <a:buChar char="•"/>
-            </a:pPr>
-            <a:r>
-              <a:rPr lang="en-US" sz="1200" dirty="0">
-                <a:solidFill>
-                  <a:srgbClr val="000000"/>
-                </a:solidFill>
-                <a:latin typeface="Times New Roman"/>
-                <a:cs typeface="Times New Roman"/>
-              </a:rPr>
-              <a:t>Attempts to resolve difficulties may instead produce guilt, family isolation, or compensatory over-involvement; stigma further worsens the situation.</a:t>
-            </a:r>
-          </a:p>
-          <a:p>
-            <a:pPr marL="285750" indent="-285750">
-              <a:spcBef>
-                <a:spcPts val="0"/>
-              </a:spcBef>
-              <a:spcAft>
-                <a:spcPts val="300"/>
-              </a:spcAft>
-              <a:buFont typeface="Arial"/>
-              <a:buChar char="•"/>
-            </a:pPr>
-            <a:r>
-              <a:rPr lang="en-US" sz="1200" dirty="0">
-                <a:solidFill>
-                  <a:srgbClr val="000000"/>
-                </a:solidFill>
-                <a:latin typeface="Times New Roman"/>
-                <a:cs typeface="Times New Roman"/>
-              </a:rPr>
-              <a:t>EE is a robust predictor of relapse in schizophrenia (Butzlaff &amp; Hooley, 1998).</a:t>
-            </a:r>
-          </a:p>
-          <a:p>
-            <a:pPr marL="285750" indent="-285750">
-              <a:spcBef>
-                <a:spcPts val="0"/>
-              </a:spcBef>
-              <a:spcAft>
-                <a:spcPts val="300"/>
-              </a:spcAft>
-              <a:buFont typeface="Arial"/>
-              <a:buChar char="•"/>
-            </a:pPr>
-            <a:r>
-              <a:rPr lang="en-US" sz="1200" dirty="0">
-                <a:solidFill>
-                  <a:srgbClr val="000000"/>
-                </a:solidFill>
-                <a:latin typeface="Times New Roman"/>
-                <a:cs typeface="Times New Roman"/>
-              </a:rPr>
-              <a:t>EE is not a fixed trait – many caregivers change EE status within 12 months, usually from high to low, which makes it a modifiable target for intervention.</a:t>
-            </a:r>
-          </a:p>
-          <a:p>
-            <a:pPr marL="285750" indent="-285750">
-              <a:spcBef>
-                <a:spcPts val="0"/>
-              </a:spcBef>
-              <a:spcAft>
-                <a:spcPts val="300"/>
-              </a:spcAft>
-              <a:buFont typeface="Arial"/>
-              <a:buChar char="•"/>
-            </a:pPr>
-            <a:r>
-              <a:rPr lang="en-US" sz="1200" dirty="0">
-                <a:solidFill>
-                  <a:srgbClr val="000000"/>
-                </a:solidFill>
-                <a:latin typeface="Times New Roman"/>
-                <a:cs typeface="Times New Roman"/>
-              </a:rPr>
-              <a:t>Family response to mental illness varies with culture, region, perception, and language – hence the need for a culturally-relevant, Indian family intervention.</a:t>
+              <a:rPr lang="en-US" sz="1800" dirty="0">
+                <a:solidFill>
+                  <a:srgbClr val="000000"/>
+                </a:solidFill>
+                <a:latin typeface="Times New Roman"/>
+                <a:cs typeface="Times New Roman"/>
+              </a:rPr>
+              <a:t>Caregivers may become unsympathetic or judgmental, interpreting the patient’s bizarre behaviours as intentional → the family develops high Expressed Emotion (EE).</a:t>
+            </a:r>
+          </a:p>
+          <a:p>
+            <a:pPr marL="285750" indent="-285750">
+              <a:spcBef>
+                <a:spcPts val="0"/>
+              </a:spcBef>
+              <a:spcAft>
+                <a:spcPts val="300"/>
+              </a:spcAft>
+              <a:buFont typeface="Arial"/>
+              <a:buChar char="•"/>
+            </a:pPr>
+            <a:r>
+              <a:rPr lang="en-US" sz="1800" dirty="0">
+                <a:solidFill>
+                  <a:srgbClr val="000000"/>
+                </a:solidFill>
+                <a:latin typeface="Times New Roman"/>
+                <a:cs typeface="Times New Roman"/>
+              </a:rPr>
+              <a:t>Well-meaning attempts to help may instead breed guilt, family isolation, or compensatory over-involvement; stigma worsens the situation further.</a:t>
+            </a:r>
+          </a:p>
+          <a:p>
+            <a:pPr marL="285750" indent="-285750">
+              <a:spcBef>
+                <a:spcPts val="0"/>
+              </a:spcBef>
+              <a:spcAft>
+                <a:spcPts val="300"/>
+              </a:spcAft>
+              <a:buFont typeface="Arial"/>
+              <a:buChar char="•"/>
+            </a:pPr>
+            <a:r>
+              <a:rPr lang="en-US" sz="1800" dirty="0">
+                <a:solidFill>
+                  <a:srgbClr val="000000"/>
+                </a:solidFill>
+                <a:latin typeface="Times New Roman"/>
+                <a:cs typeface="Times New Roman"/>
+              </a:rPr>
+              <a:t>Expressed Emotion is one of the most robust psychosocial predictors of relapse in schizophrenia (Butzlaff &amp; Hooley, 1998).</a:t>
+            </a:r>
+          </a:p>
+          <a:p>
+            <a:pPr marL="285750" indent="-285750">
+              <a:spcBef>
+                <a:spcPts val="0"/>
+              </a:spcBef>
+              <a:spcAft>
+                <a:spcPts val="300"/>
+              </a:spcAft>
+              <a:buFont typeface="Arial"/>
+              <a:buChar char="•"/>
+            </a:pPr>
+            <a:r>
+              <a:rPr lang="en-US" sz="1800" dirty="0">
+                <a:solidFill>
+                  <a:srgbClr val="000000"/>
+                </a:solidFill>
+                <a:latin typeface="Times New Roman"/>
+                <a:cs typeface="Times New Roman"/>
+              </a:rPr>
+              <a:t>Crucially, EE is NOT a fixed trait – many caregivers shift from high to low EE within 12 months, which makes it a modifiable treatment target.</a:t>
+            </a:r>
+          </a:p>
+          <a:p>
+            <a:pPr marL="285750" indent="-285750">
+              <a:spcBef>
+                <a:spcPts val="0"/>
+              </a:spcBef>
+              <a:spcAft>
+                <a:spcPts val="300"/>
+              </a:spcAft>
+              <a:buFont typeface="Arial"/>
+              <a:buChar char="•"/>
+            </a:pPr>
+            <a:r>
+              <a:rPr lang="en-US" sz="1800" dirty="0">
+                <a:solidFill>
+                  <a:srgbClr val="000000"/>
+                </a:solidFill>
+                <a:latin typeface="Times New Roman"/>
+                <a:cs typeface="Times New Roman"/>
+              </a:rPr>
+              <a:t>Because family responses differ by culture, region, perception, and language, a culturally-relevant Indian family intervention is needed.</a:t>
             </a:r>
           </a:p>
         </p:txBody>
@@ -4942,7 +5027,7 @@
         <p:spPr>
           <a:xfrm>
             <a:off x="0" y="0"/>
-            <a:ext cx="12192000" cy="900000"/>
+            <a:ext cx="12192000" cy="1000000"/>
           </a:xfrm>
           <a:prstGeom prst="rect">
             <a:avLst/>
@@ -4964,7 +5049,7 @@
               <a:buNone/>
             </a:pPr>
             <a:r>
-              <a:rPr lang="en-US" sz="1400" b="1" dirty="0">
+              <a:rPr lang="en-US" sz="3000" b="1" dirty="0">
                 <a:solidFill>
                   <a:srgbClr val="FFFFFF"/>
                 </a:solidFill>
@@ -4984,8 +5069,8 @@
         </p:nvSpPr>
         <p:spPr>
           <a:xfrm>
-            <a:off x="685800" y="1050000"/>
-            <a:ext cx="10820400" cy="5600000"/>
+            <a:off x="685800" y="1150000"/>
+            <a:ext cx="10820400" cy="5500000"/>
           </a:xfrm>
           <a:prstGeom prst="rect">
             <a:avLst/>
@@ -5007,7 +5092,7 @@
               <a:buNone/>
             </a:pPr>
             <a:r>
-              <a:rPr lang="en-US" sz="1200" b="1" dirty="0">
+              <a:rPr lang="en-US" sz="2000" b="1" dirty="0">
                 <a:solidFill>
                   <a:srgbClr val="1F3864"/>
                 </a:solidFill>
@@ -5029,14 +5114,14 @@
               <a:buChar char="•"/>
             </a:pPr>
             <a:r>
-              <a:rPr lang="en-US" sz="1200" dirty="0">
-                <a:solidFill>
-                  <a:srgbClr val="000000"/>
-                </a:solidFill>
-                <a:latin typeface="Times New Roman"/>
-                <a:cs typeface="Times New Roman"/>
-              </a:rPr>
-              <a:t>A chronic, severe mental disorder marked by disturbances in thought, perception, emotion, and behaviour; in this study diagnosed using ICD-10 criteria (WHO).</a:t>
+              <a:rPr lang="en-US" sz="1800" dirty="0">
+                <a:solidFill>
+                  <a:srgbClr val="000000"/>
+                </a:solidFill>
+                <a:latin typeface="Times New Roman"/>
+                <a:cs typeface="Times New Roman"/>
+              </a:rPr>
+              <a:t>A chronic, severe mental disorder with disturbances of thought, perception, emotion, and behaviour; diagnosed here using ICD-10 criteria (WHO).</a:t>
             </a:r>
           </a:p>
           <a:p>
@@ -5050,7 +5135,7 @@
               <a:buNone/>
             </a:pPr>
             <a:r>
-              <a:rPr lang="en-US" sz="1200" b="1" dirty="0">
+              <a:rPr lang="en-US" sz="2000" b="1" dirty="0">
                 <a:solidFill>
                   <a:srgbClr val="1F3864"/>
                 </a:solidFill>
@@ -5072,14 +5157,14 @@
               <a:buChar char="•"/>
             </a:pPr>
             <a:r>
-              <a:rPr lang="en-US" sz="1200" dirty="0">
-                <a:solidFill>
-                  <a:srgbClr val="000000"/>
-                </a:solidFill>
-                <a:latin typeface="Times New Roman"/>
-                <a:cs typeface="Times New Roman"/>
-              </a:rPr>
-              <a:t>A family member living with and providing care to the person with schizophrenia; aged ≥18 years; the primary source of emotional and practical support.</a:t>
+              <a:rPr lang="en-US" sz="1800" dirty="0">
+                <a:solidFill>
+                  <a:srgbClr val="000000"/>
+                </a:solidFill>
+                <a:latin typeface="Times New Roman"/>
+                <a:cs typeface="Times New Roman"/>
+              </a:rPr>
+              <a:t>A family member living with and providing care to the person with schizophrenia; ≥18 years of age; the primary source of emotional and practical support.</a:t>
             </a:r>
           </a:p>
           <a:p>
@@ -5093,7 +5178,7 @@
               <a:buNone/>
             </a:pPr>
             <a:r>
-              <a:rPr lang="en-US" sz="1200" b="1" dirty="0">
+              <a:rPr lang="en-US" sz="2000" b="1" dirty="0">
                 <a:solidFill>
                   <a:srgbClr val="1F3864"/>
                 </a:solidFill>
@@ -5115,14 +5200,36 @@
               <a:buChar char="•"/>
             </a:pPr>
             <a:r>
-              <a:rPr lang="en-US" sz="1200" dirty="0">
-                <a:solidFill>
-                  <a:srgbClr val="000000"/>
-                </a:solidFill>
-                <a:latin typeface="Times New Roman"/>
-                <a:cs typeface="Times New Roman"/>
-              </a:rPr>
-              <a:t>A measure of the family emotional climate – the attitudes of criticism, hostility, and emotional over-involvement expressed by relatives toward the patient (concept coined by Brown &amp; Rutter, 1966; developed by Leff &amp; Vaughn, 1985).</a:t>
+              <a:rPr lang="en-US" sz="1800" dirty="0">
+                <a:solidFill>
+                  <a:srgbClr val="000000"/>
+                </a:solidFill>
+                <a:latin typeface="Times New Roman"/>
+                <a:cs typeface="Times New Roman"/>
+              </a:rPr>
+              <a:t>A measure of the family’s emotional climate – the attitudes of criticism, hostility, and emotional over-involvement expressed by relatives toward the patient.</a:t>
+            </a:r>
+          </a:p>
+          <a:p>
+            <a:pPr marL="571500" indent="-228600">
+              <a:spcBef>
+                <a:spcPts val="0"/>
+              </a:spcBef>
+              <a:spcAft>
+                <a:spcPts val="300"/>
+              </a:spcAft>
+              <a:buFont typeface="Arial"/>
+              <a:buChar char="–"/>
+            </a:pPr>
+            <a:r>
+              <a:rPr lang="en-US" sz="1800" i="1" dirty="0">
+                <a:solidFill>
+                  <a:srgbClr val="333333"/>
+                </a:solidFill>
+                <a:latin typeface="Times New Roman"/>
+                <a:cs typeface="Times New Roman"/>
+              </a:rPr>
+              <a:t>Concept coined by Brown &amp; Rutter (1966); measured originally via the Camberwell Family Interview; developed further by Leff &amp; Vaughn (1985).</a:t>
             </a:r>
           </a:p>
         </p:txBody>
@@ -5158,7 +5265,7 @@
         <p:spPr>
           <a:xfrm>
             <a:off x="0" y="0"/>
-            <a:ext cx="12192000" cy="900000"/>
+            <a:ext cx="12192000" cy="1000000"/>
           </a:xfrm>
           <a:prstGeom prst="rect">
             <a:avLst/>
@@ -5180,7 +5287,7 @@
               <a:buNone/>
             </a:pPr>
             <a:r>
-              <a:rPr lang="en-US" sz="1400" b="1" dirty="0">
+              <a:rPr lang="en-US" sz="3000" b="1" dirty="0">
                 <a:solidFill>
                   <a:srgbClr val="FFFFFF"/>
                 </a:solidFill>
@@ -5200,8 +5307,8 @@
         </p:nvSpPr>
         <p:spPr>
           <a:xfrm>
-            <a:off x="685800" y="1050000"/>
-            <a:ext cx="10820400" cy="5600000"/>
+            <a:off x="685800" y="1150000"/>
+            <a:ext cx="10820400" cy="5500000"/>
           </a:xfrm>
           <a:prstGeom prst="rect">
             <a:avLst/>
@@ -5223,7 +5330,7 @@
               <a:buNone/>
             </a:pPr>
             <a:r>
-              <a:rPr lang="en-US" sz="1200" b="1" dirty="0">
+              <a:rPr lang="en-US" sz="2000" b="1" dirty="0">
                 <a:solidFill>
                   <a:srgbClr val="1F3864"/>
                 </a:solidFill>
@@ -5245,14 +5352,14 @@
               <a:buChar char="•"/>
             </a:pPr>
             <a:r>
-              <a:rPr lang="en-US" sz="1200" dirty="0">
-                <a:solidFill>
-                  <a:srgbClr val="000000"/>
-                </a:solidFill>
-                <a:latin typeface="Times New Roman"/>
-                <a:cs typeface="Times New Roman"/>
-              </a:rPr>
-              <a:t>Negative, disapproving statements or attitudes expressed by the caregiver about the patient’s behaviour – the “critical comments / hostility” dimension of EE.</a:t>
+              <a:rPr lang="en-US" sz="1800" dirty="0">
+                <a:solidFill>
+                  <a:srgbClr val="000000"/>
+                </a:solidFill>
+                <a:latin typeface="Times New Roman"/>
+                <a:cs typeface="Times New Roman"/>
+              </a:rPr>
+              <a:t>Negative, disapproving comments, resentment, or hostile attitudes expressed by the caregiver about the patient’s behaviour – the “critical comments / hostility” dimension of EE.</a:t>
             </a:r>
           </a:p>
           <a:p>
@@ -5266,7 +5373,7 @@
               <a:buNone/>
             </a:pPr>
             <a:r>
-              <a:rPr lang="en-US" sz="1200" b="1" dirty="0">
+              <a:rPr lang="en-US" sz="2000" b="1" dirty="0">
                 <a:solidFill>
                   <a:srgbClr val="1F3864"/>
                 </a:solidFill>
@@ -5288,14 +5395,14 @@
               <a:buChar char="•"/>
             </a:pPr>
             <a:r>
-              <a:rPr lang="en-US" sz="1200" dirty="0">
-                <a:solidFill>
-                  <a:srgbClr val="000000"/>
-                </a:solidFill>
-                <a:latin typeface="Times New Roman"/>
-                <a:cs typeface="Times New Roman"/>
-              </a:rPr>
-              <a:t>Exaggerated emotional response, over-protectiveness, self-sacrifice, or intrusiveness by the caregiver; it undermines the patient’s skills and confidence and fosters long-term dependency.</a:t>
+              <a:rPr lang="en-US" sz="1800" dirty="0">
+                <a:solidFill>
+                  <a:srgbClr val="000000"/>
+                </a:solidFill>
+                <a:latin typeface="Times New Roman"/>
+                <a:cs typeface="Times New Roman"/>
+              </a:rPr>
+              <a:t>Exaggerated emotional responses, over-protectiveness, self-sacrifice, and intrusiveness by the caregiver; it undermines the patient’s skills and confidence and fosters long-term dependency.</a:t>
             </a:r>
           </a:p>
           <a:p>
@@ -5310,14 +5417,14 @@
               <a:buChar char="–"/>
             </a:pPr>
             <a:r>
-              <a:rPr lang="en-US" sz="1200" i="1" dirty="0">
+              <a:rPr lang="en-US" sz="1800" i="1" dirty="0">
                 <a:solidFill>
                   <a:srgbClr val="333333"/>
                 </a:solidFill>
                 <a:latin typeface="Times New Roman"/>
                 <a:cs typeface="Times New Roman"/>
               </a:rPr>
-              <a:t>In this study EE = Criticality + Emotional Over-Involvement (negative EE only; the FEICS scale does not measure positive EE such as warmth).</a:t>
+              <a:t>In this study, EE = Criticality + Emotional Over-Involvement (negative EE only). The FEICS scale does NOT measure positive EE such as warmth.</a:t>
             </a:r>
           </a:p>
         </p:txBody>
@@ -5353,7 +5460,7 @@
         <p:spPr>
           <a:xfrm>
             <a:off x="0" y="0"/>
-            <a:ext cx="12192000" cy="900000"/>
+            <a:ext cx="12192000" cy="1000000"/>
           </a:xfrm>
           <a:prstGeom prst="rect">
             <a:avLst/>
@@ -5375,7 +5482,7 @@
               <a:buNone/>
             </a:pPr>
             <a:r>
-              <a:rPr lang="en-US" sz="1400" b="1" dirty="0">
+              <a:rPr lang="en-US" sz="3000" b="1" dirty="0">
                 <a:solidFill>
                   <a:srgbClr val="FFFFFF"/>
                 </a:solidFill>
@@ -5395,8 +5502,8 @@
         </p:nvSpPr>
         <p:spPr>
           <a:xfrm>
-            <a:off x="685800" y="1050000"/>
-            <a:ext cx="10820400" cy="5600000"/>
+            <a:off x="685800" y="1150000"/>
+            <a:ext cx="10820400" cy="5500000"/>
           </a:xfrm>
           <a:prstGeom prst="rect">
             <a:avLst/>
@@ -5418,36 +5525,36 @@
               <a:buNone/>
             </a:pPr>
             <a:r>
-              <a:rPr lang="en-US" sz="1200" b="1" dirty="0">
+              <a:rPr lang="en-US" sz="2000" b="1" dirty="0">
                 <a:solidFill>
                   <a:srgbClr val="1F3864"/>
                 </a:solidFill>
                 <a:latin typeface="Times New Roman"/>
                 <a:cs typeface="Times New Roman"/>
               </a:rPr>
-              <a:t>Family Intervention / Psychosocial Intervention</a:t>
-            </a:r>
-          </a:p>
-          <a:p>
-            <a:pPr marL="285750" indent="-285750">
-              <a:spcBef>
-                <a:spcPts val="0"/>
-              </a:spcBef>
-              <a:spcAft>
-                <a:spcPts val="300"/>
-              </a:spcAft>
-              <a:buFont typeface="Arial"/>
-              <a:buChar char="•"/>
-            </a:pPr>
-            <a:r>
-              <a:rPr lang="en-US" sz="1200" dirty="0">
-                <a:solidFill>
-                  <a:srgbClr val="000000"/>
-                </a:solidFill>
-                <a:latin typeface="Times New Roman"/>
-                <a:cs typeface="Times New Roman"/>
-              </a:rPr>
-              <a:t>A structured, professionally-delivered programme for caregivers that aims to reduce high EE and improve the family environment for rehabilitation.</a:t>
+              <a:t>Family / Psychosocial Intervention</a:t>
+            </a:r>
+          </a:p>
+          <a:p>
+            <a:pPr marL="285750" indent="-285750">
+              <a:spcBef>
+                <a:spcPts val="0"/>
+              </a:spcBef>
+              <a:spcAft>
+                <a:spcPts val="300"/>
+              </a:spcAft>
+              <a:buFont typeface="Arial"/>
+              <a:buChar char="•"/>
+            </a:pPr>
+            <a:r>
+              <a:rPr lang="en-US" sz="1800" dirty="0">
+                <a:solidFill>
+                  <a:srgbClr val="000000"/>
+                </a:solidFill>
+                <a:latin typeface="Times New Roman"/>
+                <a:cs typeface="Times New Roman"/>
+              </a:rPr>
+              <a:t>A structured, professionally-delivered programme for caregivers aimed at reducing high EE and creating a favourable family environment for rehabilitation.</a:t>
             </a:r>
           </a:p>
           <a:p>
@@ -5461,7 +5568,7 @@
               <a:buNone/>
             </a:pPr>
             <a:r>
-              <a:rPr lang="en-US" sz="1200" b="1" dirty="0">
+              <a:rPr lang="en-US" sz="2000" b="1" dirty="0">
                 <a:solidFill>
                   <a:srgbClr val="1F3864"/>
                 </a:solidFill>
@@ -5483,14 +5590,14 @@
               <a:buChar char="•"/>
             </a:pPr>
             <a:r>
-              <a:rPr lang="en-US" sz="1200" dirty="0">
-                <a:solidFill>
-                  <a:srgbClr val="000000"/>
-                </a:solidFill>
-                <a:latin typeface="Times New Roman"/>
-                <a:cs typeface="Times New Roman"/>
-              </a:rPr>
-              <a:t>A structured approach providing information about the illness, problem-solving, communication skills, and self-assertiveness – term first used by Anderson &amp; Hogarty (1980).</a:t>
+              <a:rPr lang="en-US" sz="1800" dirty="0">
+                <a:solidFill>
+                  <a:srgbClr val="000000"/>
+                </a:solidFill>
+                <a:latin typeface="Times New Roman"/>
+                <a:cs typeface="Times New Roman"/>
+              </a:rPr>
+              <a:t>A structured approach giving information about the illness, problem-solving, communication skills, and self-assertiveness training – term first used by Anderson &amp; Hogarty (1980).</a:t>
             </a:r>
           </a:p>
           <a:p>
@@ -5504,36 +5611,36 @@
               <a:buNone/>
             </a:pPr>
             <a:r>
-              <a:rPr lang="en-US" sz="1200" b="1" dirty="0">
+              <a:rPr lang="en-US" sz="2000" b="1" dirty="0">
                 <a:solidFill>
                   <a:srgbClr val="1F3864"/>
                 </a:solidFill>
                 <a:latin typeface="Times New Roman"/>
                 <a:cs typeface="Times New Roman"/>
               </a:rPr>
-              <a:t>Communication Training / Stress Management</a:t>
-            </a:r>
-          </a:p>
-          <a:p>
-            <a:pPr marL="285750" indent="-285750">
-              <a:spcBef>
-                <a:spcPts val="0"/>
-              </a:spcBef>
-              <a:spcAft>
-                <a:spcPts val="300"/>
-              </a:spcAft>
-              <a:buFont typeface="Arial"/>
-              <a:buChar char="•"/>
-            </a:pPr>
-            <a:r>
-              <a:rPr lang="en-US" sz="1200" dirty="0">
-                <a:solidFill>
-                  <a:srgbClr val="000000"/>
-                </a:solidFill>
-                <a:latin typeface="Times New Roman"/>
-                <a:cs typeface="Times New Roman"/>
-              </a:rPr>
-              <a:t>Skills-based components teaching caregivers effective communication and coping/stress-reduction strategies, delivered here through social case-work and group-work methods.</a:t>
+              <a:t>Communication Training &amp; Stress Management</a:t>
+            </a:r>
+          </a:p>
+          <a:p>
+            <a:pPr marL="285750" indent="-285750">
+              <a:spcBef>
+                <a:spcPts val="0"/>
+              </a:spcBef>
+              <a:spcAft>
+                <a:spcPts val="300"/>
+              </a:spcAft>
+              <a:buFont typeface="Arial"/>
+              <a:buChar char="•"/>
+            </a:pPr>
+            <a:r>
+              <a:rPr lang="en-US" sz="1800" dirty="0">
+                <a:solidFill>
+                  <a:srgbClr val="000000"/>
+                </a:solidFill>
+                <a:latin typeface="Times New Roman"/>
+                <a:cs typeface="Times New Roman"/>
+              </a:rPr>
+              <a:t>Skills-based components teaching effective caregiver communication and coping/stress-reduction, delivered via social case-work and group-work methods.</a:t>
             </a:r>
           </a:p>
         </p:txBody>
@@ -5569,7 +5676,7 @@
         <p:spPr>
           <a:xfrm>
             <a:off x="0" y="0"/>
-            <a:ext cx="12192000" cy="900000"/>
+            <a:ext cx="12192000" cy="1000000"/>
           </a:xfrm>
           <a:prstGeom prst="rect">
             <a:avLst/>
@@ -5591,7 +5698,7 @@
               <a:buNone/>
             </a:pPr>
             <a:r>
-              <a:rPr lang="en-US" sz="1400" b="1" dirty="0">
+              <a:rPr lang="en-US" sz="3000" b="1" dirty="0">
                 <a:solidFill>
                   <a:srgbClr val="FFFFFF"/>
                 </a:solidFill>
@@ -5611,8 +5718,8 @@
         </p:nvSpPr>
         <p:spPr>
           <a:xfrm>
-            <a:off x="685800" y="1050000"/>
-            <a:ext cx="10820400" cy="5600000"/>
+            <a:off x="685800" y="1150000"/>
+            <a:ext cx="10820400" cy="5500000"/>
           </a:xfrm>
           <a:prstGeom prst="rect">
             <a:avLst/>
@@ -5635,51 +5742,51 @@
               <a:buChar char="•"/>
             </a:pPr>
             <a:r>
-              <a:rPr lang="en-US" sz="1200" dirty="0">
-                <a:solidFill>
-                  <a:srgbClr val="000000"/>
-                </a:solidFill>
-                <a:latin typeface="Times New Roman"/>
-                <a:cs typeface="Times New Roman"/>
-              </a:rPr>
-              <a:t>EE has been studied largely in Western settings; family responses differ by culture, region, and language, so Western findings may not transfer directly to India.</a:t>
-            </a:r>
-          </a:p>
-          <a:p>
-            <a:pPr marL="285750" indent="-285750">
-              <a:spcBef>
-                <a:spcPts val="0"/>
-              </a:spcBef>
-              <a:spcAft>
-                <a:spcPts val="300"/>
-              </a:spcAft>
-              <a:buFont typeface="Arial"/>
-              <a:buChar char="•"/>
-            </a:pPr>
-            <a:r>
-              <a:rPr lang="en-US" sz="1200" dirty="0">
-                <a:solidFill>
-                  <a:srgbClr val="000000"/>
-                </a:solidFill>
-                <a:latin typeface="Times New Roman"/>
-                <a:cs typeface="Times New Roman"/>
-              </a:rPr>
-              <a:t>Existing Indian programmes were largely generic support-group or psychoeducation formats, not a structured, skill-based EE-reduction package.</a:t>
-            </a:r>
-          </a:p>
-          <a:p>
-            <a:pPr marL="285750" indent="-285750">
-              <a:spcBef>
-                <a:spcPts val="0"/>
-              </a:spcBef>
-              <a:spcAft>
-                <a:spcPts val="300"/>
-              </a:spcAft>
-              <a:buFont typeface="Arial"/>
-              <a:buChar char="•"/>
-            </a:pPr>
-            <a:r>
-              <a:rPr lang="en-US" sz="1200" dirty="0">
+              <a:rPr lang="en-US" sz="1800" dirty="0">
+                <a:solidFill>
+                  <a:srgbClr val="000000"/>
+                </a:solidFill>
+                <a:latin typeface="Times New Roman"/>
+                <a:cs typeface="Times New Roman"/>
+              </a:rPr>
+              <a:t>EE has been studied mostly in Western populations; family responses differ by culture, region, and language, so Western findings may not transfer to India.</a:t>
+            </a:r>
+          </a:p>
+          <a:p>
+            <a:pPr marL="285750" indent="-285750">
+              <a:spcBef>
+                <a:spcPts val="0"/>
+              </a:spcBef>
+              <a:spcAft>
+                <a:spcPts val="300"/>
+              </a:spcAft>
+              <a:buFont typeface="Arial"/>
+              <a:buChar char="•"/>
+            </a:pPr>
+            <a:r>
+              <a:rPr lang="en-US" sz="1800" dirty="0">
+                <a:solidFill>
+                  <a:srgbClr val="000000"/>
+                </a:solidFill>
+                <a:latin typeface="Times New Roman"/>
+                <a:cs typeface="Times New Roman"/>
+              </a:rPr>
+              <a:t>Existing Indian programmes were largely generic (support groups, general psychoeducation), not a structured, skill-based, EE-focused package.</a:t>
+            </a:r>
+          </a:p>
+          <a:p>
+            <a:pPr marL="285750" indent="-285750">
+              <a:spcBef>
+                <a:spcPts val="0"/>
+              </a:spcBef>
+              <a:spcAft>
+                <a:spcPts val="300"/>
+              </a:spcAft>
+              <a:buFont typeface="Arial"/>
+              <a:buChar char="•"/>
+            </a:pPr>
+            <a:r>
+              <a:rPr lang="en-US" sz="1800" dirty="0">
                 <a:solidFill>
                   <a:srgbClr val="000000"/>
                 </a:solidFill>
@@ -5701,36 +5808,36 @@
               <a:buChar char="•"/>
             </a:pPr>
             <a:r>
-              <a:rPr lang="en-US" sz="1200" dirty="0">
-                <a:solidFill>
-                  <a:srgbClr val="000000"/>
-                </a:solidFill>
-                <a:latin typeface="Times New Roman"/>
-                <a:cs typeface="Times New Roman"/>
-              </a:rPr>
-              <a:t>Unresolved questions in the literature: “Is high EE a significant predictor of relapse?” and “Is EE linked with caregiver’s knowledge about the illness?”</a:t>
-            </a:r>
-          </a:p>
-          <a:p>
-            <a:pPr marL="285750" indent="-285750">
-              <a:spcBef>
-                <a:spcPts val="0"/>
-              </a:spcBef>
-              <a:spcAft>
-                <a:spcPts val="300"/>
-              </a:spcAft>
-              <a:buFont typeface="Arial"/>
-              <a:buChar char="•"/>
-            </a:pPr>
-            <a:r>
-              <a:rPr lang="en-US" sz="1200" dirty="0">
-                <a:solidFill>
-                  <a:srgbClr val="000000"/>
-                </a:solidFill>
-                <a:latin typeface="Times New Roman"/>
-                <a:cs typeface="Times New Roman"/>
-              </a:rPr>
-              <a:t>Hence a culturally-appropriate, standardized family intervention needed to be developed and tested – the gap this study addresses.</a:t>
+              <a:rPr lang="en-US" sz="1800" dirty="0">
+                <a:solidFill>
+                  <a:srgbClr val="000000"/>
+                </a:solidFill>
+                <a:latin typeface="Times New Roman"/>
+                <a:cs typeface="Times New Roman"/>
+              </a:rPr>
+              <a:t>Unresolved questions in the literature: (a) Is high EE a significant predictor of relapse? (b) Is EE linked with the caregiver’s knowledge about the illness?</a:t>
+            </a:r>
+          </a:p>
+          <a:p>
+            <a:pPr marL="285750" indent="-285750">
+              <a:spcBef>
+                <a:spcPts val="0"/>
+              </a:spcBef>
+              <a:spcAft>
+                <a:spcPts val="300"/>
+              </a:spcAft>
+              <a:buFont typeface="Arial"/>
+              <a:buChar char="•"/>
+            </a:pPr>
+            <a:r>
+              <a:rPr lang="en-US" sz="1800" dirty="0">
+                <a:solidFill>
+                  <a:srgbClr val="000000"/>
+                </a:solidFill>
+                <a:latin typeface="Times New Roman"/>
+                <a:cs typeface="Times New Roman"/>
+              </a:rPr>
+              <a:t>Hence a culturally-appropriate, standardized, manualized family intervention needed to be developed and tested – the gap this study addresses.</a:t>
             </a:r>
           </a:p>
         </p:txBody>
@@ -5766,7 +5873,7 @@
         <p:spPr>
           <a:xfrm>
             <a:off x="0" y="0"/>
-            <a:ext cx="12192000" cy="900000"/>
+            <a:ext cx="12192000" cy="1000000"/>
           </a:xfrm>
           <a:prstGeom prst="rect">
             <a:avLst/>
@@ -5788,7 +5895,7 @@
               <a:buNone/>
             </a:pPr>
             <a:r>
-              <a:rPr lang="en-US" sz="1400" b="1" dirty="0">
+              <a:rPr lang="en-US" sz="3000" b="1" dirty="0">
                 <a:solidFill>
                   <a:srgbClr val="FFFFFF"/>
                 </a:solidFill>
@@ -5808,8 +5915,8 @@
         </p:nvSpPr>
         <p:spPr>
           <a:xfrm>
-            <a:off x="685800" y="1050000"/>
-            <a:ext cx="10820400" cy="5600000"/>
+            <a:off x="685800" y="1150000"/>
+            <a:ext cx="10820400" cy="5500000"/>
           </a:xfrm>
           <a:prstGeom prst="rect">
             <a:avLst/>
@@ -5832,7 +5939,7 @@
               <a:buChar char="•"/>
             </a:pPr>
             <a:r>
-              <a:rPr lang="en-US" sz="1200" dirty="0">
+              <a:rPr lang="en-US" sz="1800" dirty="0">
                 <a:solidFill>
                   <a:srgbClr val="000000"/>
                 </a:solidFill>
@@ -5854,80 +5961,80 @@
               <a:buChar char="•"/>
             </a:pPr>
             <a:r>
-              <a:rPr lang="en-US" sz="1200" dirty="0">
-                <a:solidFill>
-                  <a:srgbClr val="000000"/>
-                </a:solidFill>
-                <a:latin typeface="Times New Roman"/>
-                <a:cs typeface="Times New Roman"/>
-              </a:rPr>
-              <a:t>EE is modifiable – enhancing caregivers’ knowledge can lower EE and create a favourable rehabilitation environment.</a:t>
-            </a:r>
-          </a:p>
-          <a:p>
-            <a:pPr marL="285750" indent="-285750">
-              <a:spcBef>
-                <a:spcPts val="0"/>
-              </a:spcBef>
-              <a:spcAft>
-                <a:spcPts val="300"/>
-              </a:spcAft>
-              <a:buFont typeface="Arial"/>
-              <a:buChar char="•"/>
-            </a:pPr>
-            <a:r>
-              <a:rPr lang="en-US" sz="1200" dirty="0">
-                <a:solidFill>
-                  <a:srgbClr val="000000"/>
-                </a:solidFill>
-                <a:latin typeface="Times New Roman"/>
-                <a:cs typeface="Times New Roman"/>
-              </a:rPr>
-              <a:t>In India, families are the principal care providers, so equipping them is the most sustainable, culturally-relevant point of intervention.</a:t>
-            </a:r>
-          </a:p>
-          <a:p>
-            <a:pPr marL="285750" indent="-285750">
-              <a:spcBef>
-                <a:spcPts val="0"/>
-              </a:spcBef>
-              <a:spcAft>
-                <a:spcPts val="300"/>
-              </a:spcAft>
-              <a:buFont typeface="Arial"/>
-              <a:buChar char="•"/>
-            </a:pPr>
-            <a:r>
-              <a:rPr lang="en-US" sz="1200" dirty="0">
-                <a:solidFill>
-                  <a:srgbClr val="000000"/>
-                </a:solidFill>
-                <a:latin typeface="Times New Roman"/>
-                <a:cs typeface="Times New Roman"/>
-              </a:rPr>
-              <a:t>A structured skill-development package (vs. routine care) was expected to be more effective in reducing EE.</a:t>
-            </a:r>
-          </a:p>
-          <a:p>
-            <a:pPr marL="285750" indent="-285750">
-              <a:spcBef>
-                <a:spcPts val="0"/>
-              </a:spcBef>
-              <a:spcAft>
-                <a:spcPts val="300"/>
-              </a:spcAft>
-              <a:buFont typeface="Arial"/>
-              <a:buChar char="•"/>
-            </a:pPr>
-            <a:r>
-              <a:rPr lang="en-US" sz="1200" dirty="0">
-                <a:solidFill>
-                  <a:srgbClr val="000000"/>
-                </a:solidFill>
-                <a:latin typeface="Times New Roman"/>
-                <a:cs typeface="Times New Roman"/>
-              </a:rPr>
-              <a:t>Therefore, this study aimed to develop and evaluate a standardized family intervention to reduce EE among caregivers of persons with schizophrenia.</a:t>
+              <a:rPr lang="en-US" sz="1800" dirty="0">
+                <a:solidFill>
+                  <a:srgbClr val="000000"/>
+                </a:solidFill>
+                <a:latin typeface="Times New Roman"/>
+                <a:cs typeface="Times New Roman"/>
+              </a:rPr>
+              <a:t>EE is modifiable – enhancing caregivers’ knowledge and skills can lower EE and support rehabilitation.</a:t>
+            </a:r>
+          </a:p>
+          <a:p>
+            <a:pPr marL="285750" indent="-285750">
+              <a:spcBef>
+                <a:spcPts val="0"/>
+              </a:spcBef>
+              <a:spcAft>
+                <a:spcPts val="300"/>
+              </a:spcAft>
+              <a:buFont typeface="Arial"/>
+              <a:buChar char="•"/>
+            </a:pPr>
+            <a:r>
+              <a:rPr lang="en-US" sz="1800" dirty="0">
+                <a:solidFill>
+                  <a:srgbClr val="000000"/>
+                </a:solidFill>
+                <a:latin typeface="Times New Roman"/>
+                <a:cs typeface="Times New Roman"/>
+              </a:rPr>
+              <a:t>In India, families are the principal care providers, so equipping them is the most sustainable and culturally-relevant point of intervention.</a:t>
+            </a:r>
+          </a:p>
+          <a:p>
+            <a:pPr marL="285750" indent="-285750">
+              <a:spcBef>
+                <a:spcPts val="0"/>
+              </a:spcBef>
+              <a:spcAft>
+                <a:spcPts val="300"/>
+              </a:spcAft>
+              <a:buFont typeface="Arial"/>
+              <a:buChar char="•"/>
+            </a:pPr>
+            <a:r>
+              <a:rPr lang="en-US" sz="1800" dirty="0">
+                <a:solidFill>
+                  <a:srgbClr val="000000"/>
+                </a:solidFill>
+                <a:latin typeface="Times New Roman"/>
+                <a:cs typeface="Times New Roman"/>
+              </a:rPr>
+              <a:t>A structured skill-development package was expected to outperform routine care in reducing EE.</a:t>
+            </a:r>
+          </a:p>
+          <a:p>
+            <a:pPr marL="285750" indent="-285750">
+              <a:spcBef>
+                <a:spcPts val="0"/>
+              </a:spcBef>
+              <a:spcAft>
+                <a:spcPts val="300"/>
+              </a:spcAft>
+              <a:buFont typeface="Arial"/>
+              <a:buChar char="•"/>
+            </a:pPr>
+            <a:r>
+              <a:rPr lang="en-US" sz="1800" dirty="0">
+                <a:solidFill>
+                  <a:srgbClr val="000000"/>
+                </a:solidFill>
+                <a:latin typeface="Times New Roman"/>
+                <a:cs typeface="Times New Roman"/>
+              </a:rPr>
+              <a:t>Therefore, this study developed and evaluated a standardized family intervention to reduce EE among caregivers of persons with schizophrenia.</a:t>
             </a:r>
           </a:p>
         </p:txBody>

--- a/Family_Intervention_EE_Schizophrenia_JournalClub.pptx
+++ b/Family_Intervention_EE_Schizophrenia_JournalClub.pptx
@@ -33,6 +33,9 @@
     <p:sldId id="281" r:id="rId27"/>
     <p:sldId id="282" r:id="rId28"/>
     <p:sldId id="283" r:id="rId29"/>
+    <p:sldId id="284" r:id="rId30"/>
+    <p:sldId id="285" r:id="rId31"/>
+    <p:sldId id="286" r:id="rId32"/>
   </p:sldIdLst>
   <p:sldSz cx="12192000" cy="6858000"/>
   <p:notesSz cx="6858000" cy="9144000"/>
@@ -120,8 +123,8 @@
         </p:nvSpPr>
         <p:spPr>
           <a:xfrm>
-            <a:off x="914400" y="1400200"/>
-            <a:ext cx="10363200" cy="2800000"/>
+            <a:off x="762000" y="1200000"/>
+            <a:ext cx="10668000" cy="2600000"/>
           </a:xfrm>
           <a:prstGeom prst="rect">
             <a:avLst/>
@@ -140,7 +143,7 @@
               <a:buNone/>
             </a:pPr>
             <a:r>
-              <a:rPr lang="en-US" sz="4000" b="1" dirty="0">
+              <a:rPr lang="en-US" sz="3600" b="1" dirty="0">
                 <a:solidFill>
                   <a:srgbClr val="1F3864"/>
                 </a:solidFill>
@@ -160,8 +163,8 @@
         </p:nvSpPr>
         <p:spPr>
           <a:xfrm>
-            <a:off x="914400" y="4400000"/>
-            <a:ext cx="10363200" cy="2000000"/>
+            <a:off x="762000" y="3950000"/>
+            <a:ext cx="10668000" cy="2400000"/>
           </a:xfrm>
           <a:prstGeom prst="rect">
             <a:avLst/>
@@ -180,14 +183,32 @@
               <a:buNone/>
             </a:pPr>
             <a:r>
-              <a:rPr lang="en-US" sz="2000" dirty="0">
+              <a:rPr lang="en-US" sz="1800" b="1" dirty="0">
+                <a:solidFill>
+                  <a:srgbClr val="1F3864"/>
+                </a:solidFill>
+                <a:latin typeface="Times New Roman"/>
+                <a:cs typeface="Times New Roman"/>
+              </a:rPr>
+              <a:t>Published in: INDIAN JOURNAL OF PSYCHIATRY</a:t>
+            </a:r>
+          </a:p>
+          <a:p>
+            <a:pPr algn="ctr">
+              <a:spcAft>
+                <a:spcPts val="600"/>
+              </a:spcAft>
+              <a:buNone/>
+            </a:pPr>
+            <a:r>
+              <a:rPr lang="en-US" sz="1800" dirty="0">
                 <a:solidFill>
                   <a:srgbClr val="404040"/>
                 </a:solidFill>
                 <a:latin typeface="Times New Roman"/>
                 <a:cs typeface="Times New Roman"/>
               </a:rPr>
-              <a:t>Shetty K. V., Math S. B., Marimuthu P., Rawat V. S.</a:t>
+              <a:t>2023; 65(4): 453–459  ·  DOI: 10.4103/indianjpsychiatry.indianjpsychiatry_526_22</a:t>
             </a:r>
           </a:p>
           <a:p>
@@ -197,15 +218,23 @@
               </a:spcAft>
               <a:buNone/>
             </a:pPr>
-            <a:r>
-              <a:rPr lang="en-US" sz="2000" dirty="0">
+          </a:p>
+          <a:p>
+            <a:pPr algn="ctr">
+              <a:spcAft>
+                <a:spcPts val="600"/>
+              </a:spcAft>
+              <a:buNone/>
+            </a:pPr>
+            <a:r>
+              <a:rPr lang="en-US" sz="1800" dirty="0">
                 <a:solidFill>
                   <a:srgbClr val="404040"/>
                 </a:solidFill>
                 <a:latin typeface="Times New Roman"/>
                 <a:cs typeface="Times New Roman"/>
               </a:rPr>
-              <a:t>Indian Journal of Psychiatry, 2023; 65(4): 453–459</a:t>
+              <a:t>Authors: Shetty K. V., Math S. B., Marimuthu P., Rawat V. S.</a:t>
             </a:r>
           </a:p>
           <a:p>
@@ -215,16 +244,6 @@
               </a:spcAft>
               <a:buNone/>
             </a:pPr>
-            <a:r>
-              <a:rPr lang="en-US" sz="2000" dirty="0">
-                <a:solidFill>
-                  <a:srgbClr val="404040"/>
-                </a:solidFill>
-                <a:latin typeface="Times New Roman"/>
-                <a:cs typeface="Times New Roman"/>
-              </a:rPr>
-              <a:t>DOI: 10.4103/indianjpsychiatry.indianjpsychiatry_526_22</a:t>
-            </a:r>
           </a:p>
           <a:p>
             <a:pPr algn="ctr">
@@ -233,16 +252,8 @@
               </a:spcAft>
               <a:buNone/>
             </a:pPr>
-          </a:p>
-          <a:p>
-            <a:pPr algn="ctr">
-              <a:spcAft>
-                <a:spcPts val="600"/>
-              </a:spcAft>
-              <a:buNone/>
-            </a:pPr>
-            <a:r>
-              <a:rPr lang="en-US" sz="2000" dirty="0">
+            <a:r>
+              <a:rPr lang="en-US" sz="1800" dirty="0">
                 <a:solidFill>
                   <a:srgbClr val="404040"/>
                 </a:solidFill>
@@ -285,7 +296,7 @@
         <p:spPr>
           <a:xfrm>
             <a:off x="0" y="0"/>
-            <a:ext cx="12192000" cy="1000000"/>
+            <a:ext cx="12192000" cy="900000"/>
           </a:xfrm>
           <a:prstGeom prst="rect">
             <a:avLst/>
@@ -307,14 +318,14 @@
               <a:buNone/>
             </a:pPr>
             <a:r>
-              <a:rPr lang="en-US" sz="3000" b="1" dirty="0">
+              <a:rPr lang="en-US" sz="1800" b="1" dirty="0">
                 <a:solidFill>
                   <a:srgbClr val="FFFFFF"/>
                 </a:solidFill>
                 <a:latin typeface="Times New Roman"/>
                 <a:cs typeface="Times New Roman"/>
               </a:rPr>
-              <a:t>Aim &amp; Objectives</a:t>
+              <a:t>Aim, Objective &amp; Hypothesis</a:t>
             </a:r>
           </a:p>
         </p:txBody>
@@ -327,8 +338,8 @@
         </p:nvSpPr>
         <p:spPr>
           <a:xfrm>
-            <a:off x="685800" y="1150000"/>
-            <a:ext cx="10820400" cy="5500000"/>
+            <a:off x="685800" y="1050000"/>
+            <a:ext cx="10820400" cy="5650000"/>
           </a:xfrm>
           <a:prstGeom prst="rect">
             <a:avLst/>
@@ -350,7 +361,7 @@
               <a:buNone/>
             </a:pPr>
             <a:r>
-              <a:rPr lang="en-US" sz="2000" b="1" dirty="0">
+              <a:rPr lang="en-US" sz="1600" b="1" dirty="0">
                 <a:solidFill>
                   <a:srgbClr val="1F3864"/>
                 </a:solidFill>
@@ -372,7 +383,7 @@
               <a:buChar char="•"/>
             </a:pPr>
             <a:r>
-              <a:rPr lang="en-US" sz="1800" dirty="0">
+              <a:rPr lang="en-US" sz="1600" dirty="0">
                 <a:solidFill>
                   <a:srgbClr val="000000"/>
                 </a:solidFill>
@@ -393,102 +404,101 @@
               <a:buNone/>
             </a:pPr>
             <a:r>
-              <a:rPr lang="en-US" sz="2000" b="1" dirty="0">
+              <a:rPr lang="en-US" sz="1600" b="1" dirty="0">
                 <a:solidFill>
                   <a:srgbClr val="1F3864"/>
                 </a:solidFill>
                 <a:latin typeface="Times New Roman"/>
                 <a:cs typeface="Times New Roman"/>
               </a:rPr>
-              <a:t>Objectives</a:t>
-            </a:r>
-          </a:p>
-          <a:p>
-            <a:pPr marL="285750" indent="-285750">
-              <a:spcBef>
-                <a:spcPts val="0"/>
-              </a:spcBef>
-              <a:spcAft>
-                <a:spcPts val="300"/>
-              </a:spcAft>
-              <a:buFont typeface="Arial"/>
-              <a:buChar char="•"/>
-            </a:pPr>
-            <a:r>
-              <a:rPr lang="en-US" sz="1800" dirty="0">
-                <a:solidFill>
-                  <a:srgbClr val="000000"/>
-                </a:solidFill>
-                <a:latin typeface="Times New Roman"/>
-                <a:cs typeface="Times New Roman"/>
-              </a:rPr>
-              <a:t>1. To assess the level of EE (criticality &amp; emotional over-involvement) among caregivers.</a:t>
-            </a:r>
-          </a:p>
-          <a:p>
-            <a:pPr marL="285750" indent="-285750">
-              <a:spcBef>
-                <a:spcPts val="0"/>
-              </a:spcBef>
-              <a:spcAft>
-                <a:spcPts val="300"/>
-              </a:spcAft>
-              <a:buFont typeface="Arial"/>
-              <a:buChar char="•"/>
-            </a:pPr>
-            <a:r>
-              <a:rPr lang="en-US" sz="1800" dirty="0">
-                <a:solidFill>
-                  <a:srgbClr val="000000"/>
-                </a:solidFill>
-                <a:latin typeface="Times New Roman"/>
-                <a:cs typeface="Times New Roman"/>
-              </a:rPr>
-              <a:t>2. To deliver a standardized 10-session family intervention to the experimental group.</a:t>
-            </a:r>
-          </a:p>
-          <a:p>
-            <a:pPr marL="285750" indent="-285750">
-              <a:spcBef>
-                <a:spcPts val="0"/>
-              </a:spcBef>
-              <a:spcAft>
-                <a:spcPts val="300"/>
-              </a:spcAft>
-              <a:buFont typeface="Arial"/>
-              <a:buChar char="•"/>
-            </a:pPr>
-            <a:r>
-              <a:rPr lang="en-US" sz="1800" dirty="0">
-                <a:solidFill>
-                  <a:srgbClr val="000000"/>
-                </a:solidFill>
-                <a:latin typeface="Times New Roman"/>
-                <a:cs typeface="Times New Roman"/>
-              </a:rPr>
-              <a:t>3. To compare pre-test &amp; post-test EE scores within and between the experimental and control (TAU) groups.</a:t>
-            </a:r>
-          </a:p>
-          <a:p>
-            <a:pPr marL="285750" indent="-285750">
-              <a:spcBef>
-                <a:spcPts val="0"/>
-              </a:spcBef>
-              <a:spcAft>
-                <a:spcPts val="300"/>
-              </a:spcAft>
-              <a:buFont typeface="Arial"/>
-              <a:buChar char="•"/>
-            </a:pPr>
-            <a:r>
-              <a:rPr lang="en-US" sz="1800" dirty="0">
-                <a:solidFill>
-                  <a:srgbClr val="000000"/>
-                </a:solidFill>
-                <a:latin typeface="Times New Roman"/>
-                <a:cs typeface="Times New Roman"/>
-              </a:rPr>
-              <a:t>4. To evaluate the effectiveness of the family intervention in reducing EE.</a:t>
+              <a:t>Objective</a:t>
+            </a:r>
+          </a:p>
+          <a:p>
+            <a:pPr marL="285750" indent="-285750">
+              <a:spcBef>
+                <a:spcPts val="0"/>
+              </a:spcBef>
+              <a:spcAft>
+                <a:spcPts val="300"/>
+              </a:spcAft>
+              <a:buFont typeface="Arial"/>
+              <a:buChar char="•"/>
+            </a:pPr>
+            <a:r>
+              <a:rPr lang="en-US" sz="1600" dirty="0">
+                <a:solidFill>
+                  <a:srgbClr val="000000"/>
+                </a:solidFill>
+                <a:latin typeface="Times New Roman"/>
+                <a:cs typeface="Times New Roman"/>
+              </a:rPr>
+              <a:t>To evaluate whether a standardized family-intervention programme reduces Expressed Emotion in caregivers, compared with treatment as usual.</a:t>
+            </a:r>
+          </a:p>
+          <a:p>
+            <a:pPr marL="0" indent="0">
+              <a:spcBef>
+                <a:spcPts val="300"/>
+              </a:spcBef>
+              <a:spcAft>
+                <a:spcPts val="150"/>
+              </a:spcAft>
+              <a:buNone/>
+            </a:pPr>
+            <a:r>
+              <a:rPr lang="en-US" sz="1600" b="1" dirty="0">
+                <a:solidFill>
+                  <a:srgbClr val="1F3864"/>
+                </a:solidFill>
+                <a:latin typeface="Times New Roman"/>
+                <a:cs typeface="Times New Roman"/>
+              </a:rPr>
+              <a:t>Hypothesis</a:t>
+            </a:r>
+          </a:p>
+          <a:p>
+            <a:pPr marL="285750" indent="-285750">
+              <a:spcBef>
+                <a:spcPts val="0"/>
+              </a:spcBef>
+              <a:spcAft>
+                <a:spcPts val="300"/>
+              </a:spcAft>
+              <a:buFont typeface="Arial"/>
+              <a:buChar char="•"/>
+            </a:pPr>
+            <a:r>
+              <a:rPr lang="en-US" sz="1600" dirty="0">
+                <a:solidFill>
+                  <a:srgbClr val="000000"/>
+                </a:solidFill>
+                <a:latin typeface="Times New Roman"/>
+                <a:cs typeface="Times New Roman"/>
+              </a:rPr>
+              <a:t>Caregivers who receive the family intervention will show a significantly greater reduction in Expressed Emotion than caregivers receiving treatment as usual.</a:t>
+            </a:r>
+          </a:p>
+          <a:p>
+            <a:pPr marL="571500" indent="-228600">
+              <a:spcBef>
+                <a:spcPts val="0"/>
+              </a:spcBef>
+              <a:spcAft>
+                <a:spcPts val="300"/>
+              </a:spcAft>
+              <a:buFont typeface="Arial"/>
+              <a:buChar char="–"/>
+            </a:pPr>
+            <a:r>
+              <a:rPr lang="en-US" sz="1600" i="1" dirty="0">
+                <a:solidFill>
+                  <a:srgbClr val="333333"/>
+                </a:solidFill>
+                <a:latin typeface="Times New Roman"/>
+                <a:cs typeface="Times New Roman"/>
+              </a:rPr>
+              <a:t>Note: the original paper states an Aim; the objective and hypothesis are framed from that aim for the presentation.</a:t>
             </a:r>
           </a:p>
         </p:txBody>
@@ -524,7 +534,7 @@
         <p:spPr>
           <a:xfrm>
             <a:off x="0" y="0"/>
-            <a:ext cx="12192000" cy="1000000"/>
+            <a:ext cx="12192000" cy="900000"/>
           </a:xfrm>
           <a:prstGeom prst="rect">
             <a:avLst/>
@@ -546,14 +556,14 @@
               <a:buNone/>
             </a:pPr>
             <a:r>
-              <a:rPr lang="en-US" sz="3000" b="1" dirty="0">
+              <a:rPr lang="en-US" sz="1800" b="1" dirty="0">
                 <a:solidFill>
                   <a:srgbClr val="FFFFFF"/>
                 </a:solidFill>
                 <a:latin typeface="Times New Roman"/>
                 <a:cs typeface="Times New Roman"/>
               </a:rPr>
-              <a:t>Hypotheses</a:t>
+              <a:t>Study Design &amp; Setting</a:t>
             </a:r>
           </a:p>
         </p:txBody>
@@ -566,8 +576,8 @@
         </p:nvSpPr>
         <p:spPr>
           <a:xfrm>
-            <a:off x="685800" y="1150000"/>
-            <a:ext cx="10820400" cy="5500000"/>
+            <a:off x="685800" y="1050000"/>
+            <a:ext cx="10820400" cy="5650000"/>
           </a:xfrm>
           <a:prstGeom prst="rect">
             <a:avLst/>
@@ -589,36 +599,36 @@
               <a:buNone/>
             </a:pPr>
             <a:r>
-              <a:rPr lang="en-US" sz="2000" b="1" dirty="0">
+              <a:rPr lang="en-US" sz="1600" b="1" dirty="0">
                 <a:solidFill>
                   <a:srgbClr val="1F3864"/>
                 </a:solidFill>
                 <a:latin typeface="Times New Roman"/>
                 <a:cs typeface="Times New Roman"/>
               </a:rPr>
-              <a:t>Research Hypothesis (H1)</a:t>
-            </a:r>
-          </a:p>
-          <a:p>
-            <a:pPr marL="285750" indent="-285750">
-              <a:spcBef>
-                <a:spcPts val="0"/>
-              </a:spcBef>
-              <a:spcAft>
-                <a:spcPts val="300"/>
-              </a:spcAft>
-              <a:buFont typeface="Arial"/>
-              <a:buChar char="•"/>
-            </a:pPr>
-            <a:r>
-              <a:rPr lang="en-US" sz="1800" dirty="0">
-                <a:solidFill>
-                  <a:srgbClr val="000000"/>
-                </a:solidFill>
-                <a:latin typeface="Times New Roman"/>
-                <a:cs typeface="Times New Roman"/>
-              </a:rPr>
-              <a:t>There is a significant difference in EE scores between the experimental and control groups after the family intervention.</a:t>
+              <a:t>Design</a:t>
+            </a:r>
+          </a:p>
+          <a:p>
+            <a:pPr marL="285750" indent="-285750">
+              <a:spcBef>
+                <a:spcPts val="0"/>
+              </a:spcBef>
+              <a:spcAft>
+                <a:spcPts val="300"/>
+              </a:spcAft>
+              <a:buFont typeface="Arial"/>
+              <a:buChar char="•"/>
+            </a:pPr>
+            <a:r>
+              <a:rPr lang="en-US" sz="1600" dirty="0">
+                <a:solidFill>
+                  <a:srgbClr val="000000"/>
+                </a:solidFill>
+                <a:latin typeface="Times New Roman"/>
+                <a:cs typeface="Times New Roman"/>
+              </a:rPr>
+              <a:t>Experimental research design – a randomized, two-arm (parallel-group) controlled trial with pre-test / post-test assessment of both groups.</a:t>
             </a:r>
           </a:p>
           <a:p>
@@ -632,36 +642,36 @@
               <a:buNone/>
             </a:pPr>
             <a:r>
-              <a:rPr lang="en-US" sz="2000" b="1" dirty="0">
+              <a:rPr lang="en-US" sz="1600" b="1" dirty="0">
                 <a:solidFill>
                   <a:srgbClr val="1F3864"/>
                 </a:solidFill>
                 <a:latin typeface="Times New Roman"/>
                 <a:cs typeface="Times New Roman"/>
               </a:rPr>
-              <a:t>Directional Hypothesis</a:t>
-            </a:r>
-          </a:p>
-          <a:p>
-            <a:pPr marL="285750" indent="-285750">
-              <a:spcBef>
-                <a:spcPts val="0"/>
-              </a:spcBef>
-              <a:spcAft>
-                <a:spcPts val="300"/>
-              </a:spcAft>
-              <a:buFont typeface="Arial"/>
-              <a:buChar char="•"/>
-            </a:pPr>
-            <a:r>
-              <a:rPr lang="en-US" sz="1800" dirty="0">
-                <a:solidFill>
-                  <a:srgbClr val="000000"/>
-                </a:solidFill>
-                <a:latin typeface="Times New Roman"/>
-                <a:cs typeface="Times New Roman"/>
-              </a:rPr>
-              <a:t>Caregivers who receive the family intervention will show a significantly greater reduction in EE (criticality &amp; emotional over-involvement) than caregivers receiving treatment as usual.</a:t>
+              <a:t>Setting &amp; duration</a:t>
+            </a:r>
+          </a:p>
+          <a:p>
+            <a:pPr marL="285750" indent="-285750">
+              <a:spcBef>
+                <a:spcPts val="0"/>
+              </a:spcBef>
+              <a:spcAft>
+                <a:spcPts val="300"/>
+              </a:spcAft>
+              <a:buFont typeface="Arial"/>
+              <a:buChar char="•"/>
+            </a:pPr>
+            <a:r>
+              <a:rPr lang="en-US" sz="1600" dirty="0">
+                <a:solidFill>
+                  <a:srgbClr val="000000"/>
+                </a:solidFill>
+                <a:latin typeface="Times New Roman"/>
+                <a:cs typeface="Times New Roman"/>
+              </a:rPr>
+              <a:t>In-patient wards, NIMHANS, Bengaluru, India; September 2014 – November 2014.</a:t>
             </a:r>
           </a:p>
           <a:p>
@@ -675,58 +685,36 @@
               <a:buNone/>
             </a:pPr>
             <a:r>
-              <a:rPr lang="en-US" sz="2000" b="1" dirty="0">
+              <a:rPr lang="en-US" sz="1600" b="1" dirty="0">
                 <a:solidFill>
                   <a:srgbClr val="1F3864"/>
                 </a:solidFill>
                 <a:latin typeface="Times New Roman"/>
                 <a:cs typeface="Times New Roman"/>
               </a:rPr>
-              <a:t>Null Hypothesis (H0)</a:t>
-            </a:r>
-          </a:p>
-          <a:p>
-            <a:pPr marL="285750" indent="-285750">
-              <a:spcBef>
-                <a:spcPts val="0"/>
-              </a:spcBef>
-              <a:spcAft>
-                <a:spcPts val="300"/>
-              </a:spcAft>
-              <a:buFont typeface="Arial"/>
-              <a:buChar char="•"/>
-            </a:pPr>
-            <a:r>
-              <a:rPr lang="en-US" sz="1800" dirty="0">
-                <a:solidFill>
-                  <a:srgbClr val="000000"/>
-                </a:solidFill>
-                <a:latin typeface="Times New Roman"/>
-                <a:cs typeface="Times New Roman"/>
-              </a:rPr>
-              <a:t>There is no significant difference in EE scores between the experimental and control groups; the family intervention has no effect on EE.</a:t>
-            </a:r>
-          </a:p>
-          <a:p>
-            <a:pPr marL="571500" indent="-228600">
-              <a:spcBef>
-                <a:spcPts val="0"/>
-              </a:spcBef>
-              <a:spcAft>
-                <a:spcPts val="300"/>
-              </a:spcAft>
-              <a:buFont typeface="Arial"/>
-              <a:buChar char="–"/>
-            </a:pPr>
-            <a:r>
-              <a:rPr lang="en-US" sz="1800" i="1" dirty="0">
-                <a:solidFill>
-                  <a:srgbClr val="333333"/>
-                </a:solidFill>
-                <a:latin typeface="Times New Roman"/>
-                <a:cs typeface="Times New Roman"/>
-              </a:rPr>
-              <a:t>Note: the original paper states an Aim; these hypotheses are framed from that aim for the journal-club presentation.</a:t>
+              <a:t>Randomization &amp; blinding</a:t>
+            </a:r>
+          </a:p>
+          <a:p>
+            <a:pPr marL="285750" indent="-285750">
+              <a:spcBef>
+                <a:spcPts val="0"/>
+              </a:spcBef>
+              <a:spcAft>
+                <a:spcPts val="300"/>
+              </a:spcAft>
+              <a:buFont typeface="Arial"/>
+              <a:buChar char="•"/>
+            </a:pPr>
+            <a:r>
+              <a:rPr lang="en-US" sz="1600" dirty="0">
+                <a:solidFill>
+                  <a:srgbClr val="000000"/>
+                </a:solidFill>
+                <a:latin typeface="Times New Roman"/>
+                <a:cs typeface="Times New Roman"/>
+              </a:rPr>
+              <a:t>Random allocation via computer-generated list, concealed until assignment; two trained blind raters (Social Work &amp; Psychology postgraduates) assessed outcomes.</a:t>
             </a:r>
           </a:p>
         </p:txBody>
@@ -762,7 +750,7 @@
         <p:spPr>
           <a:xfrm>
             <a:off x="0" y="0"/>
-            <a:ext cx="12192000" cy="1000000"/>
+            <a:ext cx="12192000" cy="900000"/>
           </a:xfrm>
           <a:prstGeom prst="rect">
             <a:avLst/>
@@ -784,14 +772,14 @@
               <a:buNone/>
             </a:pPr>
             <a:r>
-              <a:rPr lang="en-US" sz="3000" b="1" dirty="0">
+              <a:rPr lang="en-US" sz="1800" b="1" dirty="0">
                 <a:solidFill>
                   <a:srgbClr val="FFFFFF"/>
                 </a:solidFill>
                 <a:latin typeface="Times New Roman"/>
                 <a:cs typeface="Times New Roman"/>
               </a:rPr>
-              <a:t>Study Design &amp; Setting</a:t>
+              <a:t>Participants (Sample)</a:t>
             </a:r>
           </a:p>
         </p:txBody>
@@ -804,8 +792,8 @@
         </p:nvSpPr>
         <p:spPr>
           <a:xfrm>
-            <a:off x="685800" y="1150000"/>
-            <a:ext cx="10820400" cy="5500000"/>
+            <a:off x="685800" y="1050000"/>
+            <a:ext cx="10820400" cy="5650000"/>
           </a:xfrm>
           <a:prstGeom prst="rect">
             <a:avLst/>
@@ -817,154 +805,113 @@
           </a:bodyPr>
           <a:lstStyle/>
           <a:p>
-            <a:pPr marL="0" indent="0">
-              <a:spcBef>
-                <a:spcPts val="300"/>
-              </a:spcBef>
-              <a:spcAft>
-                <a:spcPts val="150"/>
-              </a:spcAft>
-              <a:buNone/>
-            </a:pPr>
-            <a:r>
-              <a:rPr lang="en-US" sz="2000" b="1" dirty="0">
-                <a:solidFill>
-                  <a:srgbClr val="1F3864"/>
-                </a:solidFill>
-                <a:latin typeface="Times New Roman"/>
-                <a:cs typeface="Times New Roman"/>
-              </a:rPr>
-              <a:t>Design</a:t>
-            </a:r>
-          </a:p>
-          <a:p>
-            <a:pPr marL="285750" indent="-285750">
-              <a:spcBef>
-                <a:spcPts val="0"/>
-              </a:spcBef>
-              <a:spcAft>
-                <a:spcPts val="300"/>
-              </a:spcAft>
-              <a:buFont typeface="Arial"/>
-              <a:buChar char="•"/>
-            </a:pPr>
-            <a:r>
-              <a:rPr lang="en-US" sz="1800" dirty="0">
-                <a:solidFill>
-                  <a:srgbClr val="000000"/>
-                </a:solidFill>
-                <a:latin typeface="Times New Roman"/>
-                <a:cs typeface="Times New Roman"/>
-              </a:rPr>
-              <a:t>Experimental research design – a randomized, two-arm (parallel-group) controlled trial with pre-test / post-test assessment of both groups.</a:t>
-            </a:r>
-          </a:p>
-          <a:p>
-            <a:pPr marL="0" indent="0">
-              <a:spcBef>
-                <a:spcPts val="300"/>
-              </a:spcBef>
-              <a:spcAft>
-                <a:spcPts val="150"/>
-              </a:spcAft>
-              <a:buNone/>
-            </a:pPr>
-            <a:r>
-              <a:rPr lang="en-US" sz="2000" b="1" dirty="0">
-                <a:solidFill>
-                  <a:srgbClr val="1F3864"/>
-                </a:solidFill>
-                <a:latin typeface="Times New Roman"/>
-                <a:cs typeface="Times New Roman"/>
-              </a:rPr>
-              <a:t>Setting &amp; duration</a:t>
-            </a:r>
-          </a:p>
-          <a:p>
-            <a:pPr marL="285750" indent="-285750">
-              <a:spcBef>
-                <a:spcPts val="0"/>
-              </a:spcBef>
-              <a:spcAft>
-                <a:spcPts val="300"/>
-              </a:spcAft>
-              <a:buFont typeface="Arial"/>
-              <a:buChar char="•"/>
-            </a:pPr>
-            <a:r>
-              <a:rPr lang="en-US" sz="1800" dirty="0">
-                <a:solidFill>
-                  <a:srgbClr val="000000"/>
-                </a:solidFill>
-                <a:latin typeface="Times New Roman"/>
-                <a:cs typeface="Times New Roman"/>
-              </a:rPr>
-              <a:t>In-patient wards, NIMHANS, Bengaluru, India; September 2014 – November 2014.</a:t>
-            </a:r>
-          </a:p>
-          <a:p>
-            <a:pPr marL="0" indent="0">
-              <a:spcBef>
-                <a:spcPts val="300"/>
-              </a:spcBef>
-              <a:spcAft>
-                <a:spcPts val="150"/>
-              </a:spcAft>
-              <a:buNone/>
-            </a:pPr>
-            <a:r>
-              <a:rPr lang="en-US" sz="2000" b="1" dirty="0">
-                <a:solidFill>
-                  <a:srgbClr val="1F3864"/>
-                </a:solidFill>
-                <a:latin typeface="Times New Roman"/>
-                <a:cs typeface="Times New Roman"/>
-              </a:rPr>
-              <a:t>Randomization &amp; blinding</a:t>
-            </a:r>
-          </a:p>
-          <a:p>
-            <a:pPr marL="285750" indent="-285750">
-              <a:spcBef>
-                <a:spcPts val="0"/>
-              </a:spcBef>
-              <a:spcAft>
-                <a:spcPts val="300"/>
-              </a:spcAft>
-              <a:buFont typeface="Arial"/>
-              <a:buChar char="•"/>
-            </a:pPr>
-            <a:r>
-              <a:rPr lang="en-US" sz="1800" dirty="0">
-                <a:solidFill>
-                  <a:srgbClr val="000000"/>
-                </a:solidFill>
-                <a:latin typeface="Times New Roman"/>
-                <a:cs typeface="Times New Roman"/>
-              </a:rPr>
-              <a:t>Caregivers randomly allocated to experimental or control (TAU) group using a computer-generated random list; allocation concealed until assignment.</a:t>
-            </a:r>
-          </a:p>
-          <a:p>
-            <a:pPr marL="285750" indent="-285750">
-              <a:spcBef>
-                <a:spcPts val="0"/>
-              </a:spcBef>
-              <a:spcAft>
-                <a:spcPts val="300"/>
-              </a:spcAft>
-              <a:buFont typeface="Arial"/>
-              <a:buChar char="•"/>
-            </a:pPr>
-            <a:r>
-              <a:rPr lang="en-US" sz="1800" dirty="0">
-                <a:solidFill>
-                  <a:srgbClr val="000000"/>
-                </a:solidFill>
-                <a:latin typeface="Times New Roman"/>
-                <a:cs typeface="Times New Roman"/>
-              </a:rPr>
-              <a:t>Two blind raters (postgraduates in Social Work &amp; Psychology, &gt;5 years’ experience) trained for 2 days assessed outcomes.</a:t>
+            <a:pPr marL="285750" indent="-285750">
+              <a:spcBef>
+                <a:spcPts val="0"/>
+              </a:spcBef>
+              <a:spcAft>
+                <a:spcPts val="300"/>
+              </a:spcAft>
+              <a:buFont typeface="Arial"/>
+              <a:buChar char="•"/>
+            </a:pPr>
+            <a:r>
+              <a:rPr lang="en-US" sz="1600" dirty="0">
+                <a:solidFill>
+                  <a:srgbClr val="000000"/>
+                </a:solidFill>
+                <a:latin typeface="Times New Roman"/>
+                <a:cs typeface="Times New Roman"/>
+              </a:rPr>
+              <a:t>Total sample: 80 caregivers of persons with schizophrenia.</a:t>
+            </a:r>
+          </a:p>
+          <a:p>
+            <a:pPr marL="285750" indent="-285750">
+              <a:spcBef>
+                <a:spcPts val="0"/>
+              </a:spcBef>
+              <a:spcAft>
+                <a:spcPts val="300"/>
+              </a:spcAft>
+              <a:buFont typeface="Arial"/>
+              <a:buChar char="•"/>
+            </a:pPr>
+            <a:r>
+              <a:rPr lang="en-US" sz="1600" dirty="0">
+                <a:solidFill>
+                  <a:srgbClr val="000000"/>
+                </a:solidFill>
+                <a:latin typeface="Times New Roman"/>
+                <a:cs typeface="Times New Roman"/>
+              </a:rPr>
+              <a:t>Experimental (intervention) group: 40 caregivers.</a:t>
+            </a:r>
+          </a:p>
+          <a:p>
+            <a:pPr marL="285750" indent="-285750">
+              <a:spcBef>
+                <a:spcPts val="0"/>
+              </a:spcBef>
+              <a:spcAft>
+                <a:spcPts val="300"/>
+              </a:spcAft>
+              <a:buFont typeface="Arial"/>
+              <a:buChar char="•"/>
+            </a:pPr>
+            <a:r>
+              <a:rPr lang="en-US" sz="1600" dirty="0">
+                <a:solidFill>
+                  <a:srgbClr val="000000"/>
+                </a:solidFill>
+                <a:latin typeface="Times New Roman"/>
+                <a:cs typeface="Times New Roman"/>
+              </a:rPr>
+              <a:t>Control (treatment-as-usual, TAU) group: 40 caregivers.</a:t>
+            </a:r>
+          </a:p>
+          <a:p>
+            <a:pPr marL="285750" indent="-285750">
+              <a:spcBef>
+                <a:spcPts val="0"/>
+              </a:spcBef>
+              <a:spcAft>
+                <a:spcPts val="300"/>
+              </a:spcAft>
+              <a:buFont typeface="Arial"/>
+              <a:buChar char="•"/>
+            </a:pPr>
+            <a:r>
+              <a:rPr lang="en-US" sz="1600" dirty="0">
+                <a:solidFill>
+                  <a:srgbClr val="000000"/>
+                </a:solidFill>
+                <a:latin typeface="Times New Roman"/>
+                <a:cs typeface="Times New Roman"/>
+              </a:rPr>
+              <a:t>Recruitment: ICD-10 case files screened → diagnosis &amp; stay confirmed with treating psychiatrist → patient screened with MINI for comorbidity → informed consent.</a:t>
+            </a:r>
+          </a:p>
+          <a:p>
+            <a:pPr marL="571500" indent="-228600">
+              <a:spcBef>
+                <a:spcPts val="0"/>
+              </a:spcBef>
+              <a:spcAft>
+                <a:spcPts val="300"/>
+              </a:spcAft>
+              <a:buFont typeface="Arial"/>
+              <a:buChar char="–"/>
+            </a:pPr>
+            <a:r>
+              <a:rPr lang="en-US" sz="1600" i="1" dirty="0">
+                <a:solidFill>
+                  <a:srgbClr val="333333"/>
+                </a:solidFill>
+                <a:latin typeface="Times New Roman"/>
+                <a:cs typeface="Times New Roman"/>
+              </a:rPr>
+              <a:t>Some post-test analyses report n = 32 (control) and n = 33 (experimental), indicating attrition.</a:t>
             </a:r>
           </a:p>
         </p:txBody>
@@ -1000,7 +947,7 @@
         <p:spPr>
           <a:xfrm>
             <a:off x="0" y="0"/>
-            <a:ext cx="12192000" cy="1000000"/>
+            <a:ext cx="12192000" cy="900000"/>
           </a:xfrm>
           <a:prstGeom prst="rect">
             <a:avLst/>
@@ -1022,14 +969,14 @@
               <a:buNone/>
             </a:pPr>
             <a:r>
-              <a:rPr lang="en-US" sz="3000" b="1" dirty="0">
+              <a:rPr lang="en-US" sz="1800" b="1" dirty="0">
                 <a:solidFill>
                   <a:srgbClr val="FFFFFF"/>
                 </a:solidFill>
                 <a:latin typeface="Times New Roman"/>
                 <a:cs typeface="Times New Roman"/>
               </a:rPr>
-              <a:t>Participants (Sample)</a:t>
+              <a:t>Eligibility: Inclusion Criteria</a:t>
             </a:r>
           </a:p>
         </p:txBody>
@@ -1042,8 +989,8 @@
         </p:nvSpPr>
         <p:spPr>
           <a:xfrm>
-            <a:off x="685800" y="1150000"/>
-            <a:ext cx="10820400" cy="5500000"/>
+            <a:off x="685800" y="1050000"/>
+            <a:ext cx="10820400" cy="5650000"/>
           </a:xfrm>
           <a:prstGeom prst="rect">
             <a:avLst/>
@@ -1066,102 +1013,124 @@
               <a:buChar char="•"/>
             </a:pPr>
             <a:r>
-              <a:rPr lang="en-US" sz="1800" dirty="0">
-                <a:solidFill>
-                  <a:srgbClr val="000000"/>
-                </a:solidFill>
-                <a:latin typeface="Times New Roman"/>
-                <a:cs typeface="Times New Roman"/>
-              </a:rPr>
-              <a:t>Total sample: 80 caregivers of persons with schizophrenia.</a:t>
-            </a:r>
-          </a:p>
-          <a:p>
-            <a:pPr marL="285750" indent="-285750">
-              <a:spcBef>
-                <a:spcPts val="0"/>
-              </a:spcBef>
-              <a:spcAft>
-                <a:spcPts val="300"/>
-              </a:spcAft>
-              <a:buFont typeface="Arial"/>
-              <a:buChar char="•"/>
-            </a:pPr>
-            <a:r>
-              <a:rPr lang="en-US" sz="1800" dirty="0">
-                <a:solidFill>
-                  <a:srgbClr val="000000"/>
-                </a:solidFill>
-                <a:latin typeface="Times New Roman"/>
-                <a:cs typeface="Times New Roman"/>
-              </a:rPr>
-              <a:t>Experimental (intervention) group: 40 caregivers.</a:t>
-            </a:r>
-          </a:p>
-          <a:p>
-            <a:pPr marL="285750" indent="-285750">
-              <a:spcBef>
-                <a:spcPts val="0"/>
-              </a:spcBef>
-              <a:spcAft>
-                <a:spcPts val="300"/>
-              </a:spcAft>
-              <a:buFont typeface="Arial"/>
-              <a:buChar char="•"/>
-            </a:pPr>
-            <a:r>
-              <a:rPr lang="en-US" sz="1800" dirty="0">
-                <a:solidFill>
-                  <a:srgbClr val="000000"/>
-                </a:solidFill>
-                <a:latin typeface="Times New Roman"/>
-                <a:cs typeface="Times New Roman"/>
-              </a:rPr>
-              <a:t>Control (treatment-as-usual, TAU) group: 40 caregivers.</a:t>
-            </a:r>
-          </a:p>
-          <a:p>
-            <a:pPr marL="285750" indent="-285750">
-              <a:spcBef>
-                <a:spcPts val="0"/>
-              </a:spcBef>
-              <a:spcAft>
-                <a:spcPts val="300"/>
-              </a:spcAft>
-              <a:buFont typeface="Arial"/>
-              <a:buChar char="•"/>
-            </a:pPr>
-            <a:r>
-              <a:rPr lang="en-US" sz="1800" dirty="0">
-                <a:solidFill>
-                  <a:srgbClr val="000000"/>
-                </a:solidFill>
-                <a:latin typeface="Times New Roman"/>
-                <a:cs typeface="Times New Roman"/>
-              </a:rPr>
-              <a:t>Recruitment: case files screened by ICD-10 diagnosis → diagnosis &amp; in-patient stay confirmed with the treating psychiatrist → patient screened with MINI to exclude comorbidity → informed consent obtained.</a:t>
-            </a:r>
-          </a:p>
-          <a:p>
-            <a:pPr marL="571500" indent="-228600">
-              <a:spcBef>
-                <a:spcPts val="0"/>
-              </a:spcBef>
-              <a:spcAft>
-                <a:spcPts val="300"/>
-              </a:spcAft>
-              <a:buFont typeface="Arial"/>
-              <a:buChar char="–"/>
-            </a:pPr>
-            <a:r>
-              <a:rPr lang="en-US" sz="1800" i="1" dirty="0">
-                <a:solidFill>
-                  <a:srgbClr val="333333"/>
-                </a:solidFill>
-                <a:latin typeface="Times New Roman"/>
-                <a:cs typeface="Times New Roman"/>
-              </a:rPr>
-              <a:t>Note: some post-test analyses report n = 32 (control) and n = 33 (experimental), indicating attrition from the original 40 + 40.</a:t>
+              <a:rPr lang="en-US" sz="1600" dirty="0">
+                <a:solidFill>
+                  <a:srgbClr val="000000"/>
+                </a:solidFill>
+                <a:latin typeface="Times New Roman"/>
+                <a:cs typeface="Times New Roman"/>
+              </a:rPr>
+              <a:t>Caregiver living with the patient and actively providing care.</a:t>
+            </a:r>
+          </a:p>
+          <a:p>
+            <a:pPr marL="285750" indent="-285750">
+              <a:spcBef>
+                <a:spcPts val="0"/>
+              </a:spcBef>
+              <a:spcAft>
+                <a:spcPts val="300"/>
+              </a:spcAft>
+              <a:buFont typeface="Arial"/>
+              <a:buChar char="•"/>
+            </a:pPr>
+            <a:r>
+              <a:rPr lang="en-US" sz="1600" dirty="0">
+                <a:solidFill>
+                  <a:srgbClr val="000000"/>
+                </a:solidFill>
+                <a:latin typeface="Times New Roman"/>
+                <a:cs typeface="Times New Roman"/>
+              </a:rPr>
+              <a:t>Aged 18 years or more.</a:t>
+            </a:r>
+          </a:p>
+          <a:p>
+            <a:pPr marL="285750" indent="-285750">
+              <a:spcBef>
+                <a:spcPts val="0"/>
+              </a:spcBef>
+              <a:spcAft>
+                <a:spcPts val="300"/>
+              </a:spcAft>
+              <a:buFont typeface="Arial"/>
+              <a:buChar char="•"/>
+            </a:pPr>
+            <a:r>
+              <a:rPr lang="en-US" sz="1600" dirty="0">
+                <a:solidFill>
+                  <a:srgbClr val="000000"/>
+                </a:solidFill>
+                <a:latin typeface="Times New Roman"/>
+                <a:cs typeface="Times New Roman"/>
+              </a:rPr>
+              <a:t>Duration of the patient’s illness between 1 and 5 years.</a:t>
+            </a:r>
+          </a:p>
+          <a:p>
+            <a:pPr marL="285750" indent="-285750">
+              <a:spcBef>
+                <a:spcPts val="0"/>
+              </a:spcBef>
+              <a:spcAft>
+                <a:spcPts val="300"/>
+              </a:spcAft>
+              <a:buFont typeface="Arial"/>
+              <a:buChar char="•"/>
+            </a:pPr>
+            <a:r>
+              <a:rPr lang="en-US" sz="1600" dirty="0">
+                <a:solidFill>
+                  <a:srgbClr val="000000"/>
+                </a:solidFill>
+                <a:latin typeface="Times New Roman"/>
+                <a:cs typeface="Times New Roman"/>
+              </a:rPr>
+              <a:t>Caregiver fluent in Kannada, Telugu, or English.</a:t>
+            </a:r>
+          </a:p>
+          <a:p>
+            <a:pPr marL="285750" indent="-285750">
+              <a:spcBef>
+                <a:spcPts val="0"/>
+              </a:spcBef>
+              <a:spcAft>
+                <a:spcPts val="300"/>
+              </a:spcAft>
+              <a:buFont typeface="Arial"/>
+              <a:buChar char="•"/>
+            </a:pPr>
+            <a:r>
+              <a:rPr lang="en-US" sz="1600" dirty="0">
+                <a:solidFill>
+                  <a:srgbClr val="000000"/>
+                </a:solidFill>
+                <a:latin typeface="Times New Roman"/>
+                <a:cs typeface="Times New Roman"/>
+              </a:rPr>
+              <a:t>Patient’s schizophrenia diagnosis confirmed by ICD-10.</a:t>
+            </a:r>
+          </a:p>
+          <a:p>
+            <a:pPr marL="285750" indent="-285750">
+              <a:spcBef>
+                <a:spcPts val="0"/>
+              </a:spcBef>
+              <a:spcAft>
+                <a:spcPts val="300"/>
+              </a:spcAft>
+              <a:buFont typeface="Arial"/>
+              <a:buChar char="•"/>
+            </a:pPr>
+            <a:r>
+              <a:rPr lang="en-US" sz="1600" dirty="0">
+                <a:solidFill>
+                  <a:srgbClr val="000000"/>
+                </a:solidFill>
+                <a:latin typeface="Times New Roman"/>
+                <a:cs typeface="Times New Roman"/>
+              </a:rPr>
+              <a:t>Caregiver available for at least 10 days to undergo the programme.</a:t>
             </a:r>
           </a:p>
         </p:txBody>
@@ -1197,7 +1166,7 @@
         <p:spPr>
           <a:xfrm>
             <a:off x="0" y="0"/>
-            <a:ext cx="12192000" cy="1000000"/>
+            <a:ext cx="12192000" cy="900000"/>
           </a:xfrm>
           <a:prstGeom prst="rect">
             <a:avLst/>
@@ -1219,14 +1188,14 @@
               <a:buNone/>
             </a:pPr>
             <a:r>
-              <a:rPr lang="en-US" sz="3000" b="1" dirty="0">
+              <a:rPr lang="en-US" sz="1800" b="1" dirty="0">
                 <a:solidFill>
                   <a:srgbClr val="FFFFFF"/>
                 </a:solidFill>
                 <a:latin typeface="Times New Roman"/>
                 <a:cs typeface="Times New Roman"/>
               </a:rPr>
-              <a:t>Control Group vs Experimental Group (1)</a:t>
+              <a:t>Eligibility: Exclusion Criteria</a:t>
             </a:r>
           </a:p>
         </p:txBody>
@@ -1239,8 +1208,8 @@
         </p:nvSpPr>
         <p:spPr>
           <a:xfrm>
-            <a:off x="685800" y="1150000"/>
-            <a:ext cx="10820400" cy="5500000"/>
+            <a:off x="685800" y="1050000"/>
+            <a:ext cx="10820400" cy="5650000"/>
           </a:xfrm>
           <a:prstGeom prst="rect">
             <a:avLst/>
@@ -1252,155 +1221,69 @@
           </a:bodyPr>
           <a:lstStyle/>
           <a:p>
-            <a:pPr marL="0" indent="0">
-              <a:spcBef>
-                <a:spcPts val="300"/>
-              </a:spcBef>
-              <a:spcAft>
-                <a:spcPts val="150"/>
-              </a:spcAft>
-              <a:buNone/>
-            </a:pPr>
-            <a:r>
-              <a:rPr lang="en-US" sz="2000" b="1" dirty="0">
-                <a:solidFill>
-                  <a:srgbClr val="1F3864"/>
-                </a:solidFill>
-                <a:latin typeface="Times New Roman"/>
-                <a:cs typeface="Times New Roman"/>
-              </a:rPr>
-              <a:t>Experimental (Intervention) Group – n = 40</a:t>
-            </a:r>
-          </a:p>
-          <a:p>
-            <a:pPr marL="285750" indent="-285750">
-              <a:spcBef>
-                <a:spcPts val="0"/>
-              </a:spcBef>
-              <a:spcAft>
-                <a:spcPts val="300"/>
-              </a:spcAft>
-              <a:buFont typeface="Arial"/>
-              <a:buChar char="•"/>
-            </a:pPr>
-            <a:r>
-              <a:rPr lang="en-US" sz="1800" dirty="0">
-                <a:solidFill>
-                  <a:srgbClr val="000000"/>
-                </a:solidFill>
-                <a:latin typeface="Times New Roman"/>
-                <a:cs typeface="Times New Roman"/>
-              </a:rPr>
-              <a:t>Received treatment as usual PLUS a standardized 10-session family intervention delivered by a trained Psychiatric Social Worker over 2–3 months.</a:t>
-            </a:r>
-          </a:p>
-          <a:p>
-            <a:pPr marL="285750" indent="-285750">
-              <a:spcBef>
-                <a:spcPts val="0"/>
-              </a:spcBef>
-              <a:spcAft>
-                <a:spcPts val="300"/>
-              </a:spcAft>
-              <a:buFont typeface="Arial"/>
-              <a:buChar char="•"/>
-            </a:pPr>
-            <a:r>
-              <a:rPr lang="en-US" sz="1800" dirty="0">
-                <a:solidFill>
-                  <a:srgbClr val="000000"/>
-                </a:solidFill>
-                <a:latin typeface="Times New Roman"/>
-                <a:cs typeface="Times New Roman"/>
-              </a:rPr>
-              <a:t>Package: 6 psychoeducation + 2 communication-training + 1 stress-management + 1 recap/referral sessions.</a:t>
-            </a:r>
-          </a:p>
-          <a:p>
-            <a:pPr marL="285750" indent="-285750">
-              <a:spcBef>
-                <a:spcPts val="0"/>
-              </a:spcBef>
-              <a:spcAft>
-                <a:spcPts val="300"/>
-              </a:spcAft>
-              <a:buFont typeface="Arial"/>
-              <a:buChar char="•"/>
-            </a:pPr>
-            <a:r>
-              <a:rPr lang="en-US" sz="1800" dirty="0">
-                <a:solidFill>
-                  <a:srgbClr val="000000"/>
-                </a:solidFill>
-                <a:latin typeface="Times New Roman"/>
-                <a:cs typeface="Times New Roman"/>
-              </a:rPr>
-              <a:t>Methods: social case-work &amp; group-work, role plays, video clippings, case vignettes, brainstorming, and a vernacular take-home handout.</a:t>
-            </a:r>
-          </a:p>
-          <a:p>
-            <a:pPr marL="0" indent="0">
-              <a:spcBef>
-                <a:spcPts val="300"/>
-              </a:spcBef>
-              <a:spcAft>
-                <a:spcPts val="150"/>
-              </a:spcAft>
-              <a:buNone/>
-            </a:pPr>
-            <a:r>
-              <a:rPr lang="en-US" sz="2000" b="1" dirty="0">
-                <a:solidFill>
-                  <a:srgbClr val="1F3864"/>
-                </a:solidFill>
-                <a:latin typeface="Times New Roman"/>
-                <a:cs typeface="Times New Roman"/>
-              </a:rPr>
-              <a:t>Control Group – Treatment As Usual (TAU) – n = 40</a:t>
-            </a:r>
-          </a:p>
-          <a:p>
-            <a:pPr marL="285750" indent="-285750">
-              <a:spcBef>
-                <a:spcPts val="0"/>
-              </a:spcBef>
-              <a:spcAft>
-                <a:spcPts val="300"/>
-              </a:spcAft>
-              <a:buFont typeface="Arial"/>
-              <a:buChar char="•"/>
-            </a:pPr>
-            <a:r>
-              <a:rPr lang="en-US" sz="1800" dirty="0">
-                <a:solidFill>
-                  <a:srgbClr val="000000"/>
-                </a:solidFill>
-                <a:latin typeface="Times New Roman"/>
-                <a:cs typeface="Times New Roman"/>
-              </a:rPr>
-              <a:t>Continued only with the routine hospital care provided by their respective units – no structured family intervention.</a:t>
-            </a:r>
-          </a:p>
-          <a:p>
-            <a:pPr marL="285750" indent="-285750">
-              <a:spcBef>
-                <a:spcPts val="0"/>
-              </a:spcBef>
-              <a:spcAft>
-                <a:spcPts val="300"/>
-              </a:spcAft>
-              <a:buFont typeface="Arial"/>
-              <a:buChar char="•"/>
-            </a:pPr>
-            <a:r>
-              <a:rPr lang="en-US" sz="1800" dirty="0">
-                <a:solidFill>
-                  <a:srgbClr val="000000"/>
-                </a:solidFill>
-                <a:latin typeface="Times New Roman"/>
-                <a:cs typeface="Times New Roman"/>
-              </a:rPr>
-              <a:t>For ethical reasons, the control group was offered the intervention AFTER the post-assessment.</a:t>
+            <a:pPr marL="285750" indent="-285750">
+              <a:spcBef>
+                <a:spcPts val="0"/>
+              </a:spcBef>
+              <a:spcAft>
+                <a:spcPts val="300"/>
+              </a:spcAft>
+              <a:buFont typeface="Arial"/>
+              <a:buChar char="•"/>
+            </a:pPr>
+            <a:r>
+              <a:rPr lang="en-US" sz="1600" dirty="0">
+                <a:solidFill>
+                  <a:srgbClr val="000000"/>
+                </a:solidFill>
+                <a:latin typeface="Times New Roman"/>
+                <a:cs typeface="Times New Roman"/>
+              </a:rPr>
+              <a:t>Caregivers with a history of psychiatric illness and treatment were excluded.</a:t>
+            </a:r>
+          </a:p>
+          <a:p>
+            <a:pPr marL="285750" indent="-285750">
+              <a:spcBef>
+                <a:spcPts val="0"/>
+              </a:spcBef>
+              <a:spcAft>
+                <a:spcPts val="300"/>
+              </a:spcAft>
+              <a:buFont typeface="Arial"/>
+              <a:buChar char="•"/>
+            </a:pPr>
+            <a:r>
+              <a:rPr lang="en-US" sz="1600" dirty="0">
+                <a:solidFill>
+                  <a:srgbClr val="000000"/>
+                </a:solidFill>
+                <a:latin typeface="Times New Roman"/>
+                <a:cs typeface="Times New Roman"/>
+              </a:rPr>
+              <a:t>Persons with schizophrenia found to have a comorbid psychiatric illness (screened with MINI) were excluded, along with their caregivers.</a:t>
+            </a:r>
+          </a:p>
+          <a:p>
+            <a:pPr marL="571500" indent="-228600">
+              <a:spcBef>
+                <a:spcPts val="0"/>
+              </a:spcBef>
+              <a:spcAft>
+                <a:spcPts val="300"/>
+              </a:spcAft>
+              <a:buFont typeface="Arial"/>
+              <a:buChar char="–"/>
+            </a:pPr>
+            <a:r>
+              <a:rPr lang="en-US" sz="1600" i="1" dirty="0">
+                <a:solidFill>
+                  <a:srgbClr val="333333"/>
+                </a:solidFill>
+                <a:latin typeface="Times New Roman"/>
+                <a:cs typeface="Times New Roman"/>
+              </a:rPr>
+              <a:t>Screening used the Mini International Neuropsychiatric Interview (MINI 6.0).</a:t>
             </a:r>
           </a:p>
         </p:txBody>
@@ -1436,7 +1319,7 @@
         <p:spPr>
           <a:xfrm>
             <a:off x="0" y="0"/>
-            <a:ext cx="12192000" cy="1000000"/>
+            <a:ext cx="12192000" cy="900000"/>
           </a:xfrm>
           <a:prstGeom prst="rect">
             <a:avLst/>
@@ -1458,14 +1341,14 @@
               <a:buNone/>
             </a:pPr>
             <a:r>
-              <a:rPr lang="en-US" sz="3000" b="1" dirty="0">
+              <a:rPr lang="en-US" sz="1800" b="1" dirty="0">
                 <a:solidFill>
                   <a:srgbClr val="FFFFFF"/>
                 </a:solidFill>
                 <a:latin typeface="Times New Roman"/>
                 <a:cs typeface="Times New Roman"/>
               </a:rPr>
-              <a:t>Control Group vs Experimental Group (2)</a:t>
+              <a:t>Control Group vs Experimental Group (1)</a:t>
             </a:r>
           </a:p>
         </p:txBody>
@@ -1478,8 +1361,8 @@
         </p:nvSpPr>
         <p:spPr>
           <a:xfrm>
-            <a:off x="685800" y="1150000"/>
-            <a:ext cx="10820400" cy="5500000"/>
+            <a:off x="685800" y="1050000"/>
+            <a:ext cx="10820400" cy="5650000"/>
           </a:xfrm>
           <a:prstGeom prst="rect">
             <a:avLst/>
@@ -1501,58 +1384,58 @@
               <a:buNone/>
             </a:pPr>
             <a:r>
-              <a:rPr lang="en-US" sz="2000" b="1" dirty="0">
+              <a:rPr lang="en-US" sz="1600" b="1" dirty="0">
                 <a:solidFill>
                   <a:srgbClr val="1F3864"/>
                 </a:solidFill>
                 <a:latin typeface="Times New Roman"/>
                 <a:cs typeface="Times New Roman"/>
               </a:rPr>
-              <a:t>Baseline comparability</a:t>
-            </a:r>
-          </a:p>
-          <a:p>
-            <a:pPr marL="285750" indent="-285750">
-              <a:spcBef>
-                <a:spcPts val="0"/>
-              </a:spcBef>
-              <a:spcAft>
-                <a:spcPts val="300"/>
-              </a:spcAft>
-              <a:buFont typeface="Arial"/>
-              <a:buChar char="•"/>
-            </a:pPr>
-            <a:r>
-              <a:rPr lang="en-US" sz="1800" dirty="0">
-                <a:solidFill>
-                  <a:srgbClr val="000000"/>
-                </a:solidFill>
-                <a:latin typeface="Times New Roman"/>
-                <a:cs typeface="Times New Roman"/>
-              </a:rPr>
-              <a:t>Groups were comparable at baseline on most sociodemographic variables (age, marital status, education, occupation, primary caregiver, contact frequency) – no significant differences (P &gt; 0.05).</a:t>
-            </a:r>
-          </a:p>
-          <a:p>
-            <a:pPr marL="285750" indent="-285750">
-              <a:spcBef>
-                <a:spcPts val="0"/>
-              </a:spcBef>
-              <a:spcAft>
-                <a:spcPts val="300"/>
-              </a:spcAft>
-              <a:buFont typeface="Arial"/>
-              <a:buChar char="•"/>
-            </a:pPr>
-            <a:r>
-              <a:rPr lang="en-US" sz="1800" dirty="0">
-                <a:solidFill>
-                  <a:srgbClr val="000000"/>
-                </a:solidFill>
-                <a:latin typeface="Times New Roman"/>
-                <a:cs typeface="Times New Roman"/>
-              </a:rPr>
-              <a:t>Only caregiver gender differed significantly (more females in the experimental group; P = 0.039).</a:t>
+              <a:t>Experimental (Intervention) Group – n = 40</a:t>
+            </a:r>
+          </a:p>
+          <a:p>
+            <a:pPr marL="285750" indent="-285750">
+              <a:spcBef>
+                <a:spcPts val="0"/>
+              </a:spcBef>
+              <a:spcAft>
+                <a:spcPts val="300"/>
+              </a:spcAft>
+              <a:buFont typeface="Arial"/>
+              <a:buChar char="•"/>
+            </a:pPr>
+            <a:r>
+              <a:rPr lang="en-US" sz="1600" dirty="0">
+                <a:solidFill>
+                  <a:srgbClr val="000000"/>
+                </a:solidFill>
+                <a:latin typeface="Times New Roman"/>
+                <a:cs typeface="Times New Roman"/>
+              </a:rPr>
+              <a:t>Received treatment as usual PLUS a standardized 10-session family intervention delivered by a trained Psychiatric Social Worker over 2–3 months.</a:t>
+            </a:r>
+          </a:p>
+          <a:p>
+            <a:pPr marL="285750" indent="-285750">
+              <a:spcBef>
+                <a:spcPts val="0"/>
+              </a:spcBef>
+              <a:spcAft>
+                <a:spcPts val="300"/>
+              </a:spcAft>
+              <a:buFont typeface="Arial"/>
+              <a:buChar char="•"/>
+            </a:pPr>
+            <a:r>
+              <a:rPr lang="en-US" sz="1600" dirty="0">
+                <a:solidFill>
+                  <a:srgbClr val="000000"/>
+                </a:solidFill>
+                <a:latin typeface="Times New Roman"/>
+                <a:cs typeface="Times New Roman"/>
+              </a:rPr>
+              <a:t>Package: 6 psychoeducation + 2 communication-training + 1 stress-management + 1 recap/referral sessions.</a:t>
             </a:r>
           </a:p>
           <a:p>
@@ -1566,79 +1449,58 @@
               <a:buNone/>
             </a:pPr>
             <a:r>
-              <a:rPr lang="en-US" sz="2000" b="1" dirty="0">
+              <a:rPr lang="en-US" sz="1600" b="1" dirty="0">
                 <a:solidFill>
                   <a:srgbClr val="1F3864"/>
                 </a:solidFill>
                 <a:latin typeface="Times New Roman"/>
                 <a:cs typeface="Times New Roman"/>
               </a:rPr>
-              <a:t>What differed between the groups</a:t>
-            </a:r>
-          </a:p>
-          <a:p>
-            <a:pPr marL="285750" indent="-285750">
-              <a:spcBef>
-                <a:spcPts val="0"/>
-              </a:spcBef>
-              <a:spcAft>
-                <a:spcPts val="300"/>
-              </a:spcAft>
-              <a:buFont typeface="Arial"/>
-              <a:buChar char="•"/>
-            </a:pPr>
-            <a:r>
-              <a:rPr lang="en-US" sz="1800" dirty="0">
-                <a:solidFill>
-                  <a:srgbClr val="000000"/>
-                </a:solidFill>
-                <a:latin typeface="Times New Roman"/>
-                <a:cs typeface="Times New Roman"/>
-              </a:rPr>
-              <a:t>The ONLY planned difference was the family-intervention package – allowing its effect on EE to be isolated.</a:t>
-            </a:r>
-          </a:p>
-          <a:p>
-            <a:pPr marL="0" indent="0">
-              <a:spcBef>
-                <a:spcPts val="300"/>
-              </a:spcBef>
-              <a:spcAft>
-                <a:spcPts val="150"/>
-              </a:spcAft>
-              <a:buNone/>
-            </a:pPr>
-            <a:r>
-              <a:rPr lang="en-US" sz="2000" b="1" dirty="0">
-                <a:solidFill>
-                  <a:srgbClr val="1F3864"/>
-                </a:solidFill>
-                <a:latin typeface="Times New Roman"/>
-                <a:cs typeface="Times New Roman"/>
-              </a:rPr>
-              <a:t>Direction of change</a:t>
-            </a:r>
-          </a:p>
-          <a:p>
-            <a:pPr marL="285750" indent="-285750">
-              <a:spcBef>
-                <a:spcPts val="0"/>
-              </a:spcBef>
-              <a:spcAft>
-                <a:spcPts val="300"/>
-              </a:spcAft>
-              <a:buFont typeface="Arial"/>
-              <a:buChar char="•"/>
-            </a:pPr>
-            <a:r>
-              <a:rPr lang="en-US" sz="1800" dirty="0">
-                <a:solidFill>
-                  <a:srgbClr val="000000"/>
-                </a:solidFill>
-                <a:latin typeface="Times New Roman"/>
-                <a:cs typeface="Times New Roman"/>
-              </a:rPr>
-              <a:t>Experimental group: EE DECREASED after intervention. Control (TAU) group: EE INCREASED over the same period – highlighting the value of the intervention.</a:t>
+              <a:t>Control Group – Treatment As Usual (TAU) – n = 40</a:t>
+            </a:r>
+          </a:p>
+          <a:p>
+            <a:pPr marL="285750" indent="-285750">
+              <a:spcBef>
+                <a:spcPts val="0"/>
+              </a:spcBef>
+              <a:spcAft>
+                <a:spcPts val="300"/>
+              </a:spcAft>
+              <a:buFont typeface="Arial"/>
+              <a:buChar char="•"/>
+            </a:pPr>
+            <a:r>
+              <a:rPr lang="en-US" sz="1600" dirty="0">
+                <a:solidFill>
+                  <a:srgbClr val="000000"/>
+                </a:solidFill>
+                <a:latin typeface="Times New Roman"/>
+                <a:cs typeface="Times New Roman"/>
+              </a:rPr>
+              <a:t>Continued only with routine hospital care from their respective units – no structured family intervention.</a:t>
+            </a:r>
+          </a:p>
+          <a:p>
+            <a:pPr marL="285750" indent="-285750">
+              <a:spcBef>
+                <a:spcPts val="0"/>
+              </a:spcBef>
+              <a:spcAft>
+                <a:spcPts val="300"/>
+              </a:spcAft>
+              <a:buFont typeface="Arial"/>
+              <a:buChar char="•"/>
+            </a:pPr>
+            <a:r>
+              <a:rPr lang="en-US" sz="1600" dirty="0">
+                <a:solidFill>
+                  <a:srgbClr val="000000"/>
+                </a:solidFill>
+                <a:latin typeface="Times New Roman"/>
+                <a:cs typeface="Times New Roman"/>
+              </a:rPr>
+              <a:t>For ethical reasons, the control group was offered the intervention AFTER the post-assessment.</a:t>
             </a:r>
           </a:p>
         </p:txBody>
@@ -1674,7 +1536,7 @@
         <p:spPr>
           <a:xfrm>
             <a:off x="0" y="0"/>
-            <a:ext cx="12192000" cy="1000000"/>
+            <a:ext cx="12192000" cy="900000"/>
           </a:xfrm>
           <a:prstGeom prst="rect">
             <a:avLst/>
@@ -1696,14 +1558,14 @@
               <a:buNone/>
             </a:pPr>
             <a:r>
-              <a:rPr lang="en-US" sz="3000" b="1" dirty="0">
+              <a:rPr lang="en-US" sz="1800" b="1" dirty="0">
                 <a:solidFill>
                   <a:srgbClr val="FFFFFF"/>
                 </a:solidFill>
                 <a:latin typeface="Times New Roman"/>
                 <a:cs typeface="Times New Roman"/>
               </a:rPr>
-              <a:t>Family Intervention – Sessions 1–6 (Psychoeducation)</a:t>
+              <a:t>Control Group vs Experimental Group (2)</a:t>
             </a:r>
           </a:p>
         </p:txBody>
@@ -1716,8 +1578,8 @@
         </p:nvSpPr>
         <p:spPr>
           <a:xfrm>
-            <a:off x="685800" y="1150000"/>
-            <a:ext cx="10820400" cy="5500000"/>
+            <a:off x="685800" y="1050000"/>
+            <a:ext cx="10820400" cy="5650000"/>
           </a:xfrm>
           <a:prstGeom prst="rect">
             <a:avLst/>
@@ -1739,124 +1601,144 @@
               <a:buNone/>
             </a:pPr>
             <a:r>
-              <a:rPr lang="en-US" sz="2000" b="1" dirty="0">
+              <a:rPr lang="en-US" sz="1600" b="1" dirty="0">
                 <a:solidFill>
                   <a:srgbClr val="1F3864"/>
                 </a:solidFill>
                 <a:latin typeface="Times New Roman"/>
                 <a:cs typeface="Times New Roman"/>
               </a:rPr>
-              <a:t>Family Psychoeducation (6 sessions)</a:t>
-            </a:r>
-          </a:p>
-          <a:p>
-            <a:pPr marL="285750" indent="-285750">
-              <a:spcBef>
-                <a:spcPts val="0"/>
-              </a:spcBef>
-              <a:spcAft>
-                <a:spcPts val="300"/>
-              </a:spcAft>
-              <a:buFont typeface="Arial"/>
-              <a:buChar char="•"/>
-            </a:pPr>
-            <a:r>
-              <a:rPr lang="en-US" sz="1800" dirty="0">
-                <a:solidFill>
-                  <a:srgbClr val="000000"/>
-                </a:solidFill>
-                <a:latin typeface="Times New Roman"/>
-                <a:cs typeface="Times New Roman"/>
-              </a:rPr>
-              <a:t>Information about schizophrenia – symptoms, signs, course, and outcomes of the illness.</a:t>
-            </a:r>
-          </a:p>
-          <a:p>
-            <a:pPr marL="285750" indent="-285750">
-              <a:spcBef>
-                <a:spcPts val="0"/>
-              </a:spcBef>
-              <a:spcAft>
-                <a:spcPts val="300"/>
-              </a:spcAft>
-              <a:buFont typeface="Arial"/>
-              <a:buChar char="•"/>
-            </a:pPr>
-            <a:r>
-              <a:rPr lang="en-US" sz="1800" dirty="0">
-                <a:solidFill>
-                  <a:srgbClr val="000000"/>
-                </a:solidFill>
-                <a:latin typeface="Times New Roman"/>
-                <a:cs typeface="Times New Roman"/>
-              </a:rPr>
-              <a:t>Understanding high EE – what criticality and emotional over-involvement are, and how they affect relapse.</a:t>
-            </a:r>
-          </a:p>
-          <a:p>
-            <a:pPr marL="285750" indent="-285750">
-              <a:spcBef>
-                <a:spcPts val="0"/>
-              </a:spcBef>
-              <a:spcAft>
-                <a:spcPts val="300"/>
-              </a:spcAft>
-              <a:buFont typeface="Arial"/>
-              <a:buChar char="•"/>
-            </a:pPr>
-            <a:r>
-              <a:rPr lang="en-US" sz="1800" dirty="0">
-                <a:solidFill>
-                  <a:srgbClr val="000000"/>
-                </a:solidFill>
-                <a:latin typeface="Times New Roman"/>
-                <a:cs typeface="Times New Roman"/>
-              </a:rPr>
-              <a:t>Role of medication, adherence, and meeting the patient’s basic needs.</a:t>
-            </a:r>
-          </a:p>
-          <a:p>
-            <a:pPr marL="285750" indent="-285750">
-              <a:spcBef>
-                <a:spcPts val="0"/>
-              </a:spcBef>
-              <a:spcAft>
-                <a:spcPts val="300"/>
-              </a:spcAft>
-              <a:buFont typeface="Arial"/>
-              <a:buChar char="•"/>
-            </a:pPr>
-            <a:r>
-              <a:rPr lang="en-US" sz="1800" dirty="0">
-                <a:solidFill>
-                  <a:srgbClr val="000000"/>
-                </a:solidFill>
-                <a:latin typeface="Times New Roman"/>
-                <a:cs typeface="Times New Roman"/>
-              </a:rPr>
-              <a:t>Reducing excessive face-to-face contact by engaging the patient in productive activity – household work, day-care / vocational training, suitable jobs, family business, agriculture, dairy, or cattle-rearing.</a:t>
-            </a:r>
-          </a:p>
-          <a:p>
-            <a:pPr marL="285750" indent="-285750">
-              <a:spcBef>
-                <a:spcPts val="0"/>
-              </a:spcBef>
-              <a:spcAft>
-                <a:spcPts val="300"/>
-              </a:spcAft>
-              <a:buFont typeface="Arial"/>
-              <a:buChar char="•"/>
-            </a:pPr>
-            <a:r>
-              <a:rPr lang="en-US" sz="1800" dirty="0">
-                <a:solidFill>
-                  <a:srgbClr val="000000"/>
-                </a:solidFill>
-                <a:latin typeface="Times New Roman"/>
-                <a:cs typeface="Times New Roman"/>
-              </a:rPr>
-              <a:t>Helping the patient gradually regain independence in self-care (eating, bathing, watching TV) during the caregiver’s brief absences.</a:t>
+              <a:t>Baseline comparability</a:t>
+            </a:r>
+          </a:p>
+          <a:p>
+            <a:pPr marL="285750" indent="-285750">
+              <a:spcBef>
+                <a:spcPts val="0"/>
+              </a:spcBef>
+              <a:spcAft>
+                <a:spcPts val="300"/>
+              </a:spcAft>
+              <a:buFont typeface="Arial"/>
+              <a:buChar char="•"/>
+            </a:pPr>
+            <a:r>
+              <a:rPr lang="en-US" sz="1600" dirty="0">
+                <a:solidFill>
+                  <a:srgbClr val="000000"/>
+                </a:solidFill>
+                <a:latin typeface="Times New Roman"/>
+                <a:cs typeface="Times New Roman"/>
+              </a:rPr>
+              <a:t>Groups were comparable at baseline on most sociodemographic variables (P &gt; 0.05).</a:t>
+            </a:r>
+          </a:p>
+          <a:p>
+            <a:pPr marL="285750" indent="-285750">
+              <a:spcBef>
+                <a:spcPts val="0"/>
+              </a:spcBef>
+              <a:spcAft>
+                <a:spcPts val="300"/>
+              </a:spcAft>
+              <a:buFont typeface="Arial"/>
+              <a:buChar char="•"/>
+            </a:pPr>
+            <a:r>
+              <a:rPr lang="en-US" sz="1600" dirty="0">
+                <a:solidFill>
+                  <a:srgbClr val="000000"/>
+                </a:solidFill>
+                <a:latin typeface="Times New Roman"/>
+                <a:cs typeface="Times New Roman"/>
+              </a:rPr>
+              <a:t>Only caregiver gender differed significantly (more females in the experimental group; P = 0.039).</a:t>
+            </a:r>
+          </a:p>
+          <a:p>
+            <a:pPr marL="0" indent="0">
+              <a:spcBef>
+                <a:spcPts val="300"/>
+              </a:spcBef>
+              <a:spcAft>
+                <a:spcPts val="150"/>
+              </a:spcAft>
+              <a:buNone/>
+            </a:pPr>
+            <a:r>
+              <a:rPr lang="en-US" sz="1600" b="1" dirty="0">
+                <a:solidFill>
+                  <a:srgbClr val="1F3864"/>
+                </a:solidFill>
+                <a:latin typeface="Times New Roman"/>
+                <a:cs typeface="Times New Roman"/>
+              </a:rPr>
+              <a:t>What differed</a:t>
+            </a:r>
+          </a:p>
+          <a:p>
+            <a:pPr marL="285750" indent="-285750">
+              <a:spcBef>
+                <a:spcPts val="0"/>
+              </a:spcBef>
+              <a:spcAft>
+                <a:spcPts val="300"/>
+              </a:spcAft>
+              <a:buFont typeface="Arial"/>
+              <a:buChar char="•"/>
+            </a:pPr>
+            <a:r>
+              <a:rPr lang="en-US" sz="1600" dirty="0">
+                <a:solidFill>
+                  <a:srgbClr val="000000"/>
+                </a:solidFill>
+                <a:latin typeface="Times New Roman"/>
+                <a:cs typeface="Times New Roman"/>
+              </a:rPr>
+              <a:t>The only planned difference was the family-intervention package – isolating its effect on EE.</a:t>
+            </a:r>
+          </a:p>
+          <a:p>
+            <a:pPr marL="0" indent="0">
+              <a:spcBef>
+                <a:spcPts val="300"/>
+              </a:spcBef>
+              <a:spcAft>
+                <a:spcPts val="150"/>
+              </a:spcAft>
+              <a:buNone/>
+            </a:pPr>
+            <a:r>
+              <a:rPr lang="en-US" sz="1600" b="1" dirty="0">
+                <a:solidFill>
+                  <a:srgbClr val="1F3864"/>
+                </a:solidFill>
+                <a:latin typeface="Times New Roman"/>
+                <a:cs typeface="Times New Roman"/>
+              </a:rPr>
+              <a:t>Direction of change</a:t>
+            </a:r>
+          </a:p>
+          <a:p>
+            <a:pPr marL="285750" indent="-285750">
+              <a:spcBef>
+                <a:spcPts val="0"/>
+              </a:spcBef>
+              <a:spcAft>
+                <a:spcPts val="300"/>
+              </a:spcAft>
+              <a:buFont typeface="Arial"/>
+              <a:buChar char="•"/>
+            </a:pPr>
+            <a:r>
+              <a:rPr lang="en-US" sz="1600" dirty="0">
+                <a:solidFill>
+                  <a:srgbClr val="000000"/>
+                </a:solidFill>
+                <a:latin typeface="Times New Roman"/>
+                <a:cs typeface="Times New Roman"/>
+              </a:rPr>
+              <a:t>Experimental group: EE DECREASED after intervention. Control (TAU): EE INCREASED over the same period.</a:t>
             </a:r>
           </a:p>
         </p:txBody>
@@ -1892,7 +1774,7 @@
         <p:spPr>
           <a:xfrm>
             <a:off x="0" y="0"/>
-            <a:ext cx="12192000" cy="1000000"/>
+            <a:ext cx="12192000" cy="900000"/>
           </a:xfrm>
           <a:prstGeom prst="rect">
             <a:avLst/>
@@ -1914,14 +1796,14 @@
               <a:buNone/>
             </a:pPr>
             <a:r>
-              <a:rPr lang="en-US" sz="3000" b="1" dirty="0">
+              <a:rPr lang="en-US" sz="1800" b="1" dirty="0">
                 <a:solidFill>
                   <a:srgbClr val="FFFFFF"/>
                 </a:solidFill>
                 <a:latin typeface="Times New Roman"/>
                 <a:cs typeface="Times New Roman"/>
               </a:rPr>
-              <a:t>Family Intervention – Sessions 7–10</a:t>
+              <a:t>The Family-Intervention Technique Used</a:t>
             </a:r>
           </a:p>
         </p:txBody>
@@ -1934,8 +1816,8 @@
         </p:nvSpPr>
         <p:spPr>
           <a:xfrm>
-            <a:off x="685800" y="1150000"/>
-            <a:ext cx="10820400" cy="5500000"/>
+            <a:off x="685800" y="1050000"/>
+            <a:ext cx="10820400" cy="5650000"/>
           </a:xfrm>
           <a:prstGeom prst="rect">
             <a:avLst/>
@@ -1957,80 +1839,36 @@
               <a:buNone/>
             </a:pPr>
             <a:r>
-              <a:rPr lang="en-US" sz="2000" b="1" dirty="0">
+              <a:rPr lang="en-US" sz="1600" b="1" dirty="0">
                 <a:solidFill>
                   <a:srgbClr val="1F3864"/>
                 </a:solidFill>
                 <a:latin typeface="Times New Roman"/>
                 <a:cs typeface="Times New Roman"/>
               </a:rPr>
-              <a:t>Sessions 7–8: Communication Training</a:t>
-            </a:r>
-          </a:p>
-          <a:p>
-            <a:pPr marL="285750" indent="-285750">
-              <a:spcBef>
-                <a:spcPts val="0"/>
-              </a:spcBef>
-              <a:spcAft>
-                <a:spcPts val="300"/>
-              </a:spcAft>
-              <a:buFont typeface="Arial"/>
-              <a:buChar char="•"/>
-            </a:pPr>
-            <a:r>
-              <a:rPr lang="en-US" sz="1800" dirty="0">
-                <a:solidFill>
-                  <a:srgbClr val="000000"/>
-                </a:solidFill>
-                <a:latin typeface="Times New Roman"/>
-                <a:cs typeface="Times New Roman"/>
-              </a:rPr>
-              <a:t>Role plays and video clippings to improve day-to-day communication with the patient.</a:t>
-            </a:r>
-          </a:p>
-          <a:p>
-            <a:pPr marL="285750" indent="-285750">
-              <a:spcBef>
-                <a:spcPts val="0"/>
-              </a:spcBef>
-              <a:spcAft>
-                <a:spcPts val="300"/>
-              </a:spcAft>
-              <a:buFont typeface="Arial"/>
-              <a:buChar char="•"/>
-            </a:pPr>
-            <a:r>
-              <a:rPr lang="en-US" sz="1800" dirty="0">
-                <a:solidFill>
-                  <a:srgbClr val="000000"/>
-                </a:solidFill>
-                <a:latin typeface="Times New Roman"/>
-                <a:cs typeface="Times New Roman"/>
-              </a:rPr>
-              <a:t>Modifying negative emotions (criticality, hostility) toward positive, supportive interactions.</a:t>
-            </a:r>
-          </a:p>
-          <a:p>
-            <a:pPr marL="285750" indent="-285750">
-              <a:spcBef>
-                <a:spcPts val="0"/>
-              </a:spcBef>
-              <a:spcAft>
-                <a:spcPts val="300"/>
-              </a:spcAft>
-              <a:buFont typeface="Arial"/>
-              <a:buChar char="•"/>
-            </a:pPr>
-            <a:r>
-              <a:rPr lang="en-US" sz="1800" dirty="0">
-                <a:solidFill>
-                  <a:srgbClr val="000000"/>
-                </a:solidFill>
-                <a:latin typeface="Times New Roman"/>
-                <a:cs typeface="Times New Roman"/>
-              </a:rPr>
-              <a:t>Vernacular-language handouts to reinforce communication skills.</a:t>
+              <a:t>What it is</a:t>
+            </a:r>
+          </a:p>
+          <a:p>
+            <a:pPr marL="285750" indent="-285750">
+              <a:spcBef>
+                <a:spcPts val="0"/>
+              </a:spcBef>
+              <a:spcAft>
+                <a:spcPts val="300"/>
+              </a:spcAft>
+              <a:buFont typeface="Arial"/>
+              <a:buChar char="•"/>
+            </a:pPr>
+            <a:r>
+              <a:rPr lang="en-US" sz="1600" dirty="0">
+                <a:solidFill>
+                  <a:srgbClr val="000000"/>
+                </a:solidFill>
+                <a:latin typeface="Times New Roman"/>
+                <a:cs typeface="Times New Roman"/>
+              </a:rPr>
+              <a:t>A structured, manualized Psychiatric Social-Work Family Intervention package built on the model of FAMILY PSYCHOEDUCATION – a psychoeducational, skills-based approach for caregivers of persons with schizophrenia.</a:t>
             </a:r>
           </a:p>
           <a:p>
@@ -2044,36 +1882,36 @@
               <a:buNone/>
             </a:pPr>
             <a:r>
-              <a:rPr lang="en-US" sz="2000" b="1" dirty="0">
+              <a:rPr lang="en-US" sz="1600" b="1" dirty="0">
                 <a:solidFill>
                   <a:srgbClr val="1F3864"/>
                 </a:solidFill>
                 <a:latin typeface="Times New Roman"/>
                 <a:cs typeface="Times New Roman"/>
               </a:rPr>
-              <a:t>Session 9: Stress Management</a:t>
-            </a:r>
-          </a:p>
-          <a:p>
-            <a:pPr marL="285750" indent="-285750">
-              <a:spcBef>
-                <a:spcPts val="0"/>
-              </a:spcBef>
-              <a:spcAft>
-                <a:spcPts val="300"/>
-              </a:spcAft>
-              <a:buFont typeface="Arial"/>
-              <a:buChar char="•"/>
-            </a:pPr>
-            <a:r>
-              <a:rPr lang="en-US" sz="1800" dirty="0">
-                <a:solidFill>
-                  <a:srgbClr val="000000"/>
-                </a:solidFill>
-                <a:latin typeface="Times New Roman"/>
-                <a:cs typeface="Times New Roman"/>
-              </a:rPr>
-              <a:t>Identifying caregiver stressors; balanced lifestyle; sharing roles &amp; responsibilities; enhancing social support; crisis management; ‘caring for the carers’ (enjoyable activities, brief trial separations); addressing guilt.</a:t>
+              <a:t>Where it came from</a:t>
+            </a:r>
+          </a:p>
+          <a:p>
+            <a:pPr marL="285750" indent="-285750">
+              <a:spcBef>
+                <a:spcPts val="0"/>
+              </a:spcBef>
+              <a:spcAft>
+                <a:spcPts val="300"/>
+              </a:spcAft>
+              <a:buFont typeface="Arial"/>
+              <a:buChar char="•"/>
+            </a:pPr>
+            <a:r>
+              <a:rPr lang="en-US" sz="1600" dirty="0">
+                <a:solidFill>
+                  <a:srgbClr val="000000"/>
+                </a:solidFill>
+                <a:latin typeface="Times New Roman"/>
+                <a:cs typeface="Times New Roman"/>
+              </a:rPr>
+              <a:t>Family psychoeducation was first developed by Carol Anderson &amp; Gerard Hogarty (1980); it draws on Expressed-Emotion theory (Brown &amp; Rutter, 1966; Leff &amp; Vaughn, 1985) and Perlman’s (1957) social case-work problem-solving method.</a:t>
             </a:r>
           </a:p>
           <a:p>
@@ -2087,36 +1925,79 @@
               <a:buNone/>
             </a:pPr>
             <a:r>
-              <a:rPr lang="en-US" sz="2000" b="1" dirty="0">
+              <a:rPr lang="en-US" sz="1600" b="1" dirty="0">
                 <a:solidFill>
                   <a:srgbClr val="1F3864"/>
                 </a:solidFill>
                 <a:latin typeface="Times New Roman"/>
                 <a:cs typeface="Times New Roman"/>
               </a:rPr>
-              <a:t>Session 10: Recap &amp; Referral</a:t>
-            </a:r>
-          </a:p>
-          <a:p>
-            <a:pPr marL="285750" indent="-285750">
-              <a:spcBef>
-                <a:spcPts val="0"/>
-              </a:spcBef>
-              <a:spcAft>
-                <a:spcPts val="300"/>
-              </a:spcAft>
-              <a:buFont typeface="Arial"/>
-              <a:buChar char="•"/>
-            </a:pPr>
-            <a:r>
-              <a:rPr lang="en-US" sz="1800" dirty="0">
-                <a:solidFill>
-                  <a:srgbClr val="000000"/>
-                </a:solidFill>
-                <a:latin typeface="Times New Roman"/>
-                <a:cs typeface="Times New Roman"/>
-              </a:rPr>
-              <a:t>Consolidation of learning, take-home handout, and referral to appropriate services.</a:t>
+              <a:t>What it involves</a:t>
+            </a:r>
+          </a:p>
+          <a:p>
+            <a:pPr marL="285750" indent="-285750">
+              <a:spcBef>
+                <a:spcPts val="0"/>
+              </a:spcBef>
+              <a:spcAft>
+                <a:spcPts val="300"/>
+              </a:spcAft>
+              <a:buFont typeface="Arial"/>
+              <a:buChar char="•"/>
+            </a:pPr>
+            <a:r>
+              <a:rPr lang="en-US" sz="1600" dirty="0">
+                <a:solidFill>
+                  <a:srgbClr val="000000"/>
+                </a:solidFill>
+                <a:latin typeface="Times New Roman"/>
+                <a:cs typeface="Times New Roman"/>
+              </a:rPr>
+              <a:t>Educating the family about the illness and EE, communication training, stress management, and problem-solving – delivered through case-work &amp; group-work, brainstorming, case vignettes, role plays, video clippings, and vernacular handouts.</a:t>
+            </a:r>
+          </a:p>
+          <a:p>
+            <a:pPr marL="0" indent="0">
+              <a:spcBef>
+                <a:spcPts val="300"/>
+              </a:spcBef>
+              <a:spcAft>
+                <a:spcPts val="150"/>
+              </a:spcAft>
+              <a:buNone/>
+            </a:pPr>
+            <a:r>
+              <a:rPr lang="en-US" sz="1600" b="1" dirty="0">
+                <a:solidFill>
+                  <a:srgbClr val="1F3864"/>
+                </a:solidFill>
+                <a:latin typeface="Times New Roman"/>
+                <a:cs typeface="Times New Roman"/>
+              </a:rPr>
+              <a:t>Number of sessions</a:t>
+            </a:r>
+          </a:p>
+          <a:p>
+            <a:pPr marL="285750" indent="-285750">
+              <a:spcBef>
+                <a:spcPts val="0"/>
+              </a:spcBef>
+              <a:spcAft>
+                <a:spcPts val="300"/>
+              </a:spcAft>
+              <a:buFont typeface="Arial"/>
+              <a:buChar char="•"/>
+            </a:pPr>
+            <a:r>
+              <a:rPr lang="en-US" sz="1600" dirty="0">
+                <a:solidFill>
+                  <a:srgbClr val="000000"/>
+                </a:solidFill>
+                <a:latin typeface="Times New Roman"/>
+                <a:cs typeface="Times New Roman"/>
+              </a:rPr>
+              <a:t>10 sessions in total: 6 psychoeducation + 2 communication training + 1 stress management + 1 recap/referral, over 2–3 months.</a:t>
             </a:r>
           </a:p>
         </p:txBody>
@@ -2152,7 +2033,7 @@
         <p:spPr>
           <a:xfrm>
             <a:off x="0" y="0"/>
-            <a:ext cx="12192000" cy="1000000"/>
+            <a:ext cx="12192000" cy="900000"/>
           </a:xfrm>
           <a:prstGeom prst="rect">
             <a:avLst/>
@@ -2174,14 +2055,14 @@
               <a:buNone/>
             </a:pPr>
             <a:r>
-              <a:rPr lang="en-US" sz="3000" b="1" dirty="0">
+              <a:rPr lang="en-US" sz="1800" b="1" dirty="0">
                 <a:solidFill>
                   <a:srgbClr val="FFFFFF"/>
                 </a:solidFill>
                 <a:latin typeface="Times New Roman"/>
                 <a:cs typeface="Times New Roman"/>
               </a:rPr>
-              <a:t>Outcome Measures &amp; Tools</a:t>
+              <a:t>Technique in Practice – Sessions 1–6 (Psychoeducation)</a:t>
             </a:r>
           </a:p>
         </p:txBody>
@@ -2194,8 +2075,8 @@
         </p:nvSpPr>
         <p:spPr>
           <a:xfrm>
-            <a:off x="685800" y="1150000"/>
-            <a:ext cx="10820400" cy="5500000"/>
+            <a:off x="685800" y="1050000"/>
+            <a:ext cx="10820400" cy="5650000"/>
           </a:xfrm>
           <a:prstGeom prst="rect">
             <a:avLst/>
@@ -2207,175 +2088,113 @@
           </a:bodyPr>
           <a:lstStyle/>
           <a:p>
-            <a:pPr marL="0" indent="0">
-              <a:spcBef>
-                <a:spcPts val="300"/>
-              </a:spcBef>
-              <a:spcAft>
-                <a:spcPts val="150"/>
-              </a:spcAft>
-              <a:buNone/>
-            </a:pPr>
-            <a:r>
-              <a:rPr lang="en-US" sz="2000" b="1" dirty="0">
-                <a:solidFill>
-                  <a:srgbClr val="1F3864"/>
-                </a:solidFill>
-                <a:latin typeface="Times New Roman"/>
-                <a:cs typeface="Times New Roman"/>
-              </a:rPr>
-              <a:t>Primary outcome</a:t>
-            </a:r>
-          </a:p>
-          <a:p>
-            <a:pPr marL="285750" indent="-285750">
-              <a:spcBef>
-                <a:spcPts val="0"/>
-              </a:spcBef>
-              <a:spcAft>
-                <a:spcPts val="300"/>
-              </a:spcAft>
-              <a:buFont typeface="Arial"/>
-              <a:buChar char="•"/>
-            </a:pPr>
-            <a:r>
-              <a:rPr lang="en-US" sz="1800" dirty="0">
-                <a:solidFill>
-                  <a:srgbClr val="000000"/>
-                </a:solidFill>
-                <a:latin typeface="Times New Roman"/>
-                <a:cs typeface="Times New Roman"/>
-              </a:rPr>
-              <a:t>Level of Expressed Emotion (criticality + emotional over-involvement) in caregivers.</a:t>
-            </a:r>
-          </a:p>
-          <a:p>
-            <a:pPr marL="0" indent="0">
-              <a:spcBef>
-                <a:spcPts val="300"/>
-              </a:spcBef>
-              <a:spcAft>
-                <a:spcPts val="150"/>
-              </a:spcAft>
-              <a:buNone/>
-            </a:pPr>
-            <a:r>
-              <a:rPr lang="en-US" sz="2000" b="1" dirty="0">
-                <a:solidFill>
-                  <a:srgbClr val="1F3864"/>
-                </a:solidFill>
-                <a:latin typeface="Times New Roman"/>
-                <a:cs typeface="Times New Roman"/>
-              </a:rPr>
-              <a:t>1. Sociodemographic interview schedule</a:t>
-            </a:r>
-          </a:p>
-          <a:p>
-            <a:pPr marL="285750" indent="-285750">
-              <a:spcBef>
-                <a:spcPts val="0"/>
-              </a:spcBef>
-              <a:spcAft>
-                <a:spcPts val="300"/>
-              </a:spcAft>
-              <a:buFont typeface="Arial"/>
-              <a:buChar char="•"/>
-            </a:pPr>
-            <a:r>
-              <a:rPr lang="en-US" sz="1800" dirty="0">
-                <a:solidFill>
-                  <a:srgbClr val="000000"/>
-                </a:solidFill>
-                <a:latin typeface="Times New Roman"/>
-                <a:cs typeface="Times New Roman"/>
-              </a:rPr>
-              <a:t>Semi-structured schedule (by the researcher) – personal, family, marital, occupational, income, caregiving, and illness details.</a:t>
-            </a:r>
-          </a:p>
-          <a:p>
-            <a:pPr marL="0" indent="0">
-              <a:spcBef>
-                <a:spcPts val="300"/>
-              </a:spcBef>
-              <a:spcAft>
-                <a:spcPts val="150"/>
-              </a:spcAft>
-              <a:buNone/>
-            </a:pPr>
-            <a:r>
-              <a:rPr lang="en-US" sz="2000" b="1" dirty="0">
-                <a:solidFill>
-                  <a:srgbClr val="1F3864"/>
-                </a:solidFill>
-                <a:latin typeface="Times New Roman"/>
-                <a:cs typeface="Times New Roman"/>
-              </a:rPr>
-              <a:t>2. FEICS – Family Emotional Involvement &amp; Criticism Scale (Shields et al., 1992)</a:t>
-            </a:r>
-          </a:p>
-          <a:p>
-            <a:pPr marL="285750" indent="-285750">
-              <a:spcBef>
-                <a:spcPts val="0"/>
-              </a:spcBef>
-              <a:spcAft>
-                <a:spcPts val="300"/>
-              </a:spcAft>
-              <a:buFont typeface="Arial"/>
-              <a:buChar char="•"/>
-            </a:pPr>
-            <a:r>
-              <a:rPr lang="en-US" sz="1800" dirty="0">
-                <a:solidFill>
-                  <a:srgbClr val="000000"/>
-                </a:solidFill>
-                <a:latin typeface="Times New Roman"/>
-                <a:cs typeface="Times New Roman"/>
-              </a:rPr>
-              <a:t>14-item self-report; two dimensions – perceived criticism (even items) &amp; emotional over-involvement (odd items); 5-point Likert (almost never → almost always); higher = greater EE.</a:t>
-            </a:r>
-          </a:p>
-          <a:p>
-            <a:pPr marL="0" indent="0">
-              <a:spcBef>
-                <a:spcPts val="300"/>
-              </a:spcBef>
-              <a:spcAft>
-                <a:spcPts val="150"/>
-              </a:spcAft>
-              <a:buNone/>
-            </a:pPr>
-            <a:r>
-              <a:rPr lang="en-US" sz="2000" b="1" dirty="0">
-                <a:solidFill>
-                  <a:srgbClr val="1F3864"/>
-                </a:solidFill>
-                <a:latin typeface="Times New Roman"/>
-                <a:cs typeface="Times New Roman"/>
-              </a:rPr>
-              <a:t>3. MINI 6.0 (Sheehan et al., 1998)</a:t>
-            </a:r>
-          </a:p>
-          <a:p>
-            <a:pPr marL="285750" indent="-285750">
-              <a:spcBef>
-                <a:spcPts val="0"/>
-              </a:spcBef>
-              <a:spcAft>
-                <a:spcPts val="300"/>
-              </a:spcAft>
-              <a:buFont typeface="Arial"/>
-              <a:buChar char="•"/>
-            </a:pPr>
-            <a:r>
-              <a:rPr lang="en-US" sz="1800" dirty="0">
-                <a:solidFill>
-                  <a:srgbClr val="000000"/>
-                </a:solidFill>
-                <a:latin typeface="Times New Roman"/>
-                <a:cs typeface="Times New Roman"/>
-              </a:rPr>
-              <a:t>Brief structured interview for major Axis-I disorders (DSM-IV / ICD-10); used to screen out comorbidity.</a:t>
+            <a:pPr marL="285750" indent="-285750">
+              <a:spcBef>
+                <a:spcPts val="0"/>
+              </a:spcBef>
+              <a:spcAft>
+                <a:spcPts val="300"/>
+              </a:spcAft>
+              <a:buFont typeface="Arial"/>
+              <a:buChar char="•"/>
+            </a:pPr>
+            <a:r>
+              <a:rPr lang="en-US" sz="1600" dirty="0">
+                <a:solidFill>
+                  <a:srgbClr val="000000"/>
+                </a:solidFill>
+                <a:latin typeface="Times New Roman"/>
+                <a:cs typeface="Times New Roman"/>
+              </a:rPr>
+              <a:t>Information about schizophrenia – symptoms, signs, course, and outcomes.</a:t>
+            </a:r>
+          </a:p>
+          <a:p>
+            <a:pPr marL="285750" indent="-285750">
+              <a:spcBef>
+                <a:spcPts val="0"/>
+              </a:spcBef>
+              <a:spcAft>
+                <a:spcPts val="300"/>
+              </a:spcAft>
+              <a:buFont typeface="Arial"/>
+              <a:buChar char="•"/>
+            </a:pPr>
+            <a:r>
+              <a:rPr lang="en-US" sz="1600" dirty="0">
+                <a:solidFill>
+                  <a:srgbClr val="000000"/>
+                </a:solidFill>
+                <a:latin typeface="Times New Roman"/>
+                <a:cs typeface="Times New Roman"/>
+              </a:rPr>
+              <a:t>Understanding high EE – criticality and emotional over-involvement and their link to relapse.</a:t>
+            </a:r>
+          </a:p>
+          <a:p>
+            <a:pPr marL="285750" indent="-285750">
+              <a:spcBef>
+                <a:spcPts val="0"/>
+              </a:spcBef>
+              <a:spcAft>
+                <a:spcPts val="300"/>
+              </a:spcAft>
+              <a:buFont typeface="Arial"/>
+              <a:buChar char="•"/>
+            </a:pPr>
+            <a:r>
+              <a:rPr lang="en-US" sz="1600" dirty="0">
+                <a:solidFill>
+                  <a:srgbClr val="000000"/>
+                </a:solidFill>
+                <a:latin typeface="Times New Roman"/>
+                <a:cs typeface="Times New Roman"/>
+              </a:rPr>
+              <a:t>Role of medication, adherence, and meeting the patient’s basic needs.</a:t>
+            </a:r>
+          </a:p>
+          <a:p>
+            <a:pPr marL="285750" indent="-285750">
+              <a:spcBef>
+                <a:spcPts val="0"/>
+              </a:spcBef>
+              <a:spcAft>
+                <a:spcPts val="300"/>
+              </a:spcAft>
+              <a:buFont typeface="Arial"/>
+              <a:buChar char="•"/>
+            </a:pPr>
+            <a:r>
+              <a:rPr lang="en-US" sz="1600" dirty="0">
+                <a:solidFill>
+                  <a:srgbClr val="000000"/>
+                </a:solidFill>
+                <a:latin typeface="Times New Roman"/>
+                <a:cs typeface="Times New Roman"/>
+              </a:rPr>
+              <a:t>Reducing excessive face-to-face contact by engaging the patient in productive activity (household work, day-care/vocational training, jobs, family business, agriculture, dairy).</a:t>
+            </a:r>
+          </a:p>
+          <a:p>
+            <a:pPr marL="285750" indent="-285750">
+              <a:spcBef>
+                <a:spcPts val="0"/>
+              </a:spcBef>
+              <a:spcAft>
+                <a:spcPts val="300"/>
+              </a:spcAft>
+              <a:buFont typeface="Arial"/>
+              <a:buChar char="•"/>
+            </a:pPr>
+            <a:r>
+              <a:rPr lang="en-US" sz="1600" dirty="0">
+                <a:solidFill>
+                  <a:srgbClr val="000000"/>
+                </a:solidFill>
+                <a:latin typeface="Times New Roman"/>
+                <a:cs typeface="Times New Roman"/>
+              </a:rPr>
+              <a:t>Helping the patient gradually regain independence in self-care during the caregiver’s brief absences.</a:t>
             </a:r>
           </a:p>
         </p:txBody>
@@ -2411,7 +2230,7 @@
         <p:spPr>
           <a:xfrm>
             <a:off x="0" y="0"/>
-            <a:ext cx="12192000" cy="1000000"/>
+            <a:ext cx="12192000" cy="900000"/>
           </a:xfrm>
           <a:prstGeom prst="rect">
             <a:avLst/>
@@ -2433,14 +2252,14 @@
               <a:buNone/>
             </a:pPr>
             <a:r>
-              <a:rPr lang="en-US" sz="3000" b="1" dirty="0">
+              <a:rPr lang="en-US" sz="1800" b="1" dirty="0">
                 <a:solidFill>
                   <a:srgbClr val="FFFFFF"/>
                 </a:solidFill>
                 <a:latin typeface="Times New Roman"/>
                 <a:cs typeface="Times New Roman"/>
               </a:rPr>
-              <a:t>Analysis Plan</a:t>
+              <a:t>Technique in Practice – Sessions 7–10</a:t>
             </a:r>
           </a:p>
         </p:txBody>
@@ -2453,8 +2272,8 @@
         </p:nvSpPr>
         <p:spPr>
           <a:xfrm>
-            <a:off x="685800" y="1150000"/>
-            <a:ext cx="10820400" cy="5500000"/>
+            <a:off x="685800" y="1050000"/>
+            <a:ext cx="10820400" cy="5650000"/>
           </a:xfrm>
           <a:prstGeom prst="rect">
             <a:avLst/>
@@ -2466,94 +2285,6 @@
           </a:bodyPr>
           <a:lstStyle/>
           <a:p>
-            <a:pPr marL="285750" indent="-285750">
-              <a:spcBef>
-                <a:spcPts val="0"/>
-              </a:spcBef>
-              <a:spcAft>
-                <a:spcPts val="300"/>
-              </a:spcAft>
-              <a:buFont typeface="Arial"/>
-              <a:buChar char="•"/>
-            </a:pPr>
-            <a:r>
-              <a:rPr lang="en-US" sz="1800" dirty="0">
-                <a:solidFill>
-                  <a:srgbClr val="000000"/>
-                </a:solidFill>
-                <a:latin typeface="Times New Roman"/>
-                <a:cs typeface="Times New Roman"/>
-              </a:rPr>
-              <a:t>Software: SPSS version 20.0.</a:t>
-            </a:r>
-          </a:p>
-          <a:p>
-            <a:pPr marL="285750" indent="-285750">
-              <a:spcBef>
-                <a:spcPts val="0"/>
-              </a:spcBef>
-              <a:spcAft>
-                <a:spcPts val="300"/>
-              </a:spcAft>
-              <a:buFont typeface="Arial"/>
-              <a:buChar char="•"/>
-            </a:pPr>
-            <a:r>
-              <a:rPr lang="en-US" sz="1800" dirty="0">
-                <a:solidFill>
-                  <a:srgbClr val="000000"/>
-                </a:solidFill>
-                <a:latin typeface="Times New Roman"/>
-                <a:cs typeface="Times New Roman"/>
-              </a:rPr>
-              <a:t>Repeated Measures ANOVA (RMANOVA) – compares pre-test &amp; post-test scores while simultaneously analysing the experimental and control groups (between-within design).</a:t>
-            </a:r>
-          </a:p>
-          <a:p>
-            <a:pPr marL="285750" indent="-285750">
-              <a:spcBef>
-                <a:spcPts val="0"/>
-              </a:spcBef>
-              <a:spcAft>
-                <a:spcPts val="300"/>
-              </a:spcAft>
-              <a:buFont typeface="Arial"/>
-              <a:buChar char="•"/>
-            </a:pPr>
-            <a:r>
-              <a:rPr lang="en-US" sz="1800" dirty="0">
-                <a:solidFill>
-                  <a:srgbClr val="000000"/>
-                </a:solidFill>
-                <a:latin typeface="Times New Roman"/>
-                <a:cs typeface="Times New Roman"/>
-              </a:rPr>
-              <a:t>Paired t-test – compares pre- vs post-intervention scores within each group.</a:t>
-            </a:r>
-          </a:p>
-          <a:p>
-            <a:pPr marL="285750" indent="-285750">
-              <a:spcBef>
-                <a:spcPts val="0"/>
-              </a:spcBef>
-              <a:spcAft>
-                <a:spcPts val="300"/>
-              </a:spcAft>
-              <a:buFont typeface="Arial"/>
-              <a:buChar char="•"/>
-            </a:pPr>
-            <a:r>
-              <a:rPr lang="en-US" sz="1800" dirty="0">
-                <a:solidFill>
-                  <a:srgbClr val="000000"/>
-                </a:solidFill>
-                <a:latin typeface="Times New Roman"/>
-                <a:cs typeface="Times New Roman"/>
-              </a:rPr>
-              <a:t>Chi-square / independent t-tests – compare sociodemographic variables across groups at baseline.</a:t>
-            </a:r>
-          </a:p>
-          <a:p>
             <a:pPr marL="0" indent="0">
               <a:spcBef>
                 <a:spcPts val="300"/>
@@ -2564,36 +2295,122 @@
               <a:buNone/>
             </a:pPr>
             <a:r>
-              <a:rPr lang="en-US" sz="2000" b="1" dirty="0">
+              <a:rPr lang="en-US" sz="1600" b="1" dirty="0">
                 <a:solidFill>
                   <a:srgbClr val="1F3864"/>
                 </a:solidFill>
                 <a:latin typeface="Times New Roman"/>
                 <a:cs typeface="Times New Roman"/>
               </a:rPr>
-              <a:t>Ethics</a:t>
-            </a:r>
-          </a:p>
-          <a:p>
-            <a:pPr marL="285750" indent="-285750">
-              <a:spcBef>
-                <a:spcPts val="0"/>
-              </a:spcBef>
-              <a:spcAft>
-                <a:spcPts val="300"/>
-              </a:spcAft>
-              <a:buFont typeface="Arial"/>
-              <a:buChar char="•"/>
-            </a:pPr>
-            <a:r>
-              <a:rPr lang="en-US" sz="1800" dirty="0">
-                <a:solidFill>
-                  <a:srgbClr val="000000"/>
-                </a:solidFill>
-                <a:latin typeface="Times New Roman"/>
-                <a:cs typeface="Times New Roman"/>
-              </a:rPr>
-              <a:t>Ethical clearance from the NIMHANS institute ethics committee; voluntary participation; written informed consent; control group offered the intervention after post-assessment.</a:t>
+              <a:t>Sessions 7–8: Communication Training</a:t>
+            </a:r>
+          </a:p>
+          <a:p>
+            <a:pPr marL="285750" indent="-285750">
+              <a:spcBef>
+                <a:spcPts val="0"/>
+              </a:spcBef>
+              <a:spcAft>
+                <a:spcPts val="300"/>
+              </a:spcAft>
+              <a:buFont typeface="Arial"/>
+              <a:buChar char="•"/>
+            </a:pPr>
+            <a:r>
+              <a:rPr lang="en-US" sz="1600" dirty="0">
+                <a:solidFill>
+                  <a:srgbClr val="000000"/>
+                </a:solidFill>
+                <a:latin typeface="Times New Roman"/>
+                <a:cs typeface="Times New Roman"/>
+              </a:rPr>
+              <a:t>Role plays and video clippings to improve day-to-day communication; modifying negative emotions (criticality, hostility) toward positive interactions; vernacular handouts.</a:t>
+            </a:r>
+          </a:p>
+          <a:p>
+            <a:pPr marL="0" indent="0">
+              <a:spcBef>
+                <a:spcPts val="300"/>
+              </a:spcBef>
+              <a:spcAft>
+                <a:spcPts val="150"/>
+              </a:spcAft>
+              <a:buNone/>
+            </a:pPr>
+            <a:r>
+              <a:rPr lang="en-US" sz="1600" b="1" dirty="0">
+                <a:solidFill>
+                  <a:srgbClr val="1F3864"/>
+                </a:solidFill>
+                <a:latin typeface="Times New Roman"/>
+                <a:cs typeface="Times New Roman"/>
+              </a:rPr>
+              <a:t>Session 9: Stress Management</a:t>
+            </a:r>
+          </a:p>
+          <a:p>
+            <a:pPr marL="285750" indent="-285750">
+              <a:spcBef>
+                <a:spcPts val="0"/>
+              </a:spcBef>
+              <a:spcAft>
+                <a:spcPts val="300"/>
+              </a:spcAft>
+              <a:buFont typeface="Arial"/>
+              <a:buChar char="•"/>
+            </a:pPr>
+            <a:r>
+              <a:rPr lang="en-US" sz="1600" dirty="0">
+                <a:solidFill>
+                  <a:srgbClr val="000000"/>
+                </a:solidFill>
+                <a:latin typeface="Times New Roman"/>
+                <a:cs typeface="Times New Roman"/>
+              </a:rPr>
+              <a:t>Identifying stressors; balanced lifestyle; sharing roles; enhancing social support; crisis management; ‘caring for the carers’; addressing guilt.</a:t>
+            </a:r>
+          </a:p>
+          <a:p>
+            <a:pPr marL="0" indent="0">
+              <a:spcBef>
+                <a:spcPts val="300"/>
+              </a:spcBef>
+              <a:spcAft>
+                <a:spcPts val="150"/>
+              </a:spcAft>
+              <a:buNone/>
+            </a:pPr>
+            <a:r>
+              <a:rPr lang="en-US" sz="1600" b="1" dirty="0">
+                <a:solidFill>
+                  <a:srgbClr val="1F3864"/>
+                </a:solidFill>
+                <a:latin typeface="Times New Roman"/>
+                <a:cs typeface="Times New Roman"/>
+              </a:rPr>
+              <a:t>Session 10: Recap &amp; Referral</a:t>
+            </a:r>
+          </a:p>
+          <a:p>
+            <a:pPr marL="285750" indent="-285750">
+              <a:spcBef>
+                <a:spcPts val="0"/>
+              </a:spcBef>
+              <a:spcAft>
+                <a:spcPts val="300"/>
+              </a:spcAft>
+              <a:buFont typeface="Arial"/>
+              <a:buChar char="•"/>
+            </a:pPr>
+            <a:r>
+              <a:rPr lang="en-US" sz="1600" dirty="0">
+                <a:solidFill>
+                  <a:srgbClr val="000000"/>
+                </a:solidFill>
+                <a:latin typeface="Times New Roman"/>
+                <a:cs typeface="Times New Roman"/>
+              </a:rPr>
+              <a:t>Consolidation of learning, take-home handout, and referral to services.</a:t>
             </a:r>
           </a:p>
         </p:txBody>
@@ -2629,7 +2446,7 @@
         <p:spPr>
           <a:xfrm>
             <a:off x="0" y="0"/>
-            <a:ext cx="12192000" cy="1000000"/>
+            <a:ext cx="12192000" cy="900000"/>
           </a:xfrm>
           <a:prstGeom prst="rect">
             <a:avLst/>
@@ -2651,7 +2468,7 @@
               <a:buNone/>
             </a:pPr>
             <a:r>
-              <a:rPr lang="en-US" sz="3000" b="1" dirty="0">
+              <a:rPr lang="en-US" sz="1800" b="1" dirty="0">
                 <a:solidFill>
                   <a:srgbClr val="FFFFFF"/>
                 </a:solidFill>
@@ -2671,8 +2488,8 @@
         </p:nvSpPr>
         <p:spPr>
           <a:xfrm>
-            <a:off x="685800" y="1150000"/>
-            <a:ext cx="10820400" cy="5500000"/>
+            <a:off x="685800" y="1050000"/>
+            <a:ext cx="10820400" cy="5650000"/>
           </a:xfrm>
           <a:prstGeom prst="rect">
             <a:avLst/>
@@ -2695,51 +2512,51 @@
               <a:buChar char="•"/>
             </a:pPr>
             <a:r>
-              <a:rPr lang="en-US" sz="1800" dirty="0">
-                <a:solidFill>
-                  <a:srgbClr val="000000"/>
-                </a:solidFill>
-                <a:latin typeface="Times New Roman"/>
-                <a:cs typeface="Times New Roman"/>
-              </a:rPr>
-              <a:t>Introduction &amp; background</a:t>
-            </a:r>
-          </a:p>
-          <a:p>
-            <a:pPr marL="285750" indent="-285750">
-              <a:spcBef>
-                <a:spcPts val="0"/>
-              </a:spcBef>
-              <a:spcAft>
-                <a:spcPts val="300"/>
-              </a:spcAft>
-              <a:buFont typeface="Arial"/>
-              <a:buChar char="•"/>
-            </a:pPr>
-            <a:r>
-              <a:rPr lang="en-US" sz="1800" dirty="0">
-                <a:solidFill>
-                  <a:srgbClr val="000000"/>
-                </a:solidFill>
-                <a:latin typeface="Times New Roman"/>
-                <a:cs typeface="Times New Roman"/>
-              </a:rPr>
-              <a:t>Operational definitions of all variables</a:t>
-            </a:r>
-          </a:p>
-          <a:p>
-            <a:pPr marL="285750" indent="-285750">
-              <a:spcBef>
-                <a:spcPts val="0"/>
-              </a:spcBef>
-              <a:spcAft>
-                <a:spcPts val="300"/>
-              </a:spcAft>
-              <a:buFont typeface="Arial"/>
-              <a:buChar char="•"/>
-            </a:pPr>
-            <a:r>
-              <a:rPr lang="en-US" sz="1800" dirty="0">
+              <a:rPr lang="en-US" sz="1600" dirty="0">
+                <a:solidFill>
+                  <a:srgbClr val="000000"/>
+                </a:solidFill>
+                <a:latin typeface="Times New Roman"/>
+                <a:cs typeface="Times New Roman"/>
+              </a:rPr>
+              <a:t>Introduction &amp; background (with sources)</a:t>
+            </a:r>
+          </a:p>
+          <a:p>
+            <a:pPr marL="285750" indent="-285750">
+              <a:spcBef>
+                <a:spcPts val="0"/>
+              </a:spcBef>
+              <a:spcAft>
+                <a:spcPts val="300"/>
+              </a:spcAft>
+              <a:buFont typeface="Arial"/>
+              <a:buChar char="•"/>
+            </a:pPr>
+            <a:r>
+              <a:rPr lang="en-US" sz="1600" dirty="0">
+                <a:solidFill>
+                  <a:srgbClr val="000000"/>
+                </a:solidFill>
+                <a:latin typeface="Times New Roman"/>
+                <a:cs typeface="Times New Roman"/>
+              </a:rPr>
+              <a:t>Operational definitions of variables (with sources)</a:t>
+            </a:r>
+          </a:p>
+          <a:p>
+            <a:pPr marL="285750" indent="-285750">
+              <a:spcBef>
+                <a:spcPts val="0"/>
+              </a:spcBef>
+              <a:spcAft>
+                <a:spcPts val="300"/>
+              </a:spcAft>
+              <a:buFont typeface="Arial"/>
+              <a:buChar char="•"/>
+            </a:pPr>
+            <a:r>
+              <a:rPr lang="en-US" sz="1600" dirty="0">
                 <a:solidFill>
                   <a:srgbClr val="000000"/>
                 </a:solidFill>
@@ -2761,29 +2578,29 @@
               <a:buChar char="•"/>
             </a:pPr>
             <a:r>
-              <a:rPr lang="en-US" sz="1800" dirty="0">
-                <a:solidFill>
-                  <a:srgbClr val="000000"/>
-                </a:solidFill>
-                <a:latin typeface="Times New Roman"/>
-                <a:cs typeface="Times New Roman"/>
-              </a:rPr>
-              <a:t>Aim, objectives &amp; hypotheses (research, directional, null)</a:t>
-            </a:r>
-          </a:p>
-          <a:p>
-            <a:pPr marL="285750" indent="-285750">
-              <a:spcBef>
-                <a:spcPts val="0"/>
-              </a:spcBef>
-              <a:spcAft>
-                <a:spcPts val="300"/>
-              </a:spcAft>
-              <a:buFont typeface="Arial"/>
-              <a:buChar char="•"/>
-            </a:pPr>
-            <a:r>
-              <a:rPr lang="en-US" sz="1800" dirty="0">
+              <a:rPr lang="en-US" sz="1600" dirty="0">
+                <a:solidFill>
+                  <a:srgbClr val="000000"/>
+                </a:solidFill>
+                <a:latin typeface="Times New Roman"/>
+                <a:cs typeface="Times New Roman"/>
+              </a:rPr>
+              <a:t>Aim, objective &amp; hypothesis</a:t>
+            </a:r>
+          </a:p>
+          <a:p>
+            <a:pPr marL="285750" indent="-285750">
+              <a:spcBef>
+                <a:spcPts val="0"/>
+              </a:spcBef>
+              <a:spcAft>
+                <a:spcPts val="300"/>
+              </a:spcAft>
+              <a:buFont typeface="Arial"/>
+              <a:buChar char="•"/>
+            </a:pPr>
+            <a:r>
+              <a:rPr lang="en-US" sz="1600" dirty="0">
                 <a:solidFill>
                   <a:srgbClr val="000000"/>
                 </a:solidFill>
@@ -2805,73 +2622,73 @@
               <a:buChar char="•"/>
             </a:pPr>
             <a:r>
-              <a:rPr lang="en-US" sz="1800" dirty="0">
-                <a:solidFill>
-                  <a:srgbClr val="000000"/>
-                </a:solidFill>
-                <a:latin typeface="Times New Roman"/>
-                <a:cs typeface="Times New Roman"/>
-              </a:rPr>
-              <a:t>Control (TAU) group vs Experimental group</a:t>
-            </a:r>
-          </a:p>
-          <a:p>
-            <a:pPr marL="285750" indent="-285750">
-              <a:spcBef>
-                <a:spcPts val="0"/>
-              </a:spcBef>
-              <a:spcAft>
-                <a:spcPts val="300"/>
-              </a:spcAft>
-              <a:buFont typeface="Arial"/>
-              <a:buChar char="•"/>
-            </a:pPr>
-            <a:r>
-              <a:rPr lang="en-US" sz="1800" dirty="0">
-                <a:solidFill>
-                  <a:srgbClr val="000000"/>
-                </a:solidFill>
-                <a:latin typeface="Times New Roman"/>
-                <a:cs typeface="Times New Roman"/>
-              </a:rPr>
-              <a:t>The family intervention – session by session</a:t>
-            </a:r>
-          </a:p>
-          <a:p>
-            <a:pPr marL="285750" indent="-285750">
-              <a:spcBef>
-                <a:spcPts val="0"/>
-              </a:spcBef>
-              <a:spcAft>
-                <a:spcPts val="300"/>
-              </a:spcAft>
-              <a:buFont typeface="Arial"/>
-              <a:buChar char="•"/>
-            </a:pPr>
-            <a:r>
-              <a:rPr lang="en-US" sz="1800" dirty="0">
-                <a:solidFill>
-                  <a:srgbClr val="000000"/>
-                </a:solidFill>
-                <a:latin typeface="Times New Roman"/>
-                <a:cs typeface="Times New Roman"/>
-              </a:rPr>
-              <a:t>Outcome measures &amp; tools; analysis plan</a:t>
-            </a:r>
-          </a:p>
-          <a:p>
-            <a:pPr marL="285750" indent="-285750">
-              <a:spcBef>
-                <a:spcPts val="0"/>
-              </a:spcBef>
-              <a:spcAft>
-                <a:spcPts val="300"/>
-              </a:spcAft>
-              <a:buFont typeface="Arial"/>
-              <a:buChar char="•"/>
-            </a:pPr>
-            <a:r>
-              <a:rPr lang="en-US" sz="1800" dirty="0">
+              <a:rPr lang="en-US" sz="1600" dirty="0">
+                <a:solidFill>
+                  <a:srgbClr val="000000"/>
+                </a:solidFill>
+                <a:latin typeface="Times New Roman"/>
+                <a:cs typeface="Times New Roman"/>
+              </a:rPr>
+              <a:t>Control (TAU) vs Experimental group</a:t>
+            </a:r>
+          </a:p>
+          <a:p>
+            <a:pPr marL="285750" indent="-285750">
+              <a:spcBef>
+                <a:spcPts val="0"/>
+              </a:spcBef>
+              <a:spcAft>
+                <a:spcPts val="300"/>
+              </a:spcAft>
+              <a:buFont typeface="Arial"/>
+              <a:buChar char="•"/>
+            </a:pPr>
+            <a:r>
+              <a:rPr lang="en-US" sz="1600" dirty="0">
+                <a:solidFill>
+                  <a:srgbClr val="000000"/>
+                </a:solidFill>
+                <a:latin typeface="Times New Roman"/>
+                <a:cs typeface="Times New Roman"/>
+              </a:rPr>
+              <a:t>The family-intervention technique &amp; its sessions</a:t>
+            </a:r>
+          </a:p>
+          <a:p>
+            <a:pPr marL="285750" indent="-285750">
+              <a:spcBef>
+                <a:spcPts val="0"/>
+              </a:spcBef>
+              <a:spcAft>
+                <a:spcPts val="300"/>
+              </a:spcAft>
+              <a:buFont typeface="Arial"/>
+              <a:buChar char="•"/>
+            </a:pPr>
+            <a:r>
+              <a:rPr lang="en-US" sz="1600" dirty="0">
+                <a:solidFill>
+                  <a:srgbClr val="000000"/>
+                </a:solidFill>
+                <a:latin typeface="Times New Roman"/>
+                <a:cs typeface="Times New Roman"/>
+              </a:rPr>
+              <a:t>Outcome measures, tools &amp; analysis plan</a:t>
+            </a:r>
+          </a:p>
+          <a:p>
+            <a:pPr marL="285750" indent="-285750">
+              <a:spcBef>
+                <a:spcPts val="0"/>
+              </a:spcBef>
+              <a:spcAft>
+                <a:spcPts val="300"/>
+              </a:spcAft>
+              <a:buFont typeface="Arial"/>
+              <a:buChar char="•"/>
+            </a:pPr>
+            <a:r>
+              <a:rPr lang="en-US" sz="1600" dirty="0">
                 <a:solidFill>
                   <a:srgbClr val="000000"/>
                 </a:solidFill>
@@ -2893,14 +2710,14 @@
               <a:buChar char="•"/>
             </a:pPr>
             <a:r>
-              <a:rPr lang="en-US" sz="1800" dirty="0">
-                <a:solidFill>
-                  <a:srgbClr val="000000"/>
-                </a:solidFill>
-                <a:latin typeface="Times New Roman"/>
-                <a:cs typeface="Times New Roman"/>
-              </a:rPr>
-              <a:t>Strengths, limitations, conclusion &amp; references</a:t>
+              <a:rPr lang="en-US" sz="1600" dirty="0">
+                <a:solidFill>
+                  <a:srgbClr val="000000"/>
+                </a:solidFill>
+                <a:latin typeface="Times New Roman"/>
+                <a:cs typeface="Times New Roman"/>
+              </a:rPr>
+              <a:t>Strengths, limitations, conclusion, references &amp; critical reflection</a:t>
             </a:r>
           </a:p>
         </p:txBody>
@@ -2936,7 +2753,7 @@
         <p:spPr>
           <a:xfrm>
             <a:off x="0" y="0"/>
-            <a:ext cx="12192000" cy="1000000"/>
+            <a:ext cx="12192000" cy="900000"/>
           </a:xfrm>
           <a:prstGeom prst="rect">
             <a:avLst/>
@@ -2958,14 +2775,14 @@
               <a:buNone/>
             </a:pPr>
             <a:r>
-              <a:rPr lang="en-US" sz="3000" b="1" dirty="0">
+              <a:rPr lang="en-US" sz="1800" b="1" dirty="0">
                 <a:solidFill>
                   <a:srgbClr val="FFFFFF"/>
                 </a:solidFill>
                 <a:latin typeface="Times New Roman"/>
                 <a:cs typeface="Times New Roman"/>
               </a:rPr>
-              <a:t>Findings (1): Sociodemographic Profile</a:t>
+              <a:t>Outcome Measures &amp; Tools</a:t>
             </a:r>
           </a:p>
         </p:txBody>
@@ -2978,8 +2795,8 @@
         </p:nvSpPr>
         <p:spPr>
           <a:xfrm>
-            <a:off x="685800" y="1150000"/>
-            <a:ext cx="10820400" cy="5500000"/>
+            <a:off x="685800" y="1050000"/>
+            <a:ext cx="10820400" cy="5650000"/>
           </a:xfrm>
           <a:prstGeom prst="rect">
             <a:avLst/>
@@ -2991,113 +2808,175 @@
           </a:bodyPr>
           <a:lstStyle/>
           <a:p>
-            <a:pPr marL="285750" indent="-285750">
-              <a:spcBef>
-                <a:spcPts val="0"/>
-              </a:spcBef>
-              <a:spcAft>
-                <a:spcPts val="300"/>
-              </a:spcAft>
-              <a:buFont typeface="Arial"/>
-              <a:buChar char="•"/>
-            </a:pPr>
-            <a:r>
-              <a:rPr lang="en-US" sz="1800" dirty="0">
-                <a:solidFill>
-                  <a:srgbClr val="000000"/>
-                </a:solidFill>
-                <a:latin typeface="Times New Roman"/>
-                <a:cs typeface="Times New Roman"/>
-              </a:rPr>
-              <a:t>50% of caregivers were aged 50 years and above.</a:t>
-            </a:r>
-          </a:p>
-          <a:p>
-            <a:pPr marL="285750" indent="-285750">
-              <a:spcBef>
-                <a:spcPts val="0"/>
-              </a:spcBef>
-              <a:spcAft>
-                <a:spcPts val="300"/>
-              </a:spcAft>
-              <a:buFont typeface="Arial"/>
-              <a:buChar char="•"/>
-            </a:pPr>
-            <a:r>
-              <a:rPr lang="en-US" sz="1800" dirty="0">
-                <a:solidFill>
-                  <a:srgbClr val="000000"/>
-                </a:solidFill>
-                <a:latin typeface="Times New Roman"/>
-                <a:cs typeface="Times New Roman"/>
-              </a:rPr>
-              <a:t>More female caregivers than male in both groups (up to 85% female in the experimental group).</a:t>
-            </a:r>
-          </a:p>
-          <a:p>
-            <a:pPr marL="285750" indent="-285750">
-              <a:spcBef>
-                <a:spcPts val="0"/>
-              </a:spcBef>
-              <a:spcAft>
-                <a:spcPts val="300"/>
-              </a:spcAft>
-              <a:buFont typeface="Arial"/>
-              <a:buChar char="•"/>
-            </a:pPr>
-            <a:r>
-              <a:rPr lang="en-US" sz="1800" dirty="0">
-                <a:solidFill>
-                  <a:srgbClr val="000000"/>
-                </a:solidFill>
-                <a:latin typeface="Times New Roman"/>
-                <a:cs typeface="Times New Roman"/>
-              </a:rPr>
-              <a:t>Mothers were the primary caregivers in 40% (control) and 47.5% (experimental) of cases.</a:t>
-            </a:r>
-          </a:p>
-          <a:p>
-            <a:pPr marL="285750" indent="-285750">
-              <a:spcBef>
-                <a:spcPts val="0"/>
-              </a:spcBef>
-              <a:spcAft>
-                <a:spcPts val="300"/>
-              </a:spcAft>
-              <a:buFont typeface="Arial"/>
-              <a:buChar char="•"/>
-            </a:pPr>
-            <a:r>
-              <a:rPr lang="en-US" sz="1800" dirty="0">
-                <a:solidFill>
-                  <a:srgbClr val="000000"/>
-                </a:solidFill>
-                <a:latin typeface="Times New Roman"/>
-                <a:cs typeface="Times New Roman"/>
-              </a:rPr>
-              <a:t>92.5% of caregivers were in daily contact with the patient – high face-to-face contact.</a:t>
-            </a:r>
-          </a:p>
-          <a:p>
-            <a:pPr marL="285750" indent="-285750">
-              <a:spcBef>
-                <a:spcPts val="0"/>
-              </a:spcBef>
-              <a:spcAft>
-                <a:spcPts val="300"/>
-              </a:spcAft>
-              <a:buFont typeface="Arial"/>
-              <a:buChar char="•"/>
-            </a:pPr>
-            <a:r>
-              <a:rPr lang="en-US" sz="1800" dirty="0">
-                <a:solidFill>
-                  <a:srgbClr val="000000"/>
-                </a:solidFill>
-                <a:latin typeface="Times New Roman"/>
-                <a:cs typeface="Times New Roman"/>
-              </a:rPr>
-              <a:t>Majority of patients were female (62.5% control; 80% experimental); mean patient age ≈31 years.</a:t>
+            <a:pPr marL="0" indent="0">
+              <a:spcBef>
+                <a:spcPts val="300"/>
+              </a:spcBef>
+              <a:spcAft>
+                <a:spcPts val="150"/>
+              </a:spcAft>
+              <a:buNone/>
+            </a:pPr>
+            <a:r>
+              <a:rPr lang="en-US" sz="1600" b="1" dirty="0">
+                <a:solidFill>
+                  <a:srgbClr val="1F3864"/>
+                </a:solidFill>
+                <a:latin typeface="Times New Roman"/>
+                <a:cs typeface="Times New Roman"/>
+              </a:rPr>
+              <a:t>Primary outcome</a:t>
+            </a:r>
+          </a:p>
+          <a:p>
+            <a:pPr marL="285750" indent="-285750">
+              <a:spcBef>
+                <a:spcPts val="0"/>
+              </a:spcBef>
+              <a:spcAft>
+                <a:spcPts val="300"/>
+              </a:spcAft>
+              <a:buFont typeface="Arial"/>
+              <a:buChar char="•"/>
+            </a:pPr>
+            <a:r>
+              <a:rPr lang="en-US" sz="1600" dirty="0">
+                <a:solidFill>
+                  <a:srgbClr val="000000"/>
+                </a:solidFill>
+                <a:latin typeface="Times New Roman"/>
+                <a:cs typeface="Times New Roman"/>
+              </a:rPr>
+              <a:t>Level of Expressed Emotion (criticality + emotional over-involvement) in caregivers.</a:t>
+            </a:r>
+          </a:p>
+          <a:p>
+            <a:pPr marL="0" indent="0">
+              <a:spcBef>
+                <a:spcPts val="300"/>
+              </a:spcBef>
+              <a:spcAft>
+                <a:spcPts val="150"/>
+              </a:spcAft>
+              <a:buNone/>
+            </a:pPr>
+            <a:r>
+              <a:rPr lang="en-US" sz="1600" b="1" dirty="0">
+                <a:solidFill>
+                  <a:srgbClr val="1F3864"/>
+                </a:solidFill>
+                <a:latin typeface="Times New Roman"/>
+                <a:cs typeface="Times New Roman"/>
+              </a:rPr>
+              <a:t>1. Sociodemographic interview schedule</a:t>
+            </a:r>
+          </a:p>
+          <a:p>
+            <a:pPr marL="285750" indent="-285750">
+              <a:spcBef>
+                <a:spcPts val="0"/>
+              </a:spcBef>
+              <a:spcAft>
+                <a:spcPts val="300"/>
+              </a:spcAft>
+              <a:buFont typeface="Arial"/>
+              <a:buChar char="•"/>
+            </a:pPr>
+            <a:r>
+              <a:rPr lang="en-US" sz="1600" dirty="0">
+                <a:solidFill>
+                  <a:srgbClr val="000000"/>
+                </a:solidFill>
+                <a:latin typeface="Times New Roman"/>
+                <a:cs typeface="Times New Roman"/>
+              </a:rPr>
+              <a:t>Semi-structured schedule – personal, family, marital, occupational, income, caregiving, and illness details.</a:t>
+            </a:r>
+          </a:p>
+          <a:p>
+            <a:pPr marL="0" indent="0">
+              <a:spcBef>
+                <a:spcPts val="300"/>
+              </a:spcBef>
+              <a:spcAft>
+                <a:spcPts val="150"/>
+              </a:spcAft>
+              <a:buNone/>
+            </a:pPr>
+            <a:r>
+              <a:rPr lang="en-US" sz="1600" b="1" dirty="0">
+                <a:solidFill>
+                  <a:srgbClr val="1F3864"/>
+                </a:solidFill>
+                <a:latin typeface="Times New Roman"/>
+                <a:cs typeface="Times New Roman"/>
+              </a:rPr>
+              <a:t>2. FEICS (Shields et al., 1992)</a:t>
+            </a:r>
+          </a:p>
+          <a:p>
+            <a:pPr marL="285750" indent="-285750">
+              <a:spcBef>
+                <a:spcPts val="0"/>
+              </a:spcBef>
+              <a:spcAft>
+                <a:spcPts val="300"/>
+              </a:spcAft>
+              <a:buFont typeface="Arial"/>
+              <a:buChar char="•"/>
+            </a:pPr>
+            <a:r>
+              <a:rPr lang="en-US" sz="1600" dirty="0">
+                <a:solidFill>
+                  <a:srgbClr val="000000"/>
+                </a:solidFill>
+                <a:latin typeface="Times New Roman"/>
+                <a:cs typeface="Times New Roman"/>
+              </a:rPr>
+              <a:t>14-item self-report; perceived criticism (even items) &amp; emotional over-involvement (odd items); 5-point Likert; higher = greater EE.</a:t>
+            </a:r>
+          </a:p>
+          <a:p>
+            <a:pPr marL="0" indent="0">
+              <a:spcBef>
+                <a:spcPts val="300"/>
+              </a:spcBef>
+              <a:spcAft>
+                <a:spcPts val="150"/>
+              </a:spcAft>
+              <a:buNone/>
+            </a:pPr>
+            <a:r>
+              <a:rPr lang="en-US" sz="1600" b="1" dirty="0">
+                <a:solidFill>
+                  <a:srgbClr val="1F3864"/>
+                </a:solidFill>
+                <a:latin typeface="Times New Roman"/>
+                <a:cs typeface="Times New Roman"/>
+              </a:rPr>
+              <a:t>3. MINI 6.0 (Sheehan et al., 1998)</a:t>
+            </a:r>
+          </a:p>
+          <a:p>
+            <a:pPr marL="285750" indent="-285750">
+              <a:spcBef>
+                <a:spcPts val="0"/>
+              </a:spcBef>
+              <a:spcAft>
+                <a:spcPts val="300"/>
+              </a:spcAft>
+              <a:buFont typeface="Arial"/>
+              <a:buChar char="•"/>
+            </a:pPr>
+            <a:r>
+              <a:rPr lang="en-US" sz="1600" dirty="0">
+                <a:solidFill>
+                  <a:srgbClr val="000000"/>
+                </a:solidFill>
+                <a:latin typeface="Times New Roman"/>
+                <a:cs typeface="Times New Roman"/>
+              </a:rPr>
+              <a:t>Brief structured interview for major Axis-I disorders; used to screen out comorbidity.</a:t>
             </a:r>
           </a:p>
         </p:txBody>
@@ -3133,7 +3012,7 @@
         <p:spPr>
           <a:xfrm>
             <a:off x="0" y="0"/>
-            <a:ext cx="12192000" cy="1000000"/>
+            <a:ext cx="12192000" cy="900000"/>
           </a:xfrm>
           <a:prstGeom prst="rect">
             <a:avLst/>
@@ -3155,14 +3034,14 @@
               <a:buNone/>
             </a:pPr>
             <a:r>
-              <a:rPr lang="en-US" sz="3000" b="1" dirty="0">
+              <a:rPr lang="en-US" sz="1800" b="1" dirty="0">
                 <a:solidFill>
                   <a:srgbClr val="FFFFFF"/>
                 </a:solidFill>
                 <a:latin typeface="Times New Roman"/>
                 <a:cs typeface="Times New Roman"/>
               </a:rPr>
-              <a:t>Findings (2): Control (TAU) Group</a:t>
+              <a:t>Analysis Plan</a:t>
             </a:r>
           </a:p>
         </p:txBody>
@@ -3175,8 +3054,8 @@
         </p:nvSpPr>
         <p:spPr>
           <a:xfrm>
-            <a:off x="685800" y="1150000"/>
-            <a:ext cx="10820400" cy="5500000"/>
+            <a:off x="685800" y="1050000"/>
+            <a:ext cx="10820400" cy="5650000"/>
           </a:xfrm>
           <a:prstGeom prst="rect">
             <a:avLst/>
@@ -3199,102 +3078,123 @@
               <a:buChar char="•"/>
             </a:pPr>
             <a:r>
-              <a:rPr lang="en-US" sz="1800" dirty="0">
-                <a:solidFill>
-                  <a:srgbClr val="000000"/>
-                </a:solidFill>
-                <a:latin typeface="Times New Roman"/>
-                <a:cs typeface="Times New Roman"/>
-              </a:rPr>
-              <a:t>In the control group, EE INCREASED from pre-test to post-test (no intervention):</a:t>
-            </a:r>
-          </a:p>
-          <a:p>
-            <a:pPr marL="571500" indent="-228600">
-              <a:spcBef>
-                <a:spcPts val="0"/>
-              </a:spcBef>
-              <a:spcAft>
-                <a:spcPts val="300"/>
-              </a:spcAft>
-              <a:buFont typeface="Arial"/>
-              <a:buChar char="–"/>
-            </a:pPr>
-            <a:r>
-              <a:rPr lang="en-US" sz="1800" i="1" dirty="0">
-                <a:solidFill>
-                  <a:srgbClr val="333333"/>
-                </a:solidFill>
-                <a:latin typeface="Times New Roman"/>
-                <a:cs typeface="Times New Roman"/>
-              </a:rPr>
-              <a:t>Total EE: pre 52.47 (SD 4.95) → post 56.72 (SD 4.52); t = −3.68; P = 0.001.</a:t>
-            </a:r>
-          </a:p>
-          <a:p>
-            <a:pPr marL="571500" indent="-228600">
-              <a:spcBef>
-                <a:spcPts val="0"/>
-              </a:spcBef>
-              <a:spcAft>
-                <a:spcPts val="300"/>
-              </a:spcAft>
-              <a:buFont typeface="Arial"/>
-              <a:buChar char="–"/>
-            </a:pPr>
-            <a:r>
-              <a:rPr lang="en-US" sz="1800" i="1" dirty="0">
-                <a:solidFill>
-                  <a:srgbClr val="333333"/>
-                </a:solidFill>
-                <a:latin typeface="Times New Roman"/>
-                <a:cs typeface="Times New Roman"/>
-              </a:rPr>
-              <a:t>Criticality: pre 26.13 → post 28.28; t = −3.47; P = 0.002.</a:t>
-            </a:r>
-          </a:p>
-          <a:p>
-            <a:pPr marL="571500" indent="-228600">
-              <a:spcBef>
-                <a:spcPts val="0"/>
-              </a:spcBef>
-              <a:spcAft>
-                <a:spcPts val="300"/>
-              </a:spcAft>
-              <a:buFont typeface="Arial"/>
-              <a:buChar char="–"/>
-            </a:pPr>
-            <a:r>
-              <a:rPr lang="en-US" sz="1800" i="1" dirty="0">
-                <a:solidFill>
-                  <a:srgbClr val="333333"/>
-                </a:solidFill>
-                <a:latin typeface="Times New Roman"/>
-                <a:cs typeface="Times New Roman"/>
-              </a:rPr>
-              <a:t>Emotional over-involvement: pre 26.34 → post 28.44; t = −3.25; P = 0.003.</a:t>
-            </a:r>
-          </a:p>
-          <a:p>
-            <a:pPr marL="285750" indent="-285750">
-              <a:spcBef>
-                <a:spcPts val="0"/>
-              </a:spcBef>
-              <a:spcAft>
-                <a:spcPts val="300"/>
-              </a:spcAft>
-              <a:buFont typeface="Arial"/>
-              <a:buChar char="•"/>
-            </a:pPr>
-            <a:r>
-              <a:rPr lang="en-US" sz="1800" dirty="0">
-                <a:solidFill>
-                  <a:srgbClr val="000000"/>
-                </a:solidFill>
-                <a:latin typeface="Times New Roman"/>
-                <a:cs typeface="Times New Roman"/>
-              </a:rPr>
-              <a:t>Interpretation: without a structured intervention, caregiver EE tended to WORSEN over time.</a:t>
+              <a:rPr lang="en-US" sz="1600" dirty="0">
+                <a:solidFill>
+                  <a:srgbClr val="000000"/>
+                </a:solidFill>
+                <a:latin typeface="Times New Roman"/>
+                <a:cs typeface="Times New Roman"/>
+              </a:rPr>
+              <a:t>Software: SPSS version 20.0.</a:t>
+            </a:r>
+          </a:p>
+          <a:p>
+            <a:pPr marL="285750" indent="-285750">
+              <a:spcBef>
+                <a:spcPts val="0"/>
+              </a:spcBef>
+              <a:spcAft>
+                <a:spcPts val="300"/>
+              </a:spcAft>
+              <a:buFont typeface="Arial"/>
+              <a:buChar char="•"/>
+            </a:pPr>
+            <a:r>
+              <a:rPr lang="en-US" sz="1600" dirty="0">
+                <a:solidFill>
+                  <a:srgbClr val="000000"/>
+                </a:solidFill>
+                <a:latin typeface="Times New Roman"/>
+                <a:cs typeface="Times New Roman"/>
+              </a:rPr>
+              <a:t>Repeated Measures ANOVA (RMANOVA) – compares pre &amp; post scores while simultaneously analysing both groups.</a:t>
+            </a:r>
+          </a:p>
+          <a:p>
+            <a:pPr marL="285750" indent="-285750">
+              <a:spcBef>
+                <a:spcPts val="0"/>
+              </a:spcBef>
+              <a:spcAft>
+                <a:spcPts val="300"/>
+              </a:spcAft>
+              <a:buFont typeface="Arial"/>
+              <a:buChar char="•"/>
+            </a:pPr>
+            <a:r>
+              <a:rPr lang="en-US" sz="1600" dirty="0">
+                <a:solidFill>
+                  <a:srgbClr val="000000"/>
+                </a:solidFill>
+                <a:latin typeface="Times New Roman"/>
+                <a:cs typeface="Times New Roman"/>
+              </a:rPr>
+              <a:t>Paired t-test – compares pre- vs post-intervention scores within each group.</a:t>
+            </a:r>
+          </a:p>
+          <a:p>
+            <a:pPr marL="285750" indent="-285750">
+              <a:spcBef>
+                <a:spcPts val="0"/>
+              </a:spcBef>
+              <a:spcAft>
+                <a:spcPts val="300"/>
+              </a:spcAft>
+              <a:buFont typeface="Arial"/>
+              <a:buChar char="•"/>
+            </a:pPr>
+            <a:r>
+              <a:rPr lang="en-US" sz="1600" dirty="0">
+                <a:solidFill>
+                  <a:srgbClr val="000000"/>
+                </a:solidFill>
+                <a:latin typeface="Times New Roman"/>
+                <a:cs typeface="Times New Roman"/>
+              </a:rPr>
+              <a:t>Chi-square / t-tests – compare baseline sociodemographic variables across groups.</a:t>
+            </a:r>
+          </a:p>
+          <a:p>
+            <a:pPr marL="0" indent="0">
+              <a:spcBef>
+                <a:spcPts val="300"/>
+              </a:spcBef>
+              <a:spcAft>
+                <a:spcPts val="150"/>
+              </a:spcAft>
+              <a:buNone/>
+            </a:pPr>
+            <a:r>
+              <a:rPr lang="en-US" sz="1600" b="1" dirty="0">
+                <a:solidFill>
+                  <a:srgbClr val="1F3864"/>
+                </a:solidFill>
+                <a:latin typeface="Times New Roman"/>
+                <a:cs typeface="Times New Roman"/>
+              </a:rPr>
+              <a:t>Ethics</a:t>
+            </a:r>
+          </a:p>
+          <a:p>
+            <a:pPr marL="285750" indent="-285750">
+              <a:spcBef>
+                <a:spcPts val="0"/>
+              </a:spcBef>
+              <a:spcAft>
+                <a:spcPts val="300"/>
+              </a:spcAft>
+              <a:buFont typeface="Arial"/>
+              <a:buChar char="•"/>
+            </a:pPr>
+            <a:r>
+              <a:rPr lang="en-US" sz="1600" dirty="0">
+                <a:solidFill>
+                  <a:srgbClr val="000000"/>
+                </a:solidFill>
+                <a:latin typeface="Times New Roman"/>
+                <a:cs typeface="Times New Roman"/>
+              </a:rPr>
+              <a:t>NIMHANS ethics-committee clearance; voluntary participation; written informed consent; control group offered the intervention afterward.</a:t>
             </a:r>
           </a:p>
         </p:txBody>
@@ -3330,7 +3230,7 @@
         <p:spPr>
           <a:xfrm>
             <a:off x="0" y="0"/>
-            <a:ext cx="12192000" cy="1000000"/>
+            <a:ext cx="12192000" cy="900000"/>
           </a:xfrm>
           <a:prstGeom prst="rect">
             <a:avLst/>
@@ -3352,14 +3252,14 @@
               <a:buNone/>
             </a:pPr>
             <a:r>
-              <a:rPr lang="en-US" sz="3000" b="1" dirty="0">
+              <a:rPr lang="en-US" sz="1800" b="1" dirty="0">
                 <a:solidFill>
                   <a:srgbClr val="FFFFFF"/>
                 </a:solidFill>
                 <a:latin typeface="Times New Roman"/>
                 <a:cs typeface="Times New Roman"/>
               </a:rPr>
-              <a:t>Findings (3): Experimental Group</a:t>
+              <a:t>Findings (1): Sociodemographic Profile</a:t>
             </a:r>
           </a:p>
         </p:txBody>
@@ -3372,8 +3272,8 @@
         </p:nvSpPr>
         <p:spPr>
           <a:xfrm>
-            <a:off x="685800" y="1150000"/>
-            <a:ext cx="10820400" cy="5500000"/>
+            <a:off x="685800" y="1050000"/>
+            <a:ext cx="10820400" cy="5650000"/>
           </a:xfrm>
           <a:prstGeom prst="rect">
             <a:avLst/>
@@ -3396,123 +3296,102 @@
               <a:buChar char="•"/>
             </a:pPr>
             <a:r>
-              <a:rPr lang="en-US" sz="1800" dirty="0">
-                <a:solidFill>
-                  <a:srgbClr val="000000"/>
-                </a:solidFill>
-                <a:latin typeface="Times New Roman"/>
-                <a:cs typeface="Times New Roman"/>
-              </a:rPr>
-              <a:t>In the experimental group, EE DECREASED significantly after the intervention:</a:t>
-            </a:r>
-          </a:p>
-          <a:p>
-            <a:pPr marL="571500" indent="-228600">
-              <a:spcBef>
-                <a:spcPts val="0"/>
-              </a:spcBef>
-              <a:spcAft>
-                <a:spcPts val="300"/>
-              </a:spcAft>
-              <a:buFont typeface="Arial"/>
-              <a:buChar char="–"/>
-            </a:pPr>
-            <a:r>
-              <a:rPr lang="en-US" sz="1800" i="1" dirty="0">
-                <a:solidFill>
-                  <a:srgbClr val="333333"/>
-                </a:solidFill>
-                <a:latin typeface="Times New Roman"/>
-                <a:cs typeface="Times New Roman"/>
-              </a:rPr>
-              <a:t>Criticality: pre 27.45 (SD 2.89) → post 20.03 (SD 3.11); t = 10.16; P = 0.001.</a:t>
-            </a:r>
-          </a:p>
-          <a:p>
-            <a:pPr marL="571500" indent="-228600">
-              <a:spcBef>
-                <a:spcPts val="0"/>
-              </a:spcBef>
-              <a:spcAft>
-                <a:spcPts val="300"/>
-              </a:spcAft>
-              <a:buFont typeface="Arial"/>
-              <a:buChar char="–"/>
-            </a:pPr>
-            <a:r>
-              <a:rPr lang="en-US" sz="1800" i="1" dirty="0">
-                <a:solidFill>
-                  <a:srgbClr val="333333"/>
-                </a:solidFill>
-                <a:latin typeface="Times New Roman"/>
-                <a:cs typeface="Times New Roman"/>
-              </a:rPr>
-              <a:t>Emotional over-involvement: pre 26.39 (SD 2.86) → post 19.48 (SD 3.47); t = 8.82; P = 0.001.</a:t>
-            </a:r>
-          </a:p>
-          <a:p>
-            <a:pPr marL="571500" indent="-228600">
-              <a:spcBef>
-                <a:spcPts val="0"/>
-              </a:spcBef>
-              <a:spcAft>
-                <a:spcPts val="300"/>
-              </a:spcAft>
-              <a:buFont typeface="Arial"/>
-              <a:buChar char="–"/>
-            </a:pPr>
-            <a:r>
-              <a:rPr lang="en-US" sz="1800" i="1" dirty="0">
-                <a:solidFill>
-                  <a:srgbClr val="333333"/>
-                </a:solidFill>
-                <a:latin typeface="Times New Roman"/>
-                <a:cs typeface="Times New Roman"/>
-              </a:rPr>
-              <a:t>Total EE: pre 53.85 (SD 3.91) → post 39.52; t = 11.73; P = 0.001.</a:t>
-            </a:r>
-          </a:p>
-          <a:p>
-            <a:pPr marL="0" indent="0">
-              <a:spcBef>
-                <a:spcPts val="300"/>
-              </a:spcBef>
-              <a:spcAft>
-                <a:spcPts val="150"/>
-              </a:spcAft>
-              <a:buNone/>
-            </a:pPr>
-            <a:r>
-              <a:rPr lang="en-US" sz="2000" b="1" dirty="0">
-                <a:solidFill>
-                  <a:srgbClr val="1F3864"/>
-                </a:solidFill>
-                <a:latin typeface="Times New Roman"/>
-                <a:cs typeface="Times New Roman"/>
-              </a:rPr>
-              <a:t>Overall between-group result</a:t>
-            </a:r>
-          </a:p>
-          <a:p>
-            <a:pPr marL="285750" indent="-285750">
-              <a:spcBef>
-                <a:spcPts val="0"/>
-              </a:spcBef>
-              <a:spcAft>
-                <a:spcPts val="300"/>
-              </a:spcAft>
-              <a:buFont typeface="Arial"/>
-              <a:buChar char="•"/>
-            </a:pPr>
-            <a:r>
-              <a:rPr lang="en-US" sz="1800" dirty="0">
-                <a:solidFill>
-                  <a:srgbClr val="000000"/>
-                </a:solidFill>
-                <a:latin typeface="Times New Roman"/>
-                <a:cs typeface="Times New Roman"/>
-              </a:rPr>
-              <a:t>RMANOVA: F = 35.892; P = 0.001 – a significant reduction in EE for the experimental group compared with the control (TAU) group.</a:t>
+              <a:rPr lang="en-US" sz="1600" dirty="0">
+                <a:solidFill>
+                  <a:srgbClr val="000000"/>
+                </a:solidFill>
+                <a:latin typeface="Times New Roman"/>
+                <a:cs typeface="Times New Roman"/>
+              </a:rPr>
+              <a:t>50% of caregivers were aged 50 years and above.</a:t>
+            </a:r>
+          </a:p>
+          <a:p>
+            <a:pPr marL="285750" indent="-285750">
+              <a:spcBef>
+                <a:spcPts val="0"/>
+              </a:spcBef>
+              <a:spcAft>
+                <a:spcPts val="300"/>
+              </a:spcAft>
+              <a:buFont typeface="Arial"/>
+              <a:buChar char="•"/>
+            </a:pPr>
+            <a:r>
+              <a:rPr lang="en-US" sz="1600" dirty="0">
+                <a:solidFill>
+                  <a:srgbClr val="000000"/>
+                </a:solidFill>
+                <a:latin typeface="Times New Roman"/>
+                <a:cs typeface="Times New Roman"/>
+              </a:rPr>
+              <a:t>More female caregivers than male in both groups (up to 85% female in the experimental group).</a:t>
+            </a:r>
+          </a:p>
+          <a:p>
+            <a:pPr marL="285750" indent="-285750">
+              <a:spcBef>
+                <a:spcPts val="0"/>
+              </a:spcBef>
+              <a:spcAft>
+                <a:spcPts val="300"/>
+              </a:spcAft>
+              <a:buFont typeface="Arial"/>
+              <a:buChar char="•"/>
+            </a:pPr>
+            <a:r>
+              <a:rPr lang="en-US" sz="1600" dirty="0">
+                <a:solidFill>
+                  <a:srgbClr val="000000"/>
+                </a:solidFill>
+                <a:latin typeface="Times New Roman"/>
+                <a:cs typeface="Times New Roman"/>
+              </a:rPr>
+              <a:t>Mothers were the primary caregivers in 40% (control) and 47.5% (experimental) of cases.</a:t>
+            </a:r>
+          </a:p>
+          <a:p>
+            <a:pPr marL="285750" indent="-285750">
+              <a:spcBef>
+                <a:spcPts val="0"/>
+              </a:spcBef>
+              <a:spcAft>
+                <a:spcPts val="300"/>
+              </a:spcAft>
+              <a:buFont typeface="Arial"/>
+              <a:buChar char="•"/>
+            </a:pPr>
+            <a:r>
+              <a:rPr lang="en-US" sz="1600" dirty="0">
+                <a:solidFill>
+                  <a:srgbClr val="000000"/>
+                </a:solidFill>
+                <a:latin typeface="Times New Roman"/>
+                <a:cs typeface="Times New Roman"/>
+              </a:rPr>
+              <a:t>92.5% of caregivers were in daily contact with the patient – high face-to-face contact.</a:t>
+            </a:r>
+          </a:p>
+          <a:p>
+            <a:pPr marL="285750" indent="-285750">
+              <a:spcBef>
+                <a:spcPts val="0"/>
+              </a:spcBef>
+              <a:spcAft>
+                <a:spcPts val="300"/>
+              </a:spcAft>
+              <a:buFont typeface="Arial"/>
+              <a:buChar char="•"/>
+            </a:pPr>
+            <a:r>
+              <a:rPr lang="en-US" sz="1600" dirty="0">
+                <a:solidFill>
+                  <a:srgbClr val="000000"/>
+                </a:solidFill>
+                <a:latin typeface="Times New Roman"/>
+                <a:cs typeface="Times New Roman"/>
+              </a:rPr>
+              <a:t>Majority of patients were female (62.5% control; 80% experimental); mean patient age ≈31 years.</a:t>
             </a:r>
           </a:p>
         </p:txBody>
@@ -3548,7 +3427,7 @@
         <p:spPr>
           <a:xfrm>
             <a:off x="0" y="0"/>
-            <a:ext cx="12192000" cy="1000000"/>
+            <a:ext cx="12192000" cy="900000"/>
           </a:xfrm>
           <a:prstGeom prst="rect">
             <a:avLst/>
@@ -3570,14 +3449,14 @@
               <a:buNone/>
             </a:pPr>
             <a:r>
-              <a:rPr lang="en-US" sz="3000" b="1" dirty="0">
+              <a:rPr lang="en-US" sz="1800" b="1" dirty="0">
                 <a:solidFill>
                   <a:srgbClr val="FFFFFF"/>
                 </a:solidFill>
                 <a:latin typeface="Times New Roman"/>
                 <a:cs typeface="Times New Roman"/>
               </a:rPr>
-              <a:t>Findings (4): Interpretation</a:t>
+              <a:t>Findings (2): Control (TAU) Group</a:t>
             </a:r>
           </a:p>
         </p:txBody>
@@ -3590,8 +3469,8 @@
         </p:nvSpPr>
         <p:spPr>
           <a:xfrm>
-            <a:off x="685800" y="1150000"/>
-            <a:ext cx="10820400" cy="5500000"/>
+            <a:off x="685800" y="1050000"/>
+            <a:ext cx="10820400" cy="5650000"/>
           </a:xfrm>
           <a:prstGeom prst="rect">
             <a:avLst/>
@@ -3614,80 +3493,14 @@
               <a:buChar char="•"/>
             </a:pPr>
             <a:r>
-              <a:rPr lang="en-US" sz="1800" dirty="0">
-                <a:solidFill>
-                  <a:srgbClr val="000000"/>
-                </a:solidFill>
-                <a:latin typeface="Times New Roman"/>
-                <a:cs typeface="Times New Roman"/>
-              </a:rPr>
-              <a:t>The family intervention significantly reduced negative EE (criticism &amp; over-involvement) in caregivers.</a:t>
-            </a:r>
-          </a:p>
-          <a:p>
-            <a:pPr marL="285750" indent="-285750">
-              <a:spcBef>
-                <a:spcPts val="0"/>
-              </a:spcBef>
-              <a:spcAft>
-                <a:spcPts val="300"/>
-              </a:spcAft>
-              <a:buFont typeface="Arial"/>
-              <a:buChar char="•"/>
-            </a:pPr>
-            <a:r>
-              <a:rPr lang="en-US" sz="1800" dirty="0">
-                <a:solidFill>
-                  <a:srgbClr val="000000"/>
-                </a:solidFill>
-                <a:latin typeface="Times New Roman"/>
-                <a:cs typeface="Times New Roman"/>
-              </a:rPr>
-              <a:t>Reducing excessive face-to-face contact and over-involvement, and helping caregivers overcome guilt, contributed to lower EE.</a:t>
-            </a:r>
-          </a:p>
-          <a:p>
-            <a:pPr marL="285750" indent="-285750">
-              <a:spcBef>
-                <a:spcPts val="0"/>
-              </a:spcBef>
-              <a:spcAft>
-                <a:spcPts val="300"/>
-              </a:spcAft>
-              <a:buFont typeface="Arial"/>
-              <a:buChar char="•"/>
-            </a:pPr>
-            <a:r>
-              <a:rPr lang="en-US" sz="1800" dirty="0">
-                <a:solidFill>
-                  <a:srgbClr val="000000"/>
-                </a:solidFill>
-                <a:latin typeface="Times New Roman"/>
-                <a:cs typeface="Times New Roman"/>
-              </a:rPr>
-              <a:t>A skill-development approach (role plays, video clippings, participatory methods, handouts) proved more effective than routine support-group / general psychoeducation formats.</a:t>
-            </a:r>
-          </a:p>
-          <a:p>
-            <a:pPr marL="285750" indent="-285750">
-              <a:spcBef>
-                <a:spcPts val="0"/>
-              </a:spcBef>
-              <a:spcAft>
-                <a:spcPts val="300"/>
-              </a:spcAft>
-              <a:buFont typeface="Arial"/>
-              <a:buChar char="•"/>
-            </a:pPr>
-            <a:r>
-              <a:rPr lang="en-US" sz="1800" dirty="0">
-                <a:solidFill>
-                  <a:srgbClr val="000000"/>
-                </a:solidFill>
-                <a:latin typeface="Times New Roman"/>
-                <a:cs typeface="Times New Roman"/>
-              </a:rPr>
-              <a:t>Findings corroborate Indian (Bengaluru, Chennai) and Western studies (Linszen et al., 1997; Miklowitz &amp; Goldstein, 1984).</a:t>
+              <a:rPr lang="en-US" sz="1600" dirty="0">
+                <a:solidFill>
+                  <a:srgbClr val="000000"/>
+                </a:solidFill>
+                <a:latin typeface="Times New Roman"/>
+                <a:cs typeface="Times New Roman"/>
+              </a:rPr>
+              <a:t>EE INCREASED from pre-test to post-test (no intervention):</a:t>
             </a:r>
           </a:p>
           <a:p>
@@ -3702,14 +3515,80 @@
               <a:buChar char="–"/>
             </a:pPr>
             <a:r>
-              <a:rPr lang="en-US" sz="1800" i="1" dirty="0">
+              <a:rPr lang="en-US" sz="1600" i="1" dirty="0">
                 <a:solidFill>
                   <a:srgbClr val="333333"/>
                 </a:solidFill>
                 <a:latin typeface="Times New Roman"/>
                 <a:cs typeface="Times New Roman"/>
               </a:rPr>
-              <a:t>Caveat: FEICS measures only negative EE, not positive EE such as warmth.</a:t>
+              <a:t>Total EE: pre 52.47 (SD 4.95) → post 56.72 (SD 4.52); t = −3.68; P = 0.001.</a:t>
+            </a:r>
+          </a:p>
+          <a:p>
+            <a:pPr marL="571500" indent="-228600">
+              <a:spcBef>
+                <a:spcPts val="0"/>
+              </a:spcBef>
+              <a:spcAft>
+                <a:spcPts val="300"/>
+              </a:spcAft>
+              <a:buFont typeface="Arial"/>
+              <a:buChar char="–"/>
+            </a:pPr>
+            <a:r>
+              <a:rPr lang="en-US" sz="1600" i="1" dirty="0">
+                <a:solidFill>
+                  <a:srgbClr val="333333"/>
+                </a:solidFill>
+                <a:latin typeface="Times New Roman"/>
+                <a:cs typeface="Times New Roman"/>
+              </a:rPr>
+              <a:t>Criticality: pre 26.13 → post 28.28; t = −3.47; P = 0.002.</a:t>
+            </a:r>
+          </a:p>
+          <a:p>
+            <a:pPr marL="571500" indent="-228600">
+              <a:spcBef>
+                <a:spcPts val="0"/>
+              </a:spcBef>
+              <a:spcAft>
+                <a:spcPts val="300"/>
+              </a:spcAft>
+              <a:buFont typeface="Arial"/>
+              <a:buChar char="–"/>
+            </a:pPr>
+            <a:r>
+              <a:rPr lang="en-US" sz="1600" i="1" dirty="0">
+                <a:solidFill>
+                  <a:srgbClr val="333333"/>
+                </a:solidFill>
+                <a:latin typeface="Times New Roman"/>
+                <a:cs typeface="Times New Roman"/>
+              </a:rPr>
+              <a:t>Emotional over-involvement: pre 26.34 → post 28.44; t = −3.25; P = 0.003.</a:t>
+            </a:r>
+          </a:p>
+          <a:p>
+            <a:pPr marL="285750" indent="-285750">
+              <a:spcBef>
+                <a:spcPts val="0"/>
+              </a:spcBef>
+              <a:spcAft>
+                <a:spcPts val="300"/>
+              </a:spcAft>
+              <a:buFont typeface="Arial"/>
+              <a:buChar char="•"/>
+            </a:pPr>
+            <a:r>
+              <a:rPr lang="en-US" sz="1600" dirty="0">
+                <a:solidFill>
+                  <a:srgbClr val="000000"/>
+                </a:solidFill>
+                <a:latin typeface="Times New Roman"/>
+                <a:cs typeface="Times New Roman"/>
+              </a:rPr>
+              <a:t>Interpretation: without a structured intervention, caregiver EE tended to WORSEN over time.</a:t>
             </a:r>
           </a:p>
         </p:txBody>
@@ -3745,7 +3624,7 @@
         <p:spPr>
           <a:xfrm>
             <a:off x="0" y="0"/>
-            <a:ext cx="12192000" cy="1000000"/>
+            <a:ext cx="12192000" cy="900000"/>
           </a:xfrm>
           <a:prstGeom prst="rect">
             <a:avLst/>
@@ -3767,14 +3646,14 @@
               <a:buNone/>
             </a:pPr>
             <a:r>
-              <a:rPr lang="en-US" sz="3000" b="1" dirty="0">
+              <a:rPr lang="en-US" sz="1800" b="1" dirty="0">
                 <a:solidFill>
                   <a:srgbClr val="FFFFFF"/>
                 </a:solidFill>
                 <a:latin typeface="Times New Roman"/>
                 <a:cs typeface="Times New Roman"/>
               </a:rPr>
-              <a:t>Strengths &amp; Limitations</a:t>
+              <a:t>Findings (3): Experimental Group</a:t>
             </a:r>
           </a:p>
         </p:txBody>
@@ -3787,8 +3666,8 @@
         </p:nvSpPr>
         <p:spPr>
           <a:xfrm>
-            <a:off x="685800" y="1150000"/>
-            <a:ext cx="10820400" cy="5500000"/>
+            <a:off x="685800" y="1050000"/>
+            <a:ext cx="10820400" cy="5650000"/>
           </a:xfrm>
           <a:prstGeom prst="rect">
             <a:avLst/>
@@ -3800,6 +3679,94 @@
           </a:bodyPr>
           <a:lstStyle/>
           <a:p>
+            <a:pPr marL="285750" indent="-285750">
+              <a:spcBef>
+                <a:spcPts val="0"/>
+              </a:spcBef>
+              <a:spcAft>
+                <a:spcPts val="300"/>
+              </a:spcAft>
+              <a:buFont typeface="Arial"/>
+              <a:buChar char="•"/>
+            </a:pPr>
+            <a:r>
+              <a:rPr lang="en-US" sz="1600" dirty="0">
+                <a:solidFill>
+                  <a:srgbClr val="000000"/>
+                </a:solidFill>
+                <a:latin typeface="Times New Roman"/>
+                <a:cs typeface="Times New Roman"/>
+              </a:rPr>
+              <a:t>EE DECREASED significantly after the intervention:</a:t>
+            </a:r>
+          </a:p>
+          <a:p>
+            <a:pPr marL="571500" indent="-228600">
+              <a:spcBef>
+                <a:spcPts val="0"/>
+              </a:spcBef>
+              <a:spcAft>
+                <a:spcPts val="300"/>
+              </a:spcAft>
+              <a:buFont typeface="Arial"/>
+              <a:buChar char="–"/>
+            </a:pPr>
+            <a:r>
+              <a:rPr lang="en-US" sz="1600" i="1" dirty="0">
+                <a:solidFill>
+                  <a:srgbClr val="333333"/>
+                </a:solidFill>
+                <a:latin typeface="Times New Roman"/>
+                <a:cs typeface="Times New Roman"/>
+              </a:rPr>
+              <a:t>Criticality: pre 27.45 (SD 2.89) → post 20.03 (SD 3.11); t = 10.16; P = 0.001.</a:t>
+            </a:r>
+          </a:p>
+          <a:p>
+            <a:pPr marL="571500" indent="-228600">
+              <a:spcBef>
+                <a:spcPts val="0"/>
+              </a:spcBef>
+              <a:spcAft>
+                <a:spcPts val="300"/>
+              </a:spcAft>
+              <a:buFont typeface="Arial"/>
+              <a:buChar char="–"/>
+            </a:pPr>
+            <a:r>
+              <a:rPr lang="en-US" sz="1600" i="1" dirty="0">
+                <a:solidFill>
+                  <a:srgbClr val="333333"/>
+                </a:solidFill>
+                <a:latin typeface="Times New Roman"/>
+                <a:cs typeface="Times New Roman"/>
+              </a:rPr>
+              <a:t>Emotional over-involvement: pre 26.39 (SD 2.86) → post 19.48 (SD 3.47); t = 8.82; P = 0.001.</a:t>
+            </a:r>
+          </a:p>
+          <a:p>
+            <a:pPr marL="571500" indent="-228600">
+              <a:spcBef>
+                <a:spcPts val="0"/>
+              </a:spcBef>
+              <a:spcAft>
+                <a:spcPts val="300"/>
+              </a:spcAft>
+              <a:buFont typeface="Arial"/>
+              <a:buChar char="–"/>
+            </a:pPr>
+            <a:r>
+              <a:rPr lang="en-US" sz="1600" i="1" dirty="0">
+                <a:solidFill>
+                  <a:srgbClr val="333333"/>
+                </a:solidFill>
+                <a:latin typeface="Times New Roman"/>
+                <a:cs typeface="Times New Roman"/>
+              </a:rPr>
+              <a:t>Total EE: pre 53.85 (SD 3.91) → post 39.52; t = 11.73; P = 0.001.</a:t>
+            </a:r>
+          </a:p>
+          <a:p>
             <a:pPr marL="0" indent="0">
               <a:spcBef>
                 <a:spcPts val="300"/>
@@ -3810,167 +3777,36 @@
               <a:buNone/>
             </a:pPr>
             <a:r>
-              <a:rPr lang="en-US" sz="2000" b="1" dirty="0">
+              <a:rPr lang="en-US" sz="1600" b="1" dirty="0">
                 <a:solidFill>
                   <a:srgbClr val="1F3864"/>
                 </a:solidFill>
                 <a:latin typeface="Times New Roman"/>
                 <a:cs typeface="Times New Roman"/>
               </a:rPr>
-              <a:t>Strengths</a:t>
-            </a:r>
-          </a:p>
-          <a:p>
-            <a:pPr marL="285750" indent="-285750">
-              <a:spcBef>
-                <a:spcPts val="0"/>
-              </a:spcBef>
-              <a:spcAft>
-                <a:spcPts val="300"/>
-              </a:spcAft>
-              <a:buFont typeface="Arial"/>
-              <a:buChar char="•"/>
-            </a:pPr>
-            <a:r>
-              <a:rPr lang="en-US" sz="1800" dirty="0">
-                <a:solidFill>
-                  <a:srgbClr val="000000"/>
-                </a:solidFill>
-                <a:latin typeface="Times New Roman"/>
-                <a:cs typeface="Times New Roman"/>
-              </a:rPr>
-              <a:t>Randomized experimental design with a control group and blind raters.</a:t>
-            </a:r>
-          </a:p>
-          <a:p>
-            <a:pPr marL="285750" indent="-285750">
-              <a:spcBef>
-                <a:spcPts val="0"/>
-              </a:spcBef>
-              <a:spcAft>
-                <a:spcPts val="300"/>
-              </a:spcAft>
-              <a:buFont typeface="Arial"/>
-              <a:buChar char="•"/>
-            </a:pPr>
-            <a:r>
-              <a:rPr lang="en-US" sz="1800" dirty="0">
-                <a:solidFill>
-                  <a:srgbClr val="000000"/>
-                </a:solidFill>
-                <a:latin typeface="Times New Roman"/>
-                <a:cs typeface="Times New Roman"/>
-              </a:rPr>
-              <a:t>Culturally-relevant, standardized, manualized intervention delivered in vernacular languages.</a:t>
-            </a:r>
-          </a:p>
-          <a:p>
-            <a:pPr marL="285750" indent="-285750">
-              <a:spcBef>
-                <a:spcPts val="0"/>
-              </a:spcBef>
-              <a:spcAft>
-                <a:spcPts val="300"/>
-              </a:spcAft>
-              <a:buFont typeface="Arial"/>
-              <a:buChar char="•"/>
-            </a:pPr>
-            <a:r>
-              <a:rPr lang="en-US" sz="1800" dirty="0">
-                <a:solidFill>
-                  <a:srgbClr val="000000"/>
-                </a:solidFill>
-                <a:latin typeface="Times New Roman"/>
-                <a:cs typeface="Times New Roman"/>
-              </a:rPr>
-              <a:t>Statistically significant and clinically meaningful reduction in EE.</a:t>
-            </a:r>
-          </a:p>
-          <a:p>
-            <a:pPr marL="0" indent="0">
-              <a:spcBef>
-                <a:spcPts val="300"/>
-              </a:spcBef>
-              <a:spcAft>
-                <a:spcPts val="150"/>
-              </a:spcAft>
-              <a:buNone/>
-            </a:pPr>
-            <a:r>
-              <a:rPr lang="en-US" sz="2000" b="1" dirty="0">
-                <a:solidFill>
-                  <a:srgbClr val="1F3864"/>
-                </a:solidFill>
-                <a:latin typeface="Times New Roman"/>
-                <a:cs typeface="Times New Roman"/>
-              </a:rPr>
-              <a:t>Limitations (as stated by the authors)</a:t>
-            </a:r>
-          </a:p>
-          <a:p>
-            <a:pPr marL="285750" indent="-285750">
-              <a:spcBef>
-                <a:spcPts val="0"/>
-              </a:spcBef>
-              <a:spcAft>
-                <a:spcPts val="300"/>
-              </a:spcAft>
-              <a:buFont typeface="Arial"/>
-              <a:buChar char="•"/>
-            </a:pPr>
-            <a:r>
-              <a:rPr lang="en-US" sz="1800" dirty="0">
-                <a:solidFill>
-                  <a:srgbClr val="000000"/>
-                </a:solidFill>
-                <a:latin typeface="Times New Roman"/>
-                <a:cs typeface="Times New Roman"/>
-              </a:rPr>
-              <a:t>FEICS does not assess all domains of EE (e.g., no positive EE / warmth).</a:t>
-            </a:r>
-          </a:p>
-          <a:p>
-            <a:pPr marL="285750" indent="-285750">
-              <a:spcBef>
-                <a:spcPts val="0"/>
-              </a:spcBef>
-              <a:spcAft>
-                <a:spcPts val="300"/>
-              </a:spcAft>
-              <a:buFont typeface="Arial"/>
-              <a:buChar char="•"/>
-            </a:pPr>
-            <a:r>
-              <a:rPr lang="en-US" sz="1800" dirty="0">
-                <a:solidFill>
-                  <a:srgbClr val="000000"/>
-                </a:solidFill>
-                <a:latin typeface="Times New Roman"/>
-                <a:cs typeface="Times New Roman"/>
-              </a:rPr>
-              <a:t>Small sample size due to practical difficulties.</a:t>
-            </a:r>
-          </a:p>
-          <a:p>
-            <a:pPr marL="285750" indent="-285750">
-              <a:spcBef>
-                <a:spcPts val="0"/>
-              </a:spcBef>
-              <a:spcAft>
-                <a:spcPts val="300"/>
-              </a:spcAft>
-              <a:buFont typeface="Arial"/>
-              <a:buChar char="•"/>
-            </a:pPr>
-            <a:r>
-              <a:rPr lang="en-US" sz="1800" dirty="0">
-                <a:solidFill>
-                  <a:srgbClr val="000000"/>
-                </a:solidFill>
-                <a:latin typeface="Times New Roman"/>
-                <a:cs typeface="Times New Roman"/>
-              </a:rPr>
-              <a:t>No double-blind technique – which would have better controlled assessment and delivery biases.</a:t>
+              <a:t>Overall between-group result</a:t>
+            </a:r>
+          </a:p>
+          <a:p>
+            <a:pPr marL="285750" indent="-285750">
+              <a:spcBef>
+                <a:spcPts val="0"/>
+              </a:spcBef>
+              <a:spcAft>
+                <a:spcPts val="300"/>
+              </a:spcAft>
+              <a:buFont typeface="Arial"/>
+              <a:buChar char="•"/>
+            </a:pPr>
+            <a:r>
+              <a:rPr lang="en-US" sz="1600" dirty="0">
+                <a:solidFill>
+                  <a:srgbClr val="000000"/>
+                </a:solidFill>
+                <a:latin typeface="Times New Roman"/>
+                <a:cs typeface="Times New Roman"/>
+              </a:rPr>
+              <a:t>RMANOVA: F = 35.892; P = 0.001 – significant reduction in EE for the experimental group vs the control group.</a:t>
             </a:r>
           </a:p>
         </p:txBody>
@@ -4006,7 +3842,7 @@
         <p:spPr>
           <a:xfrm>
             <a:off x="0" y="0"/>
-            <a:ext cx="12192000" cy="1000000"/>
+            <a:ext cx="12192000" cy="900000"/>
           </a:xfrm>
           <a:prstGeom prst="rect">
             <a:avLst/>
@@ -4028,14 +3864,14 @@
               <a:buNone/>
             </a:pPr>
             <a:r>
-              <a:rPr lang="en-US" sz="3000" b="1" dirty="0">
+              <a:rPr lang="en-US" sz="1800" b="1" dirty="0">
                 <a:solidFill>
                   <a:srgbClr val="FFFFFF"/>
                 </a:solidFill>
                 <a:latin typeface="Times New Roman"/>
                 <a:cs typeface="Times New Roman"/>
               </a:rPr>
-              <a:t>Conclusion</a:t>
+              <a:t>Findings (4): Interpretation</a:t>
             </a:r>
           </a:p>
         </p:txBody>
@@ -4048,8 +3884,8 @@
         </p:nvSpPr>
         <p:spPr>
           <a:xfrm>
-            <a:off x="685800" y="1150000"/>
-            <a:ext cx="10820400" cy="5500000"/>
+            <a:off x="685800" y="1050000"/>
+            <a:ext cx="10820400" cy="5650000"/>
           </a:xfrm>
           <a:prstGeom prst="rect">
             <a:avLst/>
@@ -4072,58 +3908,102 @@
               <a:buChar char="•"/>
             </a:pPr>
             <a:r>
-              <a:rPr lang="en-US" sz="1800" dirty="0">
-                <a:solidFill>
-                  <a:srgbClr val="000000"/>
-                </a:solidFill>
-                <a:latin typeface="Times New Roman"/>
-                <a:cs typeface="Times New Roman"/>
-              </a:rPr>
-              <a:t>A family-based intervention – psychoeducation, communication training, and stress management for caregivers of persons living with schizophrenia – was effective.</a:t>
-            </a:r>
-          </a:p>
-          <a:p>
-            <a:pPr marL="285750" indent="-285750">
-              <a:spcBef>
-                <a:spcPts val="0"/>
-              </a:spcBef>
-              <a:spcAft>
-                <a:spcPts val="300"/>
-              </a:spcAft>
-              <a:buFont typeface="Arial"/>
-              <a:buChar char="•"/>
-            </a:pPr>
-            <a:r>
-              <a:rPr lang="en-US" sz="1800" dirty="0">
-                <a:solidFill>
-                  <a:srgbClr val="000000"/>
-                </a:solidFill>
-                <a:latin typeface="Times New Roman"/>
-                <a:cs typeface="Times New Roman"/>
-              </a:rPr>
-              <a:t>It produced an overall, statistically significant decrease in Expressed Emotion among caregivers, while EE rose in the untreated control group.</a:t>
-            </a:r>
-          </a:p>
-          <a:p>
-            <a:pPr marL="285750" indent="-285750">
-              <a:spcBef>
-                <a:spcPts val="0"/>
-              </a:spcBef>
-              <a:spcAft>
-                <a:spcPts val="300"/>
-              </a:spcAft>
-              <a:buFont typeface="Arial"/>
-              <a:buChar char="•"/>
-            </a:pPr>
-            <a:r>
-              <a:rPr lang="en-US" sz="1800" dirty="0">
-                <a:solidFill>
-                  <a:srgbClr val="000000"/>
-                </a:solidFill>
-                <a:latin typeface="Times New Roman"/>
-                <a:cs typeface="Times New Roman"/>
-              </a:rPr>
-              <a:t>Family intervention is a feasible, culturally-appropriate strategy to reduce EE and support rehabilitation in the Indian context.</a:t>
+              <a:rPr lang="en-US" sz="1600" dirty="0">
+                <a:solidFill>
+                  <a:srgbClr val="000000"/>
+                </a:solidFill>
+                <a:latin typeface="Times New Roman"/>
+                <a:cs typeface="Times New Roman"/>
+              </a:rPr>
+              <a:t>The family intervention significantly reduced negative EE (criticism &amp; over-involvement) in caregivers.</a:t>
+            </a:r>
+          </a:p>
+          <a:p>
+            <a:pPr marL="285750" indent="-285750">
+              <a:spcBef>
+                <a:spcPts val="0"/>
+              </a:spcBef>
+              <a:spcAft>
+                <a:spcPts val="300"/>
+              </a:spcAft>
+              <a:buFont typeface="Arial"/>
+              <a:buChar char="•"/>
+            </a:pPr>
+            <a:r>
+              <a:rPr lang="en-US" sz="1600" dirty="0">
+                <a:solidFill>
+                  <a:srgbClr val="000000"/>
+                </a:solidFill>
+                <a:latin typeface="Times New Roman"/>
+                <a:cs typeface="Times New Roman"/>
+              </a:rPr>
+              <a:t>Reducing excessive face-to-face contact and over-involvement, and addressing guilt, contributed to lower EE.</a:t>
+            </a:r>
+          </a:p>
+          <a:p>
+            <a:pPr marL="285750" indent="-285750">
+              <a:spcBef>
+                <a:spcPts val="0"/>
+              </a:spcBef>
+              <a:spcAft>
+                <a:spcPts val="300"/>
+              </a:spcAft>
+              <a:buFont typeface="Arial"/>
+              <a:buChar char="•"/>
+            </a:pPr>
+            <a:r>
+              <a:rPr lang="en-US" sz="1600" dirty="0">
+                <a:solidFill>
+                  <a:srgbClr val="000000"/>
+                </a:solidFill>
+                <a:latin typeface="Times New Roman"/>
+                <a:cs typeface="Times New Roman"/>
+              </a:rPr>
+              <a:t>A skill-development approach outperformed routine support-group / general psychoeducation formats.</a:t>
+            </a:r>
+          </a:p>
+          <a:p>
+            <a:pPr marL="285750" indent="-285750">
+              <a:spcBef>
+                <a:spcPts val="0"/>
+              </a:spcBef>
+              <a:spcAft>
+                <a:spcPts val="300"/>
+              </a:spcAft>
+              <a:buFont typeface="Arial"/>
+              <a:buChar char="•"/>
+            </a:pPr>
+            <a:r>
+              <a:rPr lang="en-US" sz="1600" dirty="0">
+                <a:solidFill>
+                  <a:srgbClr val="000000"/>
+                </a:solidFill>
+                <a:latin typeface="Times New Roman"/>
+                <a:cs typeface="Times New Roman"/>
+              </a:rPr>
+              <a:t>Findings corroborate Indian (Bengaluru, Chennai) and Western studies (Linszen et al., 1997; Miklowitz &amp; Goldstein, 1984).</a:t>
+            </a:r>
+          </a:p>
+          <a:p>
+            <a:pPr marL="571500" indent="-228600">
+              <a:spcBef>
+                <a:spcPts val="0"/>
+              </a:spcBef>
+              <a:spcAft>
+                <a:spcPts val="300"/>
+              </a:spcAft>
+              <a:buFont typeface="Arial"/>
+              <a:buChar char="–"/>
+            </a:pPr>
+            <a:r>
+              <a:rPr lang="en-US" sz="1600" i="1" dirty="0">
+                <a:solidFill>
+                  <a:srgbClr val="333333"/>
+                </a:solidFill>
+                <a:latin typeface="Times New Roman"/>
+                <a:cs typeface="Times New Roman"/>
+              </a:rPr>
+              <a:t>Caveat: FEICS measures only negative EE, not positive EE such as warmth.</a:t>
             </a:r>
           </a:p>
         </p:txBody>
@@ -4159,7 +4039,7 @@
         <p:spPr>
           <a:xfrm>
             <a:off x="0" y="0"/>
-            <a:ext cx="12192000" cy="1000000"/>
+            <a:ext cx="12192000" cy="900000"/>
           </a:xfrm>
           <a:prstGeom prst="rect">
             <a:avLst/>
@@ -4181,14 +4061,14 @@
               <a:buNone/>
             </a:pPr>
             <a:r>
-              <a:rPr lang="en-US" sz="3000" b="1" dirty="0">
+              <a:rPr lang="en-US" sz="1800" b="1" dirty="0">
                 <a:solidFill>
                   <a:srgbClr val="FFFFFF"/>
                 </a:solidFill>
                 <a:latin typeface="Times New Roman"/>
                 <a:cs typeface="Times New Roman"/>
               </a:rPr>
-              <a:t>References (1): Primary Paper &amp; Concepts</a:t>
+              <a:t>Strengths &amp; Limitations</a:t>
             </a:r>
           </a:p>
         </p:txBody>
@@ -4201,8 +4081,8 @@
         </p:nvSpPr>
         <p:spPr>
           <a:xfrm>
-            <a:off x="685800" y="1150000"/>
-            <a:ext cx="10820400" cy="5500000"/>
+            <a:off x="685800" y="1050000"/>
+            <a:ext cx="10820400" cy="5650000"/>
           </a:xfrm>
           <a:prstGeom prst="rect">
             <a:avLst/>
@@ -4214,91 +4094,155 @@
           </a:bodyPr>
           <a:lstStyle/>
           <a:p>
-            <a:pPr marL="285750" indent="-285750">
-              <a:spcBef>
-                <a:spcPts val="0"/>
-              </a:spcBef>
-              <a:spcAft>
-                <a:spcPts val="300"/>
-              </a:spcAft>
-              <a:buFont typeface="Arial"/>
-              <a:buChar char="•"/>
-            </a:pPr>
-            <a:r>
-              <a:rPr lang="en-US" sz="1800" dirty="0">
-                <a:solidFill>
-                  <a:srgbClr val="000000"/>
-                </a:solidFill>
-                <a:latin typeface="Times New Roman"/>
-                <a:cs typeface="Times New Roman"/>
-              </a:rPr>
-              <a:t>1. Shetty K. V., Math S. B., Marimuthu P., Rawat V. S. Family intervention for expressed emotion in schizophrenia: Indian context. Indian Journal of Psychiatry. 2023;65(4):453–459. DOI:10.4103/indianjpsychiatry.indianjpsychiatry_526_22.</a:t>
-            </a:r>
-          </a:p>
-          <a:p>
-            <a:pPr marL="285750" indent="-285750">
-              <a:spcBef>
-                <a:spcPts val="0"/>
-              </a:spcBef>
-              <a:spcAft>
-                <a:spcPts val="300"/>
-              </a:spcAft>
-              <a:buFont typeface="Arial"/>
-              <a:buChar char="•"/>
-            </a:pPr>
-            <a:r>
-              <a:rPr lang="en-US" sz="1800" dirty="0">
-                <a:solidFill>
-                  <a:srgbClr val="000000"/>
-                </a:solidFill>
-                <a:latin typeface="Times New Roman"/>
-                <a:cs typeface="Times New Roman"/>
-              </a:rPr>
-              <a:t>2. Brown G. W., Rutter M. (1966). The measurement of family activities and relationships: a methodology. Human Relations, 19(3):241–263. [Origin of the Expressed Emotion concept.]</a:t>
-            </a:r>
-          </a:p>
-          <a:p>
-            <a:pPr marL="285750" indent="-285750">
-              <a:spcBef>
-                <a:spcPts val="0"/>
-              </a:spcBef>
-              <a:spcAft>
-                <a:spcPts val="300"/>
-              </a:spcAft>
-              <a:buFont typeface="Arial"/>
-              <a:buChar char="•"/>
-            </a:pPr>
-            <a:r>
-              <a:rPr lang="en-US" sz="1800" dirty="0">
-                <a:solidFill>
-                  <a:srgbClr val="000000"/>
-                </a:solidFill>
-                <a:latin typeface="Times New Roman"/>
-                <a:cs typeface="Times New Roman"/>
-              </a:rPr>
-              <a:t>3. Leff J., Vaughn C. (1985). Expressed Emotion in Families: Its Significance for Mental Illness. New York: Guilford Press. [Development of EE.]</a:t>
-            </a:r>
-          </a:p>
-          <a:p>
-            <a:pPr marL="285750" indent="-285750">
-              <a:spcBef>
-                <a:spcPts val="0"/>
-              </a:spcBef>
-              <a:spcAft>
-                <a:spcPts val="300"/>
-              </a:spcAft>
-              <a:buFont typeface="Arial"/>
-              <a:buChar char="•"/>
-            </a:pPr>
-            <a:r>
-              <a:rPr lang="en-US" sz="1800" dirty="0">
-                <a:solidFill>
-                  <a:srgbClr val="000000"/>
-                </a:solidFill>
-                <a:latin typeface="Times New Roman"/>
-                <a:cs typeface="Times New Roman"/>
-              </a:rPr>
-              <a:t>4. Butzlaff R. L., Hooley J. M. (1998). Expressed emotion and psychiatric relapse: a meta-analysis. Archives of General Psychiatry, 55(6):547–552.</a:t>
+            <a:pPr marL="0" indent="0">
+              <a:spcBef>
+                <a:spcPts val="300"/>
+              </a:spcBef>
+              <a:spcAft>
+                <a:spcPts val="150"/>
+              </a:spcAft>
+              <a:buNone/>
+            </a:pPr>
+            <a:r>
+              <a:rPr lang="en-US" sz="1600" b="1" dirty="0">
+                <a:solidFill>
+                  <a:srgbClr val="1F3864"/>
+                </a:solidFill>
+                <a:latin typeface="Times New Roman"/>
+                <a:cs typeface="Times New Roman"/>
+              </a:rPr>
+              <a:t>Strengths</a:t>
+            </a:r>
+          </a:p>
+          <a:p>
+            <a:pPr marL="285750" indent="-285750">
+              <a:spcBef>
+                <a:spcPts val="0"/>
+              </a:spcBef>
+              <a:spcAft>
+                <a:spcPts val="300"/>
+              </a:spcAft>
+              <a:buFont typeface="Arial"/>
+              <a:buChar char="•"/>
+            </a:pPr>
+            <a:r>
+              <a:rPr lang="en-US" sz="1600" dirty="0">
+                <a:solidFill>
+                  <a:srgbClr val="000000"/>
+                </a:solidFill>
+                <a:latin typeface="Times New Roman"/>
+                <a:cs typeface="Times New Roman"/>
+              </a:rPr>
+              <a:t>Randomized experimental design with a control group and blind raters.</a:t>
+            </a:r>
+          </a:p>
+          <a:p>
+            <a:pPr marL="285750" indent="-285750">
+              <a:spcBef>
+                <a:spcPts val="0"/>
+              </a:spcBef>
+              <a:spcAft>
+                <a:spcPts val="300"/>
+              </a:spcAft>
+              <a:buFont typeface="Arial"/>
+              <a:buChar char="•"/>
+            </a:pPr>
+            <a:r>
+              <a:rPr lang="en-US" sz="1600" dirty="0">
+                <a:solidFill>
+                  <a:srgbClr val="000000"/>
+                </a:solidFill>
+                <a:latin typeface="Times New Roman"/>
+                <a:cs typeface="Times New Roman"/>
+              </a:rPr>
+              <a:t>Culturally-relevant, standardized, manualized intervention delivered in vernacular languages.</a:t>
+            </a:r>
+          </a:p>
+          <a:p>
+            <a:pPr marL="285750" indent="-285750">
+              <a:spcBef>
+                <a:spcPts val="0"/>
+              </a:spcBef>
+              <a:spcAft>
+                <a:spcPts val="300"/>
+              </a:spcAft>
+              <a:buFont typeface="Arial"/>
+              <a:buChar char="•"/>
+            </a:pPr>
+            <a:r>
+              <a:rPr lang="en-US" sz="1600" dirty="0">
+                <a:solidFill>
+                  <a:srgbClr val="000000"/>
+                </a:solidFill>
+                <a:latin typeface="Times New Roman"/>
+                <a:cs typeface="Times New Roman"/>
+              </a:rPr>
+              <a:t>Statistically significant and clinically meaningful reduction in EE.</a:t>
+            </a:r>
+          </a:p>
+          <a:p>
+            <a:pPr marL="0" indent="0">
+              <a:spcBef>
+                <a:spcPts val="300"/>
+              </a:spcBef>
+              <a:spcAft>
+                <a:spcPts val="150"/>
+              </a:spcAft>
+              <a:buNone/>
+            </a:pPr>
+            <a:r>
+              <a:rPr lang="en-US" sz="1600" b="1" dirty="0">
+                <a:solidFill>
+                  <a:srgbClr val="1F3864"/>
+                </a:solidFill>
+                <a:latin typeface="Times New Roman"/>
+                <a:cs typeface="Times New Roman"/>
+              </a:rPr>
+              <a:t>Limitations (authors’)</a:t>
+            </a:r>
+          </a:p>
+          <a:p>
+            <a:pPr marL="285750" indent="-285750">
+              <a:spcBef>
+                <a:spcPts val="0"/>
+              </a:spcBef>
+              <a:spcAft>
+                <a:spcPts val="300"/>
+              </a:spcAft>
+              <a:buFont typeface="Arial"/>
+              <a:buChar char="•"/>
+            </a:pPr>
+            <a:r>
+              <a:rPr lang="en-US" sz="1600" dirty="0">
+                <a:solidFill>
+                  <a:srgbClr val="000000"/>
+                </a:solidFill>
+                <a:latin typeface="Times New Roman"/>
+                <a:cs typeface="Times New Roman"/>
+              </a:rPr>
+              <a:t>FEICS does not assess all domains of EE (no positive EE / warmth).</a:t>
+            </a:r>
+          </a:p>
+          <a:p>
+            <a:pPr marL="285750" indent="-285750">
+              <a:spcBef>
+                <a:spcPts val="0"/>
+              </a:spcBef>
+              <a:spcAft>
+                <a:spcPts val="300"/>
+              </a:spcAft>
+              <a:buFont typeface="Arial"/>
+              <a:buChar char="•"/>
+            </a:pPr>
+            <a:r>
+              <a:rPr lang="en-US" sz="1600" dirty="0">
+                <a:solidFill>
+                  <a:srgbClr val="000000"/>
+                </a:solidFill>
+                <a:latin typeface="Times New Roman"/>
+                <a:cs typeface="Times New Roman"/>
+              </a:rPr>
+              <a:t>Small sample size; no double-blind technique to control assessment/delivery biases.</a:t>
             </a:r>
           </a:p>
         </p:txBody>
@@ -4334,7 +4278,7 @@
         <p:spPr>
           <a:xfrm>
             <a:off x="0" y="0"/>
-            <a:ext cx="12192000" cy="1000000"/>
+            <a:ext cx="12192000" cy="900000"/>
           </a:xfrm>
           <a:prstGeom prst="rect">
             <a:avLst/>
@@ -4356,14 +4300,14 @@
               <a:buNone/>
             </a:pPr>
             <a:r>
-              <a:rPr lang="en-US" sz="3000" b="1" dirty="0">
+              <a:rPr lang="en-US" sz="1800" b="1" dirty="0">
                 <a:solidFill>
                   <a:srgbClr val="FFFFFF"/>
                 </a:solidFill>
                 <a:latin typeface="Times New Roman"/>
                 <a:cs typeface="Times New Roman"/>
               </a:rPr>
-              <a:t>References (2): Intervention &amp; Tools</a:t>
+              <a:t>Conclusion</a:t>
             </a:r>
           </a:p>
         </p:txBody>
@@ -4376,8 +4320,8 @@
         </p:nvSpPr>
         <p:spPr>
           <a:xfrm>
-            <a:off x="685800" y="1150000"/>
-            <a:ext cx="10820400" cy="5500000"/>
+            <a:off x="685800" y="1050000"/>
+            <a:ext cx="10820400" cy="5650000"/>
           </a:xfrm>
           <a:prstGeom prst="rect">
             <a:avLst/>
@@ -4400,102 +4344,58 @@
               <a:buChar char="•"/>
             </a:pPr>
             <a:r>
-              <a:rPr lang="en-US" sz="1800" dirty="0">
-                <a:solidFill>
-                  <a:srgbClr val="000000"/>
-                </a:solidFill>
-                <a:latin typeface="Times New Roman"/>
-                <a:cs typeface="Times New Roman"/>
-              </a:rPr>
-              <a:t>5. Anderson C. M., Hogarty G. E., Reiss D. J. (1980). Family treatment of adult schizophrenic patients: a psycho-educational approach. Schizophrenia Bulletin, 6(3):490–505. [Origin of family psychoeducation.]</a:t>
-            </a:r>
-          </a:p>
-          <a:p>
-            <a:pPr marL="285750" indent="-285750">
-              <a:spcBef>
-                <a:spcPts val="0"/>
-              </a:spcBef>
-              <a:spcAft>
-                <a:spcPts val="300"/>
-              </a:spcAft>
-              <a:buFont typeface="Arial"/>
-              <a:buChar char="•"/>
-            </a:pPr>
-            <a:r>
-              <a:rPr lang="en-US" sz="1800" dirty="0">
-                <a:solidFill>
-                  <a:srgbClr val="000000"/>
-                </a:solidFill>
-                <a:latin typeface="Times New Roman"/>
-                <a:cs typeface="Times New Roman"/>
-              </a:rPr>
-              <a:t>6. Shields C. G., Franks P., Harp J. J., McDaniel S. H., Campbell T. L. (1992). Development of the Family Emotional Involvement and Criticism Scale (FEICS). Journal of Marital and Family Therapy, 18(4):395–407.</a:t>
-            </a:r>
-          </a:p>
-          <a:p>
-            <a:pPr marL="285750" indent="-285750">
-              <a:spcBef>
-                <a:spcPts val="0"/>
-              </a:spcBef>
-              <a:spcAft>
-                <a:spcPts val="300"/>
-              </a:spcAft>
-              <a:buFont typeface="Arial"/>
-              <a:buChar char="•"/>
-            </a:pPr>
-            <a:r>
-              <a:rPr lang="en-US" sz="1800" dirty="0">
-                <a:solidFill>
-                  <a:srgbClr val="000000"/>
-                </a:solidFill>
-                <a:latin typeface="Times New Roman"/>
-                <a:cs typeface="Times New Roman"/>
-              </a:rPr>
-              <a:t>7. Sheehan D. V., Lecrubier Y., Sheehan K. H., et al. (1998). The Mini-International Neuropsychiatric Interview (M.I.N.I.). Journal of Clinical Psychiatry, 59(Suppl 20):22–33.</a:t>
-            </a:r>
-          </a:p>
-          <a:p>
-            <a:pPr marL="285750" indent="-285750">
-              <a:spcBef>
-                <a:spcPts val="0"/>
-              </a:spcBef>
-              <a:spcAft>
-                <a:spcPts val="300"/>
-              </a:spcAft>
-              <a:buFont typeface="Arial"/>
-              <a:buChar char="•"/>
-            </a:pPr>
-            <a:r>
-              <a:rPr lang="en-US" sz="1800" dirty="0">
-                <a:solidFill>
-                  <a:srgbClr val="000000"/>
-                </a:solidFill>
-                <a:latin typeface="Times New Roman"/>
-                <a:cs typeface="Times New Roman"/>
-              </a:rPr>
-              <a:t>8. Shetty K. V., Janardhana N., Math S. B., Marimuthu P. (2021–2022). Development/validation &amp; manual of the psychiatric social-work intervention package to reduce EE. [Intervention package used in this study.]</a:t>
-            </a:r>
-          </a:p>
-          <a:p>
-            <a:pPr marL="285750" indent="-285750">
-              <a:spcBef>
-                <a:spcPts val="0"/>
-              </a:spcBef>
-              <a:spcAft>
-                <a:spcPts val="300"/>
-              </a:spcAft>
-              <a:buFont typeface="Arial"/>
-              <a:buChar char="•"/>
-            </a:pPr>
-            <a:r>
-              <a:rPr lang="en-US" sz="1800" dirty="0">
-                <a:solidFill>
-                  <a:srgbClr val="000000"/>
-                </a:solidFill>
-                <a:latin typeface="Times New Roman"/>
-                <a:cs typeface="Times New Roman"/>
-              </a:rPr>
-              <a:t>9. World Health Organization. ICD-10 Classification of Mental and Behavioural Disorders. Geneva: WHO. [Diagnostic criteria.]</a:t>
+              <a:rPr lang="en-US" sz="1600" dirty="0">
+                <a:solidFill>
+                  <a:srgbClr val="000000"/>
+                </a:solidFill>
+                <a:latin typeface="Times New Roman"/>
+                <a:cs typeface="Times New Roman"/>
+              </a:rPr>
+              <a:t>A family-based intervention – psychoeducation, communication training, and stress management for caregivers – was effective.</a:t>
+            </a:r>
+          </a:p>
+          <a:p>
+            <a:pPr marL="285750" indent="-285750">
+              <a:spcBef>
+                <a:spcPts val="0"/>
+              </a:spcBef>
+              <a:spcAft>
+                <a:spcPts val="300"/>
+              </a:spcAft>
+              <a:buFont typeface="Arial"/>
+              <a:buChar char="•"/>
+            </a:pPr>
+            <a:r>
+              <a:rPr lang="en-US" sz="1600" dirty="0">
+                <a:solidFill>
+                  <a:srgbClr val="000000"/>
+                </a:solidFill>
+                <a:latin typeface="Times New Roman"/>
+                <a:cs typeface="Times New Roman"/>
+              </a:rPr>
+              <a:t>It produced an overall, statistically significant decrease in Expressed Emotion, while EE rose in the untreated control group.</a:t>
+            </a:r>
+          </a:p>
+          <a:p>
+            <a:pPr marL="285750" indent="-285750">
+              <a:spcBef>
+                <a:spcPts val="0"/>
+              </a:spcBef>
+              <a:spcAft>
+                <a:spcPts val="300"/>
+              </a:spcAft>
+              <a:buFont typeface="Arial"/>
+              <a:buChar char="•"/>
+            </a:pPr>
+            <a:r>
+              <a:rPr lang="en-US" sz="1600" dirty="0">
+                <a:solidFill>
+                  <a:srgbClr val="000000"/>
+                </a:solidFill>
+                <a:latin typeface="Times New Roman"/>
+                <a:cs typeface="Times New Roman"/>
+              </a:rPr>
+              <a:t>Family intervention is a feasible, culturally-appropriate strategy to reduce EE and support rehabilitation in the Indian context.</a:t>
             </a:r>
           </a:p>
         </p:txBody>
@@ -4524,54 +4424,57 @@
       </p:grpSpPr>
       <p:sp>
         <p:nvSpPr>
-          <p:cNvPr id="2" name="Title"/>
+          <p:cNvPr id="2" name="TitleBar"/>
           <p:cNvSpPr/>
           <p:nvPr/>
         </p:nvSpPr>
         <p:spPr>
           <a:xfrm>
-            <a:off x="914400" y="1400200"/>
-            <a:ext cx="10363200" cy="2800000"/>
+            <a:off x="0" y="0"/>
+            <a:ext cx="12192000" cy="900000"/>
           </a:xfrm>
           <a:prstGeom prst="rect">
             <a:avLst/>
           </a:prstGeom>
+          <a:solidFill>
+            <a:srgbClr val="1F3864"/>
+          </a:solidFill>
         </p:spPr>
         <p:txBody>
-          <a:bodyPr wrap="square" anchor="ctr">
+          <a:bodyPr wrap="square" lIns="228600" anchor="ctr">
             <a:normAutofit/>
           </a:bodyPr>
           <a:lstStyle/>
           <a:p>
-            <a:pPr algn="ctr">
+            <a:pPr>
               <a:spcAft>
                 <a:spcPts val="600"/>
               </a:spcAft>
               <a:buNone/>
             </a:pPr>
             <a:r>
-              <a:rPr lang="en-US" sz="4000" b="1" dirty="0">
-                <a:solidFill>
-                  <a:srgbClr val="1F3864"/>
-                </a:solidFill>
-                <a:latin typeface="Times New Roman"/>
-                <a:cs typeface="Times New Roman"/>
-              </a:rPr>
-              <a:t>Thank You</a:t>
+              <a:rPr lang="en-US" sz="1800" b="1" dirty="0">
+                <a:solidFill>
+                  <a:srgbClr val="FFFFFF"/>
+                </a:solidFill>
+                <a:latin typeface="Times New Roman"/>
+                <a:cs typeface="Times New Roman"/>
+              </a:rPr>
+              <a:t>References (1): Primary Paper &amp; Concepts</a:t>
             </a:r>
           </a:p>
         </p:txBody>
       </p:sp>
       <p:sp>
         <p:nvSpPr>
-          <p:cNvPr id="3" name="Subtitle"/>
+          <p:cNvPr id="3" name="Content"/>
           <p:cNvSpPr/>
           <p:nvPr/>
         </p:nvSpPr>
         <p:spPr>
           <a:xfrm>
-            <a:off x="914400" y="4400000"/>
-            <a:ext cx="10363200" cy="2000000"/>
+            <a:off x="685800" y="1050000"/>
+            <a:ext cx="10820400" cy="5650000"/>
           </a:xfrm>
           <a:prstGeom prst="rect">
             <a:avLst/>
@@ -4583,21 +4486,288 @@
           </a:bodyPr>
           <a:lstStyle/>
           <a:p>
-            <a:pPr algn="ctr">
+            <a:pPr marL="285750" indent="-285750">
+              <a:spcBef>
+                <a:spcPts val="0"/>
+              </a:spcBef>
+              <a:spcAft>
+                <a:spcPts val="300"/>
+              </a:spcAft>
+              <a:buFont typeface="Arial"/>
+              <a:buChar char="•"/>
+            </a:pPr>
+            <a:r>
+              <a:rPr lang="en-US" sz="1600" dirty="0">
+                <a:solidFill>
+                  <a:srgbClr val="000000"/>
+                </a:solidFill>
+                <a:latin typeface="Times New Roman"/>
+                <a:cs typeface="Times New Roman"/>
+              </a:rPr>
+              <a:t>1. Shetty K. V., Math S. B., Marimuthu P., Rawat V. S. Family intervention for expressed emotion in schizophrenia: Indian context. Indian Journal of Psychiatry. 2023;65(4):453–459.</a:t>
+            </a:r>
+          </a:p>
+          <a:p>
+            <a:pPr marL="285750" indent="-285750">
+              <a:spcBef>
+                <a:spcPts val="0"/>
+              </a:spcBef>
+              <a:spcAft>
+                <a:spcPts val="300"/>
+              </a:spcAft>
+              <a:buFont typeface="Arial"/>
+              <a:buChar char="•"/>
+            </a:pPr>
+            <a:r>
+              <a:rPr lang="en-US" sz="1600" dirty="0">
+                <a:solidFill>
+                  <a:srgbClr val="000000"/>
+                </a:solidFill>
+                <a:latin typeface="Times New Roman"/>
+                <a:cs typeface="Times New Roman"/>
+              </a:rPr>
+              <a:t>2. Brown G. W., Rutter M. (1966). The measurement of family activities and relationships: a methodology. Human Relations, 19(3):241–263.</a:t>
+            </a:r>
+          </a:p>
+          <a:p>
+            <a:pPr marL="285750" indent="-285750">
+              <a:spcBef>
+                <a:spcPts val="0"/>
+              </a:spcBef>
+              <a:spcAft>
+                <a:spcPts val="300"/>
+              </a:spcAft>
+              <a:buFont typeface="Arial"/>
+              <a:buChar char="•"/>
+            </a:pPr>
+            <a:r>
+              <a:rPr lang="en-US" sz="1600" dirty="0">
+                <a:solidFill>
+                  <a:srgbClr val="000000"/>
+                </a:solidFill>
+                <a:latin typeface="Times New Roman"/>
+                <a:cs typeface="Times New Roman"/>
+              </a:rPr>
+              <a:t>3. Leff J., Vaughn C. (1985). Expressed Emotion in Families: Its Significance for Mental Illness. New York: Guilford Press.</a:t>
+            </a:r>
+          </a:p>
+          <a:p>
+            <a:pPr marL="285750" indent="-285750">
+              <a:spcBef>
+                <a:spcPts val="0"/>
+              </a:spcBef>
+              <a:spcAft>
+                <a:spcPts val="300"/>
+              </a:spcAft>
+              <a:buFont typeface="Arial"/>
+              <a:buChar char="•"/>
+            </a:pPr>
+            <a:r>
+              <a:rPr lang="en-US" sz="1600" dirty="0">
+                <a:solidFill>
+                  <a:srgbClr val="000000"/>
+                </a:solidFill>
+                <a:latin typeface="Times New Roman"/>
+                <a:cs typeface="Times New Roman"/>
+              </a:rPr>
+              <a:t>4. Butzlaff R. L., Hooley J. M. (1998). Expressed emotion and psychiatric relapse: a meta-analysis. Archives of General Psychiatry, 55(6):547–552.</a:t>
+            </a:r>
+          </a:p>
+        </p:txBody>
+      </p:sp>
+    </p:spTree>
+  </p:cSld>
+</p:sld>
+</file>
+
+<file path=ppt/slides/slide29.xml><?xml version="1.0" encoding="utf-8"?>
+<p:sld xmlns:a="http://schemas.openxmlformats.org/drawingml/2006/main" xmlns:r="http://schemas.openxmlformats.org/officeDocument/2006/relationships" xmlns:p="http://schemas.openxmlformats.org/presentationml/2006/main">
+  <p:cSld>
+    <p:spTree>
+      <p:nvGrpSpPr>
+        <p:cNvPr id="1" name=""/>
+        <p:cNvGrpSpPr/>
+        <p:nvPr/>
+      </p:nvGrpSpPr>
+      <p:grpSpPr>
+        <a:xfrm>
+          <a:off x="0" y="0"/>
+          <a:ext cx="0" cy="0"/>
+          <a:chOff x="0" y="0"/>
+          <a:chExt cx="0" cy="0"/>
+        </a:xfrm>
+      </p:grpSpPr>
+      <p:sp>
+        <p:nvSpPr>
+          <p:cNvPr id="2" name="TitleBar"/>
+          <p:cNvSpPr/>
+          <p:nvPr/>
+        </p:nvSpPr>
+        <p:spPr>
+          <a:xfrm>
+            <a:off x="0" y="0"/>
+            <a:ext cx="12192000" cy="900000"/>
+          </a:xfrm>
+          <a:prstGeom prst="rect">
+            <a:avLst/>
+          </a:prstGeom>
+          <a:solidFill>
+            <a:srgbClr val="1F3864"/>
+          </a:solidFill>
+        </p:spPr>
+        <p:txBody>
+          <a:bodyPr wrap="square" lIns="228600" anchor="ctr">
+            <a:normAutofit/>
+          </a:bodyPr>
+          <a:lstStyle/>
+          <a:p>
+            <a:pPr>
               <a:spcAft>
                 <a:spcPts val="600"/>
               </a:spcAft>
               <a:buNone/>
             </a:pPr>
             <a:r>
-              <a:rPr lang="en-US" sz="2000" dirty="0">
-                <a:solidFill>
-                  <a:srgbClr val="404040"/>
-                </a:solidFill>
-                <a:latin typeface="Times New Roman"/>
-                <a:cs typeface="Times New Roman"/>
-              </a:rPr>
-              <a:t>Questions &amp; Discussion</a:t>
+              <a:rPr lang="en-US" sz="1800" b="1" dirty="0">
+                <a:solidFill>
+                  <a:srgbClr val="FFFFFF"/>
+                </a:solidFill>
+                <a:latin typeface="Times New Roman"/>
+                <a:cs typeface="Times New Roman"/>
+              </a:rPr>
+              <a:t>References (2): Technique &amp; Tools</a:t>
+            </a:r>
+          </a:p>
+        </p:txBody>
+      </p:sp>
+      <p:sp>
+        <p:nvSpPr>
+          <p:cNvPr id="3" name="Content"/>
+          <p:cNvSpPr/>
+          <p:nvPr/>
+        </p:nvSpPr>
+        <p:spPr>
+          <a:xfrm>
+            <a:off x="685800" y="1050000"/>
+            <a:ext cx="10820400" cy="5650000"/>
+          </a:xfrm>
+          <a:prstGeom prst="rect">
+            <a:avLst/>
+          </a:prstGeom>
+        </p:spPr>
+        <p:txBody>
+          <a:bodyPr wrap="square" anchor="t">
+            <a:normAutofit/>
+          </a:bodyPr>
+          <a:lstStyle/>
+          <a:p>
+            <a:pPr marL="285750" indent="-285750">
+              <a:spcBef>
+                <a:spcPts val="0"/>
+              </a:spcBef>
+              <a:spcAft>
+                <a:spcPts val="300"/>
+              </a:spcAft>
+              <a:buFont typeface="Arial"/>
+              <a:buChar char="•"/>
+            </a:pPr>
+            <a:r>
+              <a:rPr lang="en-US" sz="1600" dirty="0">
+                <a:solidFill>
+                  <a:srgbClr val="000000"/>
+                </a:solidFill>
+                <a:latin typeface="Times New Roman"/>
+                <a:cs typeface="Times New Roman"/>
+              </a:rPr>
+              <a:t>5. Anderson C. M., Hogarty G. E., Reiss D. J. (1980). Family treatment of adult schizophrenic patients: a psycho-educational approach. Schizophrenia Bulletin, 6(3):490–505.</a:t>
+            </a:r>
+          </a:p>
+          <a:p>
+            <a:pPr marL="285750" indent="-285750">
+              <a:spcBef>
+                <a:spcPts val="0"/>
+              </a:spcBef>
+              <a:spcAft>
+                <a:spcPts val="300"/>
+              </a:spcAft>
+              <a:buFont typeface="Arial"/>
+              <a:buChar char="•"/>
+            </a:pPr>
+            <a:r>
+              <a:rPr lang="en-US" sz="1600" dirty="0">
+                <a:solidFill>
+                  <a:srgbClr val="000000"/>
+                </a:solidFill>
+                <a:latin typeface="Times New Roman"/>
+                <a:cs typeface="Times New Roman"/>
+              </a:rPr>
+              <a:t>6. Perlman H. H. (1957). Social Casework: A Problem-Solving Process. Chicago: University of Chicago Press.</a:t>
+            </a:r>
+          </a:p>
+          <a:p>
+            <a:pPr marL="285750" indent="-285750">
+              <a:spcBef>
+                <a:spcPts val="0"/>
+              </a:spcBef>
+              <a:spcAft>
+                <a:spcPts val="300"/>
+              </a:spcAft>
+              <a:buFont typeface="Arial"/>
+              <a:buChar char="•"/>
+            </a:pPr>
+            <a:r>
+              <a:rPr lang="en-US" sz="1600" dirty="0">
+                <a:solidFill>
+                  <a:srgbClr val="000000"/>
+                </a:solidFill>
+                <a:latin typeface="Times New Roman"/>
+                <a:cs typeface="Times New Roman"/>
+              </a:rPr>
+              <a:t>7. Shields C. G., Franks P., Harp J. J., McDaniel S. H., Campbell T. L. (1992). Development of the FEICS. Journal of Marital and Family Therapy, 18(4):395–407.</a:t>
+            </a:r>
+          </a:p>
+          <a:p>
+            <a:pPr marL="285750" indent="-285750">
+              <a:spcBef>
+                <a:spcPts val="0"/>
+              </a:spcBef>
+              <a:spcAft>
+                <a:spcPts val="300"/>
+              </a:spcAft>
+              <a:buFont typeface="Arial"/>
+              <a:buChar char="•"/>
+            </a:pPr>
+            <a:r>
+              <a:rPr lang="en-US" sz="1600" dirty="0">
+                <a:solidFill>
+                  <a:srgbClr val="000000"/>
+                </a:solidFill>
+                <a:latin typeface="Times New Roman"/>
+                <a:cs typeface="Times New Roman"/>
+              </a:rPr>
+              <a:t>8. Sheehan D. V., Lecrubier Y., Sheehan K. H., et al. (1998). The Mini-International Neuropsychiatric Interview (M.I.N.I.). Journal of Clinical Psychiatry, 59(Suppl 20):22–33.</a:t>
+            </a:r>
+          </a:p>
+          <a:p>
+            <a:pPr marL="285750" indent="-285750">
+              <a:spcBef>
+                <a:spcPts val="0"/>
+              </a:spcBef>
+              <a:spcAft>
+                <a:spcPts val="300"/>
+              </a:spcAft>
+              <a:buFont typeface="Arial"/>
+              <a:buChar char="•"/>
+            </a:pPr>
+            <a:r>
+              <a:rPr lang="en-US" sz="1600" dirty="0">
+                <a:solidFill>
+                  <a:srgbClr val="000000"/>
+                </a:solidFill>
+                <a:latin typeface="Times New Roman"/>
+                <a:cs typeface="Times New Roman"/>
+              </a:rPr>
+              <a:t>9. World Health Organization. ICD-10 Classification of Mental and Behavioural Disorders. Geneva: WHO.</a:t>
             </a:r>
           </a:p>
         </p:txBody>
@@ -4633,7 +4803,7 @@
         <p:spPr>
           <a:xfrm>
             <a:off x="0" y="0"/>
-            <a:ext cx="12192000" cy="1000000"/>
+            <a:ext cx="12192000" cy="900000"/>
           </a:xfrm>
           <a:prstGeom prst="rect">
             <a:avLst/>
@@ -4655,7 +4825,7 @@
               <a:buNone/>
             </a:pPr>
             <a:r>
-              <a:rPr lang="en-US" sz="3000" b="1" dirty="0">
+              <a:rPr lang="en-US" sz="1800" b="1" dirty="0">
                 <a:solidFill>
                   <a:srgbClr val="FFFFFF"/>
                 </a:solidFill>
@@ -4675,8 +4845,8 @@
         </p:nvSpPr>
         <p:spPr>
           <a:xfrm>
-            <a:off x="685800" y="1150000"/>
-            <a:ext cx="10820400" cy="5500000"/>
+            <a:off x="685800" y="1050000"/>
+            <a:ext cx="10820400" cy="5650000"/>
           </a:xfrm>
           <a:prstGeom prst="rect">
             <a:avLst/>
@@ -4699,102 +4869,400 @@
               <a:buChar char="•"/>
             </a:pPr>
             <a:r>
+              <a:rPr lang="en-US" sz="1600" dirty="0">
+                <a:solidFill>
+                  <a:srgbClr val="000000"/>
+                </a:solidFill>
+                <a:latin typeface="Times New Roman"/>
+                <a:cs typeface="Times New Roman"/>
+              </a:rPr>
+              <a:t>Schizophrenia is a chronic, disabling mental illness disrupting thought, perception, emotion, and social functioning, usually with a relapsing course.</a:t>
+            </a:r>
+          </a:p>
+          <a:p>
+            <a:pPr marL="285750" indent="-285750">
+              <a:spcBef>
+                <a:spcPts val="0"/>
+              </a:spcBef>
+              <a:spcAft>
+                <a:spcPts val="300"/>
+              </a:spcAft>
+              <a:buFont typeface="Arial"/>
+              <a:buChar char="•"/>
+            </a:pPr>
+            <a:r>
+              <a:rPr lang="en-US" sz="1600" dirty="0">
+                <a:solidFill>
+                  <a:srgbClr val="000000"/>
+                </a:solidFill>
+                <a:latin typeface="Times New Roman"/>
+                <a:cs typeface="Times New Roman"/>
+              </a:rPr>
+              <a:t>Family is an important, multifunctional social entity that meets its members’ emotional and socializing needs; a member’s chronic illness disturbs this functioning.</a:t>
+            </a:r>
+          </a:p>
+          <a:p>
+            <a:pPr marL="285750" indent="-285750">
+              <a:spcBef>
+                <a:spcPts val="0"/>
+              </a:spcBef>
+              <a:spcAft>
+                <a:spcPts val="300"/>
+              </a:spcAft>
+              <a:buFont typeface="Arial"/>
+              <a:buChar char="•"/>
+            </a:pPr>
+            <a:r>
+              <a:rPr lang="en-US" sz="1600" dirty="0">
+                <a:solidFill>
+                  <a:srgbClr val="000000"/>
+                </a:solidFill>
+                <a:latin typeface="Times New Roman"/>
+                <a:cs typeface="Times New Roman"/>
+              </a:rPr>
+              <a:t>In India, most persons with schizophrenia live with and depend on their families for emotional support, assistance, housing, safety, and advocacy – unlike in Western countries.</a:t>
+            </a:r>
+          </a:p>
+          <a:p>
+            <a:pPr marL="285750" indent="-285750">
+              <a:spcBef>
+                <a:spcPts val="0"/>
+              </a:spcBef>
+              <a:spcAft>
+                <a:spcPts val="300"/>
+              </a:spcAft>
+              <a:buFont typeface="Arial"/>
+              <a:buChar char="•"/>
+            </a:pPr>
+            <a:r>
+              <a:rPr lang="en-US" sz="1600" dirty="0">
+                <a:solidFill>
+                  <a:srgbClr val="000000"/>
+                </a:solidFill>
+                <a:latin typeface="Times New Roman"/>
+                <a:cs typeface="Times New Roman"/>
+              </a:rPr>
+              <a:t>The comparatively better prognosis of schizophrenia in Asian countries is attributed partly to this strong family support.</a:t>
+            </a:r>
+          </a:p>
+          <a:p>
+            <a:pPr marL="0" indent="0">
+              <a:spcBef>
+                <a:spcPts val="400"/>
+              </a:spcBef>
+              <a:spcAft>
+                <a:spcPts val="0"/>
+              </a:spcAft>
+              <a:buNone/>
+            </a:pPr>
+            <a:r>
+              <a:rPr lang="en-US" sz="1300" i="1" dirty="0">
+                <a:solidFill>
+                  <a:srgbClr val="7030A0"/>
+                </a:solidFill>
+                <a:latin typeface="Times New Roman"/>
+                <a:cs typeface="Times New Roman"/>
+              </a:rPr>
+              <a:t>Source: Shetty et al. (2023), Indian Journal of Psychiatry – Introduction; family-support prognosis: Asian-country studies cited therein.</a:t>
+            </a:r>
+          </a:p>
+        </p:txBody>
+      </p:sp>
+    </p:spTree>
+  </p:cSld>
+</p:sld>
+</file>
+
+<file path=ppt/slides/slide30.xml><?xml version="1.0" encoding="utf-8"?>
+<p:sld xmlns:a="http://schemas.openxmlformats.org/drawingml/2006/main" xmlns:r="http://schemas.openxmlformats.org/officeDocument/2006/relationships" xmlns:p="http://schemas.openxmlformats.org/presentationml/2006/main">
+  <p:cSld>
+    <p:spTree>
+      <p:nvGrpSpPr>
+        <p:cNvPr id="1" name=""/>
+        <p:cNvGrpSpPr/>
+        <p:nvPr/>
+      </p:nvGrpSpPr>
+      <p:grpSpPr>
+        <a:xfrm>
+          <a:off x="0" y="0"/>
+          <a:ext cx="0" cy="0"/>
+          <a:chOff x="0" y="0"/>
+          <a:chExt cx="0" cy="0"/>
+        </a:xfrm>
+      </p:grpSpPr>
+      <p:sp>
+        <p:nvSpPr>
+          <p:cNvPr id="2" name="TitleBar"/>
+          <p:cNvSpPr/>
+          <p:nvPr/>
+        </p:nvSpPr>
+        <p:spPr>
+          <a:xfrm>
+            <a:off x="0" y="0"/>
+            <a:ext cx="12192000" cy="900000"/>
+          </a:xfrm>
+          <a:prstGeom prst="rect">
+            <a:avLst/>
+          </a:prstGeom>
+          <a:solidFill>
+            <a:srgbClr val="1F3864"/>
+          </a:solidFill>
+        </p:spPr>
+        <p:txBody>
+          <a:bodyPr wrap="square" lIns="228600" anchor="ctr">
+            <a:normAutofit/>
+          </a:bodyPr>
+          <a:lstStyle/>
+          <a:p>
+            <a:pPr>
+              <a:spcAft>
+                <a:spcPts val="600"/>
+              </a:spcAft>
+              <a:buNone/>
+            </a:pPr>
+            <a:r>
+              <a:rPr lang="en-US" sz="1800" b="1" dirty="0">
+                <a:solidFill>
+                  <a:srgbClr val="FFFFFF"/>
+                </a:solidFill>
+                <a:latin typeface="Times New Roman"/>
+                <a:cs typeface="Times New Roman"/>
+              </a:rPr>
+              <a:t>Critical Reflection: What Another Researcher Might Do Differently</a:t>
+            </a:r>
+          </a:p>
+        </p:txBody>
+      </p:sp>
+      <p:sp>
+        <p:nvSpPr>
+          <p:cNvPr id="3" name="Content"/>
+          <p:cNvSpPr/>
+          <p:nvPr/>
+        </p:nvSpPr>
+        <p:spPr>
+          <a:xfrm>
+            <a:off x="685800" y="1050000"/>
+            <a:ext cx="10820400" cy="5650000"/>
+          </a:xfrm>
+          <a:prstGeom prst="rect">
+            <a:avLst/>
+          </a:prstGeom>
+        </p:spPr>
+        <p:txBody>
+          <a:bodyPr wrap="square" anchor="t">
+            <a:normAutofit/>
+          </a:bodyPr>
+          <a:lstStyle/>
+          <a:p>
+            <a:pPr marL="285750" indent="-285750">
+              <a:spcBef>
+                <a:spcPts val="0"/>
+              </a:spcBef>
+              <a:spcAft>
+                <a:spcPts val="300"/>
+              </a:spcAft>
+              <a:buFont typeface="Arial"/>
+              <a:buChar char="•"/>
+            </a:pPr>
+            <a:r>
+              <a:rPr lang="en-US" sz="1600" dirty="0">
+                <a:solidFill>
+                  <a:srgbClr val="000000"/>
+                </a:solidFill>
+                <a:latin typeface="Times New Roman"/>
+                <a:cs typeface="Times New Roman"/>
+              </a:rPr>
+              <a:t>Use a double-blind design and an independent, standardized EE measure (e.g., the Camberwell Family Interview) alongside FEICS, capturing positive EE (warmth) too.</a:t>
+            </a:r>
+          </a:p>
+          <a:p>
+            <a:pPr marL="285750" indent="-285750">
+              <a:spcBef>
+                <a:spcPts val="0"/>
+              </a:spcBef>
+              <a:spcAft>
+                <a:spcPts val="300"/>
+              </a:spcAft>
+              <a:buFont typeface="Arial"/>
+              <a:buChar char="•"/>
+            </a:pPr>
+            <a:r>
+              <a:rPr lang="en-US" sz="1600" dirty="0">
+                <a:solidFill>
+                  <a:srgbClr val="000000"/>
+                </a:solidFill>
+                <a:latin typeface="Times New Roman"/>
+                <a:cs typeface="Times New Roman"/>
+              </a:rPr>
+              <a:t>Recruit a larger, multi-centre sample with an a-priori power calculation to improve generalizability beyond a single tertiary hospital (NIMHANS).</a:t>
+            </a:r>
+          </a:p>
+          <a:p>
+            <a:pPr marL="285750" indent="-285750">
+              <a:spcBef>
+                <a:spcPts val="0"/>
+              </a:spcBef>
+              <a:spcAft>
+                <a:spcPts val="300"/>
+              </a:spcAft>
+              <a:buFont typeface="Arial"/>
+              <a:buChar char="•"/>
+            </a:pPr>
+            <a:r>
+              <a:rPr lang="en-US" sz="1600" dirty="0">
+                <a:solidFill>
+                  <a:srgbClr val="000000"/>
+                </a:solidFill>
+                <a:latin typeface="Times New Roman"/>
+                <a:cs typeface="Times New Roman"/>
+              </a:rPr>
+              <a:t>Add a follow-up period to test whether EE reduction is sustained, and measure patient outcomes (relapse, re-hospitalization, functioning), not just caregiver EE.</a:t>
+            </a:r>
+          </a:p>
+          <a:p>
+            <a:pPr marL="285750" indent="-285750">
+              <a:spcBef>
+                <a:spcPts val="0"/>
+              </a:spcBef>
+              <a:spcAft>
+                <a:spcPts val="300"/>
+              </a:spcAft>
+              <a:buFont typeface="Arial"/>
+              <a:buChar char="•"/>
+            </a:pPr>
+            <a:r>
+              <a:rPr lang="en-US" sz="1600" dirty="0">
+                <a:solidFill>
+                  <a:srgbClr val="000000"/>
+                </a:solidFill>
+                <a:latin typeface="Times New Roman"/>
+                <a:cs typeface="Times New Roman"/>
+              </a:rPr>
+              <a:t>Include a fidelity check of intervention delivery and an active comparison arm (e.g., routine psychoeducation) to isolate the added value of the technique.</a:t>
+            </a:r>
+          </a:p>
+          <a:p>
+            <a:pPr marL="285750" indent="-285750">
+              <a:spcBef>
+                <a:spcPts val="0"/>
+              </a:spcBef>
+              <a:spcAft>
+                <a:spcPts val="300"/>
+              </a:spcAft>
+              <a:buFont typeface="Arial"/>
+              <a:buChar char="•"/>
+            </a:pPr>
+            <a:r>
+              <a:rPr lang="en-US" sz="1600" dirty="0">
+                <a:solidFill>
+                  <a:srgbClr val="000000"/>
+                </a:solidFill>
+                <a:latin typeface="Times New Roman"/>
+                <a:cs typeface="Times New Roman"/>
+              </a:rPr>
+              <a:t>Report effect sizes and confidence intervals, and analyse attrition (40→32 / 40→33) with intention-to-treat to reduce bias.</a:t>
+            </a:r>
+          </a:p>
+        </p:txBody>
+      </p:sp>
+    </p:spTree>
+  </p:cSld>
+</p:sld>
+</file>
+
+<file path=ppt/slides/slide31.xml><?xml version="1.0" encoding="utf-8"?>
+<p:sld xmlns:a="http://schemas.openxmlformats.org/drawingml/2006/main" xmlns:r="http://schemas.openxmlformats.org/officeDocument/2006/relationships" xmlns:p="http://schemas.openxmlformats.org/presentationml/2006/main">
+  <p:cSld>
+    <p:spTree>
+      <p:nvGrpSpPr>
+        <p:cNvPr id="1" name=""/>
+        <p:cNvGrpSpPr/>
+        <p:nvPr/>
+      </p:nvGrpSpPr>
+      <p:grpSpPr>
+        <a:xfrm>
+          <a:off x="0" y="0"/>
+          <a:ext cx="0" cy="0"/>
+          <a:chOff x="0" y="0"/>
+          <a:chExt cx="0" cy="0"/>
+        </a:xfrm>
+      </p:grpSpPr>
+      <p:sp>
+        <p:nvSpPr>
+          <p:cNvPr id="2" name="Title"/>
+          <p:cNvSpPr/>
+          <p:nvPr/>
+        </p:nvSpPr>
+        <p:spPr>
+          <a:xfrm>
+            <a:off x="762000" y="1200000"/>
+            <a:ext cx="10668000" cy="2600000"/>
+          </a:xfrm>
+          <a:prstGeom prst="rect">
+            <a:avLst/>
+          </a:prstGeom>
+        </p:spPr>
+        <p:txBody>
+          <a:bodyPr wrap="square" anchor="ctr">
+            <a:normAutofit/>
+          </a:bodyPr>
+          <a:lstStyle/>
+          <a:p>
+            <a:pPr algn="ctr">
+              <a:spcAft>
+                <a:spcPts val="600"/>
+              </a:spcAft>
+              <a:buNone/>
+            </a:pPr>
+            <a:r>
+              <a:rPr lang="en-US" sz="3600" b="1" dirty="0">
+                <a:solidFill>
+                  <a:srgbClr val="1F3864"/>
+                </a:solidFill>
+                <a:latin typeface="Times New Roman"/>
+                <a:cs typeface="Times New Roman"/>
+              </a:rPr>
+              <a:t>Thank You</a:t>
+            </a:r>
+          </a:p>
+        </p:txBody>
+      </p:sp>
+      <p:sp>
+        <p:nvSpPr>
+          <p:cNvPr id="3" name="Subtitle"/>
+          <p:cNvSpPr/>
+          <p:nvPr/>
+        </p:nvSpPr>
+        <p:spPr>
+          <a:xfrm>
+            <a:off x="762000" y="3950000"/>
+            <a:ext cx="10668000" cy="2400000"/>
+          </a:xfrm>
+          <a:prstGeom prst="rect">
+            <a:avLst/>
+          </a:prstGeom>
+        </p:spPr>
+        <p:txBody>
+          <a:bodyPr wrap="square" anchor="t">
+            <a:normAutofit/>
+          </a:bodyPr>
+          <a:lstStyle/>
+          <a:p>
+            <a:pPr algn="ctr">
+              <a:spcAft>
+                <a:spcPts val="600"/>
+              </a:spcAft>
+              <a:buNone/>
+            </a:pPr>
+            <a:r>
               <a:rPr lang="en-US" sz="1800" dirty="0">
                 <a:solidFill>
-                  <a:srgbClr val="000000"/>
-                </a:solidFill>
-                <a:latin typeface="Times New Roman"/>
-                <a:cs typeface="Times New Roman"/>
-              </a:rPr>
-              <a:t>Schizophrenia is a chronic, disabling mental illness that disrupts thinking, perception, emotion, and social functioning, and usually follows a relapsing course.</a:t>
-            </a:r>
-          </a:p>
-          <a:p>
-            <a:pPr marL="285750" indent="-285750">
-              <a:spcBef>
-                <a:spcPts val="0"/>
-              </a:spcBef>
-              <a:spcAft>
-                <a:spcPts val="300"/>
-              </a:spcAft>
-              <a:buFont typeface="Arial"/>
-              <a:buChar char="•"/>
-            </a:pPr>
-            <a:r>
-              <a:rPr lang="en-US" sz="1800" dirty="0">
-                <a:solidFill>
-                  <a:srgbClr val="000000"/>
-                </a:solidFill>
-                <a:latin typeface="Times New Roman"/>
-                <a:cs typeface="Times New Roman"/>
-              </a:rPr>
-              <a:t>Family is an important, multifunctional social entity that meets the emotional and socializing needs of its members; a member’s chronic illness disturbs this functioning.</a:t>
-            </a:r>
-          </a:p>
-          <a:p>
-            <a:pPr marL="285750" indent="-285750">
-              <a:spcBef>
-                <a:spcPts val="0"/>
-              </a:spcBef>
-              <a:spcAft>
-                <a:spcPts val="300"/>
-              </a:spcAft>
-              <a:buFont typeface="Arial"/>
-              <a:buChar char="•"/>
-            </a:pPr>
-            <a:r>
-              <a:rPr lang="en-US" sz="1800" dirty="0">
-                <a:solidFill>
-                  <a:srgbClr val="000000"/>
-                </a:solidFill>
-                <a:latin typeface="Times New Roman"/>
-                <a:cs typeface="Times New Roman"/>
-              </a:rPr>
-              <a:t>In India, most persons with schizophrenia live with their families and depend on them for emotional support, assistance, housing, safety, and advocacy – unlike in Western countries.</a:t>
-            </a:r>
-          </a:p>
-          <a:p>
-            <a:pPr marL="285750" indent="-285750">
-              <a:spcBef>
-                <a:spcPts val="0"/>
-              </a:spcBef>
-              <a:spcAft>
-                <a:spcPts val="300"/>
-              </a:spcAft>
-              <a:buFont typeface="Arial"/>
-              <a:buChar char="•"/>
-            </a:pPr>
-            <a:r>
-              <a:rPr lang="en-US" sz="1800" dirty="0">
-                <a:solidFill>
-                  <a:srgbClr val="000000"/>
-                </a:solidFill>
-                <a:latin typeface="Times New Roman"/>
-                <a:cs typeface="Times New Roman"/>
-              </a:rPr>
-              <a:t>The comparatively better prognosis of schizophrenia in Asian countries is attributed partly to this strong family support system.</a:t>
-            </a:r>
-          </a:p>
-          <a:p>
-            <a:pPr marL="285750" indent="-285750">
-              <a:spcBef>
-                <a:spcPts val="0"/>
-              </a:spcBef>
-              <a:spcAft>
-                <a:spcPts val="300"/>
-              </a:spcAft>
-              <a:buFont typeface="Arial"/>
-              <a:buChar char="•"/>
-            </a:pPr>
-            <a:r>
-              <a:rPr lang="en-US" sz="1800" dirty="0">
-                <a:solidFill>
-                  <a:srgbClr val="000000"/>
-                </a:solidFill>
-                <a:latin typeface="Times New Roman"/>
-                <a:cs typeface="Times New Roman"/>
-              </a:rPr>
-              <a:t>However, the illness can cause distress, crises, uncertainty, and over-burden for the family, and caregivers’ attitudes toward the patient vary widely.</a:t>
+                  <a:srgbClr val="404040"/>
+                </a:solidFill>
+                <a:latin typeface="Times New Roman"/>
+                <a:cs typeface="Times New Roman"/>
+              </a:rPr>
+              <a:t>Questions &amp; Discussion</a:t>
             </a:r>
           </a:p>
         </p:txBody>
@@ -4830,7 +5298,7 @@
         <p:spPr>
           <a:xfrm>
             <a:off x="0" y="0"/>
-            <a:ext cx="12192000" cy="1000000"/>
+            <a:ext cx="12192000" cy="900000"/>
           </a:xfrm>
           <a:prstGeom prst="rect">
             <a:avLst/>
@@ -4852,7 +5320,7 @@
               <a:buNone/>
             </a:pPr>
             <a:r>
-              <a:rPr lang="en-US" sz="3000" b="1" dirty="0">
+              <a:rPr lang="en-US" sz="1800" b="1" dirty="0">
                 <a:solidFill>
                   <a:srgbClr val="FFFFFF"/>
                 </a:solidFill>
@@ -4872,8 +5340,8 @@
         </p:nvSpPr>
         <p:spPr>
           <a:xfrm>
-            <a:off x="685800" y="1150000"/>
-            <a:ext cx="10820400" cy="5500000"/>
+            <a:off x="685800" y="1050000"/>
+            <a:ext cx="10820400" cy="5650000"/>
           </a:xfrm>
           <a:prstGeom prst="rect">
             <a:avLst/>
@@ -4896,102 +5364,101 @@
               <a:buChar char="•"/>
             </a:pPr>
             <a:r>
-              <a:rPr lang="en-US" sz="1800" dirty="0">
-                <a:solidFill>
-                  <a:srgbClr val="000000"/>
-                </a:solidFill>
-                <a:latin typeface="Times New Roman"/>
-                <a:cs typeface="Times New Roman"/>
-              </a:rPr>
-              <a:t>Caregivers may become unsympathetic or judgmental, interpreting the patient’s bizarre behaviours as intentional → the family develops high Expressed Emotion (EE).</a:t>
-            </a:r>
-          </a:p>
-          <a:p>
-            <a:pPr marL="285750" indent="-285750">
-              <a:spcBef>
-                <a:spcPts val="0"/>
-              </a:spcBef>
-              <a:spcAft>
-                <a:spcPts val="300"/>
-              </a:spcAft>
-              <a:buFont typeface="Arial"/>
-              <a:buChar char="•"/>
-            </a:pPr>
-            <a:r>
-              <a:rPr lang="en-US" sz="1800" dirty="0">
-                <a:solidFill>
-                  <a:srgbClr val="000000"/>
-                </a:solidFill>
-                <a:latin typeface="Times New Roman"/>
-                <a:cs typeface="Times New Roman"/>
-              </a:rPr>
-              <a:t>Well-meaning attempts to help may instead breed guilt, family isolation, or compensatory over-involvement; stigma worsens the situation further.</a:t>
-            </a:r>
-          </a:p>
-          <a:p>
-            <a:pPr marL="285750" indent="-285750">
-              <a:spcBef>
-                <a:spcPts val="0"/>
-              </a:spcBef>
-              <a:spcAft>
-                <a:spcPts val="300"/>
-              </a:spcAft>
-              <a:buFont typeface="Arial"/>
-              <a:buChar char="•"/>
-            </a:pPr>
-            <a:r>
-              <a:rPr lang="en-US" sz="1800" dirty="0">
-                <a:solidFill>
-                  <a:srgbClr val="000000"/>
-                </a:solidFill>
-                <a:latin typeface="Times New Roman"/>
-                <a:cs typeface="Times New Roman"/>
-              </a:rPr>
-              <a:t>Expressed Emotion is one of the most robust psychosocial predictors of relapse in schizophrenia (Butzlaff &amp; Hooley, 1998).</a:t>
-            </a:r>
-          </a:p>
-          <a:p>
-            <a:pPr marL="285750" indent="-285750">
-              <a:spcBef>
-                <a:spcPts val="0"/>
-              </a:spcBef>
-              <a:spcAft>
-                <a:spcPts val="300"/>
-              </a:spcAft>
-              <a:buFont typeface="Arial"/>
-              <a:buChar char="•"/>
-            </a:pPr>
-            <a:r>
-              <a:rPr lang="en-US" sz="1800" dirty="0">
-                <a:solidFill>
-                  <a:srgbClr val="000000"/>
-                </a:solidFill>
-                <a:latin typeface="Times New Roman"/>
-                <a:cs typeface="Times New Roman"/>
-              </a:rPr>
-              <a:t>Crucially, EE is NOT a fixed trait – many caregivers shift from high to low EE within 12 months, which makes it a modifiable treatment target.</a:t>
-            </a:r>
-          </a:p>
-          <a:p>
-            <a:pPr marL="285750" indent="-285750">
-              <a:spcBef>
-                <a:spcPts val="0"/>
-              </a:spcBef>
-              <a:spcAft>
-                <a:spcPts val="300"/>
-              </a:spcAft>
-              <a:buFont typeface="Arial"/>
-              <a:buChar char="•"/>
-            </a:pPr>
-            <a:r>
-              <a:rPr lang="en-US" sz="1800" dirty="0">
-                <a:solidFill>
-                  <a:srgbClr val="000000"/>
-                </a:solidFill>
-                <a:latin typeface="Times New Roman"/>
-                <a:cs typeface="Times New Roman"/>
-              </a:rPr>
-              <a:t>Because family responses differ by culture, region, perception, and language, a culturally-relevant Indian family intervention is needed.</a:t>
+              <a:rPr lang="en-US" sz="1600" dirty="0">
+                <a:solidFill>
+                  <a:srgbClr val="000000"/>
+                </a:solidFill>
+                <a:latin typeface="Times New Roman"/>
+                <a:cs typeface="Times New Roman"/>
+              </a:rPr>
+              <a:t>Caregivers may become unsympathetic or judgmental, interpreting the patient’s bizarre behaviours as intentional → high Expressed Emotion (EE).</a:t>
+            </a:r>
+          </a:p>
+          <a:p>
+            <a:pPr marL="285750" indent="-285750">
+              <a:spcBef>
+                <a:spcPts val="0"/>
+              </a:spcBef>
+              <a:spcAft>
+                <a:spcPts val="300"/>
+              </a:spcAft>
+              <a:buFont typeface="Arial"/>
+              <a:buChar char="•"/>
+            </a:pPr>
+            <a:r>
+              <a:rPr lang="en-US" sz="1600" dirty="0">
+                <a:solidFill>
+                  <a:srgbClr val="000000"/>
+                </a:solidFill>
+                <a:latin typeface="Times New Roman"/>
+                <a:cs typeface="Times New Roman"/>
+              </a:rPr>
+              <a:t>Attempts to help may instead breed guilt, family isolation, or over-involvement; stigma worsens the situation.</a:t>
+            </a:r>
+          </a:p>
+          <a:p>
+            <a:pPr marL="285750" indent="-285750">
+              <a:spcBef>
+                <a:spcPts val="0"/>
+              </a:spcBef>
+              <a:spcAft>
+                <a:spcPts val="300"/>
+              </a:spcAft>
+              <a:buFont typeface="Arial"/>
+              <a:buChar char="•"/>
+            </a:pPr>
+            <a:r>
+              <a:rPr lang="en-US" sz="1600" dirty="0">
+                <a:solidFill>
+                  <a:srgbClr val="000000"/>
+                </a:solidFill>
+                <a:latin typeface="Times New Roman"/>
+                <a:cs typeface="Times New Roman"/>
+              </a:rPr>
+              <a:t>EE is one of the most robust psychosocial predictors of relapse in schizophrenia.</a:t>
+            </a:r>
+          </a:p>
+          <a:p>
+            <a:pPr marL="285750" indent="-285750">
+              <a:spcBef>
+                <a:spcPts val="0"/>
+              </a:spcBef>
+              <a:spcAft>
+                <a:spcPts val="300"/>
+              </a:spcAft>
+              <a:buFont typeface="Arial"/>
+              <a:buChar char="•"/>
+            </a:pPr>
+            <a:r>
+              <a:rPr lang="en-US" sz="1600" dirty="0">
+                <a:solidFill>
+                  <a:srgbClr val="000000"/>
+                </a:solidFill>
+                <a:latin typeface="Times New Roman"/>
+                <a:cs typeface="Times New Roman"/>
+              </a:rPr>
+              <a:t>EE is NOT a fixed trait – caregivers often shift from high to low EE within 12 months, making it a modifiable treatment target.</a:t>
+            </a:r>
+          </a:p>
+          <a:p>
+            <a:pPr marL="0" indent="0">
+              <a:spcBef>
+                <a:spcPts val="400"/>
+              </a:spcBef>
+              <a:spcAft>
+                <a:spcPts val="0"/>
+              </a:spcAft>
+              <a:buNone/>
+            </a:pPr>
+            <a:r>
+              <a:rPr lang="en-US" sz="1300" i="1" dirty="0">
+                <a:solidFill>
+                  <a:srgbClr val="7030A0"/>
+                </a:solidFill>
+                <a:latin typeface="Times New Roman"/>
+                <a:cs typeface="Times New Roman"/>
+              </a:rPr>
+              <a:t>Sources: Shetty et al. (2023); EE–relapse meta-analysis – Butzlaff &amp; Hooley (1998), Arch Gen Psychiatry.</a:t>
             </a:r>
           </a:p>
         </p:txBody>
@@ -5027,7 +5494,7 @@
         <p:spPr>
           <a:xfrm>
             <a:off x="0" y="0"/>
-            <a:ext cx="12192000" cy="1000000"/>
+            <a:ext cx="12192000" cy="900000"/>
           </a:xfrm>
           <a:prstGeom prst="rect">
             <a:avLst/>
@@ -5049,7 +5516,7 @@
               <a:buNone/>
             </a:pPr>
             <a:r>
-              <a:rPr lang="en-US" sz="3000" b="1" dirty="0">
+              <a:rPr lang="en-US" sz="1800" b="1" dirty="0">
                 <a:solidFill>
                   <a:srgbClr val="FFFFFF"/>
                 </a:solidFill>
@@ -5069,8 +5536,8 @@
         </p:nvSpPr>
         <p:spPr>
           <a:xfrm>
-            <a:off x="685800" y="1150000"/>
-            <a:ext cx="10820400" cy="5500000"/>
+            <a:off x="685800" y="1050000"/>
+            <a:ext cx="10820400" cy="5650000"/>
           </a:xfrm>
           <a:prstGeom prst="rect">
             <a:avLst/>
@@ -5092,7 +5559,7 @@
               <a:buNone/>
             </a:pPr>
             <a:r>
-              <a:rPr lang="en-US" sz="2000" b="1" dirty="0">
+              <a:rPr lang="en-US" sz="1600" b="1" dirty="0">
                 <a:solidFill>
                   <a:srgbClr val="1F3864"/>
                 </a:solidFill>
@@ -5114,14 +5581,14 @@
               <a:buChar char="•"/>
             </a:pPr>
             <a:r>
-              <a:rPr lang="en-US" sz="1800" dirty="0">
-                <a:solidFill>
-                  <a:srgbClr val="000000"/>
-                </a:solidFill>
-                <a:latin typeface="Times New Roman"/>
-                <a:cs typeface="Times New Roman"/>
-              </a:rPr>
-              <a:t>A chronic, severe mental disorder with disturbances of thought, perception, emotion, and behaviour; diagnosed here using ICD-10 criteria (WHO).</a:t>
+              <a:rPr lang="en-US" sz="1600" dirty="0">
+                <a:solidFill>
+                  <a:srgbClr val="000000"/>
+                </a:solidFill>
+                <a:latin typeface="Times New Roman"/>
+                <a:cs typeface="Times New Roman"/>
+              </a:rPr>
+              <a:t>A chronic, severe mental disorder with disturbances of thought, perception, emotion, and behaviour; diagnosed here using ICD-10 criteria.</a:t>
             </a:r>
           </a:p>
           <a:p>
@@ -5135,7 +5602,7 @@
               <a:buNone/>
             </a:pPr>
             <a:r>
-              <a:rPr lang="en-US" sz="2000" b="1" dirty="0">
+              <a:rPr lang="en-US" sz="1600" b="1" dirty="0">
                 <a:solidFill>
                   <a:srgbClr val="1F3864"/>
                 </a:solidFill>
@@ -5157,14 +5624,14 @@
               <a:buChar char="•"/>
             </a:pPr>
             <a:r>
-              <a:rPr lang="en-US" sz="1800" dirty="0">
-                <a:solidFill>
-                  <a:srgbClr val="000000"/>
-                </a:solidFill>
-                <a:latin typeface="Times New Roman"/>
-                <a:cs typeface="Times New Roman"/>
-              </a:rPr>
-              <a:t>A family member living with and providing care to the person with schizophrenia; ≥18 years of age; the primary source of emotional and practical support.</a:t>
+              <a:rPr lang="en-US" sz="1600" dirty="0">
+                <a:solidFill>
+                  <a:srgbClr val="000000"/>
+                </a:solidFill>
+                <a:latin typeface="Times New Roman"/>
+                <a:cs typeface="Times New Roman"/>
+              </a:rPr>
+              <a:t>A family member living with and providing care to the person with schizophrenia; ≥18 years; primary source of emotional &amp; practical support.</a:t>
             </a:r>
           </a:p>
           <a:p>
@@ -5178,7 +5645,7 @@
               <a:buNone/>
             </a:pPr>
             <a:r>
-              <a:rPr lang="en-US" sz="2000" b="1" dirty="0">
+              <a:rPr lang="en-US" sz="1600" b="1" dirty="0">
                 <a:solidFill>
                   <a:srgbClr val="1F3864"/>
                 </a:solidFill>
@@ -5200,36 +5667,35 @@
               <a:buChar char="•"/>
             </a:pPr>
             <a:r>
-              <a:rPr lang="en-US" sz="1800" dirty="0">
-                <a:solidFill>
-                  <a:srgbClr val="000000"/>
-                </a:solidFill>
-                <a:latin typeface="Times New Roman"/>
-                <a:cs typeface="Times New Roman"/>
-              </a:rPr>
-              <a:t>A measure of the family’s emotional climate – the attitudes of criticism, hostility, and emotional over-involvement expressed by relatives toward the patient.</a:t>
-            </a:r>
-          </a:p>
-          <a:p>
-            <a:pPr marL="571500" indent="-228600">
-              <a:spcBef>
-                <a:spcPts val="0"/>
-              </a:spcBef>
-              <a:spcAft>
-                <a:spcPts val="300"/>
-              </a:spcAft>
-              <a:buFont typeface="Arial"/>
-              <a:buChar char="–"/>
-            </a:pPr>
-            <a:r>
-              <a:rPr lang="en-US" sz="1800" i="1" dirty="0">
-                <a:solidFill>
-                  <a:srgbClr val="333333"/>
-                </a:solidFill>
-                <a:latin typeface="Times New Roman"/>
-                <a:cs typeface="Times New Roman"/>
-              </a:rPr>
-              <a:t>Concept coined by Brown &amp; Rutter (1966); measured originally via the Camberwell Family Interview; developed further by Leff &amp; Vaughn (1985).</a:t>
+              <a:rPr lang="en-US" sz="1600" dirty="0">
+                <a:solidFill>
+                  <a:srgbClr val="000000"/>
+                </a:solidFill>
+                <a:latin typeface="Times New Roman"/>
+                <a:cs typeface="Times New Roman"/>
+              </a:rPr>
+              <a:t>A measure of the family’s emotional climate – attitudes of criticism, hostility, and emotional over-involvement expressed by relatives toward the patient.</a:t>
+            </a:r>
+          </a:p>
+          <a:p>
+            <a:pPr marL="0" indent="0">
+              <a:spcBef>
+                <a:spcPts val="400"/>
+              </a:spcBef>
+              <a:spcAft>
+                <a:spcPts val="0"/>
+              </a:spcAft>
+              <a:buNone/>
+            </a:pPr>
+            <a:r>
+              <a:rPr lang="en-US" sz="1300" i="1" dirty="0">
+                <a:solidFill>
+                  <a:srgbClr val="7030A0"/>
+                </a:solidFill>
+                <a:latin typeface="Times New Roman"/>
+                <a:cs typeface="Times New Roman"/>
+              </a:rPr>
+              <a:t>Sources: ICD-10 (WHO); EE concept – Brown &amp; Rutter (1966); developed by Leff &amp; Vaughn (1985).</a:t>
             </a:r>
           </a:p>
         </p:txBody>
@@ -5265,7 +5731,7 @@
         <p:spPr>
           <a:xfrm>
             <a:off x="0" y="0"/>
-            <a:ext cx="12192000" cy="1000000"/>
+            <a:ext cx="12192000" cy="900000"/>
           </a:xfrm>
           <a:prstGeom prst="rect">
             <a:avLst/>
@@ -5287,7 +5753,7 @@
               <a:buNone/>
             </a:pPr>
             <a:r>
-              <a:rPr lang="en-US" sz="3000" b="1" dirty="0">
+              <a:rPr lang="en-US" sz="1800" b="1" dirty="0">
                 <a:solidFill>
                   <a:srgbClr val="FFFFFF"/>
                 </a:solidFill>
@@ -5307,8 +5773,8 @@
         </p:nvSpPr>
         <p:spPr>
           <a:xfrm>
-            <a:off x="685800" y="1150000"/>
-            <a:ext cx="10820400" cy="5500000"/>
+            <a:off x="685800" y="1050000"/>
+            <a:ext cx="10820400" cy="5650000"/>
           </a:xfrm>
           <a:prstGeom prst="rect">
             <a:avLst/>
@@ -5330,7 +5796,7 @@
               <a:buNone/>
             </a:pPr>
             <a:r>
-              <a:rPr lang="en-US" sz="2000" b="1" dirty="0">
+              <a:rPr lang="en-US" sz="1600" b="1" dirty="0">
                 <a:solidFill>
                   <a:srgbClr val="1F3864"/>
                 </a:solidFill>
@@ -5352,14 +5818,14 @@
               <a:buChar char="•"/>
             </a:pPr>
             <a:r>
-              <a:rPr lang="en-US" sz="1800" dirty="0">
-                <a:solidFill>
-                  <a:srgbClr val="000000"/>
-                </a:solidFill>
-                <a:latin typeface="Times New Roman"/>
-                <a:cs typeface="Times New Roman"/>
-              </a:rPr>
-              <a:t>Negative, disapproving comments, resentment, or hostile attitudes expressed by the caregiver about the patient’s behaviour – the “critical comments / hostility” dimension of EE.</a:t>
+              <a:rPr lang="en-US" sz="1600" dirty="0">
+                <a:solidFill>
+                  <a:srgbClr val="000000"/>
+                </a:solidFill>
+                <a:latin typeface="Times New Roman"/>
+                <a:cs typeface="Times New Roman"/>
+              </a:rPr>
+              <a:t>Negative, disapproving comments, resentment, or hostile attitudes expressed by the caregiver about the patient’s behaviour.</a:t>
             </a:r>
           </a:p>
           <a:p>
@@ -5373,7 +5839,7 @@
               <a:buNone/>
             </a:pPr>
             <a:r>
-              <a:rPr lang="en-US" sz="2000" b="1" dirty="0">
+              <a:rPr lang="en-US" sz="1600" b="1" dirty="0">
                 <a:solidFill>
                   <a:srgbClr val="1F3864"/>
                 </a:solidFill>
@@ -5395,14 +5861,14 @@
               <a:buChar char="•"/>
             </a:pPr>
             <a:r>
-              <a:rPr lang="en-US" sz="1800" dirty="0">
-                <a:solidFill>
-                  <a:srgbClr val="000000"/>
-                </a:solidFill>
-                <a:latin typeface="Times New Roman"/>
-                <a:cs typeface="Times New Roman"/>
-              </a:rPr>
-              <a:t>Exaggerated emotional responses, over-protectiveness, self-sacrifice, and intrusiveness by the caregiver; it undermines the patient’s skills and confidence and fosters long-term dependency.</a:t>
+              <a:rPr lang="en-US" sz="1600" dirty="0">
+                <a:solidFill>
+                  <a:srgbClr val="000000"/>
+                </a:solidFill>
+                <a:latin typeface="Times New Roman"/>
+                <a:cs typeface="Times New Roman"/>
+              </a:rPr>
+              <a:t>Exaggerated emotional responses, over-protectiveness, self-sacrifice, and intrusiveness; it undermines the patient’s confidence and fosters dependency.</a:t>
             </a:r>
           </a:p>
           <a:p>
@@ -5417,14 +5883,35 @@
               <a:buChar char="–"/>
             </a:pPr>
             <a:r>
-              <a:rPr lang="en-US" sz="1800" i="1" dirty="0">
+              <a:rPr lang="en-US" sz="1600" i="1" dirty="0">
                 <a:solidFill>
                   <a:srgbClr val="333333"/>
                 </a:solidFill>
                 <a:latin typeface="Times New Roman"/>
                 <a:cs typeface="Times New Roman"/>
               </a:rPr>
-              <a:t>In this study, EE = Criticality + Emotional Over-Involvement (negative EE only). The FEICS scale does NOT measure positive EE such as warmth.</a:t>
+              <a:t>In this study EE = Criticality + Emotional Over-Involvement (negative EE only). FEICS does not measure positive EE such as warmth.</a:t>
+            </a:r>
+          </a:p>
+          <a:p>
+            <a:pPr marL="0" indent="0">
+              <a:spcBef>
+                <a:spcPts val="400"/>
+              </a:spcBef>
+              <a:spcAft>
+                <a:spcPts val="0"/>
+              </a:spcAft>
+              <a:buNone/>
+            </a:pPr>
+            <a:r>
+              <a:rPr lang="en-US" sz="1300" i="1" dirty="0">
+                <a:solidFill>
+                  <a:srgbClr val="7030A0"/>
+                </a:solidFill>
+                <a:latin typeface="Times New Roman"/>
+                <a:cs typeface="Times New Roman"/>
+              </a:rPr>
+              <a:t>Sources: Leff &amp; Vaughn (1985); FEICS – Shields, Franks, Harp, McDaniel &amp; Campbell (1992).</a:t>
             </a:r>
           </a:p>
         </p:txBody>
@@ -5460,7 +5947,7 @@
         <p:spPr>
           <a:xfrm>
             <a:off x="0" y="0"/>
-            <a:ext cx="12192000" cy="1000000"/>
+            <a:ext cx="12192000" cy="900000"/>
           </a:xfrm>
           <a:prstGeom prst="rect">
             <a:avLst/>
@@ -5482,7 +5969,7 @@
               <a:buNone/>
             </a:pPr>
             <a:r>
-              <a:rPr lang="en-US" sz="3000" b="1" dirty="0">
+              <a:rPr lang="en-US" sz="1800" b="1" dirty="0">
                 <a:solidFill>
                   <a:srgbClr val="FFFFFF"/>
                 </a:solidFill>
@@ -5502,8 +5989,8 @@
         </p:nvSpPr>
         <p:spPr>
           <a:xfrm>
-            <a:off x="685800" y="1150000"/>
-            <a:ext cx="10820400" cy="5500000"/>
+            <a:off x="685800" y="1050000"/>
+            <a:ext cx="10820400" cy="5650000"/>
           </a:xfrm>
           <a:prstGeom prst="rect">
             <a:avLst/>
@@ -5525,7 +6012,7 @@
               <a:buNone/>
             </a:pPr>
             <a:r>
-              <a:rPr lang="en-US" sz="2000" b="1" dirty="0">
+              <a:rPr lang="en-US" sz="1600" b="1" dirty="0">
                 <a:solidFill>
                   <a:srgbClr val="1F3864"/>
                 </a:solidFill>
@@ -5547,14 +6034,14 @@
               <a:buChar char="•"/>
             </a:pPr>
             <a:r>
-              <a:rPr lang="en-US" sz="1800" dirty="0">
-                <a:solidFill>
-                  <a:srgbClr val="000000"/>
-                </a:solidFill>
-                <a:latin typeface="Times New Roman"/>
-                <a:cs typeface="Times New Roman"/>
-              </a:rPr>
-              <a:t>A structured, professionally-delivered programme for caregivers aimed at reducing high EE and creating a favourable family environment for rehabilitation.</a:t>
+              <a:rPr lang="en-US" sz="1600" dirty="0">
+                <a:solidFill>
+                  <a:srgbClr val="000000"/>
+                </a:solidFill>
+                <a:latin typeface="Times New Roman"/>
+                <a:cs typeface="Times New Roman"/>
+              </a:rPr>
+              <a:t>A structured, professionally-delivered programme for caregivers aimed at reducing high EE and creating a favourable rehabilitation environment.</a:t>
             </a:r>
           </a:p>
           <a:p>
@@ -5568,7 +6055,7 @@
               <a:buNone/>
             </a:pPr>
             <a:r>
-              <a:rPr lang="en-US" sz="2000" b="1" dirty="0">
+              <a:rPr lang="en-US" sz="1600" b="1" dirty="0">
                 <a:solidFill>
                   <a:srgbClr val="1F3864"/>
                 </a:solidFill>
@@ -5590,14 +6077,14 @@
               <a:buChar char="•"/>
             </a:pPr>
             <a:r>
-              <a:rPr lang="en-US" sz="1800" dirty="0">
-                <a:solidFill>
-                  <a:srgbClr val="000000"/>
-                </a:solidFill>
-                <a:latin typeface="Times New Roman"/>
-                <a:cs typeface="Times New Roman"/>
-              </a:rPr>
-              <a:t>A structured approach giving information about the illness, problem-solving, communication skills, and self-assertiveness training – term first used by Anderson &amp; Hogarty (1980).</a:t>
+              <a:rPr lang="en-US" sz="1600" dirty="0">
+                <a:solidFill>
+                  <a:srgbClr val="000000"/>
+                </a:solidFill>
+                <a:latin typeface="Times New Roman"/>
+                <a:cs typeface="Times New Roman"/>
+              </a:rPr>
+              <a:t>A structured approach giving information about the illness, problem-solving, communication skills, and self-assertiveness training.</a:t>
             </a:r>
           </a:p>
           <a:p>
@@ -5611,7 +6098,7 @@
               <a:buNone/>
             </a:pPr>
             <a:r>
-              <a:rPr lang="en-US" sz="2000" b="1" dirty="0">
+              <a:rPr lang="en-US" sz="1600" b="1" dirty="0">
                 <a:solidFill>
                   <a:srgbClr val="1F3864"/>
                 </a:solidFill>
@@ -5633,14 +6120,35 @@
               <a:buChar char="•"/>
             </a:pPr>
             <a:r>
-              <a:rPr lang="en-US" sz="1800" dirty="0">
-                <a:solidFill>
-                  <a:srgbClr val="000000"/>
-                </a:solidFill>
-                <a:latin typeface="Times New Roman"/>
-                <a:cs typeface="Times New Roman"/>
-              </a:rPr>
-              <a:t>Skills-based components teaching effective caregiver communication and coping/stress-reduction, delivered via social case-work and group-work methods.</a:t>
+              <a:rPr lang="en-US" sz="1600" dirty="0">
+                <a:solidFill>
+                  <a:srgbClr val="000000"/>
+                </a:solidFill>
+                <a:latin typeface="Times New Roman"/>
+                <a:cs typeface="Times New Roman"/>
+              </a:rPr>
+              <a:t>Skills-based components teaching effective communication and coping, delivered via social case-work and group-work methods.</a:t>
+            </a:r>
+          </a:p>
+          <a:p>
+            <a:pPr marL="0" indent="0">
+              <a:spcBef>
+                <a:spcPts val="400"/>
+              </a:spcBef>
+              <a:spcAft>
+                <a:spcPts val="0"/>
+              </a:spcAft>
+              <a:buNone/>
+            </a:pPr>
+            <a:r>
+              <a:rPr lang="en-US" sz="1300" i="1" dirty="0">
+                <a:solidFill>
+                  <a:srgbClr val="7030A0"/>
+                </a:solidFill>
+                <a:latin typeface="Times New Roman"/>
+                <a:cs typeface="Times New Roman"/>
+              </a:rPr>
+              <a:t>Sources: Family psychoeducation – Anderson &amp; Hogarty (1980); social case-work – Perlman (1957).</a:t>
             </a:r>
           </a:p>
         </p:txBody>
@@ -5676,7 +6184,7 @@
         <p:spPr>
           <a:xfrm>
             <a:off x="0" y="0"/>
-            <a:ext cx="12192000" cy="1000000"/>
+            <a:ext cx="12192000" cy="900000"/>
           </a:xfrm>
           <a:prstGeom prst="rect">
             <a:avLst/>
@@ -5698,7 +6206,7 @@
               <a:buNone/>
             </a:pPr>
             <a:r>
-              <a:rPr lang="en-US" sz="3000" b="1" dirty="0">
+              <a:rPr lang="en-US" sz="1800" b="1" dirty="0">
                 <a:solidFill>
                   <a:srgbClr val="FFFFFF"/>
                 </a:solidFill>
@@ -5718,8 +6226,8 @@
         </p:nvSpPr>
         <p:spPr>
           <a:xfrm>
-            <a:off x="685800" y="1150000"/>
-            <a:ext cx="10820400" cy="5500000"/>
+            <a:off x="685800" y="1050000"/>
+            <a:ext cx="10820400" cy="5650000"/>
           </a:xfrm>
           <a:prstGeom prst="rect">
             <a:avLst/>
@@ -5742,51 +6250,51 @@
               <a:buChar char="•"/>
             </a:pPr>
             <a:r>
-              <a:rPr lang="en-US" sz="1800" dirty="0">
-                <a:solidFill>
-                  <a:srgbClr val="000000"/>
-                </a:solidFill>
-                <a:latin typeface="Times New Roman"/>
-                <a:cs typeface="Times New Roman"/>
-              </a:rPr>
-              <a:t>EE has been studied mostly in Western populations; family responses differ by culture, region, and language, so Western findings may not transfer to India.</a:t>
-            </a:r>
-          </a:p>
-          <a:p>
-            <a:pPr marL="285750" indent="-285750">
-              <a:spcBef>
-                <a:spcPts val="0"/>
-              </a:spcBef>
-              <a:spcAft>
-                <a:spcPts val="300"/>
-              </a:spcAft>
-              <a:buFont typeface="Arial"/>
-              <a:buChar char="•"/>
-            </a:pPr>
-            <a:r>
-              <a:rPr lang="en-US" sz="1800" dirty="0">
-                <a:solidFill>
-                  <a:srgbClr val="000000"/>
-                </a:solidFill>
-                <a:latin typeface="Times New Roman"/>
-                <a:cs typeface="Times New Roman"/>
-              </a:rPr>
-              <a:t>Existing Indian programmes were largely generic (support groups, general psychoeducation), not a structured, skill-based, EE-focused package.</a:t>
-            </a:r>
-          </a:p>
-          <a:p>
-            <a:pPr marL="285750" indent="-285750">
-              <a:spcBef>
-                <a:spcPts val="0"/>
-              </a:spcBef>
-              <a:spcAft>
-                <a:spcPts val="300"/>
-              </a:spcAft>
-              <a:buFont typeface="Arial"/>
-              <a:buChar char="•"/>
-            </a:pPr>
-            <a:r>
-              <a:rPr lang="en-US" sz="1800" dirty="0">
+              <a:rPr lang="en-US" sz="1600" dirty="0">
+                <a:solidFill>
+                  <a:srgbClr val="000000"/>
+                </a:solidFill>
+                <a:latin typeface="Times New Roman"/>
+                <a:cs typeface="Times New Roman"/>
+              </a:rPr>
+              <a:t>EE research is largely Western; family responses differ by culture, region, and language, so findings may not transfer to India.</a:t>
+            </a:r>
+          </a:p>
+          <a:p>
+            <a:pPr marL="285750" indent="-285750">
+              <a:spcBef>
+                <a:spcPts val="0"/>
+              </a:spcBef>
+              <a:spcAft>
+                <a:spcPts val="300"/>
+              </a:spcAft>
+              <a:buFont typeface="Arial"/>
+              <a:buChar char="•"/>
+            </a:pPr>
+            <a:r>
+              <a:rPr lang="en-US" sz="1600" dirty="0">
+                <a:solidFill>
+                  <a:srgbClr val="000000"/>
+                </a:solidFill>
+                <a:latin typeface="Times New Roman"/>
+                <a:cs typeface="Times New Roman"/>
+              </a:rPr>
+              <a:t>Existing Indian programmes were largely generic (support groups / general psychoeducation), not a structured, skill-based, EE-focused package.</a:t>
+            </a:r>
+          </a:p>
+          <a:p>
+            <a:pPr marL="285750" indent="-285750">
+              <a:spcBef>
+                <a:spcPts val="0"/>
+              </a:spcBef>
+              <a:spcAft>
+                <a:spcPts val="300"/>
+              </a:spcAft>
+              <a:buFont typeface="Arial"/>
+              <a:buChar char="•"/>
+            </a:pPr>
+            <a:r>
+              <a:rPr lang="en-US" sz="1600" dirty="0">
                 <a:solidFill>
                   <a:srgbClr val="000000"/>
                 </a:solidFill>
@@ -5808,36 +6316,36 @@
               <a:buChar char="•"/>
             </a:pPr>
             <a:r>
-              <a:rPr lang="en-US" sz="1800" dirty="0">
-                <a:solidFill>
-                  <a:srgbClr val="000000"/>
-                </a:solidFill>
-                <a:latin typeface="Times New Roman"/>
-                <a:cs typeface="Times New Roman"/>
-              </a:rPr>
-              <a:t>Unresolved questions in the literature: (a) Is high EE a significant predictor of relapse? (b) Is EE linked with the caregiver’s knowledge about the illness?</a:t>
-            </a:r>
-          </a:p>
-          <a:p>
-            <a:pPr marL="285750" indent="-285750">
-              <a:spcBef>
-                <a:spcPts val="0"/>
-              </a:spcBef>
-              <a:spcAft>
-                <a:spcPts val="300"/>
-              </a:spcAft>
-              <a:buFont typeface="Arial"/>
-              <a:buChar char="•"/>
-            </a:pPr>
-            <a:r>
-              <a:rPr lang="en-US" sz="1800" dirty="0">
-                <a:solidFill>
-                  <a:srgbClr val="000000"/>
-                </a:solidFill>
-                <a:latin typeface="Times New Roman"/>
-                <a:cs typeface="Times New Roman"/>
-              </a:rPr>
-              <a:t>Hence a culturally-appropriate, standardized, manualized family intervention needed to be developed and tested – the gap this study addresses.</a:t>
+              <a:rPr lang="en-US" sz="1600" dirty="0">
+                <a:solidFill>
+                  <a:srgbClr val="000000"/>
+                </a:solidFill>
+                <a:latin typeface="Times New Roman"/>
+                <a:cs typeface="Times New Roman"/>
+              </a:rPr>
+              <a:t>Unresolved questions: Is high EE a significant predictor of relapse? Is EE linked with caregiver’s knowledge about the illness?</a:t>
+            </a:r>
+          </a:p>
+          <a:p>
+            <a:pPr marL="285750" indent="-285750">
+              <a:spcBef>
+                <a:spcPts val="0"/>
+              </a:spcBef>
+              <a:spcAft>
+                <a:spcPts val="300"/>
+              </a:spcAft>
+              <a:buFont typeface="Arial"/>
+              <a:buChar char="•"/>
+            </a:pPr>
+            <a:r>
+              <a:rPr lang="en-US" sz="1600" dirty="0">
+                <a:solidFill>
+                  <a:srgbClr val="000000"/>
+                </a:solidFill>
+                <a:latin typeface="Times New Roman"/>
+                <a:cs typeface="Times New Roman"/>
+              </a:rPr>
+              <a:t>Hence a culturally-appropriate, standardized family intervention needed to be developed and tested.</a:t>
             </a:r>
           </a:p>
         </p:txBody>
@@ -5873,7 +6381,7 @@
         <p:spPr>
           <a:xfrm>
             <a:off x="0" y="0"/>
-            <a:ext cx="12192000" cy="1000000"/>
+            <a:ext cx="12192000" cy="900000"/>
           </a:xfrm>
           <a:prstGeom prst="rect">
             <a:avLst/>
@@ -5895,7 +6403,7 @@
               <a:buNone/>
             </a:pPr>
             <a:r>
-              <a:rPr lang="en-US" sz="3000" b="1" dirty="0">
+              <a:rPr lang="en-US" sz="1800" b="1" dirty="0">
                 <a:solidFill>
                   <a:srgbClr val="FFFFFF"/>
                 </a:solidFill>
@@ -5915,8 +6423,8 @@
         </p:nvSpPr>
         <p:spPr>
           <a:xfrm>
-            <a:off x="685800" y="1150000"/>
-            <a:ext cx="10820400" cy="5500000"/>
+            <a:off x="685800" y="1050000"/>
+            <a:ext cx="10820400" cy="5650000"/>
           </a:xfrm>
           <a:prstGeom prst="rect">
             <a:avLst/>
@@ -5939,7 +6447,7 @@
               <a:buChar char="•"/>
             </a:pPr>
             <a:r>
-              <a:rPr lang="en-US" sz="1800" dirty="0">
+              <a:rPr lang="en-US" sz="1600" dirty="0">
                 <a:solidFill>
                   <a:srgbClr val="000000"/>
                 </a:solidFill>
@@ -5961,7 +6469,7 @@
               <a:buChar char="•"/>
             </a:pPr>
             <a:r>
-              <a:rPr lang="en-US" sz="1800" dirty="0">
+              <a:rPr lang="en-US" sz="1600" dirty="0">
                 <a:solidFill>
                   <a:srgbClr val="000000"/>
                 </a:solidFill>
@@ -5983,29 +6491,29 @@
               <a:buChar char="•"/>
             </a:pPr>
             <a:r>
-              <a:rPr lang="en-US" sz="1800" dirty="0">
-                <a:solidFill>
-                  <a:srgbClr val="000000"/>
-                </a:solidFill>
-                <a:latin typeface="Times New Roman"/>
-                <a:cs typeface="Times New Roman"/>
-              </a:rPr>
-              <a:t>In India, families are the principal care providers, so equipping them is the most sustainable and culturally-relevant point of intervention.</a:t>
-            </a:r>
-          </a:p>
-          <a:p>
-            <a:pPr marL="285750" indent="-285750">
-              <a:spcBef>
-                <a:spcPts val="0"/>
-              </a:spcBef>
-              <a:spcAft>
-                <a:spcPts val="300"/>
-              </a:spcAft>
-              <a:buFont typeface="Arial"/>
-              <a:buChar char="•"/>
-            </a:pPr>
-            <a:r>
-              <a:rPr lang="en-US" sz="1800" dirty="0">
+              <a:rPr lang="en-US" sz="1600" dirty="0">
+                <a:solidFill>
+                  <a:srgbClr val="000000"/>
+                </a:solidFill>
+                <a:latin typeface="Times New Roman"/>
+                <a:cs typeface="Times New Roman"/>
+              </a:rPr>
+              <a:t>In India, families are the principal care providers, so equipping them is the most sustainable, culturally-relevant point of intervention.</a:t>
+            </a:r>
+          </a:p>
+          <a:p>
+            <a:pPr marL="285750" indent="-285750">
+              <a:spcBef>
+                <a:spcPts val="0"/>
+              </a:spcBef>
+              <a:spcAft>
+                <a:spcPts val="300"/>
+              </a:spcAft>
+              <a:buFont typeface="Arial"/>
+              <a:buChar char="•"/>
+            </a:pPr>
+            <a:r>
+              <a:rPr lang="en-US" sz="1600" dirty="0">
                 <a:solidFill>
                   <a:srgbClr val="000000"/>
                 </a:solidFill>
@@ -6013,28 +6521,6 @@
                 <a:cs typeface="Times New Roman"/>
               </a:rPr>
               <a:t>A structured skill-development package was expected to outperform routine care in reducing EE.</a:t>
-            </a:r>
-          </a:p>
-          <a:p>
-            <a:pPr marL="285750" indent="-285750">
-              <a:spcBef>
-                <a:spcPts val="0"/>
-              </a:spcBef>
-              <a:spcAft>
-                <a:spcPts val="300"/>
-              </a:spcAft>
-              <a:buFont typeface="Arial"/>
-              <a:buChar char="•"/>
-            </a:pPr>
-            <a:r>
-              <a:rPr lang="en-US" sz="1800" dirty="0">
-                <a:solidFill>
-                  <a:srgbClr val="000000"/>
-                </a:solidFill>
-                <a:latin typeface="Times New Roman"/>
-                <a:cs typeface="Times New Roman"/>
-              </a:rPr>
-              <a:t>Therefore, this study developed and evaluated a standardized family intervention to reduce EE among caregivers of persons with schizophrenia.</a:t>
             </a:r>
           </a:p>
         </p:txBody>
